--- a/slidedeck/presentation.pptx
+++ b/slidedeck/presentation.pptx
@@ -29,6 +29,7 @@
     <p:sldId id="277" r:id="rId23"/>
     <p:sldId id="278" r:id="rId24"/>
     <p:sldId id="279" r:id="rId25"/>
+    <p:sldId id="280" r:id="rId26"/>
   </p:sldIdLst>
   <p:sldSz cx="9144000" cy="5143500" type="screen16x9"/>
   <p:notesSz cx="6858000" cy="9144000"/>
@@ -3221,14 +3222,14 @@
             </a:pPr>
             <a:r>
               <a:rPr/>
-              <a:t>Funnel phase explains more than client size inside the phase × segment matrix</a:t>
+              <a:t>For any business operations, we recommend segmenting clients by client size</a:t>
             </a:r>
           </a:p>
         </p:txBody>
       </p:sp>
       <p:pic>
         <p:nvPicPr>
-          <p:cNvPr descr="assets/eda_funnel_x_segment.png" id="0" name="Picture 1"/>
+          <p:cNvPr descr="assets/eda_client_segmentation.png" id="0" name="Picture 1"/>
           <p:cNvPicPr>
             <a:picLocks noGrp="1" noChangeAspect="1"/>
           </p:cNvPicPr>
@@ -3242,8 +3243,8 @@
         </p:blipFill>
         <p:spPr bwMode="auto">
           <a:xfrm>
-            <a:off x="457200" y="1943100"/>
-            <a:ext cx="4038600" cy="1905000"/>
+            <a:off x="457200" y="1892300"/>
+            <a:ext cx="4038600" cy="1993900"/>
           </a:xfrm>
           <a:prstGeom prst="rect">
             <a:avLst/>
@@ -3274,55 +3275,37 @@
             <a:pPr lvl="0"/>
             <a:r>
               <a:rPr/>
-              <a:t>In </a:t>
-            </a:r>
-            <a:r>
-              <a:rPr>
-                <a:latin typeface="Courier"/>
-              </a:rPr>
-              <a:t>(Re)Acquisition</a:t>
-            </a:r>
-            <a:r>
-              <a:rPr/>
-              <a:t>, win rates stay low across client sizes (</a:t>
+              <a:t>The portfolio is heavily concentrated in </a:t>
             </a:r>
             <a:r>
               <a:rPr b="1"/>
-              <a:t>14%–19%</a:t>
-            </a:r>
-            <a:r>
-              <a:rPr/>
-              <a:t>).</a:t>
+              <a:t>100K or less</a:t>
+            </a:r>
+            <a:r>
+              <a:rPr/>
+              <a:t> clients, so this segment should drive base operating playbooks and coverage models.</a:t>
             </a:r>
           </a:p>
           <a:p>
             <a:pPr lvl="0"/>
             <a:r>
               <a:rPr/>
-              <a:t>In </a:t>
+              <a:t>Conversion is relatively similar across most size bands, which means client size is more useful for </a:t>
             </a:r>
             <a:r>
               <a:rPr b="1"/>
-              <a:t>Engagement / upselling</a:t>
-            </a:r>
-            <a:r>
-              <a:rPr/>
-              <a:t>, win rates stay much higher (</a:t>
-            </a:r>
-            <a:r>
-              <a:rPr b="1"/>
-              <a:t>47%–67%</a:t>
-            </a:r>
-            <a:r>
-              <a:rPr/>
-              <a:t>).</a:t>
+              <a:t>commercial treatment and value management</a:t>
+            </a:r>
+            <a:r>
+              <a:rPr/>
+              <a:t> than for win-rate targeting alone.</a:t>
             </a:r>
           </a:p>
           <a:p>
             <a:pPr lvl="0"/>
             <a:r>
               <a:rPr/>
-              <a:t>The main implication is operational: whether the client has recent business matters more than client-size granularity for triage.</a:t>
+              <a:t>Larger accounts still matter because deal economics improve materially with size, so client-size segmentation should inform account prioritization, service model, and sales effort allocation.</a:t>
             </a:r>
           </a:p>
         </p:txBody>
@@ -3549,6 +3532,324 @@
             </a:pPr>
             <a:r>
               <a:rPr/>
+              <a:t>We also recommend starting with a simple marketing funnel segmentation</a:t>
+            </a:r>
+          </a:p>
+        </p:txBody>
+      </p:sp>
+      <p:sp>
+        <p:nvSpPr>
+          <p:cNvPr id="3" name="Content Placeholder 2"/>
+          <p:cNvSpPr>
+            <a:spLocks noGrp="1"/>
+          </p:cNvSpPr>
+          <p:nvPr>
+            <p:ph idx="1" sz="half"/>
+          </p:nvPr>
+        </p:nvSpPr>
+        <p:spPr/>
+        <p:txBody>
+          <a:bodyPr/>
+          <a:lstStyle/>
+          <a:p>
+            <a:pPr lvl="0"/>
+            <a:r>
+              <a:rPr b="1"/>
+              <a:t>(Re)Acquisition</a:t>
+            </a:r>
+            <a:r>
+              <a:rPr/>
+              <a:t> / no business in the past two years: 69,208 opportunities with a </a:t>
+            </a:r>
+            <a:r>
+              <a:rPr b="1"/>
+              <a:t>17.3%</a:t>
+            </a:r>
+            <a:r>
+              <a:rPr/>
+              <a:t> observed win rate.</a:t>
+            </a:r>
+          </a:p>
+          <a:p>
+            <a:pPr lvl="0"/>
+            <a:r>
+              <a:rPr b="1"/>
+              <a:t>Engagement / upselling</a:t>
+            </a:r>
+            <a:r>
+              <a:rPr/>
+              <a:t>: 8,817 opportunities with a </a:t>
+            </a:r>
+            <a:r>
+              <a:rPr b="1"/>
+              <a:t>63.9%</a:t>
+            </a:r>
+            <a:r>
+              <a:rPr/>
+              <a:t> observed win rate.</a:t>
+            </a:r>
+          </a:p>
+          <a:p>
+            <a:pPr lvl="0"/>
+            <a:r>
+              <a:rPr/>
+              <a:t>This is a practical first-layer funnel split for go-to-market operations because it separates low-history acquisition work from higher-propensity expansion opportunities.</a:t>
+            </a:r>
+          </a:p>
+        </p:txBody>
+      </p:sp>
+      <p:pic>
+        <p:nvPicPr>
+          <p:cNvPr descr="assets/eda_two_phase_funnel.png" id="0" name="Picture 1"/>
+          <p:cNvPicPr>
+            <a:picLocks noGrp="1" noChangeAspect="1"/>
+          </p:cNvPicPr>
+          <p:nvPr/>
+        </p:nvPicPr>
+        <p:blipFill>
+          <a:blip r:embed="rId2"/>
+          <a:stretch>
+            <a:fillRect/>
+          </a:stretch>
+        </p:blipFill>
+        <p:spPr bwMode="auto">
+          <a:xfrm>
+            <a:off x="4648200" y="1638300"/>
+            <a:ext cx="4038600" cy="2501900"/>
+          </a:xfrm>
+          <a:prstGeom prst="rect">
+            <a:avLst/>
+          </a:prstGeom>
+          <a:noFill/>
+          <a:ln w="9525">
+            <a:noFill/>
+            <a:headEnd/>
+            <a:tailEnd/>
+          </a:ln>
+        </p:spPr>
+      </p:pic>
+    </p:spTree>
+  </p:cSld>
+  <p:timing>
+    <p:tnLst>
+      <p:par>
+        <p:cTn id="1" dur="indefinite" restart="never" nodeType="tmRoot">
+          <p:childTnLst>
+            <p:seq concurrent="1" nextAc="seek">
+              <p:cTn id="2" dur="indefinite" nodeType="mainSeq">
+                <p:childTnLst>
+                  <p:par>
+                    <p:cTn id="3" fill="hold">
+                      <p:stCondLst>
+                        <p:cond delay="indefinite"/>
+                      </p:stCondLst>
+                      <p:childTnLst>
+                        <p:par>
+                          <p:cTn id="4" fill="hold">
+                            <p:stCondLst>
+                              <p:cond delay="0"/>
+                            </p:stCondLst>
+                            <p:childTnLst>
+                              <p:par>
+                                <p:cTn id="5" presetID="1" presetClass="entr" presetSubtype="0" fill="hold" grpId="0" nodeType="clickEffect">
+                                  <p:stCondLst>
+                                    <p:cond delay="0"/>
+                                  </p:stCondLst>
+                                  <p:childTnLst>
+                                    <p:set>
+                                      <p:cBhvr>
+                                        <p:cTn id="6" dur="1" fill="hold">
+                                          <p:stCondLst>
+                                            <p:cond delay="0"/>
+                                          </p:stCondLst>
+                                        </p:cTn>
+                                        <p:tgtEl>
+                                          <p:spTgt spid="3">
+                                            <p:txEl>
+                                              <p:pRg st="0" end="0"/>
+                                            </p:txEl>
+                                          </p:spTgt>
+                                        </p:tgtEl>
+                                        <p:attrNameLst>
+                                          <p:attrName>style.visibility</p:attrName>
+                                        </p:attrNameLst>
+                                      </p:cBhvr>
+                                      <p:to>
+                                        <p:strVal val="visible"/>
+                                      </p:to>
+                                    </p:set>
+                                  </p:childTnLst>
+                                </p:cTn>
+                              </p:par>
+                            </p:childTnLst>
+                          </p:cTn>
+                        </p:par>
+                      </p:childTnLst>
+                    </p:cTn>
+                  </p:par>
+                  <p:par>
+                    <p:cTn id="7" fill="hold">
+                      <p:stCondLst>
+                        <p:cond delay="indefinite"/>
+                      </p:stCondLst>
+                      <p:childTnLst>
+                        <p:par>
+                          <p:cTn id="8" fill="hold">
+                            <p:stCondLst>
+                              <p:cond delay="0"/>
+                            </p:stCondLst>
+                            <p:childTnLst>
+                              <p:par>
+                                <p:cTn id="9" presetID="1" presetClass="entr" presetSubtype="0" fill="hold" grpId="0" nodeType="clickEffect">
+                                  <p:stCondLst>
+                                    <p:cond delay="0"/>
+                                  </p:stCondLst>
+                                  <p:childTnLst>
+                                    <p:set>
+                                      <p:cBhvr>
+                                        <p:cTn id="10" dur="1" fill="hold">
+                                          <p:stCondLst>
+                                            <p:cond delay="0"/>
+                                          </p:stCondLst>
+                                        </p:cTn>
+                                        <p:tgtEl>
+                                          <p:spTgt spid="3">
+                                            <p:txEl>
+                                              <p:pRg st="1" end="1"/>
+                                            </p:txEl>
+                                          </p:spTgt>
+                                        </p:tgtEl>
+                                        <p:attrNameLst>
+                                          <p:attrName>style.visibility</p:attrName>
+                                        </p:attrNameLst>
+                                      </p:cBhvr>
+                                      <p:to>
+                                        <p:strVal val="visible"/>
+                                      </p:to>
+                                    </p:set>
+                                  </p:childTnLst>
+                                </p:cTn>
+                              </p:par>
+                            </p:childTnLst>
+                          </p:cTn>
+                        </p:par>
+                      </p:childTnLst>
+                    </p:cTn>
+                  </p:par>
+                  <p:par>
+                    <p:cTn id="11" fill="hold">
+                      <p:stCondLst>
+                        <p:cond delay="indefinite"/>
+                      </p:stCondLst>
+                      <p:childTnLst>
+                        <p:par>
+                          <p:cTn id="12" fill="hold">
+                            <p:stCondLst>
+                              <p:cond delay="0"/>
+                            </p:stCondLst>
+                            <p:childTnLst>
+                              <p:par>
+                                <p:cTn id="13" presetID="1" presetClass="entr" presetSubtype="0" fill="hold" grpId="0" nodeType="clickEffect">
+                                  <p:stCondLst>
+                                    <p:cond delay="0"/>
+                                  </p:stCondLst>
+                                  <p:childTnLst>
+                                    <p:set>
+                                      <p:cBhvr>
+                                        <p:cTn id="14" dur="1" fill="hold">
+                                          <p:stCondLst>
+                                            <p:cond delay="0"/>
+                                          </p:stCondLst>
+                                        </p:cTn>
+                                        <p:tgtEl>
+                                          <p:spTgt spid="3">
+                                            <p:txEl>
+                                              <p:pRg st="2" end="2"/>
+                                            </p:txEl>
+                                          </p:spTgt>
+                                        </p:tgtEl>
+                                        <p:attrNameLst>
+                                          <p:attrName>style.visibility</p:attrName>
+                                        </p:attrNameLst>
+                                      </p:cBhvr>
+                                      <p:to>
+                                        <p:strVal val="visible"/>
+                                      </p:to>
+                                    </p:set>
+                                  </p:childTnLst>
+                                </p:cTn>
+                              </p:par>
+                            </p:childTnLst>
+                          </p:cTn>
+                        </p:par>
+                      </p:childTnLst>
+                    </p:cTn>
+                  </p:par>
+                </p:childTnLst>
+              </p:cTn>
+              <p:prevCondLst>
+                <p:cond evt="onPrev" delay="0">
+                  <p:tgtEl>
+                    <p:sldTgt/>
+                  </p:tgtEl>
+                </p:cond>
+              </p:prevCondLst>
+              <p:nextCondLst>
+                <p:cond evt="onNext" delay="0">
+                  <p:tgtEl>
+                    <p:sldTgt/>
+                  </p:tgtEl>
+                </p:cond>
+              </p:nextCondLst>
+            </p:seq>
+          </p:childTnLst>
+        </p:cTn>
+      </p:par>
+    </p:tnLst>
+    <p:bldLst>
+      <p:bldP spid="3" grpId="0" uiExpand="1" build="p"/>
+    </p:bldLst>
+  </p:timing>
+</p:sld>
+</file>
+
+<file path=ppt/slides/slide12.xml><?xml version="1.0" encoding="utf-8"?>
+<p:sld xmlns:a="http://schemas.openxmlformats.org/drawingml/2006/main" xmlns:r="http://schemas.openxmlformats.org/officeDocument/2006/relationships" xmlns:p="http://schemas.openxmlformats.org/presentationml/2006/main">
+  <p:cSld>
+    <p:spTree>
+      <p:nvGrpSpPr>
+        <p:cNvPr id="1" name=""/>
+        <p:cNvGrpSpPr/>
+        <p:nvPr/>
+      </p:nvGrpSpPr>
+      <p:grpSpPr>
+        <a:xfrm>
+          <a:off x="0" y="0"/>
+          <a:ext cx="0" cy="0"/>
+          <a:chOff x="0" y="0"/>
+          <a:chExt cx="0" cy="0"/>
+        </a:xfrm>
+      </p:grpSpPr>
+      <p:sp>
+        <p:nvSpPr>
+          <p:cNvPr id="2" name="Title 1"/>
+          <p:cNvSpPr>
+            <a:spLocks noGrp="1"/>
+          </p:cNvSpPr>
+          <p:nvPr>
+            <p:ph type="title"/>
+          </p:nvPr>
+        </p:nvSpPr>
+        <p:spPr/>
+        <p:txBody>
+          <a:bodyPr/>
+          <a:lstStyle/>
+          <a:p>
+            <a:pPr lvl="0" indent="0" marL="0">
+              <a:buNone/>
+            </a:pPr>
+            <a:r>
+              <a:rPr/>
               <a:t>Process-time variables carry most of the predictive signal</a:t>
             </a:r>
           </a:p>
@@ -3619,7 +3920,7 @@
 </p:sld>
 </file>
 
-<file path=ppt/slides/slide12.xml><?xml version="1.0" encoding="utf-8"?>
+<file path=ppt/slides/slide13.xml><?xml version="1.0" encoding="utf-8"?>
 <p:sld xmlns:a="http://schemas.openxmlformats.org/drawingml/2006/main" xmlns:r="http://schemas.openxmlformats.org/officeDocument/2006/relationships" xmlns:p="http://schemas.openxmlformats.org/presentationml/2006/main">
   <p:cSld>
     <p:spTree>
@@ -3818,7 +4119,7 @@
 </p:sld>
 </file>
 
-<file path=ppt/slides/slide13.xml><?xml version="1.0" encoding="utf-8"?>
+<file path=ppt/slides/slide14.xml><?xml version="1.0" encoding="utf-8"?>
 <p:sld xmlns:a="http://schemas.openxmlformats.org/drawingml/2006/main" xmlns:r="http://schemas.openxmlformats.org/officeDocument/2006/relationships" xmlns:p="http://schemas.openxmlformats.org/presentationml/2006/main">
   <p:cSld>
     <p:spTree>
@@ -3870,7 +4171,7 @@
 </p:sld>
 </file>
 
-<file path=ppt/slides/slide14.xml><?xml version="1.0" encoding="utf-8"?>
+<file path=ppt/slides/slide15.xml><?xml version="1.0" encoding="utf-8"?>
 <p:sld xmlns:a="http://schemas.openxmlformats.org/drawingml/2006/main" xmlns:r="http://schemas.openxmlformats.org/officeDocument/2006/relationships" xmlns:p="http://schemas.openxmlformats.org/presentationml/2006/main">
   <p:cSld>
     <p:spTree>
@@ -4631,7 +4932,7 @@
 </p:sld>
 </file>
 
-<file path=ppt/slides/slide15.xml><?xml version="1.0" encoding="utf-8"?>
+<file path=ppt/slides/slide16.xml><?xml version="1.0" encoding="utf-8"?>
 <p:sld xmlns:a="http://schemas.openxmlformats.org/drawingml/2006/main" xmlns:r="http://schemas.openxmlformats.org/officeDocument/2006/relationships" xmlns:p="http://schemas.openxmlformats.org/presentationml/2006/main">
   <p:cSld>
     <p:spTree>
@@ -4691,7 +4992,7 @@
 </p:sld>
 </file>
 
-<file path=ppt/slides/slide16.xml><?xml version="1.0" encoding="utf-8"?>
+<file path=ppt/slides/slide17.xml><?xml version="1.0" encoding="utf-8"?>
 <p:sld xmlns:a="http://schemas.openxmlformats.org/drawingml/2006/main" xmlns:r="http://schemas.openxmlformats.org/officeDocument/2006/relationships" xmlns:p="http://schemas.openxmlformats.org/presentationml/2006/main">
   <p:cSld>
     <p:spTree>
@@ -5292,7 +5593,7 @@
 </p:sld>
 </file>
 
-<file path=ppt/slides/slide17.xml><?xml version="1.0" encoding="utf-8"?>
+<file path=ppt/slides/slide18.xml><?xml version="1.0" encoding="utf-8"?>
 <p:sld xmlns:a="http://schemas.openxmlformats.org/drawingml/2006/main" xmlns:r="http://schemas.openxmlformats.org/officeDocument/2006/relationships" xmlns:p="http://schemas.openxmlformats.org/presentationml/2006/main">
   <p:cSld>
     <p:spTree>
@@ -5396,11 +5697,9 @@
                 <a:tableStyleId>{5C22544A-7EE6-4342-B048-85BDC9FD1C3A}</a:tableStyleId>
               </a:tblPr>
               <a:tblGrid>
-                <a:gridCol w="800100"/>
-                <a:gridCol w="800100"/>
-                <a:gridCol w="800100"/>
-                <a:gridCol w="800100"/>
-                <a:gridCol w="800100"/>
+                <a:gridCol w="1346200"/>
+                <a:gridCol w="1346200"/>
+                <a:gridCol w="1346200"/>
               </a:tblGrid>
               <a:tr h="0">
                 <a:tc>
@@ -5446,38 +5745,6 @@
                       <a:r>
                         <a:rPr/>
                         <a:t>PR AUC</a:t>
-                      </a:r>
-                    </a:p>
-                  </a:txBody>
-                  <a:tcPr/>
-                </a:tc>
-                <a:tc>
-                  <a:txBody>
-                    <a:bodyPr/>
-                    <a:lstStyle/>
-                    <a:p>
-                      <a:pPr lvl="0" indent="0" marL="0" algn="r">
-                        <a:buNone/>
-                      </a:pPr>
-                      <a:r>
-                        <a:rPr/>
-                        <a:t>Accuracy</a:t>
-                      </a:r>
-                    </a:p>
-                  </a:txBody>
-                  <a:tcPr/>
-                </a:tc>
-                <a:tc>
-                  <a:txBody>
-                    <a:bodyPr/>
-                    <a:lstStyle/>
-                    <a:p>
-                      <a:pPr lvl="0" indent="0" marL="0" algn="r">
-                        <a:buNone/>
-                      </a:pPr>
-                      <a:r>
-                        <a:rPr/>
-                        <a:t>F1</a:t>
                       </a:r>
                     </a:p>
                   </a:txBody>
@@ -5530,36 +5797,6 @@
                     </a:p>
                   </a:txBody>
                 </a:tc>
-                <a:tc>
-                  <a:txBody>
-                    <a:bodyPr/>
-                    <a:lstStyle/>
-                    <a:p>
-                      <a:pPr lvl="0" indent="0" marL="0" algn="r">
-                        <a:buNone/>
-                      </a:pPr>
-                      <a:r>
-                        <a:rPr/>
-                        <a:t>0.842</a:t>
-                      </a:r>
-                    </a:p>
-                  </a:txBody>
-                </a:tc>
-                <a:tc>
-                  <a:txBody>
-                    <a:bodyPr/>
-                    <a:lstStyle/>
-                    <a:p>
-                      <a:pPr lvl="0" indent="0" marL="0" algn="r">
-                        <a:buNone/>
-                      </a:pPr>
-                      <a:r>
-                        <a:rPr/>
-                        <a:t>0.596</a:t>
-                      </a:r>
-                    </a:p>
-                  </a:txBody>
-                </a:tc>
               </a:tr>
               <a:tr h="0">
                 <a:tc>
@@ -5603,36 +5840,6 @@
                       <a:r>
                         <a:rPr/>
                         <a:t>0.695</a:t>
-                      </a:r>
-                    </a:p>
-                  </a:txBody>
-                </a:tc>
-                <a:tc>
-                  <a:txBody>
-                    <a:bodyPr/>
-                    <a:lstStyle/>
-                    <a:p>
-                      <a:pPr lvl="0" indent="0" marL="0" algn="r">
-                        <a:buNone/>
-                      </a:pPr>
-                      <a:r>
-                        <a:rPr/>
-                        <a:t>0.842</a:t>
-                      </a:r>
-                    </a:p>
-                  </a:txBody>
-                </a:tc>
-                <a:tc>
-                  <a:txBody>
-                    <a:bodyPr/>
-                    <a:lstStyle/>
-                    <a:p>
-                      <a:pPr lvl="0" indent="0" marL="0" algn="r">
-                        <a:buNone/>
-                      </a:pPr>
-                      <a:r>
-                        <a:rPr/>
-                        <a:t>0.598</a:t>
                       </a:r>
                     </a:p>
                   </a:txBody>
@@ -5759,7 +5966,7 @@
 </p:sld>
 </file>
 
-<file path=ppt/slides/slide18.xml><?xml version="1.0" encoding="utf-8"?>
+<file path=ppt/slides/slide19.xml><?xml version="1.0" encoding="utf-8"?>
 <p:sld xmlns:a="http://schemas.openxmlformats.org/drawingml/2006/main" xmlns:r="http://schemas.openxmlformats.org/officeDocument/2006/relationships" xmlns:p="http://schemas.openxmlformats.org/presentationml/2006/main">
   <p:cSld>
     <p:spTree>
@@ -6428,58 +6635,6 @@
 </p:sld>
 </file>
 
-<file path=ppt/slides/slide19.xml><?xml version="1.0" encoding="utf-8"?>
-<p:sld xmlns:a="http://schemas.openxmlformats.org/drawingml/2006/main" xmlns:r="http://schemas.openxmlformats.org/officeDocument/2006/relationships" xmlns:p="http://schemas.openxmlformats.org/presentationml/2006/main">
-  <p:cSld>
-    <p:spTree>
-      <p:nvGrpSpPr>
-        <p:cNvPr id="1" name=""/>
-        <p:cNvGrpSpPr/>
-        <p:nvPr/>
-      </p:nvGrpSpPr>
-      <p:grpSpPr>
-        <a:xfrm>
-          <a:off x="0" y="0"/>
-          <a:ext cx="0" cy="0"/>
-          <a:chOff x="0" y="0"/>
-          <a:chExt cx="0" cy="0"/>
-        </a:xfrm>
-      </p:grpSpPr>
-      <p:sp>
-        <p:nvSpPr>
-          <p:cNvPr id="2" name="Title 1"/>
-          <p:cNvSpPr>
-            <a:spLocks noGrp="1"/>
-          </p:cNvSpPr>
-          <p:nvPr>
-            <p:ph type="title"/>
-          </p:nvPr>
-        </p:nvSpPr>
-        <p:spPr>
-          <a:xfrm>
-            <a:off x="722313" y="3305176"/>
-            <a:ext cx="7772400" cy="1021556"/>
-          </a:xfrm>
-        </p:spPr>
-        <p:txBody>
-          <a:bodyPr/>
-          <a:lstStyle/>
-          <a:p>
-            <a:pPr lvl="0" indent="0" marL="0">
-              <a:buNone/>
-            </a:pPr>
-            <a:r>
-              <a:rPr/>
-              <a:t>Application simulation</a:t>
-            </a:r>
-          </a:p>
-        </p:txBody>
-      </p:sp>
-    </p:spTree>
-  </p:cSld>
-</p:sld>
-</file>
-
 <file path=ppt/slides/slide2.xml><?xml version="1.0" encoding="utf-8"?>
 <p:sld xmlns:a="http://schemas.openxmlformats.org/drawingml/2006/main" xmlns:r="http://schemas.openxmlformats.org/officeDocument/2006/relationships" xmlns:p="http://schemas.openxmlformats.org/presentationml/2006/main">
   <p:cSld>
@@ -6517,7 +6672,7 @@
             </a:pPr>
             <a:r>
               <a:rPr/>
-              <a:t>Agenda</a:t>
+              <a:t>Executive Summary</a:t>
             </a:r>
           </a:p>
         </p:txBody>
@@ -6537,57 +6692,31 @@
           <a:bodyPr/>
           <a:lstStyle/>
           <a:p>
-            <a:pPr lvl="0" indent="-342900" marL="342900">
-              <a:buAutoNum type="arabicPeriod"/>
-            </a:pPr>
-            <a:r>
-              <a:rPr/>
-              <a:t>Business framing and process assumptions</a:t>
-            </a:r>
-          </a:p>
-          <a:p>
-            <a:pPr lvl="0" indent="-342900" marL="342900">
-              <a:buAutoNum type="arabicPeriod"/>
-            </a:pPr>
-            <a:r>
-              <a:rPr/>
-              <a:t>Dataset and target overview</a:t>
-            </a:r>
-          </a:p>
-          <a:p>
-            <a:pPr lvl="0" indent="-342900" marL="342900">
-              <a:buAutoNum type="arabicPeriod"/>
-            </a:pPr>
-            <a:r>
-              <a:rPr/>
-              <a:t>EDA findings that matter for prioritization and forecasting</a:t>
-            </a:r>
-          </a:p>
-          <a:p>
-            <a:pPr lvl="0" indent="-342900" marL="342900">
-              <a:buAutoNum type="arabicPeriod"/>
-            </a:pPr>
-            <a:r>
-              <a:rPr/>
-              <a:t>Modelling approach and model outputs</a:t>
-            </a:r>
-          </a:p>
-          <a:p>
-            <a:pPr lvl="0" indent="-342900" marL="342900">
-              <a:buAutoNum type="arabicPeriod"/>
-            </a:pPr>
-            <a:r>
-              <a:rPr/>
-              <a:t>Application simulations</a:t>
-            </a:r>
-          </a:p>
-          <a:p>
-            <a:pPr lvl="0" indent="-342900" marL="342900">
-              <a:buAutoNum type="arabicPeriod"/>
-            </a:pPr>
-            <a:r>
-              <a:rPr/>
-              <a:t>Conclusions and next steps</a:t>
+            <a:pPr lvl="0"/>
+            <a:r>
+              <a:rPr/>
+              <a:t>The current sales process for auto parts opportunities shows both data quality issues and structural inefficiencies (e.g., lack of prioritization, inaccurate forecasting), which are likely driving suboptimal performance.</a:t>
+            </a:r>
+          </a:p>
+          <a:p>
+            <a:pPr lvl="0"/>
+            <a:r>
+              <a:rPr/>
+              <a:t>We propose a classification model to predict win/loss and support prioritization, and a regression model to estimate deal size for sizing and forecasting.</a:t>
+            </a:r>
+          </a:p>
+          <a:p>
+            <a:pPr lvl="0"/>
+            <a:r>
+              <a:rPr/>
+              <a:t>The classification model performs well (AUC 0.88), enabling effective prioritization, while the regression model is weaker (R² 0.13; MAE ~$74K) but still useful for aggregate forecasting and directional insights.</a:t>
+            </a:r>
+          </a:p>
+          <a:p>
+            <a:pPr lvl="0"/>
+            <a:r>
+              <a:rPr/>
+              <a:t>We recommend piloting the classification model first, while using the regression model as a complementary tool for portfolio-level planning.</a:t>
             </a:r>
           </a:p>
         </p:txBody>
@@ -6798,104 +6927,6 @@
                       </p:childTnLst>
                     </p:cTn>
                   </p:par>
-                  <p:par>
-                    <p:cTn id="19" fill="hold">
-                      <p:stCondLst>
-                        <p:cond delay="indefinite"/>
-                      </p:stCondLst>
-                      <p:childTnLst>
-                        <p:par>
-                          <p:cTn id="20" fill="hold">
-                            <p:stCondLst>
-                              <p:cond delay="0"/>
-                            </p:stCondLst>
-                            <p:childTnLst>
-                              <p:par>
-                                <p:cTn id="21" presetID="1" presetClass="entr" presetSubtype="0" fill="hold" grpId="0" nodeType="clickEffect">
-                                  <p:stCondLst>
-                                    <p:cond delay="0"/>
-                                  </p:stCondLst>
-                                  <p:childTnLst>
-                                    <p:set>
-                                      <p:cBhvr>
-                                        <p:cTn id="22" dur="1" fill="hold">
-                                          <p:stCondLst>
-                                            <p:cond delay="0"/>
-                                          </p:stCondLst>
-                                        </p:cTn>
-                                        <p:tgtEl>
-                                          <p:spTgt spid="3">
-                                            <p:txEl>
-                                              <p:pRg st="4" end="4"/>
-                                            </p:txEl>
-                                          </p:spTgt>
-                                        </p:tgtEl>
-                                        <p:attrNameLst>
-                                          <p:attrName>style.visibility</p:attrName>
-                                        </p:attrNameLst>
-                                      </p:cBhvr>
-                                      <p:to>
-                                        <p:strVal val="visible"/>
-                                      </p:to>
-                                    </p:set>
-                                  </p:childTnLst>
-                                </p:cTn>
-                              </p:par>
-                            </p:childTnLst>
-                          </p:cTn>
-                        </p:par>
-                      </p:childTnLst>
-                    </p:cTn>
-                  </p:par>
-                  <p:par>
-                    <p:cTn id="23" fill="hold">
-                      <p:stCondLst>
-                        <p:cond delay="indefinite"/>
-                      </p:stCondLst>
-                      <p:childTnLst>
-                        <p:par>
-                          <p:cTn id="24" fill="hold">
-                            <p:stCondLst>
-                              <p:cond delay="0"/>
-                            </p:stCondLst>
-                            <p:childTnLst>
-                              <p:par>
-                                <p:cTn id="25" presetID="1" presetClass="entr" presetSubtype="0" fill="hold" grpId="0" nodeType="clickEffect">
-                                  <p:stCondLst>
-                                    <p:cond delay="0"/>
-                                  </p:stCondLst>
-                                  <p:childTnLst>
-                                    <p:set>
-                                      <p:cBhvr>
-                                        <p:cTn id="26" dur="1" fill="hold">
-                                          <p:stCondLst>
-                                            <p:cond delay="0"/>
-                                          </p:stCondLst>
-                                        </p:cTn>
-                                        <p:tgtEl>
-                                          <p:spTgt spid="3">
-                                            <p:txEl>
-                                              <p:pRg st="5" end="5"/>
-                                            </p:txEl>
-                                          </p:spTgt>
-                                        </p:tgtEl>
-                                        <p:attrNameLst>
-                                          <p:attrName>style.visibility</p:attrName>
-                                        </p:attrNameLst>
-                                      </p:cBhvr>
-                                      <p:to>
-                                        <p:strVal val="visible"/>
-                                      </p:to>
-                                    </p:set>
-                                  </p:childTnLst>
-                                </p:cTn>
-                              </p:par>
-                            </p:childTnLst>
-                          </p:cTn>
-                        </p:par>
-                      </p:childTnLst>
-                    </p:cTn>
-                  </p:par>
                 </p:childTnLst>
               </p:cTn>
               <p:prevCondLst>
@@ -6925,6 +6956,58 @@
 </file>
 
 <file path=ppt/slides/slide20.xml><?xml version="1.0" encoding="utf-8"?>
+<p:sld xmlns:a="http://schemas.openxmlformats.org/drawingml/2006/main" xmlns:r="http://schemas.openxmlformats.org/officeDocument/2006/relationships" xmlns:p="http://schemas.openxmlformats.org/presentationml/2006/main">
+  <p:cSld>
+    <p:spTree>
+      <p:nvGrpSpPr>
+        <p:cNvPr id="1" name=""/>
+        <p:cNvGrpSpPr/>
+        <p:nvPr/>
+      </p:nvGrpSpPr>
+      <p:grpSpPr>
+        <a:xfrm>
+          <a:off x="0" y="0"/>
+          <a:ext cx="0" cy="0"/>
+          <a:chOff x="0" y="0"/>
+          <a:chExt cx="0" cy="0"/>
+        </a:xfrm>
+      </p:grpSpPr>
+      <p:sp>
+        <p:nvSpPr>
+          <p:cNvPr id="2" name="Title 1"/>
+          <p:cNvSpPr>
+            <a:spLocks noGrp="1"/>
+          </p:cNvSpPr>
+          <p:nvPr>
+            <p:ph type="title"/>
+          </p:nvPr>
+        </p:nvSpPr>
+        <p:spPr>
+          <a:xfrm>
+            <a:off x="722313" y="3305176"/>
+            <a:ext cx="7772400" cy="1021556"/>
+          </a:xfrm>
+        </p:spPr>
+        <p:txBody>
+          <a:bodyPr/>
+          <a:lstStyle/>
+          <a:p>
+            <a:pPr lvl="0" indent="0" marL="0">
+              <a:buNone/>
+            </a:pPr>
+            <a:r>
+              <a:rPr/>
+              <a:t>Application simulation</a:t>
+            </a:r>
+          </a:p>
+        </p:txBody>
+      </p:sp>
+    </p:spTree>
+  </p:cSld>
+</p:sld>
+</file>
+
+<file path=ppt/slides/slide21.xml><?xml version="1.0" encoding="utf-8"?>
 <p:sld xmlns:a="http://schemas.openxmlformats.org/drawingml/2006/main" xmlns:r="http://schemas.openxmlformats.org/officeDocument/2006/relationships" xmlns:p="http://schemas.openxmlformats.org/presentationml/2006/main">
   <p:cSld>
     <p:spTree>
@@ -7362,7 +7445,7 @@
 </p:sld>
 </file>
 
-<file path=ppt/slides/slide21.xml><?xml version="1.0" encoding="utf-8"?>
+<file path=ppt/slides/slide22.xml><?xml version="1.0" encoding="utf-8"?>
 <p:sld xmlns:a="http://schemas.openxmlformats.org/drawingml/2006/main" xmlns:r="http://schemas.openxmlformats.org/officeDocument/2006/relationships" xmlns:p="http://schemas.openxmlformats.org/presentationml/2006/main">
   <p:cSld>
     <p:spTree>
@@ -7744,7 +7827,7 @@
 </p:sld>
 </file>
 
-<file path=ppt/slides/slide22.xml><?xml version="1.0" encoding="utf-8"?>
+<file path=ppt/slides/slide23.xml><?xml version="1.0" encoding="utf-8"?>
 <p:sld xmlns:a="http://schemas.openxmlformats.org/drawingml/2006/main" xmlns:r="http://schemas.openxmlformats.org/officeDocument/2006/relationships" xmlns:p="http://schemas.openxmlformats.org/presentationml/2006/main">
   <p:cSld>
     <p:spTree>
@@ -7796,7 +7879,7 @@
 </p:sld>
 </file>
 
-<file path=ppt/slides/slide23.xml><?xml version="1.0" encoding="utf-8"?>
+<file path=ppt/slides/slide24.xml><?xml version="1.0" encoding="utf-8"?>
 <p:sld xmlns:a="http://schemas.openxmlformats.org/drawingml/2006/main" xmlns:r="http://schemas.openxmlformats.org/officeDocument/2006/relationships" xmlns:p="http://schemas.openxmlformats.org/presentationml/2006/main">
   <p:cSld>
     <p:spTree>
@@ -8308,7 +8391,7 @@
 </p:sld>
 </file>
 
-<file path=ppt/slides/slide24.xml><?xml version="1.0" encoding="utf-8"?>
+<file path=ppt/slides/slide25.xml><?xml version="1.0" encoding="utf-8"?>
 <p:sld xmlns:a="http://schemas.openxmlformats.org/drawingml/2006/main" xmlns:r="http://schemas.openxmlformats.org/officeDocument/2006/relationships" xmlns:p="http://schemas.openxmlformats.org/presentationml/2006/main">
   <p:cSld>
     <p:spTree>
@@ -8368,6 +8451,450 @@
 </file>
 
 <file path=ppt/slides/slide3.xml><?xml version="1.0" encoding="utf-8"?>
+<p:sld xmlns:a="http://schemas.openxmlformats.org/drawingml/2006/main" xmlns:r="http://schemas.openxmlformats.org/officeDocument/2006/relationships" xmlns:p="http://schemas.openxmlformats.org/presentationml/2006/main">
+  <p:cSld>
+    <p:spTree>
+      <p:nvGrpSpPr>
+        <p:cNvPr id="1" name=""/>
+        <p:cNvGrpSpPr/>
+        <p:nvPr/>
+      </p:nvGrpSpPr>
+      <p:grpSpPr>
+        <a:xfrm>
+          <a:off x="0" y="0"/>
+          <a:ext cx="0" cy="0"/>
+          <a:chOff x="0" y="0"/>
+          <a:chExt cx="0" cy="0"/>
+        </a:xfrm>
+      </p:grpSpPr>
+      <p:sp>
+        <p:nvSpPr>
+          <p:cNvPr id="2" name="Title 1"/>
+          <p:cNvSpPr>
+            <a:spLocks noGrp="1"/>
+          </p:cNvSpPr>
+          <p:nvPr>
+            <p:ph type="title"/>
+          </p:nvPr>
+        </p:nvSpPr>
+        <p:spPr/>
+        <p:txBody>
+          <a:bodyPr/>
+          <a:lstStyle/>
+          <a:p>
+            <a:pPr lvl="0" indent="0" marL="0">
+              <a:buNone/>
+            </a:pPr>
+            <a:r>
+              <a:rPr/>
+              <a:t>Agenda</a:t>
+            </a:r>
+          </a:p>
+        </p:txBody>
+      </p:sp>
+      <p:sp>
+        <p:nvSpPr>
+          <p:cNvPr id="3" name="Content Placeholder 2"/>
+          <p:cNvSpPr>
+            <a:spLocks noGrp="1"/>
+          </p:cNvSpPr>
+          <p:nvPr>
+            <p:ph idx="1"/>
+          </p:nvPr>
+        </p:nvSpPr>
+        <p:spPr/>
+        <p:txBody>
+          <a:bodyPr/>
+          <a:lstStyle/>
+          <a:p>
+            <a:pPr lvl="0" indent="-342900" marL="342900">
+              <a:buAutoNum type="arabicPeriod"/>
+            </a:pPr>
+            <a:r>
+              <a:rPr/>
+              <a:t>Business framing and process assumptions</a:t>
+            </a:r>
+          </a:p>
+          <a:p>
+            <a:pPr lvl="0" indent="-342900" marL="342900">
+              <a:buAutoNum type="arabicPeriod"/>
+            </a:pPr>
+            <a:r>
+              <a:rPr/>
+              <a:t>Dataset and target overview</a:t>
+            </a:r>
+          </a:p>
+          <a:p>
+            <a:pPr lvl="0" indent="-342900" marL="342900">
+              <a:buAutoNum type="arabicPeriod"/>
+            </a:pPr>
+            <a:r>
+              <a:rPr/>
+              <a:t>EDA findings that matter for prioritization and forecasting</a:t>
+            </a:r>
+          </a:p>
+          <a:p>
+            <a:pPr lvl="0" indent="-342900" marL="342900">
+              <a:buAutoNum type="arabicPeriod"/>
+            </a:pPr>
+            <a:r>
+              <a:rPr/>
+              <a:t>Modelling approach and model outputs</a:t>
+            </a:r>
+          </a:p>
+          <a:p>
+            <a:pPr lvl="0" indent="-342900" marL="342900">
+              <a:buAutoNum type="arabicPeriod"/>
+            </a:pPr>
+            <a:r>
+              <a:rPr/>
+              <a:t>Application simulations</a:t>
+            </a:r>
+          </a:p>
+          <a:p>
+            <a:pPr lvl="0" indent="-342900" marL="342900">
+              <a:buAutoNum type="arabicPeriod"/>
+            </a:pPr>
+            <a:r>
+              <a:rPr/>
+              <a:t>Conclusions and next steps</a:t>
+            </a:r>
+          </a:p>
+        </p:txBody>
+      </p:sp>
+    </p:spTree>
+  </p:cSld>
+  <p:timing>
+    <p:tnLst>
+      <p:par>
+        <p:cTn id="1" dur="indefinite" restart="never" nodeType="tmRoot">
+          <p:childTnLst>
+            <p:seq concurrent="1" nextAc="seek">
+              <p:cTn id="2" dur="indefinite" nodeType="mainSeq">
+                <p:childTnLst>
+                  <p:par>
+                    <p:cTn id="3" fill="hold">
+                      <p:stCondLst>
+                        <p:cond delay="indefinite"/>
+                      </p:stCondLst>
+                      <p:childTnLst>
+                        <p:par>
+                          <p:cTn id="4" fill="hold">
+                            <p:stCondLst>
+                              <p:cond delay="0"/>
+                            </p:stCondLst>
+                            <p:childTnLst>
+                              <p:par>
+                                <p:cTn id="5" presetID="1" presetClass="entr" presetSubtype="0" fill="hold" grpId="0" nodeType="clickEffect">
+                                  <p:stCondLst>
+                                    <p:cond delay="0"/>
+                                  </p:stCondLst>
+                                  <p:childTnLst>
+                                    <p:set>
+                                      <p:cBhvr>
+                                        <p:cTn id="6" dur="1" fill="hold">
+                                          <p:stCondLst>
+                                            <p:cond delay="0"/>
+                                          </p:stCondLst>
+                                        </p:cTn>
+                                        <p:tgtEl>
+                                          <p:spTgt spid="3">
+                                            <p:txEl>
+                                              <p:pRg st="0" end="0"/>
+                                            </p:txEl>
+                                          </p:spTgt>
+                                        </p:tgtEl>
+                                        <p:attrNameLst>
+                                          <p:attrName>style.visibility</p:attrName>
+                                        </p:attrNameLst>
+                                      </p:cBhvr>
+                                      <p:to>
+                                        <p:strVal val="visible"/>
+                                      </p:to>
+                                    </p:set>
+                                  </p:childTnLst>
+                                </p:cTn>
+                              </p:par>
+                            </p:childTnLst>
+                          </p:cTn>
+                        </p:par>
+                      </p:childTnLst>
+                    </p:cTn>
+                  </p:par>
+                  <p:par>
+                    <p:cTn id="7" fill="hold">
+                      <p:stCondLst>
+                        <p:cond delay="indefinite"/>
+                      </p:stCondLst>
+                      <p:childTnLst>
+                        <p:par>
+                          <p:cTn id="8" fill="hold">
+                            <p:stCondLst>
+                              <p:cond delay="0"/>
+                            </p:stCondLst>
+                            <p:childTnLst>
+                              <p:par>
+                                <p:cTn id="9" presetID="1" presetClass="entr" presetSubtype="0" fill="hold" grpId="0" nodeType="clickEffect">
+                                  <p:stCondLst>
+                                    <p:cond delay="0"/>
+                                  </p:stCondLst>
+                                  <p:childTnLst>
+                                    <p:set>
+                                      <p:cBhvr>
+                                        <p:cTn id="10" dur="1" fill="hold">
+                                          <p:stCondLst>
+                                            <p:cond delay="0"/>
+                                          </p:stCondLst>
+                                        </p:cTn>
+                                        <p:tgtEl>
+                                          <p:spTgt spid="3">
+                                            <p:txEl>
+                                              <p:pRg st="1" end="1"/>
+                                            </p:txEl>
+                                          </p:spTgt>
+                                        </p:tgtEl>
+                                        <p:attrNameLst>
+                                          <p:attrName>style.visibility</p:attrName>
+                                        </p:attrNameLst>
+                                      </p:cBhvr>
+                                      <p:to>
+                                        <p:strVal val="visible"/>
+                                      </p:to>
+                                    </p:set>
+                                  </p:childTnLst>
+                                </p:cTn>
+                              </p:par>
+                            </p:childTnLst>
+                          </p:cTn>
+                        </p:par>
+                      </p:childTnLst>
+                    </p:cTn>
+                  </p:par>
+                  <p:par>
+                    <p:cTn id="11" fill="hold">
+                      <p:stCondLst>
+                        <p:cond delay="indefinite"/>
+                      </p:stCondLst>
+                      <p:childTnLst>
+                        <p:par>
+                          <p:cTn id="12" fill="hold">
+                            <p:stCondLst>
+                              <p:cond delay="0"/>
+                            </p:stCondLst>
+                            <p:childTnLst>
+                              <p:par>
+                                <p:cTn id="13" presetID="1" presetClass="entr" presetSubtype="0" fill="hold" grpId="0" nodeType="clickEffect">
+                                  <p:stCondLst>
+                                    <p:cond delay="0"/>
+                                  </p:stCondLst>
+                                  <p:childTnLst>
+                                    <p:set>
+                                      <p:cBhvr>
+                                        <p:cTn id="14" dur="1" fill="hold">
+                                          <p:stCondLst>
+                                            <p:cond delay="0"/>
+                                          </p:stCondLst>
+                                        </p:cTn>
+                                        <p:tgtEl>
+                                          <p:spTgt spid="3">
+                                            <p:txEl>
+                                              <p:pRg st="2" end="2"/>
+                                            </p:txEl>
+                                          </p:spTgt>
+                                        </p:tgtEl>
+                                        <p:attrNameLst>
+                                          <p:attrName>style.visibility</p:attrName>
+                                        </p:attrNameLst>
+                                      </p:cBhvr>
+                                      <p:to>
+                                        <p:strVal val="visible"/>
+                                      </p:to>
+                                    </p:set>
+                                  </p:childTnLst>
+                                </p:cTn>
+                              </p:par>
+                            </p:childTnLst>
+                          </p:cTn>
+                        </p:par>
+                      </p:childTnLst>
+                    </p:cTn>
+                  </p:par>
+                  <p:par>
+                    <p:cTn id="15" fill="hold">
+                      <p:stCondLst>
+                        <p:cond delay="indefinite"/>
+                      </p:stCondLst>
+                      <p:childTnLst>
+                        <p:par>
+                          <p:cTn id="16" fill="hold">
+                            <p:stCondLst>
+                              <p:cond delay="0"/>
+                            </p:stCondLst>
+                            <p:childTnLst>
+                              <p:par>
+                                <p:cTn id="17" presetID="1" presetClass="entr" presetSubtype="0" fill="hold" grpId="0" nodeType="clickEffect">
+                                  <p:stCondLst>
+                                    <p:cond delay="0"/>
+                                  </p:stCondLst>
+                                  <p:childTnLst>
+                                    <p:set>
+                                      <p:cBhvr>
+                                        <p:cTn id="18" dur="1" fill="hold">
+                                          <p:stCondLst>
+                                            <p:cond delay="0"/>
+                                          </p:stCondLst>
+                                        </p:cTn>
+                                        <p:tgtEl>
+                                          <p:spTgt spid="3">
+                                            <p:txEl>
+                                              <p:pRg st="3" end="3"/>
+                                            </p:txEl>
+                                          </p:spTgt>
+                                        </p:tgtEl>
+                                        <p:attrNameLst>
+                                          <p:attrName>style.visibility</p:attrName>
+                                        </p:attrNameLst>
+                                      </p:cBhvr>
+                                      <p:to>
+                                        <p:strVal val="visible"/>
+                                      </p:to>
+                                    </p:set>
+                                  </p:childTnLst>
+                                </p:cTn>
+                              </p:par>
+                            </p:childTnLst>
+                          </p:cTn>
+                        </p:par>
+                      </p:childTnLst>
+                    </p:cTn>
+                  </p:par>
+                  <p:par>
+                    <p:cTn id="19" fill="hold">
+                      <p:stCondLst>
+                        <p:cond delay="indefinite"/>
+                      </p:stCondLst>
+                      <p:childTnLst>
+                        <p:par>
+                          <p:cTn id="20" fill="hold">
+                            <p:stCondLst>
+                              <p:cond delay="0"/>
+                            </p:stCondLst>
+                            <p:childTnLst>
+                              <p:par>
+                                <p:cTn id="21" presetID="1" presetClass="entr" presetSubtype="0" fill="hold" grpId="0" nodeType="clickEffect">
+                                  <p:stCondLst>
+                                    <p:cond delay="0"/>
+                                  </p:stCondLst>
+                                  <p:childTnLst>
+                                    <p:set>
+                                      <p:cBhvr>
+                                        <p:cTn id="22" dur="1" fill="hold">
+                                          <p:stCondLst>
+                                            <p:cond delay="0"/>
+                                          </p:stCondLst>
+                                        </p:cTn>
+                                        <p:tgtEl>
+                                          <p:spTgt spid="3">
+                                            <p:txEl>
+                                              <p:pRg st="4" end="4"/>
+                                            </p:txEl>
+                                          </p:spTgt>
+                                        </p:tgtEl>
+                                        <p:attrNameLst>
+                                          <p:attrName>style.visibility</p:attrName>
+                                        </p:attrNameLst>
+                                      </p:cBhvr>
+                                      <p:to>
+                                        <p:strVal val="visible"/>
+                                      </p:to>
+                                    </p:set>
+                                  </p:childTnLst>
+                                </p:cTn>
+                              </p:par>
+                            </p:childTnLst>
+                          </p:cTn>
+                        </p:par>
+                      </p:childTnLst>
+                    </p:cTn>
+                  </p:par>
+                  <p:par>
+                    <p:cTn id="23" fill="hold">
+                      <p:stCondLst>
+                        <p:cond delay="indefinite"/>
+                      </p:stCondLst>
+                      <p:childTnLst>
+                        <p:par>
+                          <p:cTn id="24" fill="hold">
+                            <p:stCondLst>
+                              <p:cond delay="0"/>
+                            </p:stCondLst>
+                            <p:childTnLst>
+                              <p:par>
+                                <p:cTn id="25" presetID="1" presetClass="entr" presetSubtype="0" fill="hold" grpId="0" nodeType="clickEffect">
+                                  <p:stCondLst>
+                                    <p:cond delay="0"/>
+                                  </p:stCondLst>
+                                  <p:childTnLst>
+                                    <p:set>
+                                      <p:cBhvr>
+                                        <p:cTn id="26" dur="1" fill="hold">
+                                          <p:stCondLst>
+                                            <p:cond delay="0"/>
+                                          </p:stCondLst>
+                                        </p:cTn>
+                                        <p:tgtEl>
+                                          <p:spTgt spid="3">
+                                            <p:txEl>
+                                              <p:pRg st="5" end="5"/>
+                                            </p:txEl>
+                                          </p:spTgt>
+                                        </p:tgtEl>
+                                        <p:attrNameLst>
+                                          <p:attrName>style.visibility</p:attrName>
+                                        </p:attrNameLst>
+                                      </p:cBhvr>
+                                      <p:to>
+                                        <p:strVal val="visible"/>
+                                      </p:to>
+                                    </p:set>
+                                  </p:childTnLst>
+                                </p:cTn>
+                              </p:par>
+                            </p:childTnLst>
+                          </p:cTn>
+                        </p:par>
+                      </p:childTnLst>
+                    </p:cTn>
+                  </p:par>
+                </p:childTnLst>
+              </p:cTn>
+              <p:prevCondLst>
+                <p:cond evt="onPrev" delay="0">
+                  <p:tgtEl>
+                    <p:sldTgt/>
+                  </p:tgtEl>
+                </p:cond>
+              </p:prevCondLst>
+              <p:nextCondLst>
+                <p:cond evt="onNext" delay="0">
+                  <p:tgtEl>
+                    <p:sldTgt/>
+                  </p:tgtEl>
+                </p:cond>
+              </p:nextCondLst>
+            </p:seq>
+          </p:childTnLst>
+        </p:cTn>
+      </p:par>
+    </p:tnLst>
+    <p:bldLst>
+      <p:bldP spid="3" grpId="0" uiExpand="1" build="p"/>
+    </p:bldLst>
+  </p:timing>
+</p:sld>
+</file>
+
+<file path=ppt/slides/slide4.xml><?xml version="1.0" encoding="utf-8"?>
 <p:sld xmlns:a="http://schemas.openxmlformats.org/drawingml/2006/main" xmlns:r="http://schemas.openxmlformats.org/officeDocument/2006/relationships" xmlns:p="http://schemas.openxmlformats.org/presentationml/2006/main">
   <p:cSld>
     <p:spTree>
@@ -8419,7 +8946,7 @@
 </p:sld>
 </file>
 
-<file path=ppt/slides/slide4.xml><?xml version="1.0" encoding="utf-8"?>
+<file path=ppt/slides/slide5.xml><?xml version="1.0" encoding="utf-8"?>
 <p:sld xmlns:a="http://schemas.openxmlformats.org/drawingml/2006/main" xmlns:r="http://schemas.openxmlformats.org/officeDocument/2006/relationships" xmlns:p="http://schemas.openxmlformats.org/presentationml/2006/main">
   <p:cSld>
     <p:spTree>
@@ -8479,106 +9006,42 @@
             <a:pPr lvl="0"/>
             <a:r>
               <a:rPr/>
-              <a:t>The sales process is about </a:t>
-            </a:r>
-            <a:r>
-              <a:rPr b="1"/>
-              <a:t>auto-parts sales opportunities</a:t>
-            </a:r>
-            <a:r>
-              <a:rPr/>
-              <a:t> with both potential leads and existing clients.</a:t>
+              <a:t>The sales process tracks auto-parts opportunities across both new leads and existing customers.</a:t>
             </a:r>
           </a:p>
           <a:p>
             <a:pPr lvl="0"/>
             <a:r>
               <a:rPr/>
-              <a:t>Opportunities move back and forth across </a:t>
-            </a:r>
-            <a:r>
-              <a:rPr b="1"/>
-              <a:t>Identified / Qualifying</a:t>
-            </a:r>
-            <a:r>
-              <a:rPr/>
-              <a:t>, </a:t>
-            </a:r>
-            <a:r>
-              <a:rPr b="1"/>
-              <a:t>Qualified / Validating</a:t>
-            </a:r>
-            <a:r>
-              <a:rPr/>
-              <a:t>, and </a:t>
-            </a:r>
-            <a:r>
-              <a:rPr b="1"/>
-              <a:t>Validated / Gaining Agreement</a:t>
-            </a:r>
-            <a:r>
-              <a:rPr/>
-              <a:t>.</a:t>
+              <a:t>Opportunities transition—sometimes non-linearly—between the stages Identified / Qualifying, Qualified / Validating, and Validated / Gaining Agreement.</a:t>
             </a:r>
           </a:p>
           <a:p>
             <a:pPr lvl="0"/>
             <a:r>
               <a:rPr/>
-              <a:t>Each opportunity ultimately ends in a </a:t>
-            </a:r>
-            <a:r>
-              <a:rPr b="1"/>
-              <a:t>win or a loss</a:t>
-            </a:r>
-            <a:r>
-              <a:rPr/>
-              <a:t>.</a:t>
+              <a:t>Each opportunity ultimately resolves as either a win or a loss.</a:t>
             </a:r>
           </a:p>
           <a:p>
             <a:pPr lvl="0"/>
             <a:r>
               <a:rPr/>
-              <a:t>Sales teams also assign an </a:t>
-            </a:r>
-            <a:r>
-              <a:rPr b="1"/>
-              <a:t>estimated opportunity amount</a:t>
-            </a:r>
-            <a:r>
-              <a:rPr/>
-              <a:t>, which appears to be updated as the deal evolves.</a:t>
+              <a:t>Sales teams maintain an estimated deal value, which is updated as the opportunity progresses.</a:t>
             </a:r>
           </a:p>
           <a:p>
             <a:pPr lvl="0"/>
             <a:r>
               <a:rPr/>
-              <a:t>Because the dataset mostly stores the latest record per opportunity, we can use </a:t>
-            </a:r>
-            <a:r>
-              <a:rPr b="1"/>
-              <a:t>aggregate time-in-stage variables</a:t>
-            </a:r>
-            <a:r>
-              <a:rPr/>
-              <a:t>, but not full path dynamics.</a:t>
+              <a:t>The dataset primarily captures the latest snapshot per opportunity, limiting visibility into full stage transitions over time.</a:t>
             </a:r>
           </a:p>
           <a:p>
             <a:pPr lvl="0"/>
             <a:r>
               <a:rPr/>
-              <a:t>That is why the modelling work uses </a:t>
-            </a:r>
-            <a:r>
-              <a:rPr b="1"/>
-              <a:t>all available snapshot variables</a:t>
-            </a:r>
-            <a:r>
-              <a:rPr/>
-              <a:t>, especially the process-time fields that summarize where an opportunity currently stands.</a:t>
+              <a:t>As a result, modelling relies on aggregate time-in-stage metrics and other snapshot features to represent the current state of each opportunity.</a:t>
             </a:r>
           </a:p>
         </p:txBody>
@@ -8945,7 +9408,7 @@
 </p:sld>
 </file>
 
-<file path=ppt/slides/slide5.xml><?xml version="1.0" encoding="utf-8"?>
+<file path=ppt/slides/slide6.xml><?xml version="1.0" encoding="utf-8"?>
 <p:sld xmlns:a="http://schemas.openxmlformats.org/drawingml/2006/main" xmlns:r="http://schemas.openxmlformats.org/officeDocument/2006/relationships" xmlns:p="http://schemas.openxmlformats.org/presentationml/2006/main">
   <p:cSld>
     <p:spTree>
@@ -9442,7 +9905,7 @@
 </p:sld>
 </file>
 
-<file path=ppt/slides/slide6.xml><?xml version="1.0" encoding="utf-8"?>
+<file path=ppt/slides/slide7.xml><?xml version="1.0" encoding="utf-8"?>
 <p:sld xmlns:a="http://schemas.openxmlformats.org/drawingml/2006/main" xmlns:r="http://schemas.openxmlformats.org/officeDocument/2006/relationships" xmlns:p="http://schemas.openxmlformats.org/presentationml/2006/main">
   <p:cSld>
     <p:spTree>
@@ -9494,7 +9957,7 @@
 </p:sld>
 </file>
 
-<file path=ppt/slides/slide7.xml><?xml version="1.0" encoding="utf-8"?>
+<file path=ppt/slides/slide8.xml><?xml version="1.0" encoding="utf-8"?>
 <p:sld xmlns:a="http://schemas.openxmlformats.org/drawingml/2006/main" xmlns:r="http://schemas.openxmlformats.org/officeDocument/2006/relationships" xmlns:p="http://schemas.openxmlformats.org/presentationml/2006/main">
   <p:cSld>
     <p:spTree>
@@ -9987,7 +10450,7 @@
 </p:sld>
 </file>
 
-<file path=ppt/slides/slide8.xml><?xml version="1.0" encoding="utf-8"?>
+<file path=ppt/slides/slide9.xml><?xml version="1.0" encoding="utf-8"?>
 <p:sld xmlns:a="http://schemas.openxmlformats.org/drawingml/2006/main" xmlns:r="http://schemas.openxmlformats.org/officeDocument/2006/relationships" xmlns:p="http://schemas.openxmlformats.org/presentationml/2006/main">
   <p:cSld>
     <p:spTree>
@@ -10024,14 +10487,14 @@
             </a:pPr>
             <a:r>
               <a:rPr/>
-              <a:t>For any business operations, we recommend segmenting clients by client size</a:t>
+              <a:t>The eligible modelling sample wins 22.7% of the time, with a heavily skewed amount distribution</a:t>
             </a:r>
           </a:p>
         </p:txBody>
       </p:sp>
       <p:pic>
         <p:nvPicPr>
-          <p:cNvPr descr="assets/eda_client_segmentation.png" id="0" name="Picture 1"/>
+          <p:cNvPr descr="assets/eda_amount_win_rate.png" id="0" name="Picture 1"/>
           <p:cNvPicPr>
             <a:picLocks noGrp="1" noChangeAspect="1"/>
           </p:cNvPicPr>
@@ -10045,8 +10508,8 @@
         </p:blipFill>
         <p:spPr bwMode="auto">
           <a:xfrm>
-            <a:off x="457200" y="1892300"/>
-            <a:ext cx="4038600" cy="1993900"/>
+            <a:off x="457200" y="1765300"/>
+            <a:ext cx="4038600" cy="2247900"/>
           </a:xfrm>
           <a:prstGeom prst="rect">
             <a:avLst/>
@@ -10077,37 +10540,37 @@
             <a:pPr lvl="0"/>
             <a:r>
               <a:rPr/>
-              <a:t>The portfolio is heavily concentrated in </a:t>
+              <a:t>The cleaned modelling sample is still dominated by lower-value opportunities, so volume sits overwhelmingly in the left side of the amount distribution.</a:t>
+            </a:r>
+          </a:p>
+          <a:p>
+            <a:pPr lvl="0"/>
+            <a:r>
+              <a:rPr/>
+              <a:t>Even with that skew, observed win rate improves as amount bands get larger, which supports using amount as a </a:t>
             </a:r>
             <a:r>
               <a:rPr b="1"/>
-              <a:t>100K or less</a:t>
-            </a:r>
-            <a:r>
-              <a:rPr/>
-              <a:t> clients, so this segment should drive base operating playbooks and coverage models.</a:t>
+              <a:t>commercial value lens</a:t>
+            </a:r>
+            <a:r>
+              <a:rPr/>
+              <a:t> alongside propensity.</a:t>
             </a:r>
           </a:p>
           <a:p>
             <a:pPr lvl="0"/>
             <a:r>
               <a:rPr/>
-              <a:t>Conversion is relatively similar across most size bands, which means client size is more useful for </a:t>
+              <a:t>The opportunity mix remains loss-heavy overall (</a:t>
             </a:r>
             <a:r>
               <a:rPr b="1"/>
-              <a:t>commercial treatment and value management</a:t>
-            </a:r>
-            <a:r>
-              <a:rPr/>
-              <a:t> than for win-rate targeting alone.</a:t>
-            </a:r>
-          </a:p>
-          <a:p>
-            <a:pPr lvl="0"/>
-            <a:r>
-              <a:rPr/>
-              <a:t>Larger accounts still matter because deal economics improve materially with size, so client-size segmentation should inform account prioritization, service model, and sales effort allocation.</a:t>
+              <a:t>22.7% won / 77.3% lost</a:t>
+            </a:r>
+            <a:r>
+              <a:rPr/>
+              <a:t>), so the main operating challenge is still selective prioritization rather than broad-brush pursuit.</a:t>
             </a:r>
           </a:p>
         </p:txBody>
@@ -10292,324 +10755,6 @@
     </p:tnLst>
     <p:bldLst>
       <p:bldP spid="4" grpId="0" uiExpand="1" build="p"/>
-    </p:bldLst>
-  </p:timing>
-</p:sld>
-</file>
-
-<file path=ppt/slides/slide9.xml><?xml version="1.0" encoding="utf-8"?>
-<p:sld xmlns:a="http://schemas.openxmlformats.org/drawingml/2006/main" xmlns:r="http://schemas.openxmlformats.org/officeDocument/2006/relationships" xmlns:p="http://schemas.openxmlformats.org/presentationml/2006/main">
-  <p:cSld>
-    <p:spTree>
-      <p:nvGrpSpPr>
-        <p:cNvPr id="1" name=""/>
-        <p:cNvGrpSpPr/>
-        <p:nvPr/>
-      </p:nvGrpSpPr>
-      <p:grpSpPr>
-        <a:xfrm>
-          <a:off x="0" y="0"/>
-          <a:ext cx="0" cy="0"/>
-          <a:chOff x="0" y="0"/>
-          <a:chExt cx="0" cy="0"/>
-        </a:xfrm>
-      </p:grpSpPr>
-      <p:sp>
-        <p:nvSpPr>
-          <p:cNvPr id="2" name="Title 1"/>
-          <p:cNvSpPr>
-            <a:spLocks noGrp="1"/>
-          </p:cNvSpPr>
-          <p:nvPr>
-            <p:ph type="title"/>
-          </p:nvPr>
-        </p:nvSpPr>
-        <p:spPr/>
-        <p:txBody>
-          <a:bodyPr/>
-          <a:lstStyle/>
-          <a:p>
-            <a:pPr lvl="0" indent="0" marL="0">
-              <a:buNone/>
-            </a:pPr>
-            <a:r>
-              <a:rPr/>
-              <a:t>We also recommend starting with a simple marketing funnel segmentation</a:t>
-            </a:r>
-          </a:p>
-        </p:txBody>
-      </p:sp>
-      <p:sp>
-        <p:nvSpPr>
-          <p:cNvPr id="3" name="Content Placeholder 2"/>
-          <p:cNvSpPr>
-            <a:spLocks noGrp="1"/>
-          </p:cNvSpPr>
-          <p:nvPr>
-            <p:ph idx="1" sz="half"/>
-          </p:nvPr>
-        </p:nvSpPr>
-        <p:spPr/>
-        <p:txBody>
-          <a:bodyPr/>
-          <a:lstStyle/>
-          <a:p>
-            <a:pPr lvl="0"/>
-            <a:r>
-              <a:rPr b="1"/>
-              <a:t>(Re)Acquisition</a:t>
-            </a:r>
-            <a:r>
-              <a:rPr/>
-              <a:t> / no business in the past two years: 69,208 opportunities with a </a:t>
-            </a:r>
-            <a:r>
-              <a:rPr b="1"/>
-              <a:t>17.3%</a:t>
-            </a:r>
-            <a:r>
-              <a:rPr/>
-              <a:t> observed win rate.</a:t>
-            </a:r>
-          </a:p>
-          <a:p>
-            <a:pPr lvl="0"/>
-            <a:r>
-              <a:rPr b="1"/>
-              <a:t>Engagement / upselling</a:t>
-            </a:r>
-            <a:r>
-              <a:rPr/>
-              <a:t>: 8,817 opportunities with a </a:t>
-            </a:r>
-            <a:r>
-              <a:rPr b="1"/>
-              <a:t>63.9%</a:t>
-            </a:r>
-            <a:r>
-              <a:rPr/>
-              <a:t> observed win rate.</a:t>
-            </a:r>
-          </a:p>
-          <a:p>
-            <a:pPr lvl="0"/>
-            <a:r>
-              <a:rPr/>
-              <a:t>This is a practical first-layer funnel split for go-to-market operations because it separates low-history acquisition work from higher-propensity expansion opportunities.</a:t>
-            </a:r>
-          </a:p>
-        </p:txBody>
-      </p:sp>
-      <p:pic>
-        <p:nvPicPr>
-          <p:cNvPr descr="assets/eda_two_phase_funnel.png" id="0" name="Picture 1"/>
-          <p:cNvPicPr>
-            <a:picLocks noGrp="1" noChangeAspect="1"/>
-          </p:cNvPicPr>
-          <p:nvPr/>
-        </p:nvPicPr>
-        <p:blipFill>
-          <a:blip r:embed="rId2"/>
-          <a:stretch>
-            <a:fillRect/>
-          </a:stretch>
-        </p:blipFill>
-        <p:spPr bwMode="auto">
-          <a:xfrm>
-            <a:off x="4648200" y="1638300"/>
-            <a:ext cx="4038600" cy="2501900"/>
-          </a:xfrm>
-          <a:prstGeom prst="rect">
-            <a:avLst/>
-          </a:prstGeom>
-          <a:noFill/>
-          <a:ln w="9525">
-            <a:noFill/>
-            <a:headEnd/>
-            <a:tailEnd/>
-          </a:ln>
-        </p:spPr>
-      </p:pic>
-    </p:spTree>
-  </p:cSld>
-  <p:timing>
-    <p:tnLst>
-      <p:par>
-        <p:cTn id="1" dur="indefinite" restart="never" nodeType="tmRoot">
-          <p:childTnLst>
-            <p:seq concurrent="1" nextAc="seek">
-              <p:cTn id="2" dur="indefinite" nodeType="mainSeq">
-                <p:childTnLst>
-                  <p:par>
-                    <p:cTn id="3" fill="hold">
-                      <p:stCondLst>
-                        <p:cond delay="indefinite"/>
-                      </p:stCondLst>
-                      <p:childTnLst>
-                        <p:par>
-                          <p:cTn id="4" fill="hold">
-                            <p:stCondLst>
-                              <p:cond delay="0"/>
-                            </p:stCondLst>
-                            <p:childTnLst>
-                              <p:par>
-                                <p:cTn id="5" presetID="1" presetClass="entr" presetSubtype="0" fill="hold" grpId="0" nodeType="clickEffect">
-                                  <p:stCondLst>
-                                    <p:cond delay="0"/>
-                                  </p:stCondLst>
-                                  <p:childTnLst>
-                                    <p:set>
-                                      <p:cBhvr>
-                                        <p:cTn id="6" dur="1" fill="hold">
-                                          <p:stCondLst>
-                                            <p:cond delay="0"/>
-                                          </p:stCondLst>
-                                        </p:cTn>
-                                        <p:tgtEl>
-                                          <p:spTgt spid="3">
-                                            <p:txEl>
-                                              <p:pRg st="0" end="0"/>
-                                            </p:txEl>
-                                          </p:spTgt>
-                                        </p:tgtEl>
-                                        <p:attrNameLst>
-                                          <p:attrName>style.visibility</p:attrName>
-                                        </p:attrNameLst>
-                                      </p:cBhvr>
-                                      <p:to>
-                                        <p:strVal val="visible"/>
-                                      </p:to>
-                                    </p:set>
-                                  </p:childTnLst>
-                                </p:cTn>
-                              </p:par>
-                            </p:childTnLst>
-                          </p:cTn>
-                        </p:par>
-                      </p:childTnLst>
-                    </p:cTn>
-                  </p:par>
-                  <p:par>
-                    <p:cTn id="7" fill="hold">
-                      <p:stCondLst>
-                        <p:cond delay="indefinite"/>
-                      </p:stCondLst>
-                      <p:childTnLst>
-                        <p:par>
-                          <p:cTn id="8" fill="hold">
-                            <p:stCondLst>
-                              <p:cond delay="0"/>
-                            </p:stCondLst>
-                            <p:childTnLst>
-                              <p:par>
-                                <p:cTn id="9" presetID="1" presetClass="entr" presetSubtype="0" fill="hold" grpId="0" nodeType="clickEffect">
-                                  <p:stCondLst>
-                                    <p:cond delay="0"/>
-                                  </p:stCondLst>
-                                  <p:childTnLst>
-                                    <p:set>
-                                      <p:cBhvr>
-                                        <p:cTn id="10" dur="1" fill="hold">
-                                          <p:stCondLst>
-                                            <p:cond delay="0"/>
-                                          </p:stCondLst>
-                                        </p:cTn>
-                                        <p:tgtEl>
-                                          <p:spTgt spid="3">
-                                            <p:txEl>
-                                              <p:pRg st="1" end="1"/>
-                                            </p:txEl>
-                                          </p:spTgt>
-                                        </p:tgtEl>
-                                        <p:attrNameLst>
-                                          <p:attrName>style.visibility</p:attrName>
-                                        </p:attrNameLst>
-                                      </p:cBhvr>
-                                      <p:to>
-                                        <p:strVal val="visible"/>
-                                      </p:to>
-                                    </p:set>
-                                  </p:childTnLst>
-                                </p:cTn>
-                              </p:par>
-                            </p:childTnLst>
-                          </p:cTn>
-                        </p:par>
-                      </p:childTnLst>
-                    </p:cTn>
-                  </p:par>
-                  <p:par>
-                    <p:cTn id="11" fill="hold">
-                      <p:stCondLst>
-                        <p:cond delay="indefinite"/>
-                      </p:stCondLst>
-                      <p:childTnLst>
-                        <p:par>
-                          <p:cTn id="12" fill="hold">
-                            <p:stCondLst>
-                              <p:cond delay="0"/>
-                            </p:stCondLst>
-                            <p:childTnLst>
-                              <p:par>
-                                <p:cTn id="13" presetID="1" presetClass="entr" presetSubtype="0" fill="hold" grpId="0" nodeType="clickEffect">
-                                  <p:stCondLst>
-                                    <p:cond delay="0"/>
-                                  </p:stCondLst>
-                                  <p:childTnLst>
-                                    <p:set>
-                                      <p:cBhvr>
-                                        <p:cTn id="14" dur="1" fill="hold">
-                                          <p:stCondLst>
-                                            <p:cond delay="0"/>
-                                          </p:stCondLst>
-                                        </p:cTn>
-                                        <p:tgtEl>
-                                          <p:spTgt spid="3">
-                                            <p:txEl>
-                                              <p:pRg st="2" end="2"/>
-                                            </p:txEl>
-                                          </p:spTgt>
-                                        </p:tgtEl>
-                                        <p:attrNameLst>
-                                          <p:attrName>style.visibility</p:attrName>
-                                        </p:attrNameLst>
-                                      </p:cBhvr>
-                                      <p:to>
-                                        <p:strVal val="visible"/>
-                                      </p:to>
-                                    </p:set>
-                                  </p:childTnLst>
-                                </p:cTn>
-                              </p:par>
-                            </p:childTnLst>
-                          </p:cTn>
-                        </p:par>
-                      </p:childTnLst>
-                    </p:cTn>
-                  </p:par>
-                </p:childTnLst>
-              </p:cTn>
-              <p:prevCondLst>
-                <p:cond evt="onPrev" delay="0">
-                  <p:tgtEl>
-                    <p:sldTgt/>
-                  </p:tgtEl>
-                </p:cond>
-              </p:prevCondLst>
-              <p:nextCondLst>
-                <p:cond evt="onNext" delay="0">
-                  <p:tgtEl>
-                    <p:sldTgt/>
-                  </p:tgtEl>
-                </p:cond>
-              </p:nextCondLst>
-            </p:seq>
-          </p:childTnLst>
-        </p:cTn>
-      </p:par>
-    </p:tnLst>
-    <p:bldLst>
-      <p:bldP spid="3" grpId="0" uiExpand="1" build="p"/>
     </p:bldLst>
   </p:timing>
 </p:sld>

--- a/slidedeck/presentation.pptx
+++ b/slidedeck/presentation.pptx
@@ -30,6 +30,12 @@
     <p:sldId id="278" r:id="rId24"/>
     <p:sldId id="279" r:id="rId25"/>
     <p:sldId id="280" r:id="rId26"/>
+    <p:sldId id="281" r:id="rId27"/>
+    <p:sldId id="282" r:id="rId28"/>
+    <p:sldId id="283" r:id="rId29"/>
+    <p:sldId id="284" r:id="rId30"/>
+    <p:sldId id="285" r:id="rId31"/>
+    <p:sldId id="286" r:id="rId32"/>
   </p:sldIdLst>
   <p:sldSz cx="9144000" cy="5143500" type="screen16x9"/>
   <p:notesSz cx="6858000" cy="9144000"/>
@@ -3850,7 +3856,7 @@
             </a:pPr>
             <a:r>
               <a:rPr/>
-              <a:t>Process-time variables carry most of the predictive signal</a:t>
+              <a:t>We ran an automated IV analysis and found that process-time variables carry most of the predictive signal</a:t>
             </a:r>
           </a:p>
         </p:txBody>
@@ -4208,828 +4214,15 @@
             </a:pPr>
             <a:r>
               <a:rPr/>
-              <a:t>For the selected use cases, we focused on building two models with different targets and purposes</a:t>
-            </a:r>
-          </a:p>
-        </p:txBody>
-      </p:sp>
-      <p:sp>
-        <p:nvSpPr>
-          <p:cNvPr id="3" name="Content Placeholder 2"/>
-          <p:cNvSpPr>
-            <a:spLocks noGrp="1"/>
-          </p:cNvSpPr>
-          <p:nvPr>
-            <p:ph idx="1" sz="half"/>
-          </p:nvPr>
-        </p:nvSpPr>
-        <p:spPr/>
-        <p:txBody>
-          <a:bodyPr/>
-          <a:lstStyle/>
-          <a:p>
-            <a:pPr lvl="0" indent="0" marL="0">
-              <a:spcBef>
-                <a:spcPts val="3000"/>
-              </a:spcBef>
-              <a:buNone/>
-            </a:pPr>
+              <a:t>For both classification and regression, we used a </a:t>
+            </a:r>
             <a:r>
               <a:rPr b="1"/>
-              <a:t>Process prioritization: Win/loss classification model</a:t>
-            </a:r>
-          </a:p>
-          <a:p>
-            <a:pPr lvl="0"/>
-            <a:r>
-              <a:rPr/>
-              <a:t>Target: </a:t>
-            </a:r>
-            <a:r>
-              <a:rPr b="1"/>
-              <a:t>Opportunity Result</a:t>
-            </a:r>
-            <a:r>
-              <a:rPr/>
-              <a:t>.</a:t>
-            </a:r>
-          </a:p>
-          <a:p>
-            <a:pPr lvl="0"/>
-            <a:r>
-              <a:rPr/>
-              <a:t>Business use: </a:t>
-            </a:r>
-            <a:r>
-              <a:rPr b="1"/>
-              <a:t>process prioritization</a:t>
-            </a:r>
-            <a:r>
-              <a:rPr/>
-              <a:t> and ranking the pipeline by win propensity.</a:t>
-            </a:r>
-          </a:p>
-          <a:p>
-            <a:pPr lvl="0"/>
-            <a:r>
-              <a:rPr/>
-              <a:t>Uses the full dynamic snapshot, including process timing and stage-ratio variables.</a:t>
-            </a:r>
-          </a:p>
-          <a:p>
-            <a:pPr lvl="0"/>
-            <a:r>
-              <a:rPr/>
-              <a:t>Relevant transformations tested: log-transforming amount variables, supervised binning and standard/robust scaling and OHE encoding.</a:t>
-            </a:r>
-          </a:p>
-          <a:p>
-            <a:pPr lvl="0"/>
-            <a:r>
-              <a:rPr/>
-              <a:t>Main metric focus is on </a:t>
-            </a:r>
-            <a:r>
-              <a:rPr b="1"/>
-              <a:t>ROC AUC</a:t>
-            </a:r>
-            <a:r>
-              <a:rPr/>
-              <a:t> and </a:t>
-            </a:r>
-            <a:r>
-              <a:rPr b="1"/>
-              <a:t>PR AUC</a:t>
-            </a:r>
-            <a:r>
-              <a:rPr/>
-              <a:t>.</a:t>
-            </a:r>
-          </a:p>
-        </p:txBody>
-      </p:sp>
-      <p:sp>
-        <p:nvSpPr>
-          <p:cNvPr id="4" name="Content Placeholder 3"/>
-          <p:cNvSpPr>
-            <a:spLocks noGrp="1"/>
-          </p:cNvSpPr>
-          <p:nvPr>
-            <p:ph idx="2" sz="half"/>
-          </p:nvPr>
-        </p:nvSpPr>
-        <p:spPr/>
-        <p:txBody>
-          <a:bodyPr/>
-          <a:lstStyle/>
-          <a:p>
-            <a:pPr lvl="0" indent="0" marL="0">
-              <a:spcBef>
-                <a:spcPts val="3000"/>
-              </a:spcBef>
-              <a:buNone/>
-            </a:pPr>
-            <a:r>
-              <a:rPr b="1"/>
-              <a:t>Opportunity Sizing and forecasting: Amount regression model</a:t>
-            </a:r>
-          </a:p>
-          <a:p>
-            <a:pPr lvl="0"/>
-            <a:r>
-              <a:rPr/>
-              <a:t>Target: </a:t>
-            </a:r>
-            <a:r>
-              <a:rPr b="1"/>
-              <a:t>Opportunity Amount USD</a:t>
-            </a:r>
-            <a:r>
-              <a:rPr/>
-              <a:t>.</a:t>
-            </a:r>
-          </a:p>
-          <a:p>
-            <a:pPr lvl="0"/>
-            <a:r>
-              <a:rPr/>
-              <a:t>Business use: </a:t>
-            </a:r>
-            <a:r>
-              <a:rPr b="1"/>
-              <a:t>sizing and aggregate forecasting</a:t>
-            </a:r>
-            <a:r>
-              <a:rPr/>
-              <a:t>.</a:t>
-            </a:r>
-          </a:p>
-          <a:p>
-            <a:pPr lvl="0"/>
-            <a:r>
-              <a:rPr/>
-              <a:t>Also uses the full dynamic snapshot, so amount estimates reflect both customer context and current process state.</a:t>
-            </a:r>
-          </a:p>
-          <a:p>
-            <a:pPr lvl="0"/>
-            <a:r>
-              <a:rPr/>
-              <a:t>Relevant transformations tested: log-transforming amount variables, supervised binning, standard/robust scaling and OHE encoding.</a:t>
-            </a:r>
-          </a:p>
-          <a:p>
-            <a:pPr lvl="0"/>
-            <a:r>
-              <a:rPr/>
-              <a:t>Main metric focus is on </a:t>
-            </a:r>
-            <a:r>
-              <a:rPr b="1"/>
-              <a:t>MAE</a:t>
-            </a:r>
-            <a:r>
-              <a:rPr/>
-              <a:t> and </a:t>
-            </a:r>
-            <a:r>
-              <a:rPr b="1"/>
-              <a:t>MAPE</a:t>
-            </a:r>
-            <a:r>
-              <a:rPr/>
-              <a:t>.</a:t>
-            </a:r>
-          </a:p>
-        </p:txBody>
-      </p:sp>
-    </p:spTree>
-  </p:cSld>
-  <p:timing>
-    <p:tnLst>
-      <p:par>
-        <p:cTn id="1" dur="indefinite" restart="never" nodeType="tmRoot">
-          <p:childTnLst>
-            <p:seq concurrent="1" nextAc="seek">
-              <p:cTn id="2" dur="indefinite" nodeType="mainSeq">
-                <p:childTnLst>
-                  <p:par>
-                    <p:cTn id="3" fill="hold">
-                      <p:stCondLst>
-                        <p:cond delay="indefinite"/>
-                      </p:stCondLst>
-                      <p:childTnLst>
-                        <p:par>
-                          <p:cTn id="4" fill="hold">
-                            <p:stCondLst>
-                              <p:cond delay="0"/>
-                            </p:stCondLst>
-                            <p:childTnLst>
-                              <p:par>
-                                <p:cTn id="5" presetID="1" presetClass="entr" presetSubtype="0" fill="hold" grpId="0" nodeType="clickEffect">
-                                  <p:stCondLst>
-                                    <p:cond delay="0"/>
-                                  </p:stCondLst>
-                                  <p:childTnLst>
-                                    <p:set>
-                                      <p:cBhvr>
-                                        <p:cTn id="6" dur="1" fill="hold">
-                                          <p:stCondLst>
-                                            <p:cond delay="0"/>
-                                          </p:stCondLst>
-                                        </p:cTn>
-                                        <p:tgtEl>
-                                          <p:spTgt spid="3">
-                                            <p:txEl>
-                                              <p:pRg st="1" end="1"/>
-                                            </p:txEl>
-                                          </p:spTgt>
-                                        </p:tgtEl>
-                                        <p:attrNameLst>
-                                          <p:attrName>style.visibility</p:attrName>
-                                        </p:attrNameLst>
-                                      </p:cBhvr>
-                                      <p:to>
-                                        <p:strVal val="visible"/>
-                                      </p:to>
-                                    </p:set>
-                                  </p:childTnLst>
-                                </p:cTn>
-                              </p:par>
-                            </p:childTnLst>
-                          </p:cTn>
-                        </p:par>
-                      </p:childTnLst>
-                    </p:cTn>
-                  </p:par>
-                  <p:par>
-                    <p:cTn id="7" fill="hold">
-                      <p:stCondLst>
-                        <p:cond delay="indefinite"/>
-                      </p:stCondLst>
-                      <p:childTnLst>
-                        <p:par>
-                          <p:cTn id="8" fill="hold">
-                            <p:stCondLst>
-                              <p:cond delay="0"/>
-                            </p:stCondLst>
-                            <p:childTnLst>
-                              <p:par>
-                                <p:cTn id="9" presetID="1" presetClass="entr" presetSubtype="0" fill="hold" grpId="0" nodeType="clickEffect">
-                                  <p:stCondLst>
-                                    <p:cond delay="0"/>
-                                  </p:stCondLst>
-                                  <p:childTnLst>
-                                    <p:set>
-                                      <p:cBhvr>
-                                        <p:cTn id="10" dur="1" fill="hold">
-                                          <p:stCondLst>
-                                            <p:cond delay="0"/>
-                                          </p:stCondLst>
-                                        </p:cTn>
-                                        <p:tgtEl>
-                                          <p:spTgt spid="3">
-                                            <p:txEl>
-                                              <p:pRg st="2" end="2"/>
-                                            </p:txEl>
-                                          </p:spTgt>
-                                        </p:tgtEl>
-                                        <p:attrNameLst>
-                                          <p:attrName>style.visibility</p:attrName>
-                                        </p:attrNameLst>
-                                      </p:cBhvr>
-                                      <p:to>
-                                        <p:strVal val="visible"/>
-                                      </p:to>
-                                    </p:set>
-                                  </p:childTnLst>
-                                </p:cTn>
-                              </p:par>
-                            </p:childTnLst>
-                          </p:cTn>
-                        </p:par>
-                      </p:childTnLst>
-                    </p:cTn>
-                  </p:par>
-                  <p:par>
-                    <p:cTn id="11" fill="hold">
-                      <p:stCondLst>
-                        <p:cond delay="indefinite"/>
-                      </p:stCondLst>
-                      <p:childTnLst>
-                        <p:par>
-                          <p:cTn id="12" fill="hold">
-                            <p:stCondLst>
-                              <p:cond delay="0"/>
-                            </p:stCondLst>
-                            <p:childTnLst>
-                              <p:par>
-                                <p:cTn id="13" presetID="1" presetClass="entr" presetSubtype="0" fill="hold" grpId="0" nodeType="clickEffect">
-                                  <p:stCondLst>
-                                    <p:cond delay="0"/>
-                                  </p:stCondLst>
-                                  <p:childTnLst>
-                                    <p:set>
-                                      <p:cBhvr>
-                                        <p:cTn id="14" dur="1" fill="hold">
-                                          <p:stCondLst>
-                                            <p:cond delay="0"/>
-                                          </p:stCondLst>
-                                        </p:cTn>
-                                        <p:tgtEl>
-                                          <p:spTgt spid="3">
-                                            <p:txEl>
-                                              <p:pRg st="3" end="3"/>
-                                            </p:txEl>
-                                          </p:spTgt>
-                                        </p:tgtEl>
-                                        <p:attrNameLst>
-                                          <p:attrName>style.visibility</p:attrName>
-                                        </p:attrNameLst>
-                                      </p:cBhvr>
-                                      <p:to>
-                                        <p:strVal val="visible"/>
-                                      </p:to>
-                                    </p:set>
-                                  </p:childTnLst>
-                                </p:cTn>
-                              </p:par>
-                            </p:childTnLst>
-                          </p:cTn>
-                        </p:par>
-                      </p:childTnLst>
-                    </p:cTn>
-                  </p:par>
-                  <p:par>
-                    <p:cTn id="15" fill="hold">
-                      <p:stCondLst>
-                        <p:cond delay="indefinite"/>
-                      </p:stCondLst>
-                      <p:childTnLst>
-                        <p:par>
-                          <p:cTn id="16" fill="hold">
-                            <p:stCondLst>
-                              <p:cond delay="0"/>
-                            </p:stCondLst>
-                            <p:childTnLst>
-                              <p:par>
-                                <p:cTn id="17" presetID="1" presetClass="entr" presetSubtype="0" fill="hold" grpId="0" nodeType="clickEffect">
-                                  <p:stCondLst>
-                                    <p:cond delay="0"/>
-                                  </p:stCondLst>
-                                  <p:childTnLst>
-                                    <p:set>
-                                      <p:cBhvr>
-                                        <p:cTn id="18" dur="1" fill="hold">
-                                          <p:stCondLst>
-                                            <p:cond delay="0"/>
-                                          </p:stCondLst>
-                                        </p:cTn>
-                                        <p:tgtEl>
-                                          <p:spTgt spid="3">
-                                            <p:txEl>
-                                              <p:pRg st="4" end="4"/>
-                                            </p:txEl>
-                                          </p:spTgt>
-                                        </p:tgtEl>
-                                        <p:attrNameLst>
-                                          <p:attrName>style.visibility</p:attrName>
-                                        </p:attrNameLst>
-                                      </p:cBhvr>
-                                      <p:to>
-                                        <p:strVal val="visible"/>
-                                      </p:to>
-                                    </p:set>
-                                  </p:childTnLst>
-                                </p:cTn>
-                              </p:par>
-                            </p:childTnLst>
-                          </p:cTn>
-                        </p:par>
-                      </p:childTnLst>
-                    </p:cTn>
-                  </p:par>
-                  <p:par>
-                    <p:cTn id="19" fill="hold">
-                      <p:stCondLst>
-                        <p:cond delay="indefinite"/>
-                      </p:stCondLst>
-                      <p:childTnLst>
-                        <p:par>
-                          <p:cTn id="20" fill="hold">
-                            <p:stCondLst>
-                              <p:cond delay="0"/>
-                            </p:stCondLst>
-                            <p:childTnLst>
-                              <p:par>
-                                <p:cTn id="21" presetID="1" presetClass="entr" presetSubtype="0" fill="hold" grpId="0" nodeType="clickEffect">
-                                  <p:stCondLst>
-                                    <p:cond delay="0"/>
-                                  </p:stCondLst>
-                                  <p:childTnLst>
-                                    <p:set>
-                                      <p:cBhvr>
-                                        <p:cTn id="22" dur="1" fill="hold">
-                                          <p:stCondLst>
-                                            <p:cond delay="0"/>
-                                          </p:stCondLst>
-                                        </p:cTn>
-                                        <p:tgtEl>
-                                          <p:spTgt spid="3">
-                                            <p:txEl>
-                                              <p:pRg st="5" end="5"/>
-                                            </p:txEl>
-                                          </p:spTgt>
-                                        </p:tgtEl>
-                                        <p:attrNameLst>
-                                          <p:attrName>style.visibility</p:attrName>
-                                        </p:attrNameLst>
-                                      </p:cBhvr>
-                                      <p:to>
-                                        <p:strVal val="visible"/>
-                                      </p:to>
-                                    </p:set>
-                                  </p:childTnLst>
-                                </p:cTn>
-                              </p:par>
-                            </p:childTnLst>
-                          </p:cTn>
-                        </p:par>
-                      </p:childTnLst>
-                    </p:cTn>
-                  </p:par>
-                  <p:par>
-                    <p:cTn id="23" fill="hold">
-                      <p:stCondLst>
-                        <p:cond delay="indefinite"/>
-                      </p:stCondLst>
-                      <p:childTnLst>
-                        <p:par>
-                          <p:cTn id="24" fill="hold">
-                            <p:stCondLst>
-                              <p:cond delay="0"/>
-                            </p:stCondLst>
-                            <p:childTnLst>
-                              <p:par>
-                                <p:cTn id="25" presetID="1" presetClass="entr" presetSubtype="0" fill="hold" grpId="0" nodeType="clickEffect">
-                                  <p:stCondLst>
-                                    <p:cond delay="0"/>
-                                  </p:stCondLst>
-                                  <p:childTnLst>
-                                    <p:set>
-                                      <p:cBhvr>
-                                        <p:cTn id="26" dur="1" fill="hold">
-                                          <p:stCondLst>
-                                            <p:cond delay="0"/>
-                                          </p:stCondLst>
-                                        </p:cTn>
-                                        <p:tgtEl>
-                                          <p:spTgt spid="4">
-                                            <p:txEl>
-                                              <p:pRg st="1" end="1"/>
-                                            </p:txEl>
-                                          </p:spTgt>
-                                        </p:tgtEl>
-                                        <p:attrNameLst>
-                                          <p:attrName>style.visibility</p:attrName>
-                                        </p:attrNameLst>
-                                      </p:cBhvr>
-                                      <p:to>
-                                        <p:strVal val="visible"/>
-                                      </p:to>
-                                    </p:set>
-                                  </p:childTnLst>
-                                </p:cTn>
-                              </p:par>
-                            </p:childTnLst>
-                          </p:cTn>
-                        </p:par>
-                      </p:childTnLst>
-                    </p:cTn>
-                  </p:par>
-                  <p:par>
-                    <p:cTn id="27" fill="hold">
-                      <p:stCondLst>
-                        <p:cond delay="indefinite"/>
-                      </p:stCondLst>
-                      <p:childTnLst>
-                        <p:par>
-                          <p:cTn id="28" fill="hold">
-                            <p:stCondLst>
-                              <p:cond delay="0"/>
-                            </p:stCondLst>
-                            <p:childTnLst>
-                              <p:par>
-                                <p:cTn id="29" presetID="1" presetClass="entr" presetSubtype="0" fill="hold" grpId="0" nodeType="clickEffect">
-                                  <p:stCondLst>
-                                    <p:cond delay="0"/>
-                                  </p:stCondLst>
-                                  <p:childTnLst>
-                                    <p:set>
-                                      <p:cBhvr>
-                                        <p:cTn id="30" dur="1" fill="hold">
-                                          <p:stCondLst>
-                                            <p:cond delay="0"/>
-                                          </p:stCondLst>
-                                        </p:cTn>
-                                        <p:tgtEl>
-                                          <p:spTgt spid="4">
-                                            <p:txEl>
-                                              <p:pRg st="2" end="2"/>
-                                            </p:txEl>
-                                          </p:spTgt>
-                                        </p:tgtEl>
-                                        <p:attrNameLst>
-                                          <p:attrName>style.visibility</p:attrName>
-                                        </p:attrNameLst>
-                                      </p:cBhvr>
-                                      <p:to>
-                                        <p:strVal val="visible"/>
-                                      </p:to>
-                                    </p:set>
-                                  </p:childTnLst>
-                                </p:cTn>
-                              </p:par>
-                            </p:childTnLst>
-                          </p:cTn>
-                        </p:par>
-                      </p:childTnLst>
-                    </p:cTn>
-                  </p:par>
-                  <p:par>
-                    <p:cTn id="31" fill="hold">
-                      <p:stCondLst>
-                        <p:cond delay="indefinite"/>
-                      </p:stCondLst>
-                      <p:childTnLst>
-                        <p:par>
-                          <p:cTn id="32" fill="hold">
-                            <p:stCondLst>
-                              <p:cond delay="0"/>
-                            </p:stCondLst>
-                            <p:childTnLst>
-                              <p:par>
-                                <p:cTn id="33" presetID="1" presetClass="entr" presetSubtype="0" fill="hold" grpId="0" nodeType="clickEffect">
-                                  <p:stCondLst>
-                                    <p:cond delay="0"/>
-                                  </p:stCondLst>
-                                  <p:childTnLst>
-                                    <p:set>
-                                      <p:cBhvr>
-                                        <p:cTn id="34" dur="1" fill="hold">
-                                          <p:stCondLst>
-                                            <p:cond delay="0"/>
-                                          </p:stCondLst>
-                                        </p:cTn>
-                                        <p:tgtEl>
-                                          <p:spTgt spid="4">
-                                            <p:txEl>
-                                              <p:pRg st="3" end="3"/>
-                                            </p:txEl>
-                                          </p:spTgt>
-                                        </p:tgtEl>
-                                        <p:attrNameLst>
-                                          <p:attrName>style.visibility</p:attrName>
-                                        </p:attrNameLst>
-                                      </p:cBhvr>
-                                      <p:to>
-                                        <p:strVal val="visible"/>
-                                      </p:to>
-                                    </p:set>
-                                  </p:childTnLst>
-                                </p:cTn>
-                              </p:par>
-                            </p:childTnLst>
-                          </p:cTn>
-                        </p:par>
-                      </p:childTnLst>
-                    </p:cTn>
-                  </p:par>
-                  <p:par>
-                    <p:cTn id="35" fill="hold">
-                      <p:stCondLst>
-                        <p:cond delay="indefinite"/>
-                      </p:stCondLst>
-                      <p:childTnLst>
-                        <p:par>
-                          <p:cTn id="36" fill="hold">
-                            <p:stCondLst>
-                              <p:cond delay="0"/>
-                            </p:stCondLst>
-                            <p:childTnLst>
-                              <p:par>
-                                <p:cTn id="37" presetID="1" presetClass="entr" presetSubtype="0" fill="hold" grpId="0" nodeType="clickEffect">
-                                  <p:stCondLst>
-                                    <p:cond delay="0"/>
-                                  </p:stCondLst>
-                                  <p:childTnLst>
-                                    <p:set>
-                                      <p:cBhvr>
-                                        <p:cTn id="38" dur="1" fill="hold">
-                                          <p:stCondLst>
-                                            <p:cond delay="0"/>
-                                          </p:stCondLst>
-                                        </p:cTn>
-                                        <p:tgtEl>
-                                          <p:spTgt spid="4">
-                                            <p:txEl>
-                                              <p:pRg st="4" end="4"/>
-                                            </p:txEl>
-                                          </p:spTgt>
-                                        </p:tgtEl>
-                                        <p:attrNameLst>
-                                          <p:attrName>style.visibility</p:attrName>
-                                        </p:attrNameLst>
-                                      </p:cBhvr>
-                                      <p:to>
-                                        <p:strVal val="visible"/>
-                                      </p:to>
-                                    </p:set>
-                                  </p:childTnLst>
-                                </p:cTn>
-                              </p:par>
-                            </p:childTnLst>
-                          </p:cTn>
-                        </p:par>
-                      </p:childTnLst>
-                    </p:cTn>
-                  </p:par>
-                  <p:par>
-                    <p:cTn id="39" fill="hold">
-                      <p:stCondLst>
-                        <p:cond delay="indefinite"/>
-                      </p:stCondLst>
-                      <p:childTnLst>
-                        <p:par>
-                          <p:cTn id="40" fill="hold">
-                            <p:stCondLst>
-                              <p:cond delay="0"/>
-                            </p:stCondLst>
-                            <p:childTnLst>
-                              <p:par>
-                                <p:cTn id="41" presetID="1" presetClass="entr" presetSubtype="0" fill="hold" grpId="0" nodeType="clickEffect">
-                                  <p:stCondLst>
-                                    <p:cond delay="0"/>
-                                  </p:stCondLst>
-                                  <p:childTnLst>
-                                    <p:set>
-                                      <p:cBhvr>
-                                        <p:cTn id="42" dur="1" fill="hold">
-                                          <p:stCondLst>
-                                            <p:cond delay="0"/>
-                                          </p:stCondLst>
-                                        </p:cTn>
-                                        <p:tgtEl>
-                                          <p:spTgt spid="4">
-                                            <p:txEl>
-                                              <p:pRg st="5" end="5"/>
-                                            </p:txEl>
-                                          </p:spTgt>
-                                        </p:tgtEl>
-                                        <p:attrNameLst>
-                                          <p:attrName>style.visibility</p:attrName>
-                                        </p:attrNameLst>
-                                      </p:cBhvr>
-                                      <p:to>
-                                        <p:strVal val="visible"/>
-                                      </p:to>
-                                    </p:set>
-                                  </p:childTnLst>
-                                </p:cTn>
-                              </p:par>
-                            </p:childTnLst>
-                          </p:cTn>
-                        </p:par>
-                      </p:childTnLst>
-                    </p:cTn>
-                  </p:par>
-                </p:childTnLst>
-              </p:cTn>
-              <p:prevCondLst>
-                <p:cond evt="onPrev" delay="0">
-                  <p:tgtEl>
-                    <p:sldTgt/>
-                  </p:tgtEl>
-                </p:cond>
-              </p:prevCondLst>
-              <p:nextCondLst>
-                <p:cond evt="onNext" delay="0">
-                  <p:tgtEl>
-                    <p:sldTgt/>
-                  </p:tgtEl>
-                </p:cond>
-              </p:nextCondLst>
-            </p:seq>
-          </p:childTnLst>
-        </p:cTn>
-      </p:par>
-    </p:tnLst>
-    <p:bldLst>
-      <p:bldP spid="3" grpId="0" uiExpand="1" build="p"/>
-      <p:bldP spid="4" grpId="0" uiExpand="1" build="p"/>
-    </p:bldLst>
-  </p:timing>
-</p:sld>
-</file>
-
-<file path=ppt/slides/slide16.xml><?xml version="1.0" encoding="utf-8"?>
-<p:sld xmlns:a="http://schemas.openxmlformats.org/drawingml/2006/main" xmlns:r="http://schemas.openxmlformats.org/officeDocument/2006/relationships" xmlns:p="http://schemas.openxmlformats.org/presentationml/2006/main">
-  <p:cSld>
-    <p:spTree>
-      <p:nvGrpSpPr>
-        <p:cNvPr id="1" name=""/>
-        <p:cNvGrpSpPr/>
-        <p:nvPr/>
-      </p:nvGrpSpPr>
-      <p:grpSpPr>
-        <a:xfrm>
-          <a:off x="0" y="0"/>
-          <a:ext cx="0" cy="0"/>
-          <a:chOff x="0" y="0"/>
-          <a:chExt cx="0" cy="0"/>
-        </a:xfrm>
-      </p:grpSpPr>
-      <p:sp>
-        <p:nvSpPr>
-          <p:cNvPr id="3" name="Content Placeholder 2"/>
-          <p:cNvSpPr>
-            <a:spLocks noGrp="1"/>
-          </p:cNvSpPr>
-          <p:nvPr>
-            <p:ph idx="1"/>
-          </p:nvPr>
-        </p:nvSpPr>
-        <p:spPr/>
-        <p:txBody>
-          <a:bodyPr/>
-          <a:lstStyle/>
-          <a:p>
-            <a:pPr lvl="0" indent="0" marL="0">
-              <a:buNone/>
-            </a:pPr>
-            <a:r>
-              <a:rPr/>
-              <a:t> </a:t>
-            </a:r>
-          </a:p>
-          <a:p>
-            <a:pPr lvl="0" indent="0" marL="0">
-              <a:buNone/>
-            </a:pPr>
-            <a:r>
-              <a:rPr b="1"/>
-              <a:t>Variables used for both models:</a:t>
-            </a:r>
-            <a:r>
-              <a:rPr/>
-              <a:t> client size, route to market, region, competitor type, supplies / supplies subgroup, prior client revenue, sales-stage change count, elapsed days, total days, total Siebel days, and stage-ratio variables.</a:t>
-            </a:r>
-          </a:p>
-        </p:txBody>
-      </p:sp>
-    </p:spTree>
-  </p:cSld>
-</p:sld>
-</file>
-
-<file path=ppt/slides/slide17.xml><?xml version="1.0" encoding="utf-8"?>
-<p:sld xmlns:a="http://schemas.openxmlformats.org/drawingml/2006/main" xmlns:r="http://schemas.openxmlformats.org/officeDocument/2006/relationships" xmlns:p="http://schemas.openxmlformats.org/presentationml/2006/main">
-  <p:cSld>
-    <p:spTree>
-      <p:nvGrpSpPr>
-        <p:cNvPr id="1" name=""/>
-        <p:cNvGrpSpPr/>
-        <p:nvPr/>
-      </p:nvGrpSpPr>
-      <p:grpSpPr>
-        <a:xfrm>
-          <a:off x="0" y="0"/>
-          <a:ext cx="0" cy="0"/>
-          <a:chOff x="0" y="0"/>
-          <a:chExt cx="0" cy="0"/>
-        </a:xfrm>
-      </p:grpSpPr>
-      <p:sp>
-        <p:nvSpPr>
-          <p:cNvPr id="2" name="Title 1"/>
-          <p:cNvSpPr>
-            <a:spLocks noGrp="1"/>
-          </p:cNvSpPr>
-          <p:nvPr>
-            <p:ph type="title"/>
-          </p:nvPr>
-        </p:nvSpPr>
-        <p:spPr/>
-        <p:txBody>
-          <a:bodyPr/>
-          <a:lstStyle/>
-          <a:p>
-            <a:pPr lvl="0" indent="0" marL="0">
-              <a:buNone/>
-            </a:pPr>
-            <a:r>
-              <a:rPr/>
-              <a:t>Data preparation and modelling sample</a:t>
+              <a:t>dynamic snapshot</a:t>
+            </a:r>
+            <a:r>
+              <a:rPr/>
+              <a:t> of the opportunity data, which captures the current state of the sales process and customer context</a:t>
             </a:r>
           </a:p>
         </p:txBody>
@@ -5593,7 +4786,7 @@
 </p:sld>
 </file>
 
-<file path=ppt/slides/slide18.xml><?xml version="1.0" encoding="utf-8"?>
+<file path=ppt/slides/slide16.xml><?xml version="1.0" encoding="utf-8"?>
 <p:sld xmlns:a="http://schemas.openxmlformats.org/drawingml/2006/main" xmlns:r="http://schemas.openxmlformats.org/officeDocument/2006/relationships" xmlns:p="http://schemas.openxmlformats.org/presentationml/2006/main">
   <p:cSld>
     <p:spTree>
@@ -5653,11 +4846,48 @@
             <a:pPr lvl="0"/>
             <a:r>
               <a:rPr/>
+              <a:t>Target: </a:t>
+            </a:r>
+            <a:r>
+              <a:rPr b="1"/>
+              <a:t>Opportunity Result</a:t>
+            </a:r>
+            <a:r>
+              <a:rPr/>
+              <a:t>.</a:t>
+            </a:r>
+          </a:p>
+          <a:p>
+            <a:pPr lvl="0"/>
+            <a:r>
+              <a:rPr/>
+              <a:t>Business use: </a:t>
+            </a:r>
+            <a:r>
+              <a:rPr b="1"/>
+              <a:t>process prioritization</a:t>
+            </a:r>
+            <a:r>
+              <a:rPr/>
+              <a:t> and ranking the pipeline by win propensity.</a:t>
+            </a:r>
+          </a:p>
+          <a:p>
+            <a:pPr lvl="0"/>
+            <a:r>
+              <a:rPr/>
+              <a:t>Specific transformations tested: log-transforming amount variables and supervised binning.</a:t>
+            </a:r>
+          </a:p>
+          <a:p>
+            <a:pPr lvl="0"/>
+            <a:r>
+              <a:rPr/>
               <a:t>Selected final logistic model: </a:t>
             </a:r>
             <a:r>
               <a:rPr b="1"/>
-              <a:t>Logit + binned one-hot encoding</a:t>
+              <a:t>Logistic Regression over supervisedly binned and one-hot encoded features</a:t>
             </a:r>
             <a:r>
               <a:rPr/>
@@ -5938,6 +5168,153 @@
                       </p:childTnLst>
                     </p:cTn>
                   </p:par>
+                  <p:par>
+                    <p:cTn id="7" fill="hold">
+                      <p:stCondLst>
+                        <p:cond delay="indefinite"/>
+                      </p:stCondLst>
+                      <p:childTnLst>
+                        <p:par>
+                          <p:cTn id="8" fill="hold">
+                            <p:stCondLst>
+                              <p:cond delay="0"/>
+                            </p:stCondLst>
+                            <p:childTnLst>
+                              <p:par>
+                                <p:cTn id="9" presetID="1" presetClass="entr" presetSubtype="0" fill="hold" grpId="0" nodeType="clickEffect">
+                                  <p:stCondLst>
+                                    <p:cond delay="0"/>
+                                  </p:stCondLst>
+                                  <p:childTnLst>
+                                    <p:set>
+                                      <p:cBhvr>
+                                        <p:cTn id="10" dur="1" fill="hold">
+                                          <p:stCondLst>
+                                            <p:cond delay="0"/>
+                                          </p:stCondLst>
+                                        </p:cTn>
+                                        <p:tgtEl>
+                                          <p:spTgt spid="3">
+                                            <p:txEl>
+                                              <p:pRg st="1" end="1"/>
+                                            </p:txEl>
+                                          </p:spTgt>
+                                        </p:tgtEl>
+                                        <p:attrNameLst>
+                                          <p:attrName>style.visibility</p:attrName>
+                                        </p:attrNameLst>
+                                      </p:cBhvr>
+                                      <p:to>
+                                        <p:strVal val="visible"/>
+                                      </p:to>
+                                    </p:set>
+                                  </p:childTnLst>
+                                </p:cTn>
+                              </p:par>
+                            </p:childTnLst>
+                          </p:cTn>
+                        </p:par>
+                      </p:childTnLst>
+                    </p:cTn>
+                  </p:par>
+                  <p:par>
+                    <p:cTn id="11" fill="hold">
+                      <p:stCondLst>
+                        <p:cond delay="indefinite"/>
+                      </p:stCondLst>
+                      <p:childTnLst>
+                        <p:par>
+                          <p:cTn id="12" fill="hold">
+                            <p:stCondLst>
+                              <p:cond delay="0"/>
+                            </p:stCondLst>
+                            <p:childTnLst>
+                              <p:par>
+                                <p:cTn id="13" presetID="1" presetClass="entr" presetSubtype="0" fill="hold" grpId="0" nodeType="clickEffect">
+                                  <p:stCondLst>
+                                    <p:cond delay="0"/>
+                                  </p:stCondLst>
+                                  <p:childTnLst>
+                                    <p:set>
+                                      <p:cBhvr>
+                                        <p:cTn id="14" dur="1" fill="hold">
+                                          <p:stCondLst>
+                                            <p:cond delay="0"/>
+                                          </p:stCondLst>
+                                        </p:cTn>
+                                        <p:tgtEl>
+                                          <p:spTgt spid="3">
+                                            <p:txEl>
+                                              <p:pRg st="2" end="2"/>
+                                            </p:txEl>
+                                          </p:spTgt>
+                                        </p:tgtEl>
+                                        <p:attrNameLst>
+                                          <p:attrName>style.visibility</p:attrName>
+                                        </p:attrNameLst>
+                                      </p:cBhvr>
+                                      <p:to>
+                                        <p:strVal val="visible"/>
+                                      </p:to>
+                                    </p:set>
+                                  </p:childTnLst>
+                                </p:cTn>
+                              </p:par>
+                            </p:childTnLst>
+                          </p:cTn>
+                        </p:par>
+                      </p:childTnLst>
+                    </p:cTn>
+                  </p:par>
+                  <p:par>
+                    <p:cTn id="15" fill="hold">
+                      <p:stCondLst>
+                        <p:cond delay="indefinite"/>
+                      </p:stCondLst>
+                      <p:childTnLst>
+                        <p:par>
+                          <p:cTn id="16" fill="hold">
+                            <p:stCondLst>
+                              <p:cond delay="0"/>
+                            </p:stCondLst>
+                            <p:childTnLst>
+                              <p:par>
+                                <p:cTn id="17" presetID="1" presetClass="entr" presetSubtype="0" fill="hold" grpId="0" nodeType="clickEffect">
+                                  <p:stCondLst>
+                                    <p:cond delay="0"/>
+                                  </p:stCondLst>
+                                  <p:childTnLst>
+                                    <p:set>
+                                      <p:cBhvr>
+                                        <p:cTn id="18" dur="1" fill="hold">
+                                          <p:stCondLst>
+                                            <p:cond delay="0"/>
+                                          </p:stCondLst>
+                                        </p:cTn>
+                                        <p:tgtEl>
+                                          <p:spTgt spid="3">
+                                            <p:txEl>
+                                              <p:pRg st="3" end="3"/>
+                                            </p:txEl>
+                                          </p:spTgt>
+                                        </p:tgtEl>
+                                        <p:attrNameLst>
+                                          <p:attrName>style.visibility</p:attrName>
+                                        </p:attrNameLst>
+                                      </p:cBhvr>
+                                      <p:to>
+                                        <p:strVal val="visible"/>
+                                      </p:to>
+                                    </p:set>
+                                  </p:childTnLst>
+                                </p:cTn>
+                              </p:par>
+                            </p:childTnLst>
+                          </p:cTn>
+                        </p:par>
+                      </p:childTnLst>
+                    </p:cTn>
+                  </p:par>
                 </p:childTnLst>
               </p:cTn>
               <p:prevCondLst>
@@ -5966,7 +5343,7 @@
 </p:sld>
 </file>
 
-<file path=ppt/slides/slide19.xml><?xml version="1.0" encoding="utf-8"?>
+<file path=ppt/slides/slide17.xml><?xml version="1.0" encoding="utf-8"?>
 <p:sld xmlns:a="http://schemas.openxmlformats.org/drawingml/2006/main" xmlns:r="http://schemas.openxmlformats.org/officeDocument/2006/relationships" xmlns:p="http://schemas.openxmlformats.org/presentationml/2006/main">
   <p:cSld>
     <p:spTree>
@@ -6026,15 +5403,69 @@
             <a:pPr lvl="0"/>
             <a:r>
               <a:rPr/>
+              <a:t>Target: </a:t>
+            </a:r>
+            <a:r>
+              <a:rPr b="1"/>
+              <a:t>Opportunity Amount USD</a:t>
+            </a:r>
+            <a:r>
+              <a:rPr/>
+              <a:t>.</a:t>
+            </a:r>
+          </a:p>
+          <a:p>
+            <a:pPr lvl="0"/>
+            <a:r>
+              <a:rPr/>
+              <a:t>Business use: </a:t>
+            </a:r>
+            <a:r>
+              <a:rPr b="1"/>
+              <a:t>sizing and aggregate forecasting</a:t>
+            </a:r>
+            <a:r>
+              <a:rPr/>
+              <a:t>.</a:t>
+            </a:r>
+          </a:p>
+          <a:p>
+            <a:pPr lvl="0"/>
+            <a:r>
+              <a:rPr/>
+              <a:t>Also uses the full dynamic snapshot, so amount estimates reflect both customer context and current process state.</a:t>
+            </a:r>
+          </a:p>
+          <a:p>
+            <a:pPr lvl="0"/>
+            <a:r>
+              <a:rPr/>
+              <a:t>Specific transformations tested: log-transforming amount variables and supervised binning.</a:t>
+            </a:r>
+          </a:p>
+          <a:p>
+            <a:pPr lvl="0"/>
+            <a:r>
+              <a:rPr/>
               <a:t>Selected final regression model: </a:t>
             </a:r>
             <a:r>
               <a:rPr b="1"/>
+              <a:t>Classic linear regression with standard scaled input</a:t>
+            </a:r>
+            <a:r>
+              <a:rPr/>
+              <a:t> (</a:t>
+            </a:r>
+            <a:r>
+              <a:rPr>
+                <a:latin typeface="Courier"/>
+              </a:rPr>
               <a:t>classic_linear_standard_scaler</a:t>
             </a:r>
             <a:r>
               <a:rPr/>
-              <a:t>.</a:t>
+              <a:t>).</a:t>
             </a:r>
           </a:p>
         </p:txBody>
@@ -6259,117 +5690,6 @@
           </a:graphicData>
         </a:graphic>
       </p:graphicFrame>
-      <p:sp>
-        <p:nvSpPr>
-          <p:cNvPr id="4" name="Content Placeholder 3"/>
-          <p:cNvSpPr>
-            <a:spLocks noGrp="1"/>
-          </p:cNvSpPr>
-          <p:nvPr>
-            <p:ph idx="2" sz="half"/>
-          </p:nvPr>
-        </p:nvSpPr>
-        <p:spPr/>
-        <p:txBody>
-          <a:bodyPr/>
-          <a:lstStyle/>
-          <a:p>
-            <a:pPr lvl="0"/>
-            <a:r>
-              <a:rPr/>
-              <a:t>For comparison, the </a:t>
-            </a:r>
-            <a:r>
-              <a:rPr b="1"/>
-              <a:t>best-MAE</a:t>
-            </a:r>
-            <a:r>
-              <a:rPr/>
-              <a:t> CV model was </a:t>
-            </a:r>
-            <a:r>
-              <a:rPr b="1">
-                <a:latin typeface="Courier"/>
-              </a:rPr>
-              <a:t>huber_robust_scaler</a:t>
-            </a:r>
-            <a:r>
-              <a:rPr/>
-              <a:t>, with </a:t>
-            </a:r>
-            <a:r>
-              <a:rPr b="1"/>
-              <a:t>67.3k USD MAE</a:t>
-            </a:r>
-            <a:r>
-              <a:rPr/>
-              <a:t> but a much lower </a:t>
-            </a:r>
-            <a:r>
-              <a:rPr b="1"/>
-              <a:t>R² of 0.066</a:t>
-            </a:r>
-            <a:r>
-              <a:rPr/>
-              <a:t>.</a:t>
-            </a:r>
-          </a:p>
-          <a:p>
-            <a:pPr lvl="0"/>
-            <a:r>
-              <a:rPr/>
-              <a:t>Largest direct coefficients are concentrated in specific transformed terms such as </a:t>
-            </a:r>
-            <a:r>
-              <a:rPr b="1"/>
-              <a:t>Route To Market: Telesales</a:t>
-            </a:r>
-            <a:r>
-              <a:rPr/>
-              <a:t>, </a:t>
-            </a:r>
-            <a:r>
-              <a:rPr b="1"/>
-              <a:t>Route To Market: Reseller</a:t>
-            </a:r>
-            <a:r>
-              <a:rPr/>
-              <a:t>, </a:t>
-            </a:r>
-            <a:r>
-              <a:rPr b="1"/>
-              <a:t>high prior-client revenue bands</a:t>
-            </a:r>
-            <a:r>
-              <a:rPr/>
-              <a:t>, </a:t>
-            </a:r>
-            <a:r>
-              <a:rPr b="1"/>
-              <a:t>missing competitor type</a:t>
-            </a:r>
-            <a:r>
-              <a:rPr/>
-              <a:t>, and </a:t>
-            </a:r>
-            <a:r>
-              <a:rPr b="1"/>
-              <a:t>Telecoverage</a:t>
-            </a:r>
-            <a:r>
-              <a:rPr/>
-              <a:t>.</a:t>
-            </a:r>
-          </a:p>
-          <a:p>
-            <a:pPr lvl="0"/>
-            <a:r>
-              <a:rPr/>
-              <a:t>This is usable for directional comparisons and aggregate forecasting, but it is not as decision-ready as a precise result model.</a:t>
-            </a:r>
-          </a:p>
-        </p:txBody>
-      </p:sp>
       <p:pic>
         <p:nvPicPr>
           <p:cNvPr descr="assets/regression_importance.png" id="0" name="Picture 1"/>
@@ -6388,768 +5708,6 @@
           <a:xfrm>
             <a:off x="4635500" y="1765300"/>
             <a:ext cx="4038600" cy="2692400"/>
-          </a:xfrm>
-          <a:prstGeom prst="rect">
-            <a:avLst/>
-          </a:prstGeom>
-          <a:noFill/>
-          <a:ln w="9525">
-            <a:noFill/>
-            <a:headEnd/>
-            <a:tailEnd/>
-          </a:ln>
-        </p:spPr>
-      </p:pic>
-    </p:spTree>
-  </p:cSld>
-  <p:timing>
-    <p:tnLst>
-      <p:par>
-        <p:cTn id="1" dur="indefinite" restart="never" nodeType="tmRoot">
-          <p:childTnLst>
-            <p:seq concurrent="1" nextAc="seek">
-              <p:cTn id="2" dur="indefinite" nodeType="mainSeq">
-                <p:childTnLst>
-                  <p:par>
-                    <p:cTn id="3" fill="hold">
-                      <p:stCondLst>
-                        <p:cond delay="indefinite"/>
-                      </p:stCondLst>
-                      <p:childTnLst>
-                        <p:par>
-                          <p:cTn id="4" fill="hold">
-                            <p:stCondLst>
-                              <p:cond delay="0"/>
-                            </p:stCondLst>
-                            <p:childTnLst>
-                              <p:par>
-                                <p:cTn id="5" presetID="1" presetClass="entr" presetSubtype="0" fill="hold" grpId="0" nodeType="clickEffect">
-                                  <p:stCondLst>
-                                    <p:cond delay="0"/>
-                                  </p:stCondLst>
-                                  <p:childTnLst>
-                                    <p:set>
-                                      <p:cBhvr>
-                                        <p:cTn id="6" dur="1" fill="hold">
-                                          <p:stCondLst>
-                                            <p:cond delay="0"/>
-                                          </p:stCondLst>
-                                        </p:cTn>
-                                        <p:tgtEl>
-                                          <p:spTgt spid="3">
-                                            <p:txEl>
-                                              <p:pRg st="0" end="0"/>
-                                            </p:txEl>
-                                          </p:spTgt>
-                                        </p:tgtEl>
-                                        <p:attrNameLst>
-                                          <p:attrName>style.visibility</p:attrName>
-                                        </p:attrNameLst>
-                                      </p:cBhvr>
-                                      <p:to>
-                                        <p:strVal val="visible"/>
-                                      </p:to>
-                                    </p:set>
-                                  </p:childTnLst>
-                                </p:cTn>
-                              </p:par>
-                            </p:childTnLst>
-                          </p:cTn>
-                        </p:par>
-                      </p:childTnLst>
-                    </p:cTn>
-                  </p:par>
-                  <p:par>
-                    <p:cTn id="7" fill="hold">
-                      <p:stCondLst>
-                        <p:cond delay="indefinite"/>
-                      </p:stCondLst>
-                      <p:childTnLst>
-                        <p:par>
-                          <p:cTn id="8" fill="hold">
-                            <p:stCondLst>
-                              <p:cond delay="0"/>
-                            </p:stCondLst>
-                            <p:childTnLst>
-                              <p:par>
-                                <p:cTn id="9" presetID="1" presetClass="entr" presetSubtype="0" fill="hold" grpId="0" nodeType="clickEffect">
-                                  <p:stCondLst>
-                                    <p:cond delay="0"/>
-                                  </p:stCondLst>
-                                  <p:childTnLst>
-                                    <p:set>
-                                      <p:cBhvr>
-                                        <p:cTn id="10" dur="1" fill="hold">
-                                          <p:stCondLst>
-                                            <p:cond delay="0"/>
-                                          </p:stCondLst>
-                                        </p:cTn>
-                                        <p:tgtEl>
-                                          <p:spTgt spid="4">
-                                            <p:txEl>
-                                              <p:pRg st="0" end="0"/>
-                                            </p:txEl>
-                                          </p:spTgt>
-                                        </p:tgtEl>
-                                        <p:attrNameLst>
-                                          <p:attrName>style.visibility</p:attrName>
-                                        </p:attrNameLst>
-                                      </p:cBhvr>
-                                      <p:to>
-                                        <p:strVal val="visible"/>
-                                      </p:to>
-                                    </p:set>
-                                  </p:childTnLst>
-                                </p:cTn>
-                              </p:par>
-                            </p:childTnLst>
-                          </p:cTn>
-                        </p:par>
-                      </p:childTnLst>
-                    </p:cTn>
-                  </p:par>
-                  <p:par>
-                    <p:cTn id="11" fill="hold">
-                      <p:stCondLst>
-                        <p:cond delay="indefinite"/>
-                      </p:stCondLst>
-                      <p:childTnLst>
-                        <p:par>
-                          <p:cTn id="12" fill="hold">
-                            <p:stCondLst>
-                              <p:cond delay="0"/>
-                            </p:stCondLst>
-                            <p:childTnLst>
-                              <p:par>
-                                <p:cTn id="13" presetID="1" presetClass="entr" presetSubtype="0" fill="hold" grpId="0" nodeType="clickEffect">
-                                  <p:stCondLst>
-                                    <p:cond delay="0"/>
-                                  </p:stCondLst>
-                                  <p:childTnLst>
-                                    <p:set>
-                                      <p:cBhvr>
-                                        <p:cTn id="14" dur="1" fill="hold">
-                                          <p:stCondLst>
-                                            <p:cond delay="0"/>
-                                          </p:stCondLst>
-                                        </p:cTn>
-                                        <p:tgtEl>
-                                          <p:spTgt spid="4">
-                                            <p:txEl>
-                                              <p:pRg st="1" end="1"/>
-                                            </p:txEl>
-                                          </p:spTgt>
-                                        </p:tgtEl>
-                                        <p:attrNameLst>
-                                          <p:attrName>style.visibility</p:attrName>
-                                        </p:attrNameLst>
-                                      </p:cBhvr>
-                                      <p:to>
-                                        <p:strVal val="visible"/>
-                                      </p:to>
-                                    </p:set>
-                                  </p:childTnLst>
-                                </p:cTn>
-                              </p:par>
-                            </p:childTnLst>
-                          </p:cTn>
-                        </p:par>
-                      </p:childTnLst>
-                    </p:cTn>
-                  </p:par>
-                  <p:par>
-                    <p:cTn id="15" fill="hold">
-                      <p:stCondLst>
-                        <p:cond delay="indefinite"/>
-                      </p:stCondLst>
-                      <p:childTnLst>
-                        <p:par>
-                          <p:cTn id="16" fill="hold">
-                            <p:stCondLst>
-                              <p:cond delay="0"/>
-                            </p:stCondLst>
-                            <p:childTnLst>
-                              <p:par>
-                                <p:cTn id="17" presetID="1" presetClass="entr" presetSubtype="0" fill="hold" grpId="0" nodeType="clickEffect">
-                                  <p:stCondLst>
-                                    <p:cond delay="0"/>
-                                  </p:stCondLst>
-                                  <p:childTnLst>
-                                    <p:set>
-                                      <p:cBhvr>
-                                        <p:cTn id="18" dur="1" fill="hold">
-                                          <p:stCondLst>
-                                            <p:cond delay="0"/>
-                                          </p:stCondLst>
-                                        </p:cTn>
-                                        <p:tgtEl>
-                                          <p:spTgt spid="4">
-                                            <p:txEl>
-                                              <p:pRg st="2" end="2"/>
-                                            </p:txEl>
-                                          </p:spTgt>
-                                        </p:tgtEl>
-                                        <p:attrNameLst>
-                                          <p:attrName>style.visibility</p:attrName>
-                                        </p:attrNameLst>
-                                      </p:cBhvr>
-                                      <p:to>
-                                        <p:strVal val="visible"/>
-                                      </p:to>
-                                    </p:set>
-                                  </p:childTnLst>
-                                </p:cTn>
-                              </p:par>
-                            </p:childTnLst>
-                          </p:cTn>
-                        </p:par>
-                      </p:childTnLst>
-                    </p:cTn>
-                  </p:par>
-                </p:childTnLst>
-              </p:cTn>
-              <p:prevCondLst>
-                <p:cond evt="onPrev" delay="0">
-                  <p:tgtEl>
-                    <p:sldTgt/>
-                  </p:tgtEl>
-                </p:cond>
-              </p:prevCondLst>
-              <p:nextCondLst>
-                <p:cond evt="onNext" delay="0">
-                  <p:tgtEl>
-                    <p:sldTgt/>
-                  </p:tgtEl>
-                </p:cond>
-              </p:nextCondLst>
-            </p:seq>
-          </p:childTnLst>
-        </p:cTn>
-      </p:par>
-    </p:tnLst>
-    <p:bldLst>
-      <p:bldP spid="3" grpId="0" uiExpand="1" build="p"/>
-      <p:bldP spid="4" grpId="0" uiExpand="1" build="p"/>
-    </p:bldLst>
-  </p:timing>
-</p:sld>
-</file>
-
-<file path=ppt/slides/slide2.xml><?xml version="1.0" encoding="utf-8"?>
-<p:sld xmlns:a="http://schemas.openxmlformats.org/drawingml/2006/main" xmlns:r="http://schemas.openxmlformats.org/officeDocument/2006/relationships" xmlns:p="http://schemas.openxmlformats.org/presentationml/2006/main">
-  <p:cSld>
-    <p:spTree>
-      <p:nvGrpSpPr>
-        <p:cNvPr id="1" name=""/>
-        <p:cNvGrpSpPr/>
-        <p:nvPr/>
-      </p:nvGrpSpPr>
-      <p:grpSpPr>
-        <a:xfrm>
-          <a:off x="0" y="0"/>
-          <a:ext cx="0" cy="0"/>
-          <a:chOff x="0" y="0"/>
-          <a:chExt cx="0" cy="0"/>
-        </a:xfrm>
-      </p:grpSpPr>
-      <p:sp>
-        <p:nvSpPr>
-          <p:cNvPr id="2" name="Title 1"/>
-          <p:cNvSpPr>
-            <a:spLocks noGrp="1"/>
-          </p:cNvSpPr>
-          <p:nvPr>
-            <p:ph type="title"/>
-          </p:nvPr>
-        </p:nvSpPr>
-        <p:spPr/>
-        <p:txBody>
-          <a:bodyPr/>
-          <a:lstStyle/>
-          <a:p>
-            <a:pPr lvl="0" indent="0" marL="0">
-              <a:buNone/>
-            </a:pPr>
-            <a:r>
-              <a:rPr/>
-              <a:t>Executive Summary</a:t>
-            </a:r>
-          </a:p>
-        </p:txBody>
-      </p:sp>
-      <p:sp>
-        <p:nvSpPr>
-          <p:cNvPr id="3" name="Content Placeholder 2"/>
-          <p:cNvSpPr>
-            <a:spLocks noGrp="1"/>
-          </p:cNvSpPr>
-          <p:nvPr>
-            <p:ph idx="1"/>
-          </p:nvPr>
-        </p:nvSpPr>
-        <p:spPr/>
-        <p:txBody>
-          <a:bodyPr/>
-          <a:lstStyle/>
-          <a:p>
-            <a:pPr lvl="0"/>
-            <a:r>
-              <a:rPr/>
-              <a:t>The current sales process for auto parts opportunities shows both data quality issues and structural inefficiencies (e.g., lack of prioritization, inaccurate forecasting), which are likely driving suboptimal performance.</a:t>
-            </a:r>
-          </a:p>
-          <a:p>
-            <a:pPr lvl="0"/>
-            <a:r>
-              <a:rPr/>
-              <a:t>We propose a classification model to predict win/loss and support prioritization, and a regression model to estimate deal size for sizing and forecasting.</a:t>
-            </a:r>
-          </a:p>
-          <a:p>
-            <a:pPr lvl="0"/>
-            <a:r>
-              <a:rPr/>
-              <a:t>The classification model performs well (AUC 0.88), enabling effective prioritization, while the regression model is weaker (R² 0.13; MAE ~$74K) but still useful for aggregate forecasting and directional insights.</a:t>
-            </a:r>
-          </a:p>
-          <a:p>
-            <a:pPr lvl="0"/>
-            <a:r>
-              <a:rPr/>
-              <a:t>We recommend piloting the classification model first, while using the regression model as a complementary tool for portfolio-level planning.</a:t>
-            </a:r>
-          </a:p>
-        </p:txBody>
-      </p:sp>
-    </p:spTree>
-  </p:cSld>
-  <p:timing>
-    <p:tnLst>
-      <p:par>
-        <p:cTn id="1" dur="indefinite" restart="never" nodeType="tmRoot">
-          <p:childTnLst>
-            <p:seq concurrent="1" nextAc="seek">
-              <p:cTn id="2" dur="indefinite" nodeType="mainSeq">
-                <p:childTnLst>
-                  <p:par>
-                    <p:cTn id="3" fill="hold">
-                      <p:stCondLst>
-                        <p:cond delay="indefinite"/>
-                      </p:stCondLst>
-                      <p:childTnLst>
-                        <p:par>
-                          <p:cTn id="4" fill="hold">
-                            <p:stCondLst>
-                              <p:cond delay="0"/>
-                            </p:stCondLst>
-                            <p:childTnLst>
-                              <p:par>
-                                <p:cTn id="5" presetID="1" presetClass="entr" presetSubtype="0" fill="hold" grpId="0" nodeType="clickEffect">
-                                  <p:stCondLst>
-                                    <p:cond delay="0"/>
-                                  </p:stCondLst>
-                                  <p:childTnLst>
-                                    <p:set>
-                                      <p:cBhvr>
-                                        <p:cTn id="6" dur="1" fill="hold">
-                                          <p:stCondLst>
-                                            <p:cond delay="0"/>
-                                          </p:stCondLst>
-                                        </p:cTn>
-                                        <p:tgtEl>
-                                          <p:spTgt spid="3">
-                                            <p:txEl>
-                                              <p:pRg st="0" end="0"/>
-                                            </p:txEl>
-                                          </p:spTgt>
-                                        </p:tgtEl>
-                                        <p:attrNameLst>
-                                          <p:attrName>style.visibility</p:attrName>
-                                        </p:attrNameLst>
-                                      </p:cBhvr>
-                                      <p:to>
-                                        <p:strVal val="visible"/>
-                                      </p:to>
-                                    </p:set>
-                                  </p:childTnLst>
-                                </p:cTn>
-                              </p:par>
-                            </p:childTnLst>
-                          </p:cTn>
-                        </p:par>
-                      </p:childTnLst>
-                    </p:cTn>
-                  </p:par>
-                  <p:par>
-                    <p:cTn id="7" fill="hold">
-                      <p:stCondLst>
-                        <p:cond delay="indefinite"/>
-                      </p:stCondLst>
-                      <p:childTnLst>
-                        <p:par>
-                          <p:cTn id="8" fill="hold">
-                            <p:stCondLst>
-                              <p:cond delay="0"/>
-                            </p:stCondLst>
-                            <p:childTnLst>
-                              <p:par>
-                                <p:cTn id="9" presetID="1" presetClass="entr" presetSubtype="0" fill="hold" grpId="0" nodeType="clickEffect">
-                                  <p:stCondLst>
-                                    <p:cond delay="0"/>
-                                  </p:stCondLst>
-                                  <p:childTnLst>
-                                    <p:set>
-                                      <p:cBhvr>
-                                        <p:cTn id="10" dur="1" fill="hold">
-                                          <p:stCondLst>
-                                            <p:cond delay="0"/>
-                                          </p:stCondLst>
-                                        </p:cTn>
-                                        <p:tgtEl>
-                                          <p:spTgt spid="3">
-                                            <p:txEl>
-                                              <p:pRg st="1" end="1"/>
-                                            </p:txEl>
-                                          </p:spTgt>
-                                        </p:tgtEl>
-                                        <p:attrNameLst>
-                                          <p:attrName>style.visibility</p:attrName>
-                                        </p:attrNameLst>
-                                      </p:cBhvr>
-                                      <p:to>
-                                        <p:strVal val="visible"/>
-                                      </p:to>
-                                    </p:set>
-                                  </p:childTnLst>
-                                </p:cTn>
-                              </p:par>
-                            </p:childTnLst>
-                          </p:cTn>
-                        </p:par>
-                      </p:childTnLst>
-                    </p:cTn>
-                  </p:par>
-                  <p:par>
-                    <p:cTn id="11" fill="hold">
-                      <p:stCondLst>
-                        <p:cond delay="indefinite"/>
-                      </p:stCondLst>
-                      <p:childTnLst>
-                        <p:par>
-                          <p:cTn id="12" fill="hold">
-                            <p:stCondLst>
-                              <p:cond delay="0"/>
-                            </p:stCondLst>
-                            <p:childTnLst>
-                              <p:par>
-                                <p:cTn id="13" presetID="1" presetClass="entr" presetSubtype="0" fill="hold" grpId="0" nodeType="clickEffect">
-                                  <p:stCondLst>
-                                    <p:cond delay="0"/>
-                                  </p:stCondLst>
-                                  <p:childTnLst>
-                                    <p:set>
-                                      <p:cBhvr>
-                                        <p:cTn id="14" dur="1" fill="hold">
-                                          <p:stCondLst>
-                                            <p:cond delay="0"/>
-                                          </p:stCondLst>
-                                        </p:cTn>
-                                        <p:tgtEl>
-                                          <p:spTgt spid="3">
-                                            <p:txEl>
-                                              <p:pRg st="2" end="2"/>
-                                            </p:txEl>
-                                          </p:spTgt>
-                                        </p:tgtEl>
-                                        <p:attrNameLst>
-                                          <p:attrName>style.visibility</p:attrName>
-                                        </p:attrNameLst>
-                                      </p:cBhvr>
-                                      <p:to>
-                                        <p:strVal val="visible"/>
-                                      </p:to>
-                                    </p:set>
-                                  </p:childTnLst>
-                                </p:cTn>
-                              </p:par>
-                            </p:childTnLst>
-                          </p:cTn>
-                        </p:par>
-                      </p:childTnLst>
-                    </p:cTn>
-                  </p:par>
-                  <p:par>
-                    <p:cTn id="15" fill="hold">
-                      <p:stCondLst>
-                        <p:cond delay="indefinite"/>
-                      </p:stCondLst>
-                      <p:childTnLst>
-                        <p:par>
-                          <p:cTn id="16" fill="hold">
-                            <p:stCondLst>
-                              <p:cond delay="0"/>
-                            </p:stCondLst>
-                            <p:childTnLst>
-                              <p:par>
-                                <p:cTn id="17" presetID="1" presetClass="entr" presetSubtype="0" fill="hold" grpId="0" nodeType="clickEffect">
-                                  <p:stCondLst>
-                                    <p:cond delay="0"/>
-                                  </p:stCondLst>
-                                  <p:childTnLst>
-                                    <p:set>
-                                      <p:cBhvr>
-                                        <p:cTn id="18" dur="1" fill="hold">
-                                          <p:stCondLst>
-                                            <p:cond delay="0"/>
-                                          </p:stCondLst>
-                                        </p:cTn>
-                                        <p:tgtEl>
-                                          <p:spTgt spid="3">
-                                            <p:txEl>
-                                              <p:pRg st="3" end="3"/>
-                                            </p:txEl>
-                                          </p:spTgt>
-                                        </p:tgtEl>
-                                        <p:attrNameLst>
-                                          <p:attrName>style.visibility</p:attrName>
-                                        </p:attrNameLst>
-                                      </p:cBhvr>
-                                      <p:to>
-                                        <p:strVal val="visible"/>
-                                      </p:to>
-                                    </p:set>
-                                  </p:childTnLst>
-                                </p:cTn>
-                              </p:par>
-                            </p:childTnLst>
-                          </p:cTn>
-                        </p:par>
-                      </p:childTnLst>
-                    </p:cTn>
-                  </p:par>
-                </p:childTnLst>
-              </p:cTn>
-              <p:prevCondLst>
-                <p:cond evt="onPrev" delay="0">
-                  <p:tgtEl>
-                    <p:sldTgt/>
-                  </p:tgtEl>
-                </p:cond>
-              </p:prevCondLst>
-              <p:nextCondLst>
-                <p:cond evt="onNext" delay="0">
-                  <p:tgtEl>
-                    <p:sldTgt/>
-                  </p:tgtEl>
-                </p:cond>
-              </p:nextCondLst>
-            </p:seq>
-          </p:childTnLst>
-        </p:cTn>
-      </p:par>
-    </p:tnLst>
-    <p:bldLst>
-      <p:bldP spid="3" grpId="0" uiExpand="1" build="p"/>
-    </p:bldLst>
-  </p:timing>
-</p:sld>
-</file>
-
-<file path=ppt/slides/slide20.xml><?xml version="1.0" encoding="utf-8"?>
-<p:sld xmlns:a="http://schemas.openxmlformats.org/drawingml/2006/main" xmlns:r="http://schemas.openxmlformats.org/officeDocument/2006/relationships" xmlns:p="http://schemas.openxmlformats.org/presentationml/2006/main">
-  <p:cSld>
-    <p:spTree>
-      <p:nvGrpSpPr>
-        <p:cNvPr id="1" name=""/>
-        <p:cNvGrpSpPr/>
-        <p:nvPr/>
-      </p:nvGrpSpPr>
-      <p:grpSpPr>
-        <a:xfrm>
-          <a:off x="0" y="0"/>
-          <a:ext cx="0" cy="0"/>
-          <a:chOff x="0" y="0"/>
-          <a:chExt cx="0" cy="0"/>
-        </a:xfrm>
-      </p:grpSpPr>
-      <p:sp>
-        <p:nvSpPr>
-          <p:cNvPr id="2" name="Title 1"/>
-          <p:cNvSpPr>
-            <a:spLocks noGrp="1"/>
-          </p:cNvSpPr>
-          <p:nvPr>
-            <p:ph type="title"/>
-          </p:nvPr>
-        </p:nvSpPr>
-        <p:spPr>
-          <a:xfrm>
-            <a:off x="722313" y="3305176"/>
-            <a:ext cx="7772400" cy="1021556"/>
-          </a:xfrm>
-        </p:spPr>
-        <p:txBody>
-          <a:bodyPr/>
-          <a:lstStyle/>
-          <a:p>
-            <a:pPr lvl="0" indent="0" marL="0">
-              <a:buNone/>
-            </a:pPr>
-            <a:r>
-              <a:rPr/>
-              <a:t>Application simulation</a:t>
-            </a:r>
-          </a:p>
-        </p:txBody>
-      </p:sp>
-    </p:spTree>
-  </p:cSld>
-</p:sld>
-</file>
-
-<file path=ppt/slides/slide21.xml><?xml version="1.0" encoding="utf-8"?>
-<p:sld xmlns:a="http://schemas.openxmlformats.org/drawingml/2006/main" xmlns:r="http://schemas.openxmlformats.org/officeDocument/2006/relationships" xmlns:p="http://schemas.openxmlformats.org/presentationml/2006/main">
-  <p:cSld>
-    <p:spTree>
-      <p:nvGrpSpPr>
-        <p:cNvPr id="1" name=""/>
-        <p:cNvGrpSpPr/>
-        <p:nvPr/>
-      </p:nvGrpSpPr>
-      <p:grpSpPr>
-        <a:xfrm>
-          <a:off x="0" y="0"/>
-          <a:ext cx="0" cy="0"/>
-          <a:chOff x="0" y="0"/>
-          <a:chExt cx="0" cy="0"/>
-        </a:xfrm>
-      </p:grpSpPr>
-      <p:sp>
-        <p:nvSpPr>
-          <p:cNvPr id="2" name="Title 1"/>
-          <p:cNvSpPr>
-            <a:spLocks noGrp="1"/>
-          </p:cNvSpPr>
-          <p:nvPr>
-            <p:ph type="title"/>
-          </p:nvPr>
-        </p:nvSpPr>
-        <p:spPr/>
-        <p:txBody>
-          <a:bodyPr/>
-          <a:lstStyle/>
-          <a:p>
-            <a:pPr lvl="0" indent="0" marL="0">
-              <a:buNone/>
-            </a:pPr>
-            <a:r>
-              <a:rPr/>
-              <a:t>Prioritization simulation: the top decile captures 35.2% of held-out test wins</a:t>
-            </a:r>
-          </a:p>
-        </p:txBody>
-      </p:sp>
-      <p:sp>
-        <p:nvSpPr>
-          <p:cNvPr id="3" name="Content Placeholder 2"/>
-          <p:cNvSpPr>
-            <a:spLocks noGrp="1"/>
-          </p:cNvSpPr>
-          <p:nvPr>
-            <p:ph idx="1" sz="half"/>
-          </p:nvPr>
-        </p:nvSpPr>
-        <p:spPr/>
-        <p:txBody>
-          <a:bodyPr/>
-          <a:lstStyle/>
-          <a:p>
-            <a:pPr lvl="0"/>
-            <a:r>
-              <a:rPr/>
-              <a:t>The model ranking is highly concentrated:</a:t>
-            </a:r>
-          </a:p>
-          <a:p>
-            <a:pPr lvl="1"/>
-            <a:r>
-              <a:rPr b="1"/>
-              <a:t>Top decile</a:t>
-            </a:r>
-            <a:r>
-              <a:rPr/>
-              <a:t> captures </a:t>
-            </a:r>
-            <a:r>
-              <a:rPr b="1"/>
-              <a:t>35.2%</a:t>
-            </a:r>
-            <a:r>
-              <a:rPr/>
-              <a:t> of all test wins.</a:t>
-            </a:r>
-          </a:p>
-          <a:p>
-            <a:pPr lvl="1"/>
-            <a:r>
-              <a:rPr b="1"/>
-              <a:t>Top two deciles</a:t>
-            </a:r>
-            <a:r>
-              <a:rPr/>
-              <a:t> capture </a:t>
-            </a:r>
-            <a:r>
-              <a:rPr b="1"/>
-              <a:t>64.8%</a:t>
-            </a:r>
-            <a:r>
-              <a:rPr/>
-              <a:t> of all test wins.</a:t>
-            </a:r>
-          </a:p>
-          <a:p>
-            <a:pPr lvl="0"/>
-            <a:r>
-              <a:rPr/>
-              <a:t>This supports a </a:t>
-            </a:r>
-            <a:r>
-              <a:rPr b="1"/>
-              <a:t>process-prioritization</a:t>
-            </a:r>
-            <a:r>
-              <a:rPr/>
-              <a:t> use case: sales effort can be focused on a much smaller slice of the pipeline.</a:t>
-            </a:r>
-          </a:p>
-          <a:p>
-            <a:pPr lvl="0"/>
-            <a:r>
-              <a:rPr/>
-              <a:t>This simulation is based on held-out test-set predictions from the final logistic model.</a:t>
-            </a:r>
-          </a:p>
-        </p:txBody>
-      </p:sp>
-      <p:pic>
-        <p:nvPicPr>
-          <p:cNvPr descr="assets/sim_prioritization.png" id="0" name="Picture 1"/>
-          <p:cNvPicPr>
-            <a:picLocks noGrp="1" noChangeAspect="1"/>
-          </p:cNvPicPr>
-          <p:nvPr/>
-        </p:nvPicPr>
-        <p:blipFill>
-          <a:blip r:embed="rId2"/>
-          <a:stretch>
-            <a:fillRect/>
-          </a:stretch>
-        </p:blipFill>
-        <p:spPr bwMode="auto">
-          <a:xfrm>
-            <a:off x="4648200" y="1638300"/>
-            <a:ext cx="4038600" cy="2489200"/>
           </a:xfrm>
           <a:prstGeom prst="rect">
             <a:avLst/>
@@ -7445,7 +6003,675 @@
 </p:sld>
 </file>
 
-<file path=ppt/slides/slide22.xml><?xml version="1.0" encoding="utf-8"?>
+<file path=ppt/slides/slide18.xml><?xml version="1.0" encoding="utf-8"?>
+<p:sld xmlns:a="http://schemas.openxmlformats.org/drawingml/2006/main" xmlns:r="http://schemas.openxmlformats.org/officeDocument/2006/relationships" xmlns:p="http://schemas.openxmlformats.org/presentationml/2006/main">
+  <p:cSld>
+    <p:spTree>
+      <p:nvGrpSpPr>
+        <p:cNvPr id="1" name=""/>
+        <p:cNvGrpSpPr/>
+        <p:nvPr/>
+      </p:nvGrpSpPr>
+      <p:grpSpPr>
+        <a:xfrm>
+          <a:off x="0" y="0"/>
+          <a:ext cx="0" cy="0"/>
+          <a:chOff x="0" y="0"/>
+          <a:chExt cx="0" cy="0"/>
+        </a:xfrm>
+      </p:grpSpPr>
+      <p:sp>
+        <p:nvSpPr>
+          <p:cNvPr id="2" name="Title 1"/>
+          <p:cNvSpPr>
+            <a:spLocks noGrp="1"/>
+          </p:cNvSpPr>
+          <p:nvPr>
+            <p:ph type="title"/>
+          </p:nvPr>
+        </p:nvSpPr>
+        <p:spPr>
+          <a:xfrm>
+            <a:off x="722313" y="3305176"/>
+            <a:ext cx="7772400" cy="1021556"/>
+          </a:xfrm>
+        </p:spPr>
+        <p:txBody>
+          <a:bodyPr/>
+          <a:lstStyle/>
+          <a:p>
+            <a:pPr lvl="0" indent="0" marL="0">
+              <a:buNone/>
+            </a:pPr>
+            <a:r>
+              <a:rPr/>
+              <a:t>Application simulation</a:t>
+            </a:r>
+          </a:p>
+        </p:txBody>
+      </p:sp>
+    </p:spTree>
+  </p:cSld>
+</p:sld>
+</file>
+
+<file path=ppt/slides/slide19.xml><?xml version="1.0" encoding="utf-8"?>
+<p:sld xmlns:a="http://schemas.openxmlformats.org/drawingml/2006/main" xmlns:r="http://schemas.openxmlformats.org/officeDocument/2006/relationships" xmlns:p="http://schemas.openxmlformats.org/presentationml/2006/main">
+  <p:cSld>
+    <p:spTree>
+      <p:nvGrpSpPr>
+        <p:cNvPr id="1" name=""/>
+        <p:cNvGrpSpPr/>
+        <p:nvPr/>
+      </p:nvGrpSpPr>
+      <p:grpSpPr>
+        <a:xfrm>
+          <a:off x="0" y="0"/>
+          <a:ext cx="0" cy="0"/>
+          <a:chOff x="0" y="0"/>
+          <a:chExt cx="0" cy="0"/>
+        </a:xfrm>
+      </p:grpSpPr>
+      <p:sp>
+        <p:nvSpPr>
+          <p:cNvPr id="2" name="Title 1"/>
+          <p:cNvSpPr>
+            <a:spLocks noGrp="1"/>
+          </p:cNvSpPr>
+          <p:nvPr>
+            <p:ph type="title"/>
+          </p:nvPr>
+        </p:nvSpPr>
+        <p:spPr/>
+        <p:txBody>
+          <a:bodyPr/>
+          <a:lstStyle/>
+          <a:p>
+            <a:pPr lvl="0" indent="0" marL="0">
+              <a:buNone/>
+            </a:pPr>
+            <a:r>
+              <a:rPr/>
+              <a:t>Prioritization simulation: the top propensity decile delivers 3.5× lift versus the average held-out win rate</a:t>
+            </a:r>
+          </a:p>
+        </p:txBody>
+      </p:sp>
+      <p:sp>
+        <p:nvSpPr>
+          <p:cNvPr id="3" name="Content Placeholder 2"/>
+          <p:cNvSpPr>
+            <a:spLocks noGrp="1"/>
+          </p:cNvSpPr>
+          <p:nvPr>
+            <p:ph idx="1" sz="half"/>
+          </p:nvPr>
+        </p:nvSpPr>
+        <p:spPr/>
+        <p:txBody>
+          <a:bodyPr/>
+          <a:lstStyle/>
+          <a:p>
+            <a:pPr lvl="0" indent="0" marL="0">
+              <a:buNone/>
+            </a:pPr>
+            <a:r>
+              <a:rPr/>
+              <a:t>The model ranking is highly concentrated:</a:t>
+            </a:r>
+          </a:p>
+          <a:p>
+            <a:pPr lvl="0"/>
+            <a:r>
+              <a:rPr b="1"/>
+              <a:t>Top decile</a:t>
+            </a:r>
+            <a:r>
+              <a:rPr/>
+              <a:t> runs at </a:t>
+            </a:r>
+            <a:r>
+              <a:rPr b="1"/>
+              <a:t>3.52× lift</a:t>
+            </a:r>
+            <a:r>
+              <a:rPr/>
+              <a:t>, with an observed win rate of </a:t>
+            </a:r>
+            <a:r>
+              <a:rPr b="1"/>
+              <a:t>80.0%</a:t>
+            </a:r>
+            <a:r>
+              <a:rPr/>
+              <a:t> versus </a:t>
+            </a:r>
+            <a:r>
+              <a:rPr b="1"/>
+              <a:t>22.7%</a:t>
+            </a:r>
+            <a:r>
+              <a:rPr/>
+              <a:t> overall.</a:t>
+            </a:r>
+          </a:p>
+          <a:p>
+            <a:pPr lvl="0"/>
+            <a:r>
+              <a:rPr b="1"/>
+              <a:t>Ninth decile</a:t>
+            </a:r>
+            <a:r>
+              <a:rPr/>
+              <a:t> is also well above average at </a:t>
+            </a:r>
+            <a:r>
+              <a:rPr b="1"/>
+              <a:t>2.38× lift</a:t>
+            </a:r>
+            <a:r>
+              <a:rPr/>
+              <a:t>, while deciles 1–6 remain below baseline.</a:t>
+            </a:r>
+          </a:p>
+          <a:p>
+            <a:pPr lvl="0" indent="0" marL="0">
+              <a:buNone/>
+            </a:pPr>
+            <a:r>
+              <a:rPr/>
+              <a:t>This simulation is based on held-out test-set predictions.</a:t>
+            </a:r>
+          </a:p>
+        </p:txBody>
+      </p:sp>
+      <p:pic>
+        <p:nvPicPr>
+          <p:cNvPr descr="assets/sim_prioritization.png" id="0" name="Picture 1"/>
+          <p:cNvPicPr>
+            <a:picLocks noGrp="1" noChangeAspect="1"/>
+          </p:cNvPicPr>
+          <p:nvPr/>
+        </p:nvPicPr>
+        <p:blipFill>
+          <a:blip r:embed="rId2"/>
+          <a:stretch>
+            <a:fillRect/>
+          </a:stretch>
+        </p:blipFill>
+        <p:spPr bwMode="auto">
+          <a:xfrm>
+            <a:off x="4648200" y="1638300"/>
+            <a:ext cx="4038600" cy="2501900"/>
+          </a:xfrm>
+          <a:prstGeom prst="rect">
+            <a:avLst/>
+          </a:prstGeom>
+          <a:noFill/>
+          <a:ln w="9525">
+            <a:noFill/>
+            <a:headEnd/>
+            <a:tailEnd/>
+          </a:ln>
+        </p:spPr>
+      </p:pic>
+    </p:spTree>
+  </p:cSld>
+  <p:timing>
+    <p:tnLst>
+      <p:par>
+        <p:cTn id="1" dur="indefinite" restart="never" nodeType="tmRoot">
+          <p:childTnLst>
+            <p:seq concurrent="1" nextAc="seek">
+              <p:cTn id="2" dur="indefinite" nodeType="mainSeq">
+                <p:childTnLst>
+                  <p:par>
+                    <p:cTn id="3" fill="hold">
+                      <p:stCondLst>
+                        <p:cond delay="indefinite"/>
+                      </p:stCondLst>
+                      <p:childTnLst>
+                        <p:par>
+                          <p:cTn id="4" fill="hold">
+                            <p:stCondLst>
+                              <p:cond delay="0"/>
+                            </p:stCondLst>
+                            <p:childTnLst>
+                              <p:par>
+                                <p:cTn id="5" presetID="1" presetClass="entr" presetSubtype="0" fill="hold" grpId="0" nodeType="clickEffect">
+                                  <p:stCondLst>
+                                    <p:cond delay="0"/>
+                                  </p:stCondLst>
+                                  <p:childTnLst>
+                                    <p:set>
+                                      <p:cBhvr>
+                                        <p:cTn id="6" dur="1" fill="hold">
+                                          <p:stCondLst>
+                                            <p:cond delay="0"/>
+                                          </p:stCondLst>
+                                        </p:cTn>
+                                        <p:tgtEl>
+                                          <p:spTgt spid="3">
+                                            <p:txEl>
+                                              <p:pRg st="1" end="1"/>
+                                            </p:txEl>
+                                          </p:spTgt>
+                                        </p:tgtEl>
+                                        <p:attrNameLst>
+                                          <p:attrName>style.visibility</p:attrName>
+                                        </p:attrNameLst>
+                                      </p:cBhvr>
+                                      <p:to>
+                                        <p:strVal val="visible"/>
+                                      </p:to>
+                                    </p:set>
+                                  </p:childTnLst>
+                                </p:cTn>
+                              </p:par>
+                            </p:childTnLst>
+                          </p:cTn>
+                        </p:par>
+                      </p:childTnLst>
+                    </p:cTn>
+                  </p:par>
+                  <p:par>
+                    <p:cTn id="7" fill="hold">
+                      <p:stCondLst>
+                        <p:cond delay="indefinite"/>
+                      </p:stCondLst>
+                      <p:childTnLst>
+                        <p:par>
+                          <p:cTn id="8" fill="hold">
+                            <p:stCondLst>
+                              <p:cond delay="0"/>
+                            </p:stCondLst>
+                            <p:childTnLst>
+                              <p:par>
+                                <p:cTn id="9" presetID="1" presetClass="entr" presetSubtype="0" fill="hold" grpId="0" nodeType="clickEffect">
+                                  <p:stCondLst>
+                                    <p:cond delay="0"/>
+                                  </p:stCondLst>
+                                  <p:childTnLst>
+                                    <p:set>
+                                      <p:cBhvr>
+                                        <p:cTn id="10" dur="1" fill="hold">
+                                          <p:stCondLst>
+                                            <p:cond delay="0"/>
+                                          </p:stCondLst>
+                                        </p:cTn>
+                                        <p:tgtEl>
+                                          <p:spTgt spid="3">
+                                            <p:txEl>
+                                              <p:pRg st="2" end="2"/>
+                                            </p:txEl>
+                                          </p:spTgt>
+                                        </p:tgtEl>
+                                        <p:attrNameLst>
+                                          <p:attrName>style.visibility</p:attrName>
+                                        </p:attrNameLst>
+                                      </p:cBhvr>
+                                      <p:to>
+                                        <p:strVal val="visible"/>
+                                      </p:to>
+                                    </p:set>
+                                  </p:childTnLst>
+                                </p:cTn>
+                              </p:par>
+                            </p:childTnLst>
+                          </p:cTn>
+                        </p:par>
+                      </p:childTnLst>
+                    </p:cTn>
+                  </p:par>
+                </p:childTnLst>
+              </p:cTn>
+              <p:prevCondLst>
+                <p:cond evt="onPrev" delay="0">
+                  <p:tgtEl>
+                    <p:sldTgt/>
+                  </p:tgtEl>
+                </p:cond>
+              </p:prevCondLst>
+              <p:nextCondLst>
+                <p:cond evt="onNext" delay="0">
+                  <p:tgtEl>
+                    <p:sldTgt/>
+                  </p:tgtEl>
+                </p:cond>
+              </p:nextCondLst>
+            </p:seq>
+          </p:childTnLst>
+        </p:cTn>
+      </p:par>
+    </p:tnLst>
+    <p:bldLst>
+      <p:bldP spid="3" grpId="0" uiExpand="1" build="p"/>
+    </p:bldLst>
+  </p:timing>
+</p:sld>
+</file>
+
+<file path=ppt/slides/slide2.xml><?xml version="1.0" encoding="utf-8"?>
+<p:sld xmlns:a="http://schemas.openxmlformats.org/drawingml/2006/main" xmlns:r="http://schemas.openxmlformats.org/officeDocument/2006/relationships" xmlns:p="http://schemas.openxmlformats.org/presentationml/2006/main">
+  <p:cSld>
+    <p:spTree>
+      <p:nvGrpSpPr>
+        <p:cNvPr id="1" name=""/>
+        <p:cNvGrpSpPr/>
+        <p:nvPr/>
+      </p:nvGrpSpPr>
+      <p:grpSpPr>
+        <a:xfrm>
+          <a:off x="0" y="0"/>
+          <a:ext cx="0" cy="0"/>
+          <a:chOff x="0" y="0"/>
+          <a:chExt cx="0" cy="0"/>
+        </a:xfrm>
+      </p:grpSpPr>
+      <p:sp>
+        <p:nvSpPr>
+          <p:cNvPr id="2" name="Title 1"/>
+          <p:cNvSpPr>
+            <a:spLocks noGrp="1"/>
+          </p:cNvSpPr>
+          <p:nvPr>
+            <p:ph type="title"/>
+          </p:nvPr>
+        </p:nvSpPr>
+        <p:spPr/>
+        <p:txBody>
+          <a:bodyPr/>
+          <a:lstStyle/>
+          <a:p>
+            <a:pPr lvl="0" indent="0" marL="0">
+              <a:buNone/>
+            </a:pPr>
+            <a:r>
+              <a:rPr/>
+              <a:t>Executive Summary</a:t>
+            </a:r>
+          </a:p>
+        </p:txBody>
+      </p:sp>
+      <p:sp>
+        <p:nvSpPr>
+          <p:cNvPr id="3" name="Content Placeholder 2"/>
+          <p:cNvSpPr>
+            <a:spLocks noGrp="1"/>
+          </p:cNvSpPr>
+          <p:nvPr>
+            <p:ph idx="1"/>
+          </p:nvPr>
+        </p:nvSpPr>
+        <p:spPr/>
+        <p:txBody>
+          <a:bodyPr/>
+          <a:lstStyle/>
+          <a:p>
+            <a:pPr lvl="0"/>
+            <a:r>
+              <a:rPr/>
+              <a:t>The current sales process for auto parts opportunities shows both opportunities in structural inefficiencies and also data quality issues (e.g., data input issues, lack of prioritization, inaccurate forecasting), which are driving suboptimal sales force performance.</a:t>
+            </a:r>
+          </a:p>
+          <a:p>
+            <a:pPr lvl="0"/>
+            <a:r>
+              <a:rPr/>
+              <a:t>For dealing with the structural inefficiencies, we propose a classification model to predict win/loss and support opportunity prioritization, and a regression model to estimate deal size for a priori sizing and forecasting.</a:t>
+            </a:r>
+          </a:p>
+          <a:p>
+            <a:pPr lvl="0"/>
+            <a:r>
+              <a:rPr/>
+              <a:t>The classification model performs well (AUROC 0.88), enabling effective prioritization, while the regression model is weaker (Mean Absolute Error ~$74K; R² 0.13) but still useful for aggregate forecasting and directional insights.</a:t>
+            </a:r>
+          </a:p>
+          <a:p>
+            <a:pPr lvl="0"/>
+            <a:r>
+              <a:rPr/>
+              <a:t>We recommend piloting the classification model first, while using the regression model as a complementary tool for portfolio-level planning.</a:t>
+            </a:r>
+          </a:p>
+        </p:txBody>
+      </p:sp>
+    </p:spTree>
+  </p:cSld>
+  <p:timing>
+    <p:tnLst>
+      <p:par>
+        <p:cTn id="1" dur="indefinite" restart="never" nodeType="tmRoot">
+          <p:childTnLst>
+            <p:seq concurrent="1" nextAc="seek">
+              <p:cTn id="2" dur="indefinite" nodeType="mainSeq">
+                <p:childTnLst>
+                  <p:par>
+                    <p:cTn id="3" fill="hold">
+                      <p:stCondLst>
+                        <p:cond delay="indefinite"/>
+                      </p:stCondLst>
+                      <p:childTnLst>
+                        <p:par>
+                          <p:cTn id="4" fill="hold">
+                            <p:stCondLst>
+                              <p:cond delay="0"/>
+                            </p:stCondLst>
+                            <p:childTnLst>
+                              <p:par>
+                                <p:cTn id="5" presetID="1" presetClass="entr" presetSubtype="0" fill="hold" grpId="0" nodeType="clickEffect">
+                                  <p:stCondLst>
+                                    <p:cond delay="0"/>
+                                  </p:stCondLst>
+                                  <p:childTnLst>
+                                    <p:set>
+                                      <p:cBhvr>
+                                        <p:cTn id="6" dur="1" fill="hold">
+                                          <p:stCondLst>
+                                            <p:cond delay="0"/>
+                                          </p:stCondLst>
+                                        </p:cTn>
+                                        <p:tgtEl>
+                                          <p:spTgt spid="3">
+                                            <p:txEl>
+                                              <p:pRg st="0" end="0"/>
+                                            </p:txEl>
+                                          </p:spTgt>
+                                        </p:tgtEl>
+                                        <p:attrNameLst>
+                                          <p:attrName>style.visibility</p:attrName>
+                                        </p:attrNameLst>
+                                      </p:cBhvr>
+                                      <p:to>
+                                        <p:strVal val="visible"/>
+                                      </p:to>
+                                    </p:set>
+                                  </p:childTnLst>
+                                </p:cTn>
+                              </p:par>
+                            </p:childTnLst>
+                          </p:cTn>
+                        </p:par>
+                      </p:childTnLst>
+                    </p:cTn>
+                  </p:par>
+                  <p:par>
+                    <p:cTn id="7" fill="hold">
+                      <p:stCondLst>
+                        <p:cond delay="indefinite"/>
+                      </p:stCondLst>
+                      <p:childTnLst>
+                        <p:par>
+                          <p:cTn id="8" fill="hold">
+                            <p:stCondLst>
+                              <p:cond delay="0"/>
+                            </p:stCondLst>
+                            <p:childTnLst>
+                              <p:par>
+                                <p:cTn id="9" presetID="1" presetClass="entr" presetSubtype="0" fill="hold" grpId="0" nodeType="clickEffect">
+                                  <p:stCondLst>
+                                    <p:cond delay="0"/>
+                                  </p:stCondLst>
+                                  <p:childTnLst>
+                                    <p:set>
+                                      <p:cBhvr>
+                                        <p:cTn id="10" dur="1" fill="hold">
+                                          <p:stCondLst>
+                                            <p:cond delay="0"/>
+                                          </p:stCondLst>
+                                        </p:cTn>
+                                        <p:tgtEl>
+                                          <p:spTgt spid="3">
+                                            <p:txEl>
+                                              <p:pRg st="1" end="1"/>
+                                            </p:txEl>
+                                          </p:spTgt>
+                                        </p:tgtEl>
+                                        <p:attrNameLst>
+                                          <p:attrName>style.visibility</p:attrName>
+                                        </p:attrNameLst>
+                                      </p:cBhvr>
+                                      <p:to>
+                                        <p:strVal val="visible"/>
+                                      </p:to>
+                                    </p:set>
+                                  </p:childTnLst>
+                                </p:cTn>
+                              </p:par>
+                            </p:childTnLst>
+                          </p:cTn>
+                        </p:par>
+                      </p:childTnLst>
+                    </p:cTn>
+                  </p:par>
+                  <p:par>
+                    <p:cTn id="11" fill="hold">
+                      <p:stCondLst>
+                        <p:cond delay="indefinite"/>
+                      </p:stCondLst>
+                      <p:childTnLst>
+                        <p:par>
+                          <p:cTn id="12" fill="hold">
+                            <p:stCondLst>
+                              <p:cond delay="0"/>
+                            </p:stCondLst>
+                            <p:childTnLst>
+                              <p:par>
+                                <p:cTn id="13" presetID="1" presetClass="entr" presetSubtype="0" fill="hold" grpId="0" nodeType="clickEffect">
+                                  <p:stCondLst>
+                                    <p:cond delay="0"/>
+                                  </p:stCondLst>
+                                  <p:childTnLst>
+                                    <p:set>
+                                      <p:cBhvr>
+                                        <p:cTn id="14" dur="1" fill="hold">
+                                          <p:stCondLst>
+                                            <p:cond delay="0"/>
+                                          </p:stCondLst>
+                                        </p:cTn>
+                                        <p:tgtEl>
+                                          <p:spTgt spid="3">
+                                            <p:txEl>
+                                              <p:pRg st="2" end="2"/>
+                                            </p:txEl>
+                                          </p:spTgt>
+                                        </p:tgtEl>
+                                        <p:attrNameLst>
+                                          <p:attrName>style.visibility</p:attrName>
+                                        </p:attrNameLst>
+                                      </p:cBhvr>
+                                      <p:to>
+                                        <p:strVal val="visible"/>
+                                      </p:to>
+                                    </p:set>
+                                  </p:childTnLst>
+                                </p:cTn>
+                              </p:par>
+                            </p:childTnLst>
+                          </p:cTn>
+                        </p:par>
+                      </p:childTnLst>
+                    </p:cTn>
+                  </p:par>
+                  <p:par>
+                    <p:cTn id="15" fill="hold">
+                      <p:stCondLst>
+                        <p:cond delay="indefinite"/>
+                      </p:stCondLst>
+                      <p:childTnLst>
+                        <p:par>
+                          <p:cTn id="16" fill="hold">
+                            <p:stCondLst>
+                              <p:cond delay="0"/>
+                            </p:stCondLst>
+                            <p:childTnLst>
+                              <p:par>
+                                <p:cTn id="17" presetID="1" presetClass="entr" presetSubtype="0" fill="hold" grpId="0" nodeType="clickEffect">
+                                  <p:stCondLst>
+                                    <p:cond delay="0"/>
+                                  </p:stCondLst>
+                                  <p:childTnLst>
+                                    <p:set>
+                                      <p:cBhvr>
+                                        <p:cTn id="18" dur="1" fill="hold">
+                                          <p:stCondLst>
+                                            <p:cond delay="0"/>
+                                          </p:stCondLst>
+                                        </p:cTn>
+                                        <p:tgtEl>
+                                          <p:spTgt spid="3">
+                                            <p:txEl>
+                                              <p:pRg st="3" end="3"/>
+                                            </p:txEl>
+                                          </p:spTgt>
+                                        </p:tgtEl>
+                                        <p:attrNameLst>
+                                          <p:attrName>style.visibility</p:attrName>
+                                        </p:attrNameLst>
+                                      </p:cBhvr>
+                                      <p:to>
+                                        <p:strVal val="visible"/>
+                                      </p:to>
+                                    </p:set>
+                                  </p:childTnLst>
+                                </p:cTn>
+                              </p:par>
+                            </p:childTnLst>
+                          </p:cTn>
+                        </p:par>
+                      </p:childTnLst>
+                    </p:cTn>
+                  </p:par>
+                </p:childTnLst>
+              </p:cTn>
+              <p:prevCondLst>
+                <p:cond evt="onPrev" delay="0">
+                  <p:tgtEl>
+                    <p:sldTgt/>
+                  </p:tgtEl>
+                </p:cond>
+              </p:prevCondLst>
+              <p:nextCondLst>
+                <p:cond evt="onNext" delay="0">
+                  <p:tgtEl>
+                    <p:sldTgt/>
+                  </p:tgtEl>
+                </p:cond>
+              </p:nextCondLst>
+            </p:seq>
+          </p:childTnLst>
+        </p:cTn>
+      </p:par>
+    </p:tnLst>
+    <p:bldLst>
+      <p:bldP spid="3" grpId="0" uiExpand="1" build="p"/>
+    </p:bldLst>
+  </p:timing>
+</p:sld>
+</file>
+
+<file path=ppt/slides/slide20.xml><?xml version="1.0" encoding="utf-8"?>
 <p:sld xmlns:a="http://schemas.openxmlformats.org/drawingml/2006/main" xmlns:r="http://schemas.openxmlformats.org/officeDocument/2006/relationships" xmlns:p="http://schemas.openxmlformats.org/presentationml/2006/main">
   <p:cSld>
     <p:spTree>
@@ -7589,6 +6815,403 @@
             <a:r>
               <a:rPr/>
               <a:t>, not at the individual-opportunity level.</a:t>
+            </a:r>
+          </a:p>
+        </p:txBody>
+      </p:sp>
+    </p:spTree>
+  </p:cSld>
+  <p:timing>
+    <p:tnLst>
+      <p:par>
+        <p:cTn id="1" dur="indefinite" restart="never" nodeType="tmRoot">
+          <p:childTnLst>
+            <p:seq concurrent="1" nextAc="seek">
+              <p:cTn id="2" dur="indefinite" nodeType="mainSeq">
+                <p:childTnLst>
+                  <p:par>
+                    <p:cTn id="3" fill="hold">
+                      <p:stCondLst>
+                        <p:cond delay="indefinite"/>
+                      </p:stCondLst>
+                      <p:childTnLst>
+                        <p:par>
+                          <p:cTn id="4" fill="hold">
+                            <p:stCondLst>
+                              <p:cond delay="0"/>
+                            </p:stCondLst>
+                            <p:childTnLst>
+                              <p:par>
+                                <p:cTn id="5" presetID="1" presetClass="entr" presetSubtype="0" fill="hold" grpId="0" nodeType="clickEffect">
+                                  <p:stCondLst>
+                                    <p:cond delay="0"/>
+                                  </p:stCondLst>
+                                  <p:childTnLst>
+                                    <p:set>
+                                      <p:cBhvr>
+                                        <p:cTn id="6" dur="1" fill="hold">
+                                          <p:stCondLst>
+                                            <p:cond delay="0"/>
+                                          </p:stCondLst>
+                                        </p:cTn>
+                                        <p:tgtEl>
+                                          <p:spTgt spid="4">
+                                            <p:txEl>
+                                              <p:pRg st="0" end="0"/>
+                                            </p:txEl>
+                                          </p:spTgt>
+                                        </p:tgtEl>
+                                        <p:attrNameLst>
+                                          <p:attrName>style.visibility</p:attrName>
+                                        </p:attrNameLst>
+                                      </p:cBhvr>
+                                      <p:to>
+                                        <p:strVal val="visible"/>
+                                      </p:to>
+                                    </p:set>
+                                  </p:childTnLst>
+                                </p:cTn>
+                              </p:par>
+                            </p:childTnLst>
+                          </p:cTn>
+                        </p:par>
+                      </p:childTnLst>
+                    </p:cTn>
+                  </p:par>
+                  <p:par>
+                    <p:cTn id="7" fill="hold">
+                      <p:stCondLst>
+                        <p:cond delay="indefinite"/>
+                      </p:stCondLst>
+                      <p:childTnLst>
+                        <p:par>
+                          <p:cTn id="8" fill="hold">
+                            <p:stCondLst>
+                              <p:cond delay="0"/>
+                            </p:stCondLst>
+                            <p:childTnLst>
+                              <p:par>
+                                <p:cTn id="9" presetID="1" presetClass="entr" presetSubtype="0" fill="hold" grpId="0" nodeType="clickEffect">
+                                  <p:stCondLst>
+                                    <p:cond delay="0"/>
+                                  </p:stCondLst>
+                                  <p:childTnLst>
+                                    <p:set>
+                                      <p:cBhvr>
+                                        <p:cTn id="10" dur="1" fill="hold">
+                                          <p:stCondLst>
+                                            <p:cond delay="0"/>
+                                          </p:stCondLst>
+                                        </p:cTn>
+                                        <p:tgtEl>
+                                          <p:spTgt spid="4">
+                                            <p:txEl>
+                                              <p:pRg st="1" end="1"/>
+                                            </p:txEl>
+                                          </p:spTgt>
+                                        </p:tgtEl>
+                                        <p:attrNameLst>
+                                          <p:attrName>style.visibility</p:attrName>
+                                        </p:attrNameLst>
+                                      </p:cBhvr>
+                                      <p:to>
+                                        <p:strVal val="visible"/>
+                                      </p:to>
+                                    </p:set>
+                                  </p:childTnLst>
+                                </p:cTn>
+                              </p:par>
+                            </p:childTnLst>
+                          </p:cTn>
+                        </p:par>
+                      </p:childTnLst>
+                    </p:cTn>
+                  </p:par>
+                  <p:par>
+                    <p:cTn id="11" fill="hold">
+                      <p:stCondLst>
+                        <p:cond delay="indefinite"/>
+                      </p:stCondLst>
+                      <p:childTnLst>
+                        <p:par>
+                          <p:cTn id="12" fill="hold">
+                            <p:stCondLst>
+                              <p:cond delay="0"/>
+                            </p:stCondLst>
+                            <p:childTnLst>
+                              <p:par>
+                                <p:cTn id="13" presetID="1" presetClass="entr" presetSubtype="0" fill="hold" grpId="0" nodeType="clickEffect">
+                                  <p:stCondLst>
+                                    <p:cond delay="0"/>
+                                  </p:stCondLst>
+                                  <p:childTnLst>
+                                    <p:set>
+                                      <p:cBhvr>
+                                        <p:cTn id="14" dur="1" fill="hold">
+                                          <p:stCondLst>
+                                            <p:cond delay="0"/>
+                                          </p:stCondLst>
+                                        </p:cTn>
+                                        <p:tgtEl>
+                                          <p:spTgt spid="4">
+                                            <p:txEl>
+                                              <p:pRg st="2" end="2"/>
+                                            </p:txEl>
+                                          </p:spTgt>
+                                        </p:tgtEl>
+                                        <p:attrNameLst>
+                                          <p:attrName>style.visibility</p:attrName>
+                                        </p:attrNameLst>
+                                      </p:cBhvr>
+                                      <p:to>
+                                        <p:strVal val="visible"/>
+                                      </p:to>
+                                    </p:set>
+                                  </p:childTnLst>
+                                </p:cTn>
+                              </p:par>
+                            </p:childTnLst>
+                          </p:cTn>
+                        </p:par>
+                      </p:childTnLst>
+                    </p:cTn>
+                  </p:par>
+                  <p:par>
+                    <p:cTn id="15" fill="hold">
+                      <p:stCondLst>
+                        <p:cond delay="indefinite"/>
+                      </p:stCondLst>
+                      <p:childTnLst>
+                        <p:par>
+                          <p:cTn id="16" fill="hold">
+                            <p:stCondLst>
+                              <p:cond delay="0"/>
+                            </p:stCondLst>
+                            <p:childTnLst>
+                              <p:par>
+                                <p:cTn id="17" presetID="1" presetClass="entr" presetSubtype="0" fill="hold" grpId="0" nodeType="clickEffect">
+                                  <p:stCondLst>
+                                    <p:cond delay="0"/>
+                                  </p:stCondLst>
+                                  <p:childTnLst>
+                                    <p:set>
+                                      <p:cBhvr>
+                                        <p:cTn id="18" dur="1" fill="hold">
+                                          <p:stCondLst>
+                                            <p:cond delay="0"/>
+                                          </p:stCondLst>
+                                        </p:cTn>
+                                        <p:tgtEl>
+                                          <p:spTgt spid="4">
+                                            <p:txEl>
+                                              <p:pRg st="3" end="3"/>
+                                            </p:txEl>
+                                          </p:spTgt>
+                                        </p:tgtEl>
+                                        <p:attrNameLst>
+                                          <p:attrName>style.visibility</p:attrName>
+                                        </p:attrNameLst>
+                                      </p:cBhvr>
+                                      <p:to>
+                                        <p:strVal val="visible"/>
+                                      </p:to>
+                                    </p:set>
+                                  </p:childTnLst>
+                                </p:cTn>
+                              </p:par>
+                            </p:childTnLst>
+                          </p:cTn>
+                        </p:par>
+                      </p:childTnLst>
+                    </p:cTn>
+                  </p:par>
+                </p:childTnLst>
+              </p:cTn>
+              <p:prevCondLst>
+                <p:cond evt="onPrev" delay="0">
+                  <p:tgtEl>
+                    <p:sldTgt/>
+                  </p:tgtEl>
+                </p:cond>
+              </p:prevCondLst>
+              <p:nextCondLst>
+                <p:cond evt="onNext" delay="0">
+                  <p:tgtEl>
+                    <p:sldTgt/>
+                  </p:tgtEl>
+                </p:cond>
+              </p:nextCondLst>
+            </p:seq>
+          </p:childTnLst>
+        </p:cTn>
+      </p:par>
+    </p:tnLst>
+    <p:bldLst>
+      <p:bldP spid="4" grpId="0" uiExpand="1" build="p"/>
+    </p:bldLst>
+  </p:timing>
+</p:sld>
+</file>
+
+<file path=ppt/slides/slide21.xml><?xml version="1.0" encoding="utf-8"?>
+<p:sld xmlns:a="http://schemas.openxmlformats.org/drawingml/2006/main" xmlns:r="http://schemas.openxmlformats.org/officeDocument/2006/relationships" xmlns:p="http://schemas.openxmlformats.org/presentationml/2006/main">
+  <p:cSld>
+    <p:spTree>
+      <p:nvGrpSpPr>
+        <p:cNvPr id="1" name=""/>
+        <p:cNvGrpSpPr/>
+        <p:nvPr/>
+      </p:nvGrpSpPr>
+      <p:grpSpPr>
+        <a:xfrm>
+          <a:off x="0" y="0"/>
+          <a:ext cx="0" cy="0"/>
+          <a:chOff x="0" y="0"/>
+          <a:chExt cx="0" cy="0"/>
+        </a:xfrm>
+      </p:grpSpPr>
+      <p:sp>
+        <p:nvSpPr>
+          <p:cNvPr id="3" name="Content Placeholder 2"/>
+          <p:cNvSpPr>
+            <a:spLocks noGrp="1"/>
+          </p:cNvSpPr>
+          <p:nvPr>
+            <p:ph idx="1"/>
+          </p:nvPr>
+        </p:nvSpPr>
+        <p:spPr/>
+        <p:txBody>
+          <a:bodyPr/>
+          <a:lstStyle/>
+          <a:p>
+            <a:pPr lvl="0" indent="0" marL="0">
+              <a:buNone/>
+            </a:pPr>
+            <a:r>
+              <a:rPr/>
+              <a:t>This simulation is based on held-out test-set predictions.</a:t>
+            </a:r>
+          </a:p>
+        </p:txBody>
+      </p:sp>
+    </p:spTree>
+  </p:cSld>
+</p:sld>
+</file>
+
+<file path=ppt/slides/slide22.xml><?xml version="1.0" encoding="utf-8"?>
+<p:sld xmlns:a="http://schemas.openxmlformats.org/drawingml/2006/main" xmlns:r="http://schemas.openxmlformats.org/officeDocument/2006/relationships" xmlns:p="http://schemas.openxmlformats.org/presentationml/2006/main">
+  <p:cSld>
+    <p:spTree>
+      <p:nvGrpSpPr>
+        <p:cNvPr id="1" name=""/>
+        <p:cNvGrpSpPr/>
+        <p:nvPr/>
+      </p:nvGrpSpPr>
+      <p:grpSpPr>
+        <a:xfrm>
+          <a:off x="0" y="0"/>
+          <a:ext cx="0" cy="0"/>
+          <a:chOff x="0" y="0"/>
+          <a:chExt cx="0" cy="0"/>
+        </a:xfrm>
+      </p:grpSpPr>
+      <p:sp>
+        <p:nvSpPr>
+          <p:cNvPr id="2" name="Title 1"/>
+          <p:cNvSpPr>
+            <a:spLocks noGrp="1"/>
+          </p:cNvSpPr>
+          <p:nvPr>
+            <p:ph type="title"/>
+          </p:nvPr>
+        </p:nvSpPr>
+        <p:spPr/>
+        <p:txBody>
+          <a:bodyPr/>
+          <a:lstStyle/>
+          <a:p>
+            <a:pPr lvl="0" indent="0" marL="0">
+              <a:buNone/>
+            </a:pPr>
+            <a:r>
+              <a:rPr/>
+              <a:t>Expected-value thresholding captures realized value much faster than a broad-pipeline approach</a:t>
+            </a:r>
+          </a:p>
+        </p:txBody>
+      </p:sp>
+      <p:pic>
+        <p:nvPicPr>
+          <p:cNvPr descr="assets/sim_expected_value_threshold.png" id="0" name="Picture 1"/>
+          <p:cNvPicPr>
+            <a:picLocks noGrp="1" noChangeAspect="1"/>
+          </p:cNvPicPr>
+          <p:nvPr/>
+        </p:nvPicPr>
+        <p:blipFill>
+          <a:blip r:embed="rId2"/>
+          <a:stretch>
+            <a:fillRect/>
+          </a:stretch>
+        </p:blipFill>
+        <p:spPr bwMode="auto">
+          <a:xfrm>
+            <a:off x="457200" y="1663700"/>
+            <a:ext cx="4038600" cy="2451100"/>
+          </a:xfrm>
+          <a:prstGeom prst="rect">
+            <a:avLst/>
+          </a:prstGeom>
+          <a:noFill/>
+          <a:ln w="9525">
+            <a:noFill/>
+            <a:headEnd/>
+            <a:tailEnd/>
+          </a:ln>
+        </p:spPr>
+      </p:pic>
+      <p:sp>
+        <p:nvSpPr>
+          <p:cNvPr id="4" name="Content Placeholder 3"/>
+          <p:cNvSpPr>
+            <a:spLocks noGrp="1"/>
+          </p:cNvSpPr>
+          <p:nvPr>
+            <p:ph idx="2" sz="half"/>
+          </p:nvPr>
+        </p:nvSpPr>
+        <p:spPr/>
+        <p:txBody>
+          <a:bodyPr/>
+          <a:lstStyle/>
+          <a:p>
+            <a:pPr lvl="0"/>
+            <a:r>
+              <a:rPr/>
+              <a:t>Rank and filter pipeline by expected value to concentrate effort where it matters most.</a:t>
+            </a:r>
+          </a:p>
+          <a:p>
+            <a:pPr lvl="0"/>
+            <a:r>
+              <a:rPr/>
+              <a:t>~44% of value captured in top 10% of opportunities, ~68% in top 25%.</a:t>
+            </a:r>
+          </a:p>
+          <a:p>
+            <a:pPr lvl="0"/>
+            <a:r>
+              <a:rPr/>
+              <a:t>Shifting from broad coverage to value-based prioritization materially accelerates revenue capture.</a:t>
+            </a:r>
+          </a:p>
+          <a:p>
+            <a:pPr lvl="0"/>
+            <a:r>
+              <a:rPr/>
+              <a:t>Acts as a bridge between prioritization and forecasting, aligning effort with both likelihood and deal size.</a:t>
             </a:r>
           </a:p>
         </p:txBody>
@@ -7846,20 +7469,15 @@
       </p:grpSpPr>
       <p:sp>
         <p:nvSpPr>
-          <p:cNvPr id="2" name="Title 1"/>
+          <p:cNvPr id="3" name="Content Placeholder 2"/>
           <p:cNvSpPr>
             <a:spLocks noGrp="1"/>
           </p:cNvSpPr>
           <p:nvPr>
-            <p:ph type="title"/>
+            <p:ph idx="1"/>
           </p:nvPr>
         </p:nvSpPr>
-        <p:spPr>
-          <a:xfrm>
-            <a:off x="722313" y="3305176"/>
-            <a:ext cx="7772400" cy="1021556"/>
-          </a:xfrm>
-        </p:spPr>
+        <p:spPr/>
         <p:txBody>
           <a:bodyPr/>
           <a:lstStyle/>
@@ -7869,7 +7487,7 @@
             </a:pPr>
             <a:r>
               <a:rPr/>
-              <a:t>Conclusions</a:t>
+              <a:t>This simulation is based on held-out test-set predictions.</a:t>
             </a:r>
           </a:p>
         </p:txBody>
@@ -7906,6 +7524,58 @@
             <p:ph type="title"/>
           </p:nvPr>
         </p:nvSpPr>
+        <p:spPr>
+          <a:xfrm>
+            <a:off x="722313" y="3305176"/>
+            <a:ext cx="7772400" cy="1021556"/>
+          </a:xfrm>
+        </p:spPr>
+        <p:txBody>
+          <a:bodyPr/>
+          <a:lstStyle/>
+          <a:p>
+            <a:pPr lvl="0" indent="0" marL="0">
+              <a:buNone/>
+            </a:pPr>
+            <a:r>
+              <a:rPr/>
+              <a:t>Conclusions</a:t>
+            </a:r>
+          </a:p>
+        </p:txBody>
+      </p:sp>
+    </p:spTree>
+  </p:cSld>
+</p:sld>
+</file>
+
+<file path=ppt/slides/slide25.xml><?xml version="1.0" encoding="utf-8"?>
+<p:sld xmlns:a="http://schemas.openxmlformats.org/drawingml/2006/main" xmlns:r="http://schemas.openxmlformats.org/officeDocument/2006/relationships" xmlns:p="http://schemas.openxmlformats.org/presentationml/2006/main">
+  <p:cSld>
+    <p:spTree>
+      <p:nvGrpSpPr>
+        <p:cNvPr id="1" name=""/>
+        <p:cNvGrpSpPr/>
+        <p:nvPr/>
+      </p:nvGrpSpPr>
+      <p:grpSpPr>
+        <a:xfrm>
+          <a:off x="0" y="0"/>
+          <a:ext cx="0" cy="0"/>
+          <a:chOff x="0" y="0"/>
+          <a:chExt cx="0" cy="0"/>
+        </a:xfrm>
+      </p:grpSpPr>
+      <p:sp>
+        <p:nvSpPr>
+          <p:cNvPr id="2" name="Title 1"/>
+          <p:cNvSpPr>
+            <a:spLocks noGrp="1"/>
+          </p:cNvSpPr>
+          <p:nvPr>
+            <p:ph type="title"/>
+          </p:nvPr>
+        </p:nvSpPr>
         <p:spPr/>
         <p:txBody>
           <a:bodyPr/>
@@ -7939,7 +7609,7 @@
             <a:pPr lvl="0"/>
             <a:r>
               <a:rPr/>
-              <a:t>The two selected targets are explicit:</a:t>
+              <a:t>Two clear decision levers:</a:t>
             </a:r>
           </a:p>
           <a:p>
@@ -7950,7 +7620,7 @@
             </a:r>
             <a:r>
               <a:rPr/>
-              <a:t> for prioritization</a:t>
+              <a:t> → prioritization of the pipeline</a:t>
             </a:r>
           </a:p>
           <a:p>
@@ -7961,51 +7631,3683 @@
             </a:r>
             <a:r>
               <a:rPr/>
-              <a:t> for sizing and forecasting</a:t>
+              <a:t> → sizing and aggregate forecasting</a:t>
             </a:r>
           </a:p>
           <a:p>
             <a:pPr lvl="0"/>
             <a:r>
               <a:rPr/>
-              <a:t>The two selected models are explicit throughout the project narrative:</a:t>
+              <a:t>Two models consistently applied:</a:t>
             </a:r>
           </a:p>
           <a:p>
             <a:pPr lvl="1"/>
             <a:r>
               <a:rPr b="1"/>
-              <a:t>Best logistic win/loss classification</a:t>
-            </a:r>
-            <a:r>
-              <a:rPr/>
-              <a:t> for prioritization</a:t>
+              <a:t>Win/loss classification</a:t>
+            </a:r>
+            <a:r>
+              <a:rPr/>
+              <a:t> to rank opportunities by likelihood to close</a:t>
             </a:r>
           </a:p>
           <a:p>
             <a:pPr lvl="1"/>
             <a:r>
               <a:rPr b="1"/>
-              <a:t>Dynamic amount regression</a:t>
-            </a:r>
-            <a:r>
-              <a:rPr/>
-              <a:t> for sizing and forecasting</a:t>
+              <a:t>Regression</a:t>
+            </a:r>
+            <a:r>
+              <a:rPr/>
+              <a:t> to estimate deal size based on current pipeline state</a:t>
             </a:r>
           </a:p>
           <a:p>
             <a:pPr lvl="0"/>
             <a:r>
-              <a:rPr/>
-              <a:t>The main recommendation is to pilot the </a:t>
-            </a:r>
-            <a:r>
               <a:rPr b="1"/>
-              <a:t>result model first</a:t>
-            </a:r>
-            <a:r>
-              <a:rPr/>
-              <a:t>, while treating amount forecasting as an aggregate planning aid built from the same dynamic feature set.</a:t>
+              <a:t>Recommendation</a:t>
+            </a:r>
+            <a:r>
+              <a:rPr/>
+              <a:t>:</a:t>
+            </a:r>
+          </a:p>
+          <a:p>
+            <a:pPr lvl="1"/>
+            <a:r>
+              <a:rPr/>
+              <a:t>Pilot the result model first to drive immediate commercial impact through better prioritization</a:t>
+            </a:r>
+          </a:p>
+          <a:p>
+            <a:pPr lvl="1"/>
+            <a:r>
+              <a:rPr/>
+              <a:t>Use the amount model as a planning layer, supporting aggregate forecasts and scenario sizing</a:t>
+            </a:r>
+          </a:p>
+          <a:p>
+            <a:pPr lvl="1"/>
+            <a:r>
+              <a:rPr/>
+              <a:t>Eventually use them together to drive expected-value prioritization, which concentrates effort on the most valuable opportunities and accelerates revenue capture.</a:t>
+            </a:r>
+          </a:p>
+        </p:txBody>
+      </p:sp>
+    </p:spTree>
+  </p:cSld>
+  <p:timing>
+    <p:tnLst>
+      <p:par>
+        <p:cTn id="1" dur="indefinite" restart="never" nodeType="tmRoot">
+          <p:childTnLst>
+            <p:seq concurrent="1" nextAc="seek">
+              <p:cTn id="2" dur="indefinite" nodeType="mainSeq">
+                <p:childTnLst>
+                  <p:par>
+                    <p:cTn id="3" fill="hold">
+                      <p:stCondLst>
+                        <p:cond delay="indefinite"/>
+                      </p:stCondLst>
+                      <p:childTnLst>
+                        <p:par>
+                          <p:cTn id="4" fill="hold">
+                            <p:stCondLst>
+                              <p:cond delay="0"/>
+                            </p:stCondLst>
+                            <p:childTnLst>
+                              <p:par>
+                                <p:cTn id="5" presetID="1" presetClass="entr" presetSubtype="0" fill="hold" grpId="0" nodeType="clickEffect">
+                                  <p:stCondLst>
+                                    <p:cond delay="0"/>
+                                  </p:stCondLst>
+                                  <p:childTnLst>
+                                    <p:set>
+                                      <p:cBhvr>
+                                        <p:cTn id="6" dur="1" fill="hold">
+                                          <p:stCondLst>
+                                            <p:cond delay="0"/>
+                                          </p:stCondLst>
+                                        </p:cTn>
+                                        <p:tgtEl>
+                                          <p:spTgt spid="3">
+                                            <p:txEl>
+                                              <p:pRg st="0" end="0"/>
+                                            </p:txEl>
+                                          </p:spTgt>
+                                        </p:tgtEl>
+                                        <p:attrNameLst>
+                                          <p:attrName>style.visibility</p:attrName>
+                                        </p:attrNameLst>
+                                      </p:cBhvr>
+                                      <p:to>
+                                        <p:strVal val="visible"/>
+                                      </p:to>
+                                    </p:set>
+                                  </p:childTnLst>
+                                </p:cTn>
+                              </p:par>
+                            </p:childTnLst>
+                          </p:cTn>
+                        </p:par>
+                      </p:childTnLst>
+                    </p:cTn>
+                  </p:par>
+                  <p:par>
+                    <p:cTn id="7" fill="hold">
+                      <p:stCondLst>
+                        <p:cond delay="indefinite"/>
+                      </p:stCondLst>
+                      <p:childTnLst>
+                        <p:par>
+                          <p:cTn id="8" fill="hold">
+                            <p:stCondLst>
+                              <p:cond delay="0"/>
+                            </p:stCondLst>
+                            <p:childTnLst>
+                              <p:par>
+                                <p:cTn id="9" presetID="1" presetClass="entr" presetSubtype="0" fill="hold" grpId="0" nodeType="clickEffect">
+                                  <p:stCondLst>
+                                    <p:cond delay="0"/>
+                                  </p:stCondLst>
+                                  <p:childTnLst>
+                                    <p:set>
+                                      <p:cBhvr>
+                                        <p:cTn id="10" dur="1" fill="hold">
+                                          <p:stCondLst>
+                                            <p:cond delay="0"/>
+                                          </p:stCondLst>
+                                        </p:cTn>
+                                        <p:tgtEl>
+                                          <p:spTgt spid="3">
+                                            <p:txEl>
+                                              <p:pRg st="1" end="1"/>
+                                            </p:txEl>
+                                          </p:spTgt>
+                                        </p:tgtEl>
+                                        <p:attrNameLst>
+                                          <p:attrName>style.visibility</p:attrName>
+                                        </p:attrNameLst>
+                                      </p:cBhvr>
+                                      <p:to>
+                                        <p:strVal val="visible"/>
+                                      </p:to>
+                                    </p:set>
+                                  </p:childTnLst>
+                                </p:cTn>
+                              </p:par>
+                            </p:childTnLst>
+                          </p:cTn>
+                        </p:par>
+                      </p:childTnLst>
+                    </p:cTn>
+                  </p:par>
+                  <p:par>
+                    <p:cTn id="11" fill="hold">
+                      <p:stCondLst>
+                        <p:cond delay="indefinite"/>
+                      </p:stCondLst>
+                      <p:childTnLst>
+                        <p:par>
+                          <p:cTn id="12" fill="hold">
+                            <p:stCondLst>
+                              <p:cond delay="0"/>
+                            </p:stCondLst>
+                            <p:childTnLst>
+                              <p:par>
+                                <p:cTn id="13" presetID="1" presetClass="entr" presetSubtype="0" fill="hold" grpId="0" nodeType="clickEffect">
+                                  <p:stCondLst>
+                                    <p:cond delay="0"/>
+                                  </p:stCondLst>
+                                  <p:childTnLst>
+                                    <p:set>
+                                      <p:cBhvr>
+                                        <p:cTn id="14" dur="1" fill="hold">
+                                          <p:stCondLst>
+                                            <p:cond delay="0"/>
+                                          </p:stCondLst>
+                                        </p:cTn>
+                                        <p:tgtEl>
+                                          <p:spTgt spid="3">
+                                            <p:txEl>
+                                              <p:pRg st="2" end="2"/>
+                                            </p:txEl>
+                                          </p:spTgt>
+                                        </p:tgtEl>
+                                        <p:attrNameLst>
+                                          <p:attrName>style.visibility</p:attrName>
+                                        </p:attrNameLst>
+                                      </p:cBhvr>
+                                      <p:to>
+                                        <p:strVal val="visible"/>
+                                      </p:to>
+                                    </p:set>
+                                  </p:childTnLst>
+                                </p:cTn>
+                              </p:par>
+                            </p:childTnLst>
+                          </p:cTn>
+                        </p:par>
+                      </p:childTnLst>
+                    </p:cTn>
+                  </p:par>
+                  <p:par>
+                    <p:cTn id="15" fill="hold">
+                      <p:stCondLst>
+                        <p:cond delay="indefinite"/>
+                      </p:stCondLst>
+                      <p:childTnLst>
+                        <p:par>
+                          <p:cTn id="16" fill="hold">
+                            <p:stCondLst>
+                              <p:cond delay="0"/>
+                            </p:stCondLst>
+                            <p:childTnLst>
+                              <p:par>
+                                <p:cTn id="17" presetID="1" presetClass="entr" presetSubtype="0" fill="hold" grpId="0" nodeType="clickEffect">
+                                  <p:stCondLst>
+                                    <p:cond delay="0"/>
+                                  </p:stCondLst>
+                                  <p:childTnLst>
+                                    <p:set>
+                                      <p:cBhvr>
+                                        <p:cTn id="18" dur="1" fill="hold">
+                                          <p:stCondLst>
+                                            <p:cond delay="0"/>
+                                          </p:stCondLst>
+                                        </p:cTn>
+                                        <p:tgtEl>
+                                          <p:spTgt spid="3">
+                                            <p:txEl>
+                                              <p:pRg st="3" end="3"/>
+                                            </p:txEl>
+                                          </p:spTgt>
+                                        </p:tgtEl>
+                                        <p:attrNameLst>
+                                          <p:attrName>style.visibility</p:attrName>
+                                        </p:attrNameLst>
+                                      </p:cBhvr>
+                                      <p:to>
+                                        <p:strVal val="visible"/>
+                                      </p:to>
+                                    </p:set>
+                                  </p:childTnLst>
+                                </p:cTn>
+                              </p:par>
+                            </p:childTnLst>
+                          </p:cTn>
+                        </p:par>
+                      </p:childTnLst>
+                    </p:cTn>
+                  </p:par>
+                  <p:par>
+                    <p:cTn id="19" fill="hold">
+                      <p:stCondLst>
+                        <p:cond delay="indefinite"/>
+                      </p:stCondLst>
+                      <p:childTnLst>
+                        <p:par>
+                          <p:cTn id="20" fill="hold">
+                            <p:stCondLst>
+                              <p:cond delay="0"/>
+                            </p:stCondLst>
+                            <p:childTnLst>
+                              <p:par>
+                                <p:cTn id="21" presetID="1" presetClass="entr" presetSubtype="0" fill="hold" grpId="0" nodeType="clickEffect">
+                                  <p:stCondLst>
+                                    <p:cond delay="0"/>
+                                  </p:stCondLst>
+                                  <p:childTnLst>
+                                    <p:set>
+                                      <p:cBhvr>
+                                        <p:cTn id="22" dur="1" fill="hold">
+                                          <p:stCondLst>
+                                            <p:cond delay="0"/>
+                                          </p:stCondLst>
+                                        </p:cTn>
+                                        <p:tgtEl>
+                                          <p:spTgt spid="3">
+                                            <p:txEl>
+                                              <p:pRg st="4" end="4"/>
+                                            </p:txEl>
+                                          </p:spTgt>
+                                        </p:tgtEl>
+                                        <p:attrNameLst>
+                                          <p:attrName>style.visibility</p:attrName>
+                                        </p:attrNameLst>
+                                      </p:cBhvr>
+                                      <p:to>
+                                        <p:strVal val="visible"/>
+                                      </p:to>
+                                    </p:set>
+                                  </p:childTnLst>
+                                </p:cTn>
+                              </p:par>
+                            </p:childTnLst>
+                          </p:cTn>
+                        </p:par>
+                      </p:childTnLst>
+                    </p:cTn>
+                  </p:par>
+                  <p:par>
+                    <p:cTn id="23" fill="hold">
+                      <p:stCondLst>
+                        <p:cond delay="indefinite"/>
+                      </p:stCondLst>
+                      <p:childTnLst>
+                        <p:par>
+                          <p:cTn id="24" fill="hold">
+                            <p:stCondLst>
+                              <p:cond delay="0"/>
+                            </p:stCondLst>
+                            <p:childTnLst>
+                              <p:par>
+                                <p:cTn id="25" presetID="1" presetClass="entr" presetSubtype="0" fill="hold" grpId="0" nodeType="clickEffect">
+                                  <p:stCondLst>
+                                    <p:cond delay="0"/>
+                                  </p:stCondLst>
+                                  <p:childTnLst>
+                                    <p:set>
+                                      <p:cBhvr>
+                                        <p:cTn id="26" dur="1" fill="hold">
+                                          <p:stCondLst>
+                                            <p:cond delay="0"/>
+                                          </p:stCondLst>
+                                        </p:cTn>
+                                        <p:tgtEl>
+                                          <p:spTgt spid="3">
+                                            <p:txEl>
+                                              <p:pRg st="5" end="5"/>
+                                            </p:txEl>
+                                          </p:spTgt>
+                                        </p:tgtEl>
+                                        <p:attrNameLst>
+                                          <p:attrName>style.visibility</p:attrName>
+                                        </p:attrNameLst>
+                                      </p:cBhvr>
+                                      <p:to>
+                                        <p:strVal val="visible"/>
+                                      </p:to>
+                                    </p:set>
+                                  </p:childTnLst>
+                                </p:cTn>
+                              </p:par>
+                            </p:childTnLst>
+                          </p:cTn>
+                        </p:par>
+                      </p:childTnLst>
+                    </p:cTn>
+                  </p:par>
+                  <p:par>
+                    <p:cTn id="27" fill="hold">
+                      <p:stCondLst>
+                        <p:cond delay="indefinite"/>
+                      </p:stCondLst>
+                      <p:childTnLst>
+                        <p:par>
+                          <p:cTn id="28" fill="hold">
+                            <p:stCondLst>
+                              <p:cond delay="0"/>
+                            </p:stCondLst>
+                            <p:childTnLst>
+                              <p:par>
+                                <p:cTn id="29" presetID="1" presetClass="entr" presetSubtype="0" fill="hold" grpId="0" nodeType="clickEffect">
+                                  <p:stCondLst>
+                                    <p:cond delay="0"/>
+                                  </p:stCondLst>
+                                  <p:childTnLst>
+                                    <p:set>
+                                      <p:cBhvr>
+                                        <p:cTn id="30" dur="1" fill="hold">
+                                          <p:stCondLst>
+                                            <p:cond delay="0"/>
+                                          </p:stCondLst>
+                                        </p:cTn>
+                                        <p:tgtEl>
+                                          <p:spTgt spid="3">
+                                            <p:txEl>
+                                              <p:pRg st="6" end="6"/>
+                                            </p:txEl>
+                                          </p:spTgt>
+                                        </p:tgtEl>
+                                        <p:attrNameLst>
+                                          <p:attrName>style.visibility</p:attrName>
+                                        </p:attrNameLst>
+                                      </p:cBhvr>
+                                      <p:to>
+                                        <p:strVal val="visible"/>
+                                      </p:to>
+                                    </p:set>
+                                  </p:childTnLst>
+                                </p:cTn>
+                              </p:par>
+                            </p:childTnLst>
+                          </p:cTn>
+                        </p:par>
+                      </p:childTnLst>
+                    </p:cTn>
+                  </p:par>
+                  <p:par>
+                    <p:cTn id="31" fill="hold">
+                      <p:stCondLst>
+                        <p:cond delay="indefinite"/>
+                      </p:stCondLst>
+                      <p:childTnLst>
+                        <p:par>
+                          <p:cTn id="32" fill="hold">
+                            <p:stCondLst>
+                              <p:cond delay="0"/>
+                            </p:stCondLst>
+                            <p:childTnLst>
+                              <p:par>
+                                <p:cTn id="33" presetID="1" presetClass="entr" presetSubtype="0" fill="hold" grpId="0" nodeType="clickEffect">
+                                  <p:stCondLst>
+                                    <p:cond delay="0"/>
+                                  </p:stCondLst>
+                                  <p:childTnLst>
+                                    <p:set>
+                                      <p:cBhvr>
+                                        <p:cTn id="34" dur="1" fill="hold">
+                                          <p:stCondLst>
+                                            <p:cond delay="0"/>
+                                          </p:stCondLst>
+                                        </p:cTn>
+                                        <p:tgtEl>
+                                          <p:spTgt spid="3">
+                                            <p:txEl>
+                                              <p:pRg st="7" end="7"/>
+                                            </p:txEl>
+                                          </p:spTgt>
+                                        </p:tgtEl>
+                                        <p:attrNameLst>
+                                          <p:attrName>style.visibility</p:attrName>
+                                        </p:attrNameLst>
+                                      </p:cBhvr>
+                                      <p:to>
+                                        <p:strVal val="visible"/>
+                                      </p:to>
+                                    </p:set>
+                                  </p:childTnLst>
+                                </p:cTn>
+                              </p:par>
+                            </p:childTnLst>
+                          </p:cTn>
+                        </p:par>
+                      </p:childTnLst>
+                    </p:cTn>
+                  </p:par>
+                  <p:par>
+                    <p:cTn id="35" fill="hold">
+                      <p:stCondLst>
+                        <p:cond delay="indefinite"/>
+                      </p:stCondLst>
+                      <p:childTnLst>
+                        <p:par>
+                          <p:cTn id="36" fill="hold">
+                            <p:stCondLst>
+                              <p:cond delay="0"/>
+                            </p:stCondLst>
+                            <p:childTnLst>
+                              <p:par>
+                                <p:cTn id="37" presetID="1" presetClass="entr" presetSubtype="0" fill="hold" grpId="0" nodeType="clickEffect">
+                                  <p:stCondLst>
+                                    <p:cond delay="0"/>
+                                  </p:stCondLst>
+                                  <p:childTnLst>
+                                    <p:set>
+                                      <p:cBhvr>
+                                        <p:cTn id="38" dur="1" fill="hold">
+                                          <p:stCondLst>
+                                            <p:cond delay="0"/>
+                                          </p:stCondLst>
+                                        </p:cTn>
+                                        <p:tgtEl>
+                                          <p:spTgt spid="3">
+                                            <p:txEl>
+                                              <p:pRg st="8" end="8"/>
+                                            </p:txEl>
+                                          </p:spTgt>
+                                        </p:tgtEl>
+                                        <p:attrNameLst>
+                                          <p:attrName>style.visibility</p:attrName>
+                                        </p:attrNameLst>
+                                      </p:cBhvr>
+                                      <p:to>
+                                        <p:strVal val="visible"/>
+                                      </p:to>
+                                    </p:set>
+                                  </p:childTnLst>
+                                </p:cTn>
+                              </p:par>
+                            </p:childTnLst>
+                          </p:cTn>
+                        </p:par>
+                      </p:childTnLst>
+                    </p:cTn>
+                  </p:par>
+                  <p:par>
+                    <p:cTn id="39" fill="hold">
+                      <p:stCondLst>
+                        <p:cond delay="indefinite"/>
+                      </p:stCondLst>
+                      <p:childTnLst>
+                        <p:par>
+                          <p:cTn id="40" fill="hold">
+                            <p:stCondLst>
+                              <p:cond delay="0"/>
+                            </p:stCondLst>
+                            <p:childTnLst>
+                              <p:par>
+                                <p:cTn id="41" presetID="1" presetClass="entr" presetSubtype="0" fill="hold" grpId="0" nodeType="clickEffect">
+                                  <p:stCondLst>
+                                    <p:cond delay="0"/>
+                                  </p:stCondLst>
+                                  <p:childTnLst>
+                                    <p:set>
+                                      <p:cBhvr>
+                                        <p:cTn id="42" dur="1" fill="hold">
+                                          <p:stCondLst>
+                                            <p:cond delay="0"/>
+                                          </p:stCondLst>
+                                        </p:cTn>
+                                        <p:tgtEl>
+                                          <p:spTgt spid="3">
+                                            <p:txEl>
+                                              <p:pRg st="9" end="9"/>
+                                            </p:txEl>
+                                          </p:spTgt>
+                                        </p:tgtEl>
+                                        <p:attrNameLst>
+                                          <p:attrName>style.visibility</p:attrName>
+                                        </p:attrNameLst>
+                                      </p:cBhvr>
+                                      <p:to>
+                                        <p:strVal val="visible"/>
+                                      </p:to>
+                                    </p:set>
+                                  </p:childTnLst>
+                                </p:cTn>
+                              </p:par>
+                            </p:childTnLst>
+                          </p:cTn>
+                        </p:par>
+                      </p:childTnLst>
+                    </p:cTn>
+                  </p:par>
+                </p:childTnLst>
+              </p:cTn>
+              <p:prevCondLst>
+                <p:cond evt="onPrev" delay="0">
+                  <p:tgtEl>
+                    <p:sldTgt/>
+                  </p:tgtEl>
+                </p:cond>
+              </p:prevCondLst>
+              <p:nextCondLst>
+                <p:cond evt="onNext" delay="0">
+                  <p:tgtEl>
+                    <p:sldTgt/>
+                  </p:tgtEl>
+                </p:cond>
+              </p:nextCondLst>
+            </p:seq>
+          </p:childTnLst>
+        </p:cTn>
+      </p:par>
+    </p:tnLst>
+    <p:bldLst>
+      <p:bldP spid="3" grpId="0" uiExpand="1" build="p"/>
+    </p:bldLst>
+  </p:timing>
+</p:sld>
+</file>
+
+<file path=ppt/slides/slide26.xml><?xml version="1.0" encoding="utf-8"?>
+<p:sld xmlns:a="http://schemas.openxmlformats.org/drawingml/2006/main" xmlns:r="http://schemas.openxmlformats.org/officeDocument/2006/relationships" xmlns:p="http://schemas.openxmlformats.org/presentationml/2006/main">
+  <p:cSld>
+    <p:spTree>
+      <p:nvGrpSpPr>
+        <p:cNvPr id="1" name=""/>
+        <p:cNvGrpSpPr/>
+        <p:nvPr/>
+      </p:nvGrpSpPr>
+      <p:grpSpPr>
+        <a:xfrm>
+          <a:off x="0" y="0"/>
+          <a:ext cx="0" cy="0"/>
+          <a:chOff x="0" y="0"/>
+          <a:chExt cx="0" cy="0"/>
+        </a:xfrm>
+      </p:grpSpPr>
+      <p:sp>
+        <p:nvSpPr>
+          <p:cNvPr id="2" name="Title 1"/>
+          <p:cNvSpPr>
+            <a:spLocks noGrp="1"/>
+          </p:cNvSpPr>
+          <p:nvPr>
+            <p:ph type="title"/>
+          </p:nvPr>
+        </p:nvSpPr>
+        <p:spPr/>
+        <p:txBody>
+          <a:bodyPr/>
+          <a:lstStyle/>
+          <a:p>
+            <a:pPr lvl="0" indent="0" marL="0">
+              <a:buNone/>
+            </a:pPr>
+            <a:r>
+              <a:rPr/>
+              <a:t>Next steps</a:t>
+            </a:r>
+          </a:p>
+        </p:txBody>
+      </p:sp>
+      <p:sp>
+        <p:nvSpPr>
+          <p:cNvPr id="3" name="Content Placeholder 2"/>
+          <p:cNvSpPr>
+            <a:spLocks noGrp="1"/>
+          </p:cNvSpPr>
+          <p:nvPr>
+            <p:ph idx="1"/>
+          </p:nvPr>
+        </p:nvSpPr>
+        <p:spPr/>
+        <p:txBody>
+          <a:bodyPr/>
+          <a:lstStyle/>
+          <a:p>
+            <a:pPr lvl="0"/>
+            <a:r>
+              <a:rPr/>
+              <a:t>Pilot deployment (4–6 weeks):</a:t>
+            </a:r>
+          </a:p>
+          <a:p>
+            <a:pPr lvl="1"/>
+            <a:r>
+              <a:rPr/>
+              <a:t>Embed prioritization scores into CRM workflows</a:t>
+            </a:r>
+          </a:p>
+          <a:p>
+            <a:pPr lvl="1"/>
+            <a:r>
+              <a:rPr/>
+              <a:t>Run A/B test vs. current sales process and measure lift in conversion and revenue</a:t>
+            </a:r>
+          </a:p>
+          <a:p>
+            <a:pPr lvl="0"/>
+            <a:r>
+              <a:rPr/>
+              <a:t>Define operating model:</a:t>
+            </a:r>
+          </a:p>
+          <a:p>
+            <a:pPr lvl="1"/>
+            <a:r>
+              <a:rPr/>
+              <a:t>Set clear thresholds and actions (e.g., top deciles = sales focus)</a:t>
+            </a:r>
+          </a:p>
+          <a:p>
+            <a:pPr lvl="1"/>
+            <a:r>
+              <a:rPr/>
+              <a:t>Align sales incentives and pipeline reviews to model outputs</a:t>
+            </a:r>
+          </a:p>
+          <a:p>
+            <a:pPr lvl="0"/>
+            <a:r>
+              <a:rPr/>
+              <a:t>Monitor performance:</a:t>
+            </a:r>
+          </a:p>
+          <a:p>
+            <a:pPr lvl="1"/>
+            <a:r>
+              <a:rPr/>
+              <a:t>Track conversion lift, cycle time, and revenue per opportunity</a:t>
+            </a:r>
+          </a:p>
+          <a:p>
+            <a:pPr lvl="1"/>
+            <a:r>
+              <a:rPr/>
+              <a:t>Continuously recalibrate thresholds and retrain models</a:t>
+            </a:r>
+          </a:p>
+          <a:p>
+            <a:pPr lvl="0"/>
+            <a:r>
+              <a:rPr/>
+              <a:t>Scale and integrate:</a:t>
+            </a:r>
+          </a:p>
+          <a:p>
+            <a:pPr lvl="1"/>
+            <a:r>
+              <a:rPr/>
+              <a:t>Extend to full pipeline and embed in forecasting cadence</a:t>
+            </a:r>
+          </a:p>
+          <a:p>
+            <a:pPr lvl="1"/>
+            <a:r>
+              <a:rPr/>
+              <a:t>Incorporate into commercial planning and resource allocation</a:t>
+            </a:r>
+          </a:p>
+        </p:txBody>
+      </p:sp>
+    </p:spTree>
+  </p:cSld>
+  <p:timing>
+    <p:tnLst>
+      <p:par>
+        <p:cTn id="1" dur="indefinite" restart="never" nodeType="tmRoot">
+          <p:childTnLst>
+            <p:seq concurrent="1" nextAc="seek">
+              <p:cTn id="2" dur="indefinite" nodeType="mainSeq">
+                <p:childTnLst>
+                  <p:par>
+                    <p:cTn id="3" fill="hold">
+                      <p:stCondLst>
+                        <p:cond delay="indefinite"/>
+                      </p:stCondLst>
+                      <p:childTnLst>
+                        <p:par>
+                          <p:cTn id="4" fill="hold">
+                            <p:stCondLst>
+                              <p:cond delay="0"/>
+                            </p:stCondLst>
+                            <p:childTnLst>
+                              <p:par>
+                                <p:cTn id="5" presetID="1" presetClass="entr" presetSubtype="0" fill="hold" grpId="0" nodeType="clickEffect">
+                                  <p:stCondLst>
+                                    <p:cond delay="0"/>
+                                  </p:stCondLst>
+                                  <p:childTnLst>
+                                    <p:set>
+                                      <p:cBhvr>
+                                        <p:cTn id="6" dur="1" fill="hold">
+                                          <p:stCondLst>
+                                            <p:cond delay="0"/>
+                                          </p:stCondLst>
+                                        </p:cTn>
+                                        <p:tgtEl>
+                                          <p:spTgt spid="3">
+                                            <p:txEl>
+                                              <p:pRg st="0" end="0"/>
+                                            </p:txEl>
+                                          </p:spTgt>
+                                        </p:tgtEl>
+                                        <p:attrNameLst>
+                                          <p:attrName>style.visibility</p:attrName>
+                                        </p:attrNameLst>
+                                      </p:cBhvr>
+                                      <p:to>
+                                        <p:strVal val="visible"/>
+                                      </p:to>
+                                    </p:set>
+                                  </p:childTnLst>
+                                </p:cTn>
+                              </p:par>
+                            </p:childTnLst>
+                          </p:cTn>
+                        </p:par>
+                      </p:childTnLst>
+                    </p:cTn>
+                  </p:par>
+                  <p:par>
+                    <p:cTn id="7" fill="hold">
+                      <p:stCondLst>
+                        <p:cond delay="indefinite"/>
+                      </p:stCondLst>
+                      <p:childTnLst>
+                        <p:par>
+                          <p:cTn id="8" fill="hold">
+                            <p:stCondLst>
+                              <p:cond delay="0"/>
+                            </p:stCondLst>
+                            <p:childTnLst>
+                              <p:par>
+                                <p:cTn id="9" presetID="1" presetClass="entr" presetSubtype="0" fill="hold" grpId="0" nodeType="clickEffect">
+                                  <p:stCondLst>
+                                    <p:cond delay="0"/>
+                                  </p:stCondLst>
+                                  <p:childTnLst>
+                                    <p:set>
+                                      <p:cBhvr>
+                                        <p:cTn id="10" dur="1" fill="hold">
+                                          <p:stCondLst>
+                                            <p:cond delay="0"/>
+                                          </p:stCondLst>
+                                        </p:cTn>
+                                        <p:tgtEl>
+                                          <p:spTgt spid="3">
+                                            <p:txEl>
+                                              <p:pRg st="1" end="1"/>
+                                            </p:txEl>
+                                          </p:spTgt>
+                                        </p:tgtEl>
+                                        <p:attrNameLst>
+                                          <p:attrName>style.visibility</p:attrName>
+                                        </p:attrNameLst>
+                                      </p:cBhvr>
+                                      <p:to>
+                                        <p:strVal val="visible"/>
+                                      </p:to>
+                                    </p:set>
+                                  </p:childTnLst>
+                                </p:cTn>
+                              </p:par>
+                            </p:childTnLst>
+                          </p:cTn>
+                        </p:par>
+                      </p:childTnLst>
+                    </p:cTn>
+                  </p:par>
+                  <p:par>
+                    <p:cTn id="11" fill="hold">
+                      <p:stCondLst>
+                        <p:cond delay="indefinite"/>
+                      </p:stCondLst>
+                      <p:childTnLst>
+                        <p:par>
+                          <p:cTn id="12" fill="hold">
+                            <p:stCondLst>
+                              <p:cond delay="0"/>
+                            </p:stCondLst>
+                            <p:childTnLst>
+                              <p:par>
+                                <p:cTn id="13" presetID="1" presetClass="entr" presetSubtype="0" fill="hold" grpId="0" nodeType="clickEffect">
+                                  <p:stCondLst>
+                                    <p:cond delay="0"/>
+                                  </p:stCondLst>
+                                  <p:childTnLst>
+                                    <p:set>
+                                      <p:cBhvr>
+                                        <p:cTn id="14" dur="1" fill="hold">
+                                          <p:stCondLst>
+                                            <p:cond delay="0"/>
+                                          </p:stCondLst>
+                                        </p:cTn>
+                                        <p:tgtEl>
+                                          <p:spTgt spid="3">
+                                            <p:txEl>
+                                              <p:pRg st="2" end="2"/>
+                                            </p:txEl>
+                                          </p:spTgt>
+                                        </p:tgtEl>
+                                        <p:attrNameLst>
+                                          <p:attrName>style.visibility</p:attrName>
+                                        </p:attrNameLst>
+                                      </p:cBhvr>
+                                      <p:to>
+                                        <p:strVal val="visible"/>
+                                      </p:to>
+                                    </p:set>
+                                  </p:childTnLst>
+                                </p:cTn>
+                              </p:par>
+                            </p:childTnLst>
+                          </p:cTn>
+                        </p:par>
+                      </p:childTnLst>
+                    </p:cTn>
+                  </p:par>
+                  <p:par>
+                    <p:cTn id="15" fill="hold">
+                      <p:stCondLst>
+                        <p:cond delay="indefinite"/>
+                      </p:stCondLst>
+                      <p:childTnLst>
+                        <p:par>
+                          <p:cTn id="16" fill="hold">
+                            <p:stCondLst>
+                              <p:cond delay="0"/>
+                            </p:stCondLst>
+                            <p:childTnLst>
+                              <p:par>
+                                <p:cTn id="17" presetID="1" presetClass="entr" presetSubtype="0" fill="hold" grpId="0" nodeType="clickEffect">
+                                  <p:stCondLst>
+                                    <p:cond delay="0"/>
+                                  </p:stCondLst>
+                                  <p:childTnLst>
+                                    <p:set>
+                                      <p:cBhvr>
+                                        <p:cTn id="18" dur="1" fill="hold">
+                                          <p:stCondLst>
+                                            <p:cond delay="0"/>
+                                          </p:stCondLst>
+                                        </p:cTn>
+                                        <p:tgtEl>
+                                          <p:spTgt spid="3">
+                                            <p:txEl>
+                                              <p:pRg st="3" end="3"/>
+                                            </p:txEl>
+                                          </p:spTgt>
+                                        </p:tgtEl>
+                                        <p:attrNameLst>
+                                          <p:attrName>style.visibility</p:attrName>
+                                        </p:attrNameLst>
+                                      </p:cBhvr>
+                                      <p:to>
+                                        <p:strVal val="visible"/>
+                                      </p:to>
+                                    </p:set>
+                                  </p:childTnLst>
+                                </p:cTn>
+                              </p:par>
+                            </p:childTnLst>
+                          </p:cTn>
+                        </p:par>
+                      </p:childTnLst>
+                    </p:cTn>
+                  </p:par>
+                  <p:par>
+                    <p:cTn id="19" fill="hold">
+                      <p:stCondLst>
+                        <p:cond delay="indefinite"/>
+                      </p:stCondLst>
+                      <p:childTnLst>
+                        <p:par>
+                          <p:cTn id="20" fill="hold">
+                            <p:stCondLst>
+                              <p:cond delay="0"/>
+                            </p:stCondLst>
+                            <p:childTnLst>
+                              <p:par>
+                                <p:cTn id="21" presetID="1" presetClass="entr" presetSubtype="0" fill="hold" grpId="0" nodeType="clickEffect">
+                                  <p:stCondLst>
+                                    <p:cond delay="0"/>
+                                  </p:stCondLst>
+                                  <p:childTnLst>
+                                    <p:set>
+                                      <p:cBhvr>
+                                        <p:cTn id="22" dur="1" fill="hold">
+                                          <p:stCondLst>
+                                            <p:cond delay="0"/>
+                                          </p:stCondLst>
+                                        </p:cTn>
+                                        <p:tgtEl>
+                                          <p:spTgt spid="3">
+                                            <p:txEl>
+                                              <p:pRg st="4" end="4"/>
+                                            </p:txEl>
+                                          </p:spTgt>
+                                        </p:tgtEl>
+                                        <p:attrNameLst>
+                                          <p:attrName>style.visibility</p:attrName>
+                                        </p:attrNameLst>
+                                      </p:cBhvr>
+                                      <p:to>
+                                        <p:strVal val="visible"/>
+                                      </p:to>
+                                    </p:set>
+                                  </p:childTnLst>
+                                </p:cTn>
+                              </p:par>
+                            </p:childTnLst>
+                          </p:cTn>
+                        </p:par>
+                      </p:childTnLst>
+                    </p:cTn>
+                  </p:par>
+                  <p:par>
+                    <p:cTn id="23" fill="hold">
+                      <p:stCondLst>
+                        <p:cond delay="indefinite"/>
+                      </p:stCondLst>
+                      <p:childTnLst>
+                        <p:par>
+                          <p:cTn id="24" fill="hold">
+                            <p:stCondLst>
+                              <p:cond delay="0"/>
+                            </p:stCondLst>
+                            <p:childTnLst>
+                              <p:par>
+                                <p:cTn id="25" presetID="1" presetClass="entr" presetSubtype="0" fill="hold" grpId="0" nodeType="clickEffect">
+                                  <p:stCondLst>
+                                    <p:cond delay="0"/>
+                                  </p:stCondLst>
+                                  <p:childTnLst>
+                                    <p:set>
+                                      <p:cBhvr>
+                                        <p:cTn id="26" dur="1" fill="hold">
+                                          <p:stCondLst>
+                                            <p:cond delay="0"/>
+                                          </p:stCondLst>
+                                        </p:cTn>
+                                        <p:tgtEl>
+                                          <p:spTgt spid="3">
+                                            <p:txEl>
+                                              <p:pRg st="5" end="5"/>
+                                            </p:txEl>
+                                          </p:spTgt>
+                                        </p:tgtEl>
+                                        <p:attrNameLst>
+                                          <p:attrName>style.visibility</p:attrName>
+                                        </p:attrNameLst>
+                                      </p:cBhvr>
+                                      <p:to>
+                                        <p:strVal val="visible"/>
+                                      </p:to>
+                                    </p:set>
+                                  </p:childTnLst>
+                                </p:cTn>
+                              </p:par>
+                            </p:childTnLst>
+                          </p:cTn>
+                        </p:par>
+                      </p:childTnLst>
+                    </p:cTn>
+                  </p:par>
+                  <p:par>
+                    <p:cTn id="27" fill="hold">
+                      <p:stCondLst>
+                        <p:cond delay="indefinite"/>
+                      </p:stCondLst>
+                      <p:childTnLst>
+                        <p:par>
+                          <p:cTn id="28" fill="hold">
+                            <p:stCondLst>
+                              <p:cond delay="0"/>
+                            </p:stCondLst>
+                            <p:childTnLst>
+                              <p:par>
+                                <p:cTn id="29" presetID="1" presetClass="entr" presetSubtype="0" fill="hold" grpId="0" nodeType="clickEffect">
+                                  <p:stCondLst>
+                                    <p:cond delay="0"/>
+                                  </p:stCondLst>
+                                  <p:childTnLst>
+                                    <p:set>
+                                      <p:cBhvr>
+                                        <p:cTn id="30" dur="1" fill="hold">
+                                          <p:stCondLst>
+                                            <p:cond delay="0"/>
+                                          </p:stCondLst>
+                                        </p:cTn>
+                                        <p:tgtEl>
+                                          <p:spTgt spid="3">
+                                            <p:txEl>
+                                              <p:pRg st="6" end="6"/>
+                                            </p:txEl>
+                                          </p:spTgt>
+                                        </p:tgtEl>
+                                        <p:attrNameLst>
+                                          <p:attrName>style.visibility</p:attrName>
+                                        </p:attrNameLst>
+                                      </p:cBhvr>
+                                      <p:to>
+                                        <p:strVal val="visible"/>
+                                      </p:to>
+                                    </p:set>
+                                  </p:childTnLst>
+                                </p:cTn>
+                              </p:par>
+                            </p:childTnLst>
+                          </p:cTn>
+                        </p:par>
+                      </p:childTnLst>
+                    </p:cTn>
+                  </p:par>
+                  <p:par>
+                    <p:cTn id="31" fill="hold">
+                      <p:stCondLst>
+                        <p:cond delay="indefinite"/>
+                      </p:stCondLst>
+                      <p:childTnLst>
+                        <p:par>
+                          <p:cTn id="32" fill="hold">
+                            <p:stCondLst>
+                              <p:cond delay="0"/>
+                            </p:stCondLst>
+                            <p:childTnLst>
+                              <p:par>
+                                <p:cTn id="33" presetID="1" presetClass="entr" presetSubtype="0" fill="hold" grpId="0" nodeType="clickEffect">
+                                  <p:stCondLst>
+                                    <p:cond delay="0"/>
+                                  </p:stCondLst>
+                                  <p:childTnLst>
+                                    <p:set>
+                                      <p:cBhvr>
+                                        <p:cTn id="34" dur="1" fill="hold">
+                                          <p:stCondLst>
+                                            <p:cond delay="0"/>
+                                          </p:stCondLst>
+                                        </p:cTn>
+                                        <p:tgtEl>
+                                          <p:spTgt spid="3">
+                                            <p:txEl>
+                                              <p:pRg st="7" end="7"/>
+                                            </p:txEl>
+                                          </p:spTgt>
+                                        </p:tgtEl>
+                                        <p:attrNameLst>
+                                          <p:attrName>style.visibility</p:attrName>
+                                        </p:attrNameLst>
+                                      </p:cBhvr>
+                                      <p:to>
+                                        <p:strVal val="visible"/>
+                                      </p:to>
+                                    </p:set>
+                                  </p:childTnLst>
+                                </p:cTn>
+                              </p:par>
+                            </p:childTnLst>
+                          </p:cTn>
+                        </p:par>
+                      </p:childTnLst>
+                    </p:cTn>
+                  </p:par>
+                  <p:par>
+                    <p:cTn id="35" fill="hold">
+                      <p:stCondLst>
+                        <p:cond delay="indefinite"/>
+                      </p:stCondLst>
+                      <p:childTnLst>
+                        <p:par>
+                          <p:cTn id="36" fill="hold">
+                            <p:stCondLst>
+                              <p:cond delay="0"/>
+                            </p:stCondLst>
+                            <p:childTnLst>
+                              <p:par>
+                                <p:cTn id="37" presetID="1" presetClass="entr" presetSubtype="0" fill="hold" grpId="0" nodeType="clickEffect">
+                                  <p:stCondLst>
+                                    <p:cond delay="0"/>
+                                  </p:stCondLst>
+                                  <p:childTnLst>
+                                    <p:set>
+                                      <p:cBhvr>
+                                        <p:cTn id="38" dur="1" fill="hold">
+                                          <p:stCondLst>
+                                            <p:cond delay="0"/>
+                                          </p:stCondLst>
+                                        </p:cTn>
+                                        <p:tgtEl>
+                                          <p:spTgt spid="3">
+                                            <p:txEl>
+                                              <p:pRg st="8" end="8"/>
+                                            </p:txEl>
+                                          </p:spTgt>
+                                        </p:tgtEl>
+                                        <p:attrNameLst>
+                                          <p:attrName>style.visibility</p:attrName>
+                                        </p:attrNameLst>
+                                      </p:cBhvr>
+                                      <p:to>
+                                        <p:strVal val="visible"/>
+                                      </p:to>
+                                    </p:set>
+                                  </p:childTnLst>
+                                </p:cTn>
+                              </p:par>
+                            </p:childTnLst>
+                          </p:cTn>
+                        </p:par>
+                      </p:childTnLst>
+                    </p:cTn>
+                  </p:par>
+                  <p:par>
+                    <p:cTn id="39" fill="hold">
+                      <p:stCondLst>
+                        <p:cond delay="indefinite"/>
+                      </p:stCondLst>
+                      <p:childTnLst>
+                        <p:par>
+                          <p:cTn id="40" fill="hold">
+                            <p:stCondLst>
+                              <p:cond delay="0"/>
+                            </p:stCondLst>
+                            <p:childTnLst>
+                              <p:par>
+                                <p:cTn id="41" presetID="1" presetClass="entr" presetSubtype="0" fill="hold" grpId="0" nodeType="clickEffect">
+                                  <p:stCondLst>
+                                    <p:cond delay="0"/>
+                                  </p:stCondLst>
+                                  <p:childTnLst>
+                                    <p:set>
+                                      <p:cBhvr>
+                                        <p:cTn id="42" dur="1" fill="hold">
+                                          <p:stCondLst>
+                                            <p:cond delay="0"/>
+                                          </p:stCondLst>
+                                        </p:cTn>
+                                        <p:tgtEl>
+                                          <p:spTgt spid="3">
+                                            <p:txEl>
+                                              <p:pRg st="9" end="9"/>
+                                            </p:txEl>
+                                          </p:spTgt>
+                                        </p:tgtEl>
+                                        <p:attrNameLst>
+                                          <p:attrName>style.visibility</p:attrName>
+                                        </p:attrNameLst>
+                                      </p:cBhvr>
+                                      <p:to>
+                                        <p:strVal val="visible"/>
+                                      </p:to>
+                                    </p:set>
+                                  </p:childTnLst>
+                                </p:cTn>
+                              </p:par>
+                            </p:childTnLst>
+                          </p:cTn>
+                        </p:par>
+                      </p:childTnLst>
+                    </p:cTn>
+                  </p:par>
+                  <p:par>
+                    <p:cTn id="43" fill="hold">
+                      <p:stCondLst>
+                        <p:cond delay="indefinite"/>
+                      </p:stCondLst>
+                      <p:childTnLst>
+                        <p:par>
+                          <p:cTn id="44" fill="hold">
+                            <p:stCondLst>
+                              <p:cond delay="0"/>
+                            </p:stCondLst>
+                            <p:childTnLst>
+                              <p:par>
+                                <p:cTn id="45" presetID="1" presetClass="entr" presetSubtype="0" fill="hold" grpId="0" nodeType="clickEffect">
+                                  <p:stCondLst>
+                                    <p:cond delay="0"/>
+                                  </p:stCondLst>
+                                  <p:childTnLst>
+                                    <p:set>
+                                      <p:cBhvr>
+                                        <p:cTn id="46" dur="1" fill="hold">
+                                          <p:stCondLst>
+                                            <p:cond delay="0"/>
+                                          </p:stCondLst>
+                                        </p:cTn>
+                                        <p:tgtEl>
+                                          <p:spTgt spid="3">
+                                            <p:txEl>
+                                              <p:pRg st="10" end="10"/>
+                                            </p:txEl>
+                                          </p:spTgt>
+                                        </p:tgtEl>
+                                        <p:attrNameLst>
+                                          <p:attrName>style.visibility</p:attrName>
+                                        </p:attrNameLst>
+                                      </p:cBhvr>
+                                      <p:to>
+                                        <p:strVal val="visible"/>
+                                      </p:to>
+                                    </p:set>
+                                  </p:childTnLst>
+                                </p:cTn>
+                              </p:par>
+                            </p:childTnLst>
+                          </p:cTn>
+                        </p:par>
+                      </p:childTnLst>
+                    </p:cTn>
+                  </p:par>
+                  <p:par>
+                    <p:cTn id="47" fill="hold">
+                      <p:stCondLst>
+                        <p:cond delay="indefinite"/>
+                      </p:stCondLst>
+                      <p:childTnLst>
+                        <p:par>
+                          <p:cTn id="48" fill="hold">
+                            <p:stCondLst>
+                              <p:cond delay="0"/>
+                            </p:stCondLst>
+                            <p:childTnLst>
+                              <p:par>
+                                <p:cTn id="49" presetID="1" presetClass="entr" presetSubtype="0" fill="hold" grpId="0" nodeType="clickEffect">
+                                  <p:stCondLst>
+                                    <p:cond delay="0"/>
+                                  </p:stCondLst>
+                                  <p:childTnLst>
+                                    <p:set>
+                                      <p:cBhvr>
+                                        <p:cTn id="50" dur="1" fill="hold">
+                                          <p:stCondLst>
+                                            <p:cond delay="0"/>
+                                          </p:stCondLst>
+                                        </p:cTn>
+                                        <p:tgtEl>
+                                          <p:spTgt spid="3">
+                                            <p:txEl>
+                                              <p:pRg st="11" end="11"/>
+                                            </p:txEl>
+                                          </p:spTgt>
+                                        </p:tgtEl>
+                                        <p:attrNameLst>
+                                          <p:attrName>style.visibility</p:attrName>
+                                        </p:attrNameLst>
+                                      </p:cBhvr>
+                                      <p:to>
+                                        <p:strVal val="visible"/>
+                                      </p:to>
+                                    </p:set>
+                                  </p:childTnLst>
+                                </p:cTn>
+                              </p:par>
+                            </p:childTnLst>
+                          </p:cTn>
+                        </p:par>
+                      </p:childTnLst>
+                    </p:cTn>
+                  </p:par>
+                </p:childTnLst>
+              </p:cTn>
+              <p:prevCondLst>
+                <p:cond evt="onPrev" delay="0">
+                  <p:tgtEl>
+                    <p:sldTgt/>
+                  </p:tgtEl>
+                </p:cond>
+              </p:prevCondLst>
+              <p:nextCondLst>
+                <p:cond evt="onNext" delay="0">
+                  <p:tgtEl>
+                    <p:sldTgt/>
+                  </p:tgtEl>
+                </p:cond>
+              </p:nextCondLst>
+            </p:seq>
+          </p:childTnLst>
+        </p:cTn>
+      </p:par>
+    </p:tnLst>
+    <p:bldLst>
+      <p:bldP spid="3" grpId="0" uiExpand="1" build="p"/>
+    </p:bldLst>
+  </p:timing>
+</p:sld>
+</file>
+
+<file path=ppt/slides/slide27.xml><?xml version="1.0" encoding="utf-8"?>
+<p:sld xmlns:a="http://schemas.openxmlformats.org/drawingml/2006/main" xmlns:r="http://schemas.openxmlformats.org/officeDocument/2006/relationships" xmlns:p="http://schemas.openxmlformats.org/presentationml/2006/main">
+  <p:cSld>
+    <p:spTree>
+      <p:nvGrpSpPr>
+        <p:cNvPr id="1" name=""/>
+        <p:cNvGrpSpPr/>
+        <p:nvPr/>
+      </p:nvGrpSpPr>
+      <p:grpSpPr>
+        <a:xfrm>
+          <a:off x="0" y="0"/>
+          <a:ext cx="0" cy="0"/>
+          <a:chOff x="0" y="0"/>
+          <a:chExt cx="0" cy="0"/>
+        </a:xfrm>
+      </p:grpSpPr>
+      <p:sp>
+        <p:nvSpPr>
+          <p:cNvPr id="2" name="Title 1"/>
+          <p:cNvSpPr>
+            <a:spLocks noGrp="1"/>
+          </p:cNvSpPr>
+          <p:nvPr>
+            <p:ph type="title"/>
+          </p:nvPr>
+        </p:nvSpPr>
+        <p:spPr>
+          <a:xfrm>
+            <a:off x="722313" y="3305176"/>
+            <a:ext cx="7772400" cy="1021556"/>
+          </a:xfrm>
+        </p:spPr>
+        <p:txBody>
+          <a:bodyPr/>
+          <a:lstStyle/>
+          <a:p>
+            <a:pPr lvl="0" indent="0" marL="0">
+              <a:buNone/>
+            </a:pPr>
+            <a:r>
+              <a:rPr/>
+              <a:t>Annex</a:t>
+            </a:r>
+          </a:p>
+        </p:txBody>
+      </p:sp>
+    </p:spTree>
+  </p:cSld>
+</p:sld>
+</file>
+
+<file path=ppt/slides/slide28.xml><?xml version="1.0" encoding="utf-8"?>
+<p:sld xmlns:a="http://schemas.openxmlformats.org/drawingml/2006/main" xmlns:r="http://schemas.openxmlformats.org/officeDocument/2006/relationships" xmlns:p="http://schemas.openxmlformats.org/presentationml/2006/main">
+  <p:cSld>
+    <p:spTree>
+      <p:nvGrpSpPr>
+        <p:cNvPr id="1" name=""/>
+        <p:cNvGrpSpPr/>
+        <p:nvPr/>
+      </p:nvGrpSpPr>
+      <p:grpSpPr>
+        <a:xfrm>
+          <a:off x="0" y="0"/>
+          <a:ext cx="0" cy="0"/>
+          <a:chOff x="0" y="0"/>
+          <a:chExt cx="0" cy="0"/>
+        </a:xfrm>
+      </p:grpSpPr>
+      <p:sp>
+        <p:nvSpPr>
+          <p:cNvPr id="2" name="Title 1"/>
+          <p:cNvSpPr>
+            <a:spLocks noGrp="1"/>
+          </p:cNvSpPr>
+          <p:nvPr>
+            <p:ph type="title"/>
+          </p:nvPr>
+        </p:nvSpPr>
+        <p:spPr/>
+        <p:txBody>
+          <a:bodyPr/>
+          <a:lstStyle/>
+          <a:p>
+            <a:pPr lvl="0" indent="0" marL="0">
+              <a:buNone/>
+            </a:pPr>
+            <a:r>
+              <a:rPr/>
+              <a:t>Annex: classification CV leaderboard</a:t>
+            </a:r>
+          </a:p>
+        </p:txBody>
+      </p:sp>
+      <p:sp>
+        <p:nvSpPr>
+          <p:cNvPr id="3" name="Content Placeholder 2"/>
+          <p:cNvSpPr>
+            <a:spLocks noGrp="1"/>
+          </p:cNvSpPr>
+          <p:nvPr>
+            <p:ph idx="1"/>
+          </p:nvPr>
+        </p:nvSpPr>
+        <p:spPr/>
+        <p:txBody>
+          <a:bodyPr/>
+          <a:lstStyle/>
+          <a:p>
+            <a:pPr lvl="0" indent="0" marL="0">
+              <a:buNone/>
+            </a:pPr>
+            <a:r>
+              <a:rPr/>
+              <a:t>Selected model in main deck: </a:t>
+            </a:r>
+            <a:r>
+              <a:rPr b="1"/>
+              <a:t>logit_binned_ohe</a:t>
+            </a:r>
+            <a:r>
+              <a:rPr/>
+              <a:t>.</a:t>
+            </a:r>
+          </a:p>
+        </p:txBody>
+      </p:sp>
+    </p:spTree>
+  </p:cSld>
+</p:sld>
+</file>
+
+<file path=ppt/slides/slide29.xml><?xml version="1.0" encoding="utf-8"?>
+<p:sld xmlns:a="http://schemas.openxmlformats.org/drawingml/2006/main" xmlns:r="http://schemas.openxmlformats.org/officeDocument/2006/relationships" xmlns:p="http://schemas.openxmlformats.org/presentationml/2006/main">
+  <p:cSld>
+    <p:spTree>
+      <p:nvGrpSpPr>
+        <p:cNvPr id="1" name=""/>
+        <p:cNvGrpSpPr/>
+        <p:nvPr/>
+      </p:nvGrpSpPr>
+      <p:grpSpPr>
+        <a:xfrm>
+          <a:off x="0" y="0"/>
+          <a:ext cx="0" cy="0"/>
+          <a:chOff x="0" y="0"/>
+          <a:chExt cx="0" cy="0"/>
+        </a:xfrm>
+      </p:grpSpPr>
+      <p:sp>
+        <p:nvSpPr>
+          <p:cNvPr id="2" name="Title 1"/>
+          <p:cNvSpPr>
+            <a:spLocks noGrp="1"/>
+          </p:cNvSpPr>
+          <p:nvPr>
+            <p:ph type="title"/>
+          </p:nvPr>
+        </p:nvSpPr>
+        <p:spPr/>
+        <p:txBody>
+          <a:bodyPr/>
+          <a:lstStyle/>
+          <a:p>
+            <a:pPr lvl="0" indent="0" marL="0">
+              <a:buNone/>
+            </a:pPr>
+            <a:r>
+              <a:rPr/>
+              <a:t>Annex: regression CV leaderboard</a:t>
+            </a:r>
+          </a:p>
+        </p:txBody>
+      </p:sp>
+      <p:sp>
+        <p:nvSpPr>
+          <p:cNvPr id="3" name="Content Placeholder 2"/>
+          <p:cNvSpPr>
+            <a:spLocks noGrp="1"/>
+          </p:cNvSpPr>
+          <p:nvPr>
+            <p:ph idx="1"/>
+          </p:nvPr>
+        </p:nvSpPr>
+        <p:spPr/>
+        <p:txBody>
+          <a:bodyPr/>
+          <a:lstStyle/>
+          <a:p>
+            <a:pPr lvl="0" indent="0" marL="0">
+              <a:buNone/>
+            </a:pPr>
+            <a:r>
+              <a:rPr/>
+              <a:t>Selected model in main deck: </a:t>
+            </a:r>
+            <a:r>
+              <a:rPr b="1"/>
+              <a:t>classic_linear_standard_scaler</a:t>
+            </a:r>
+            <a:r>
+              <a:rPr/>
+              <a:t>.</a:t>
+            </a:r>
+          </a:p>
+        </p:txBody>
+      </p:sp>
+    </p:spTree>
+  </p:cSld>
+</p:sld>
+</file>
+
+<file path=ppt/slides/slide3.xml><?xml version="1.0" encoding="utf-8"?>
+<p:sld xmlns:a="http://schemas.openxmlformats.org/drawingml/2006/main" xmlns:r="http://schemas.openxmlformats.org/officeDocument/2006/relationships" xmlns:p="http://schemas.openxmlformats.org/presentationml/2006/main">
+  <p:cSld>
+    <p:spTree>
+      <p:nvGrpSpPr>
+        <p:cNvPr id="1" name=""/>
+        <p:cNvGrpSpPr/>
+        <p:nvPr/>
+      </p:nvGrpSpPr>
+      <p:grpSpPr>
+        <a:xfrm>
+          <a:off x="0" y="0"/>
+          <a:ext cx="0" cy="0"/>
+          <a:chOff x="0" y="0"/>
+          <a:chExt cx="0" cy="0"/>
+        </a:xfrm>
+      </p:grpSpPr>
+      <p:sp>
+        <p:nvSpPr>
+          <p:cNvPr id="2" name="Title 1"/>
+          <p:cNvSpPr>
+            <a:spLocks noGrp="1"/>
+          </p:cNvSpPr>
+          <p:nvPr>
+            <p:ph type="title"/>
+          </p:nvPr>
+        </p:nvSpPr>
+        <p:spPr/>
+        <p:txBody>
+          <a:bodyPr/>
+          <a:lstStyle/>
+          <a:p>
+            <a:pPr lvl="0" indent="0" marL="0">
+              <a:buNone/>
+            </a:pPr>
+            <a:r>
+              <a:rPr/>
+              <a:t>Agenda</a:t>
+            </a:r>
+          </a:p>
+        </p:txBody>
+      </p:sp>
+      <p:sp>
+        <p:nvSpPr>
+          <p:cNvPr id="3" name="Content Placeholder 2"/>
+          <p:cNvSpPr>
+            <a:spLocks noGrp="1"/>
+          </p:cNvSpPr>
+          <p:nvPr>
+            <p:ph idx="1"/>
+          </p:nvPr>
+        </p:nvSpPr>
+        <p:spPr/>
+        <p:txBody>
+          <a:bodyPr/>
+          <a:lstStyle/>
+          <a:p>
+            <a:pPr lvl="0" indent="-342900" marL="342900">
+              <a:buAutoNum type="arabicPeriod"/>
+            </a:pPr>
+            <a:r>
+              <a:rPr/>
+              <a:t>Business framing and process assumptions</a:t>
+            </a:r>
+          </a:p>
+          <a:p>
+            <a:pPr lvl="0" indent="-342900" marL="342900">
+              <a:buAutoNum type="arabicPeriod"/>
+            </a:pPr>
+            <a:r>
+              <a:rPr/>
+              <a:t>Dataset and target overview</a:t>
+            </a:r>
+          </a:p>
+          <a:p>
+            <a:pPr lvl="0" indent="-342900" marL="342900">
+              <a:buAutoNum type="arabicPeriod"/>
+            </a:pPr>
+            <a:r>
+              <a:rPr/>
+              <a:t>EDA findings that matter for prioritization and forecasting</a:t>
+            </a:r>
+          </a:p>
+          <a:p>
+            <a:pPr lvl="0" indent="-342900" marL="342900">
+              <a:buAutoNum type="arabicPeriod"/>
+            </a:pPr>
+            <a:r>
+              <a:rPr/>
+              <a:t>Modelling approach and model outputs</a:t>
+            </a:r>
+          </a:p>
+          <a:p>
+            <a:pPr lvl="0" indent="-342900" marL="342900">
+              <a:buAutoNum type="arabicPeriod"/>
+            </a:pPr>
+            <a:r>
+              <a:rPr/>
+              <a:t>Application simulations</a:t>
+            </a:r>
+          </a:p>
+          <a:p>
+            <a:pPr lvl="0" indent="-342900" marL="342900">
+              <a:buAutoNum type="arabicPeriod"/>
+            </a:pPr>
+            <a:r>
+              <a:rPr/>
+              <a:t>Conclusions and next steps</a:t>
+            </a:r>
+          </a:p>
+        </p:txBody>
+      </p:sp>
+    </p:spTree>
+  </p:cSld>
+  <p:timing>
+    <p:tnLst>
+      <p:par>
+        <p:cTn id="1" dur="indefinite" restart="never" nodeType="tmRoot">
+          <p:childTnLst>
+            <p:seq concurrent="1" nextAc="seek">
+              <p:cTn id="2" dur="indefinite" nodeType="mainSeq">
+                <p:childTnLst>
+                  <p:par>
+                    <p:cTn id="3" fill="hold">
+                      <p:stCondLst>
+                        <p:cond delay="indefinite"/>
+                      </p:stCondLst>
+                      <p:childTnLst>
+                        <p:par>
+                          <p:cTn id="4" fill="hold">
+                            <p:stCondLst>
+                              <p:cond delay="0"/>
+                            </p:stCondLst>
+                            <p:childTnLst>
+                              <p:par>
+                                <p:cTn id="5" presetID="1" presetClass="entr" presetSubtype="0" fill="hold" grpId="0" nodeType="clickEffect">
+                                  <p:stCondLst>
+                                    <p:cond delay="0"/>
+                                  </p:stCondLst>
+                                  <p:childTnLst>
+                                    <p:set>
+                                      <p:cBhvr>
+                                        <p:cTn id="6" dur="1" fill="hold">
+                                          <p:stCondLst>
+                                            <p:cond delay="0"/>
+                                          </p:stCondLst>
+                                        </p:cTn>
+                                        <p:tgtEl>
+                                          <p:spTgt spid="3">
+                                            <p:txEl>
+                                              <p:pRg st="0" end="0"/>
+                                            </p:txEl>
+                                          </p:spTgt>
+                                        </p:tgtEl>
+                                        <p:attrNameLst>
+                                          <p:attrName>style.visibility</p:attrName>
+                                        </p:attrNameLst>
+                                      </p:cBhvr>
+                                      <p:to>
+                                        <p:strVal val="visible"/>
+                                      </p:to>
+                                    </p:set>
+                                  </p:childTnLst>
+                                </p:cTn>
+                              </p:par>
+                            </p:childTnLst>
+                          </p:cTn>
+                        </p:par>
+                      </p:childTnLst>
+                    </p:cTn>
+                  </p:par>
+                  <p:par>
+                    <p:cTn id="7" fill="hold">
+                      <p:stCondLst>
+                        <p:cond delay="indefinite"/>
+                      </p:stCondLst>
+                      <p:childTnLst>
+                        <p:par>
+                          <p:cTn id="8" fill="hold">
+                            <p:stCondLst>
+                              <p:cond delay="0"/>
+                            </p:stCondLst>
+                            <p:childTnLst>
+                              <p:par>
+                                <p:cTn id="9" presetID="1" presetClass="entr" presetSubtype="0" fill="hold" grpId="0" nodeType="clickEffect">
+                                  <p:stCondLst>
+                                    <p:cond delay="0"/>
+                                  </p:stCondLst>
+                                  <p:childTnLst>
+                                    <p:set>
+                                      <p:cBhvr>
+                                        <p:cTn id="10" dur="1" fill="hold">
+                                          <p:stCondLst>
+                                            <p:cond delay="0"/>
+                                          </p:stCondLst>
+                                        </p:cTn>
+                                        <p:tgtEl>
+                                          <p:spTgt spid="3">
+                                            <p:txEl>
+                                              <p:pRg st="1" end="1"/>
+                                            </p:txEl>
+                                          </p:spTgt>
+                                        </p:tgtEl>
+                                        <p:attrNameLst>
+                                          <p:attrName>style.visibility</p:attrName>
+                                        </p:attrNameLst>
+                                      </p:cBhvr>
+                                      <p:to>
+                                        <p:strVal val="visible"/>
+                                      </p:to>
+                                    </p:set>
+                                  </p:childTnLst>
+                                </p:cTn>
+                              </p:par>
+                            </p:childTnLst>
+                          </p:cTn>
+                        </p:par>
+                      </p:childTnLst>
+                    </p:cTn>
+                  </p:par>
+                  <p:par>
+                    <p:cTn id="11" fill="hold">
+                      <p:stCondLst>
+                        <p:cond delay="indefinite"/>
+                      </p:stCondLst>
+                      <p:childTnLst>
+                        <p:par>
+                          <p:cTn id="12" fill="hold">
+                            <p:stCondLst>
+                              <p:cond delay="0"/>
+                            </p:stCondLst>
+                            <p:childTnLst>
+                              <p:par>
+                                <p:cTn id="13" presetID="1" presetClass="entr" presetSubtype="0" fill="hold" grpId="0" nodeType="clickEffect">
+                                  <p:stCondLst>
+                                    <p:cond delay="0"/>
+                                  </p:stCondLst>
+                                  <p:childTnLst>
+                                    <p:set>
+                                      <p:cBhvr>
+                                        <p:cTn id="14" dur="1" fill="hold">
+                                          <p:stCondLst>
+                                            <p:cond delay="0"/>
+                                          </p:stCondLst>
+                                        </p:cTn>
+                                        <p:tgtEl>
+                                          <p:spTgt spid="3">
+                                            <p:txEl>
+                                              <p:pRg st="2" end="2"/>
+                                            </p:txEl>
+                                          </p:spTgt>
+                                        </p:tgtEl>
+                                        <p:attrNameLst>
+                                          <p:attrName>style.visibility</p:attrName>
+                                        </p:attrNameLst>
+                                      </p:cBhvr>
+                                      <p:to>
+                                        <p:strVal val="visible"/>
+                                      </p:to>
+                                    </p:set>
+                                  </p:childTnLst>
+                                </p:cTn>
+                              </p:par>
+                            </p:childTnLst>
+                          </p:cTn>
+                        </p:par>
+                      </p:childTnLst>
+                    </p:cTn>
+                  </p:par>
+                  <p:par>
+                    <p:cTn id="15" fill="hold">
+                      <p:stCondLst>
+                        <p:cond delay="indefinite"/>
+                      </p:stCondLst>
+                      <p:childTnLst>
+                        <p:par>
+                          <p:cTn id="16" fill="hold">
+                            <p:stCondLst>
+                              <p:cond delay="0"/>
+                            </p:stCondLst>
+                            <p:childTnLst>
+                              <p:par>
+                                <p:cTn id="17" presetID="1" presetClass="entr" presetSubtype="0" fill="hold" grpId="0" nodeType="clickEffect">
+                                  <p:stCondLst>
+                                    <p:cond delay="0"/>
+                                  </p:stCondLst>
+                                  <p:childTnLst>
+                                    <p:set>
+                                      <p:cBhvr>
+                                        <p:cTn id="18" dur="1" fill="hold">
+                                          <p:stCondLst>
+                                            <p:cond delay="0"/>
+                                          </p:stCondLst>
+                                        </p:cTn>
+                                        <p:tgtEl>
+                                          <p:spTgt spid="3">
+                                            <p:txEl>
+                                              <p:pRg st="3" end="3"/>
+                                            </p:txEl>
+                                          </p:spTgt>
+                                        </p:tgtEl>
+                                        <p:attrNameLst>
+                                          <p:attrName>style.visibility</p:attrName>
+                                        </p:attrNameLst>
+                                      </p:cBhvr>
+                                      <p:to>
+                                        <p:strVal val="visible"/>
+                                      </p:to>
+                                    </p:set>
+                                  </p:childTnLst>
+                                </p:cTn>
+                              </p:par>
+                            </p:childTnLst>
+                          </p:cTn>
+                        </p:par>
+                      </p:childTnLst>
+                    </p:cTn>
+                  </p:par>
+                  <p:par>
+                    <p:cTn id="19" fill="hold">
+                      <p:stCondLst>
+                        <p:cond delay="indefinite"/>
+                      </p:stCondLst>
+                      <p:childTnLst>
+                        <p:par>
+                          <p:cTn id="20" fill="hold">
+                            <p:stCondLst>
+                              <p:cond delay="0"/>
+                            </p:stCondLst>
+                            <p:childTnLst>
+                              <p:par>
+                                <p:cTn id="21" presetID="1" presetClass="entr" presetSubtype="0" fill="hold" grpId="0" nodeType="clickEffect">
+                                  <p:stCondLst>
+                                    <p:cond delay="0"/>
+                                  </p:stCondLst>
+                                  <p:childTnLst>
+                                    <p:set>
+                                      <p:cBhvr>
+                                        <p:cTn id="22" dur="1" fill="hold">
+                                          <p:stCondLst>
+                                            <p:cond delay="0"/>
+                                          </p:stCondLst>
+                                        </p:cTn>
+                                        <p:tgtEl>
+                                          <p:spTgt spid="3">
+                                            <p:txEl>
+                                              <p:pRg st="4" end="4"/>
+                                            </p:txEl>
+                                          </p:spTgt>
+                                        </p:tgtEl>
+                                        <p:attrNameLst>
+                                          <p:attrName>style.visibility</p:attrName>
+                                        </p:attrNameLst>
+                                      </p:cBhvr>
+                                      <p:to>
+                                        <p:strVal val="visible"/>
+                                      </p:to>
+                                    </p:set>
+                                  </p:childTnLst>
+                                </p:cTn>
+                              </p:par>
+                            </p:childTnLst>
+                          </p:cTn>
+                        </p:par>
+                      </p:childTnLst>
+                    </p:cTn>
+                  </p:par>
+                  <p:par>
+                    <p:cTn id="23" fill="hold">
+                      <p:stCondLst>
+                        <p:cond delay="indefinite"/>
+                      </p:stCondLst>
+                      <p:childTnLst>
+                        <p:par>
+                          <p:cTn id="24" fill="hold">
+                            <p:stCondLst>
+                              <p:cond delay="0"/>
+                            </p:stCondLst>
+                            <p:childTnLst>
+                              <p:par>
+                                <p:cTn id="25" presetID="1" presetClass="entr" presetSubtype="0" fill="hold" grpId="0" nodeType="clickEffect">
+                                  <p:stCondLst>
+                                    <p:cond delay="0"/>
+                                  </p:stCondLst>
+                                  <p:childTnLst>
+                                    <p:set>
+                                      <p:cBhvr>
+                                        <p:cTn id="26" dur="1" fill="hold">
+                                          <p:stCondLst>
+                                            <p:cond delay="0"/>
+                                          </p:stCondLst>
+                                        </p:cTn>
+                                        <p:tgtEl>
+                                          <p:spTgt spid="3">
+                                            <p:txEl>
+                                              <p:pRg st="5" end="5"/>
+                                            </p:txEl>
+                                          </p:spTgt>
+                                        </p:tgtEl>
+                                        <p:attrNameLst>
+                                          <p:attrName>style.visibility</p:attrName>
+                                        </p:attrNameLst>
+                                      </p:cBhvr>
+                                      <p:to>
+                                        <p:strVal val="visible"/>
+                                      </p:to>
+                                    </p:set>
+                                  </p:childTnLst>
+                                </p:cTn>
+                              </p:par>
+                            </p:childTnLst>
+                          </p:cTn>
+                        </p:par>
+                      </p:childTnLst>
+                    </p:cTn>
+                  </p:par>
+                </p:childTnLst>
+              </p:cTn>
+              <p:prevCondLst>
+                <p:cond evt="onPrev" delay="0">
+                  <p:tgtEl>
+                    <p:sldTgt/>
+                  </p:tgtEl>
+                </p:cond>
+              </p:prevCondLst>
+              <p:nextCondLst>
+                <p:cond evt="onNext" delay="0">
+                  <p:tgtEl>
+                    <p:sldTgt/>
+                  </p:tgtEl>
+                </p:cond>
+              </p:nextCondLst>
+            </p:seq>
+          </p:childTnLst>
+        </p:cTn>
+      </p:par>
+    </p:tnLst>
+    <p:bldLst>
+      <p:bldP spid="3" grpId="0" uiExpand="1" build="p"/>
+    </p:bldLst>
+  </p:timing>
+</p:sld>
+</file>
+
+<file path=ppt/slides/slide30.xml><?xml version="1.0" encoding="utf-8"?>
+<p:sld xmlns:a="http://schemas.openxmlformats.org/drawingml/2006/main" xmlns:r="http://schemas.openxmlformats.org/officeDocument/2006/relationships" xmlns:p="http://schemas.openxmlformats.org/presentationml/2006/main">
+  <p:cSld>
+    <p:spTree>
+      <p:nvGrpSpPr>
+        <p:cNvPr id="1" name=""/>
+        <p:cNvGrpSpPr/>
+        <p:nvPr/>
+      </p:nvGrpSpPr>
+      <p:grpSpPr>
+        <a:xfrm>
+          <a:off x="0" y="0"/>
+          <a:ext cx="0" cy="0"/>
+          <a:chOff x="0" y="0"/>
+          <a:chExt cx="0" cy="0"/>
+        </a:xfrm>
+      </p:grpSpPr>
+      <p:sp>
+        <p:nvSpPr>
+          <p:cNvPr id="2" name="Title 1"/>
+          <p:cNvSpPr>
+            <a:spLocks noGrp="1"/>
+          </p:cNvSpPr>
+          <p:nvPr>
+            <p:ph type="title"/>
+          </p:nvPr>
+        </p:nvSpPr>
+        <p:spPr>
+          <a:xfrm>
+            <a:off x="722313" y="3305176"/>
+            <a:ext cx="7772400" cy="1021556"/>
+          </a:xfrm>
+        </p:spPr>
+        <p:txBody>
+          <a:bodyPr/>
+          <a:lstStyle/>
+          <a:p>
+            <a:pPr lvl="0" indent="0" marL="0">
+              <a:buNone/>
+            </a:pPr>
+            <a:r>
+              <a:rPr/>
+              <a:t>Thank you</a:t>
+            </a:r>
+          </a:p>
+        </p:txBody>
+      </p:sp>
+    </p:spTree>
+  </p:cSld>
+</p:sld>
+</file>
+
+<file path=ppt/slides/slide31.xml><?xml version="1.0" encoding="utf-8"?>
+<p:sld xmlns:a="http://schemas.openxmlformats.org/drawingml/2006/main" xmlns:r="http://schemas.openxmlformats.org/officeDocument/2006/relationships" xmlns:p="http://schemas.openxmlformats.org/presentationml/2006/main">
+  <p:cSld>
+    <p:spTree>
+      <p:nvGrpSpPr>
+        <p:cNvPr id="1" name=""/>
+        <p:cNvGrpSpPr/>
+        <p:nvPr/>
+      </p:nvGrpSpPr>
+      <p:grpSpPr>
+        <a:xfrm>
+          <a:off x="0" y="0"/>
+          <a:ext cx="0" cy="0"/>
+          <a:chOff x="0" y="0"/>
+          <a:chExt cx="0" cy="0"/>
+        </a:xfrm>
+      </p:grpSpPr>
+      <p:sp>
+        <p:nvSpPr>
+          <p:cNvPr id="3" name="Content Placeholder 2"/>
+          <p:cNvSpPr>
+            <a:spLocks noGrp="1"/>
+          </p:cNvSpPr>
+          <p:nvPr>
+            <p:ph idx="1"/>
+          </p:nvPr>
+        </p:nvSpPr>
+        <p:spPr/>
+        <p:txBody>
+          <a:bodyPr/>
+          <a:lstStyle/>
+          <a:p>
+            <a:pPr lvl="0" indent="0" marL="0">
+              <a:buNone/>
+            </a:pPr>
+            <a:r>
+              <a:rPr/>
+              <a:t>Questions, comments, and feedback are welcome!</a:t>
+            </a:r>
+          </a:p>
+        </p:txBody>
+      </p:sp>
+    </p:spTree>
+  </p:cSld>
+</p:sld>
+</file>
+
+<file path=ppt/slides/slide4.xml><?xml version="1.0" encoding="utf-8"?>
+<p:sld xmlns:a="http://schemas.openxmlformats.org/drawingml/2006/main" xmlns:r="http://schemas.openxmlformats.org/officeDocument/2006/relationships" xmlns:p="http://schemas.openxmlformats.org/presentationml/2006/main">
+  <p:cSld>
+    <p:spTree>
+      <p:nvGrpSpPr>
+        <p:cNvPr id="1" name=""/>
+        <p:cNvGrpSpPr/>
+        <p:nvPr/>
+      </p:nvGrpSpPr>
+      <p:grpSpPr>
+        <a:xfrm>
+          <a:off x="0" y="0"/>
+          <a:ext cx="0" cy="0"/>
+          <a:chOff x="0" y="0"/>
+          <a:chExt cx="0" cy="0"/>
+        </a:xfrm>
+      </p:grpSpPr>
+      <p:sp>
+        <p:nvSpPr>
+          <p:cNvPr id="2" name="Title 1"/>
+          <p:cNvSpPr>
+            <a:spLocks noGrp="1"/>
+          </p:cNvSpPr>
+          <p:nvPr>
+            <p:ph type="title"/>
+          </p:nvPr>
+        </p:nvSpPr>
+        <p:spPr>
+          <a:xfrm>
+            <a:off x="722313" y="3305176"/>
+            <a:ext cx="7772400" cy="1021556"/>
+          </a:xfrm>
+        </p:spPr>
+        <p:txBody>
+          <a:bodyPr/>
+          <a:lstStyle/>
+          <a:p>
+            <a:pPr lvl="0" indent="0" marL="0">
+              <a:buNone/>
+            </a:pPr>
+            <a:r>
+              <a:rPr/>
+              <a:t>Business framing</a:t>
+            </a:r>
+          </a:p>
+        </p:txBody>
+      </p:sp>
+    </p:spTree>
+  </p:cSld>
+</p:sld>
+</file>
+
+<file path=ppt/slides/slide5.xml><?xml version="1.0" encoding="utf-8"?>
+<p:sld xmlns:a="http://schemas.openxmlformats.org/drawingml/2006/main" xmlns:r="http://schemas.openxmlformats.org/officeDocument/2006/relationships" xmlns:p="http://schemas.openxmlformats.org/presentationml/2006/main">
+  <p:cSld>
+    <p:spTree>
+      <p:nvGrpSpPr>
+        <p:cNvPr id="1" name=""/>
+        <p:cNvGrpSpPr/>
+        <p:nvPr/>
+      </p:nvGrpSpPr>
+      <p:grpSpPr>
+        <a:xfrm>
+          <a:off x="0" y="0"/>
+          <a:ext cx="0" cy="0"/>
+          <a:chOff x="0" y="0"/>
+          <a:chExt cx="0" cy="0"/>
+        </a:xfrm>
+      </p:grpSpPr>
+      <p:sp>
+        <p:nvSpPr>
+          <p:cNvPr id="2" name="Title 1"/>
+          <p:cNvSpPr>
+            <a:spLocks noGrp="1"/>
+          </p:cNvSpPr>
+          <p:nvPr>
+            <p:ph type="title"/>
+          </p:nvPr>
+        </p:nvSpPr>
+        <p:spPr/>
+        <p:txBody>
+          <a:bodyPr/>
+          <a:lstStyle/>
+          <a:p>
+            <a:pPr lvl="0" indent="0" marL="0">
+              <a:buNone/>
+            </a:pPr>
+            <a:r>
+              <a:rPr/>
+              <a:t>The sales process is non-linear, and the data captures its current state</a:t>
+            </a:r>
+          </a:p>
+        </p:txBody>
+      </p:sp>
+      <p:sp>
+        <p:nvSpPr>
+          <p:cNvPr id="3" name="Content Placeholder 2"/>
+          <p:cNvSpPr>
+            <a:spLocks noGrp="1"/>
+          </p:cNvSpPr>
+          <p:nvPr>
+            <p:ph idx="1" sz="half"/>
+          </p:nvPr>
+        </p:nvSpPr>
+        <p:spPr/>
+        <p:txBody>
+          <a:bodyPr/>
+          <a:lstStyle/>
+          <a:p>
+            <a:pPr lvl="0"/>
+            <a:r>
+              <a:rPr/>
+              <a:t>The sales process tracks auto-parts opportunities across both new leads and existing customers.</a:t>
+            </a:r>
+          </a:p>
+          <a:p>
+            <a:pPr lvl="0"/>
+            <a:r>
+              <a:rPr/>
+              <a:t>Opportunities transition between the stages Identified / Qualifying, Qualified / Validating, and Validated / Gaining Agreement.</a:t>
+            </a:r>
+          </a:p>
+          <a:p>
+            <a:pPr lvl="1"/>
+            <a:r>
+              <a:rPr/>
+              <a:t>Opportunities can move between stages in either direction, and they can also stall within a stage for extended periods.</a:t>
+            </a:r>
+          </a:p>
+          <a:p>
+            <a:pPr lvl="1"/>
+            <a:r>
+              <a:rPr/>
+              <a:t>Each opportunity ultimately resolves as either a win or a loss.</a:t>
+            </a:r>
+          </a:p>
+          <a:p>
+            <a:pPr lvl="1"/>
+            <a:r>
+              <a:rPr/>
+              <a:t>Sales teams maintain an estimated deal value, which is updated as the opportunity progresses.</a:t>
+            </a:r>
+          </a:p>
+        </p:txBody>
+      </p:sp>
+      <p:pic>
+        <p:nvPicPr>
+          <p:cNvPr descr="assets/process.png" id="0" name="Picture 1"/>
+          <p:cNvPicPr>
+            <a:picLocks noGrp="1" noChangeAspect="1"/>
+          </p:cNvPicPr>
+          <p:nvPr/>
+        </p:nvPicPr>
+        <p:blipFill>
+          <a:blip r:embed="rId2"/>
+          <a:stretch>
+            <a:fillRect/>
+          </a:stretch>
+        </p:blipFill>
+        <p:spPr bwMode="auto">
+          <a:xfrm>
+            <a:off x="4978400" y="1193800"/>
+            <a:ext cx="3390900" cy="3390900"/>
+          </a:xfrm>
+          <a:prstGeom prst="rect">
+            <a:avLst/>
+          </a:prstGeom>
+          <a:noFill/>
+          <a:ln w="9525">
+            <a:noFill/>
+            <a:headEnd/>
+            <a:tailEnd/>
+          </a:ln>
+        </p:spPr>
+      </p:pic>
+    </p:spTree>
+  </p:cSld>
+  <p:timing>
+    <p:tnLst>
+      <p:par>
+        <p:cTn id="1" dur="indefinite" restart="never" nodeType="tmRoot">
+          <p:childTnLst>
+            <p:seq concurrent="1" nextAc="seek">
+              <p:cTn id="2" dur="indefinite" nodeType="mainSeq">
+                <p:childTnLst>
+                  <p:par>
+                    <p:cTn id="3" fill="hold">
+                      <p:stCondLst>
+                        <p:cond delay="indefinite"/>
+                      </p:stCondLst>
+                      <p:childTnLst>
+                        <p:par>
+                          <p:cTn id="4" fill="hold">
+                            <p:stCondLst>
+                              <p:cond delay="0"/>
+                            </p:stCondLst>
+                            <p:childTnLst>
+                              <p:par>
+                                <p:cTn id="5" presetID="1" presetClass="entr" presetSubtype="0" fill="hold" grpId="0" nodeType="clickEffect">
+                                  <p:stCondLst>
+                                    <p:cond delay="0"/>
+                                  </p:stCondLst>
+                                  <p:childTnLst>
+                                    <p:set>
+                                      <p:cBhvr>
+                                        <p:cTn id="6" dur="1" fill="hold">
+                                          <p:stCondLst>
+                                            <p:cond delay="0"/>
+                                          </p:stCondLst>
+                                        </p:cTn>
+                                        <p:tgtEl>
+                                          <p:spTgt spid="3">
+                                            <p:txEl>
+                                              <p:pRg st="0" end="0"/>
+                                            </p:txEl>
+                                          </p:spTgt>
+                                        </p:tgtEl>
+                                        <p:attrNameLst>
+                                          <p:attrName>style.visibility</p:attrName>
+                                        </p:attrNameLst>
+                                      </p:cBhvr>
+                                      <p:to>
+                                        <p:strVal val="visible"/>
+                                      </p:to>
+                                    </p:set>
+                                  </p:childTnLst>
+                                </p:cTn>
+                              </p:par>
+                            </p:childTnLst>
+                          </p:cTn>
+                        </p:par>
+                      </p:childTnLst>
+                    </p:cTn>
+                  </p:par>
+                  <p:par>
+                    <p:cTn id="7" fill="hold">
+                      <p:stCondLst>
+                        <p:cond delay="indefinite"/>
+                      </p:stCondLst>
+                      <p:childTnLst>
+                        <p:par>
+                          <p:cTn id="8" fill="hold">
+                            <p:stCondLst>
+                              <p:cond delay="0"/>
+                            </p:stCondLst>
+                            <p:childTnLst>
+                              <p:par>
+                                <p:cTn id="9" presetID="1" presetClass="entr" presetSubtype="0" fill="hold" grpId="0" nodeType="clickEffect">
+                                  <p:stCondLst>
+                                    <p:cond delay="0"/>
+                                  </p:stCondLst>
+                                  <p:childTnLst>
+                                    <p:set>
+                                      <p:cBhvr>
+                                        <p:cTn id="10" dur="1" fill="hold">
+                                          <p:stCondLst>
+                                            <p:cond delay="0"/>
+                                          </p:stCondLst>
+                                        </p:cTn>
+                                        <p:tgtEl>
+                                          <p:spTgt spid="3">
+                                            <p:txEl>
+                                              <p:pRg st="1" end="1"/>
+                                            </p:txEl>
+                                          </p:spTgt>
+                                        </p:tgtEl>
+                                        <p:attrNameLst>
+                                          <p:attrName>style.visibility</p:attrName>
+                                        </p:attrNameLst>
+                                      </p:cBhvr>
+                                      <p:to>
+                                        <p:strVal val="visible"/>
+                                      </p:to>
+                                    </p:set>
+                                  </p:childTnLst>
+                                </p:cTn>
+                              </p:par>
+                            </p:childTnLst>
+                          </p:cTn>
+                        </p:par>
+                      </p:childTnLst>
+                    </p:cTn>
+                  </p:par>
+                  <p:par>
+                    <p:cTn id="11" fill="hold">
+                      <p:stCondLst>
+                        <p:cond delay="indefinite"/>
+                      </p:stCondLst>
+                      <p:childTnLst>
+                        <p:par>
+                          <p:cTn id="12" fill="hold">
+                            <p:stCondLst>
+                              <p:cond delay="0"/>
+                            </p:stCondLst>
+                            <p:childTnLst>
+                              <p:par>
+                                <p:cTn id="13" presetID="1" presetClass="entr" presetSubtype="0" fill="hold" grpId="0" nodeType="clickEffect">
+                                  <p:stCondLst>
+                                    <p:cond delay="0"/>
+                                  </p:stCondLst>
+                                  <p:childTnLst>
+                                    <p:set>
+                                      <p:cBhvr>
+                                        <p:cTn id="14" dur="1" fill="hold">
+                                          <p:stCondLst>
+                                            <p:cond delay="0"/>
+                                          </p:stCondLst>
+                                        </p:cTn>
+                                        <p:tgtEl>
+                                          <p:spTgt spid="3">
+                                            <p:txEl>
+                                              <p:pRg st="2" end="2"/>
+                                            </p:txEl>
+                                          </p:spTgt>
+                                        </p:tgtEl>
+                                        <p:attrNameLst>
+                                          <p:attrName>style.visibility</p:attrName>
+                                        </p:attrNameLst>
+                                      </p:cBhvr>
+                                      <p:to>
+                                        <p:strVal val="visible"/>
+                                      </p:to>
+                                    </p:set>
+                                  </p:childTnLst>
+                                </p:cTn>
+                              </p:par>
+                            </p:childTnLst>
+                          </p:cTn>
+                        </p:par>
+                      </p:childTnLst>
+                    </p:cTn>
+                  </p:par>
+                  <p:par>
+                    <p:cTn id="15" fill="hold">
+                      <p:stCondLst>
+                        <p:cond delay="indefinite"/>
+                      </p:stCondLst>
+                      <p:childTnLst>
+                        <p:par>
+                          <p:cTn id="16" fill="hold">
+                            <p:stCondLst>
+                              <p:cond delay="0"/>
+                            </p:stCondLst>
+                            <p:childTnLst>
+                              <p:par>
+                                <p:cTn id="17" presetID="1" presetClass="entr" presetSubtype="0" fill="hold" grpId="0" nodeType="clickEffect">
+                                  <p:stCondLst>
+                                    <p:cond delay="0"/>
+                                  </p:stCondLst>
+                                  <p:childTnLst>
+                                    <p:set>
+                                      <p:cBhvr>
+                                        <p:cTn id="18" dur="1" fill="hold">
+                                          <p:stCondLst>
+                                            <p:cond delay="0"/>
+                                          </p:stCondLst>
+                                        </p:cTn>
+                                        <p:tgtEl>
+                                          <p:spTgt spid="3">
+                                            <p:txEl>
+                                              <p:pRg st="3" end="3"/>
+                                            </p:txEl>
+                                          </p:spTgt>
+                                        </p:tgtEl>
+                                        <p:attrNameLst>
+                                          <p:attrName>style.visibility</p:attrName>
+                                        </p:attrNameLst>
+                                      </p:cBhvr>
+                                      <p:to>
+                                        <p:strVal val="visible"/>
+                                      </p:to>
+                                    </p:set>
+                                  </p:childTnLst>
+                                </p:cTn>
+                              </p:par>
+                            </p:childTnLst>
+                          </p:cTn>
+                        </p:par>
+                      </p:childTnLst>
+                    </p:cTn>
+                  </p:par>
+                  <p:par>
+                    <p:cTn id="19" fill="hold">
+                      <p:stCondLst>
+                        <p:cond delay="indefinite"/>
+                      </p:stCondLst>
+                      <p:childTnLst>
+                        <p:par>
+                          <p:cTn id="20" fill="hold">
+                            <p:stCondLst>
+                              <p:cond delay="0"/>
+                            </p:stCondLst>
+                            <p:childTnLst>
+                              <p:par>
+                                <p:cTn id="21" presetID="1" presetClass="entr" presetSubtype="0" fill="hold" grpId="0" nodeType="clickEffect">
+                                  <p:stCondLst>
+                                    <p:cond delay="0"/>
+                                  </p:stCondLst>
+                                  <p:childTnLst>
+                                    <p:set>
+                                      <p:cBhvr>
+                                        <p:cTn id="22" dur="1" fill="hold">
+                                          <p:stCondLst>
+                                            <p:cond delay="0"/>
+                                          </p:stCondLst>
+                                        </p:cTn>
+                                        <p:tgtEl>
+                                          <p:spTgt spid="3">
+                                            <p:txEl>
+                                              <p:pRg st="4" end="4"/>
+                                            </p:txEl>
+                                          </p:spTgt>
+                                        </p:tgtEl>
+                                        <p:attrNameLst>
+                                          <p:attrName>style.visibility</p:attrName>
+                                        </p:attrNameLst>
+                                      </p:cBhvr>
+                                      <p:to>
+                                        <p:strVal val="visible"/>
+                                      </p:to>
+                                    </p:set>
+                                  </p:childTnLst>
+                                </p:cTn>
+                              </p:par>
+                            </p:childTnLst>
+                          </p:cTn>
+                        </p:par>
+                      </p:childTnLst>
+                    </p:cTn>
+                  </p:par>
+                </p:childTnLst>
+              </p:cTn>
+              <p:prevCondLst>
+                <p:cond evt="onPrev" delay="0">
+                  <p:tgtEl>
+                    <p:sldTgt/>
+                  </p:tgtEl>
+                </p:cond>
+              </p:prevCondLst>
+              <p:nextCondLst>
+                <p:cond evt="onNext" delay="0">
+                  <p:tgtEl>
+                    <p:sldTgt/>
+                  </p:tgtEl>
+                </p:cond>
+              </p:nextCondLst>
+            </p:seq>
+          </p:childTnLst>
+        </p:cTn>
+      </p:par>
+    </p:tnLst>
+    <p:bldLst>
+      <p:bldP spid="3" grpId="0" uiExpand="1" build="p"/>
+    </p:bldLst>
+  </p:timing>
+</p:sld>
+</file>
+
+<file path=ppt/slides/slide6.xml><?xml version="1.0" encoding="utf-8"?>
+<p:sld xmlns:a="http://schemas.openxmlformats.org/drawingml/2006/main" xmlns:r="http://schemas.openxmlformats.org/officeDocument/2006/relationships" xmlns:p="http://schemas.openxmlformats.org/presentationml/2006/main">
+  <p:cSld>
+    <p:spTree>
+      <p:nvGrpSpPr>
+        <p:cNvPr id="1" name=""/>
+        <p:cNvGrpSpPr/>
+        <p:nvPr/>
+      </p:nvGrpSpPr>
+      <p:grpSpPr>
+        <a:xfrm>
+          <a:off x="0" y="0"/>
+          <a:ext cx="0" cy="0"/>
+          <a:chOff x="0" y="0"/>
+          <a:chExt cx="0" cy="0"/>
+        </a:xfrm>
+      </p:grpSpPr>
+      <p:sp>
+        <p:nvSpPr>
+          <p:cNvPr id="2" name="Title 1"/>
+          <p:cNvSpPr>
+            <a:spLocks noGrp="1"/>
+          </p:cNvSpPr>
+          <p:nvPr>
+            <p:ph type="title"/>
+          </p:nvPr>
+        </p:nvSpPr>
+        <p:spPr/>
+        <p:txBody>
+          <a:bodyPr/>
+          <a:lstStyle/>
+          <a:p>
+            <a:pPr lvl="0" indent="0" marL="0">
+              <a:buNone/>
+            </a:pPr>
+            <a:r>
+              <a:rPr/>
+              <a:t>Most value sits in a small share of opportunities making prioritization an important growth lever</a:t>
+            </a:r>
+          </a:p>
+        </p:txBody>
+      </p:sp>
+      <p:pic>
+        <p:nvPicPr>
+          <p:cNvPr descr="assets/eda_amount_win_rate.png" id="0" name="Picture 1"/>
+          <p:cNvPicPr>
+            <a:picLocks noGrp="1" noChangeAspect="1"/>
+          </p:cNvPicPr>
+          <p:nvPr/>
+        </p:nvPicPr>
+        <p:blipFill>
+          <a:blip r:embed="rId2"/>
+          <a:stretch>
+            <a:fillRect/>
+          </a:stretch>
+        </p:blipFill>
+        <p:spPr bwMode="auto">
+          <a:xfrm>
+            <a:off x="457200" y="1765300"/>
+            <a:ext cx="4038600" cy="2247900"/>
+          </a:xfrm>
+          <a:prstGeom prst="rect">
+            <a:avLst/>
+          </a:prstGeom>
+          <a:noFill/>
+          <a:ln w="9525">
+            <a:noFill/>
+            <a:headEnd/>
+            <a:tailEnd/>
+          </a:ln>
+        </p:spPr>
+      </p:pic>
+      <p:sp>
+        <p:nvSpPr>
+          <p:cNvPr id="4" name="Content Placeholder 3"/>
+          <p:cNvSpPr>
+            <a:spLocks noGrp="1"/>
+          </p:cNvSpPr>
+          <p:nvPr>
+            <p:ph idx="2" sz="half"/>
+          </p:nvPr>
+        </p:nvSpPr>
+        <p:spPr/>
+        <p:txBody>
+          <a:bodyPr/>
+          <a:lstStyle/>
+          <a:p>
+            <a:pPr lvl="0"/>
+            <a:r>
+              <a:rPr/>
+              <a:t>The pipeline is high-volume but low-yield: only 22.7% of opportunities convert, meaning most effort is currently misallocated.</a:t>
+            </a:r>
+          </a:p>
+          <a:p>
+            <a:pPr lvl="0"/>
+            <a:r>
+              <a:rPr/>
+              <a:t>Value is highly concentrated: the majority of opportunities are low-amount, but win rates increase materially with deal size, signaling where commercial focus should shift.</a:t>
+            </a:r>
+          </a:p>
+          <a:p>
+            <a:pPr lvl="0"/>
+            <a:r>
+              <a:rPr/>
+              <a:t>This creates a clear opportunity: → Move from volume-driven selling to value-driven prioritization, combining win propensity + deal size.</a:t>
+            </a:r>
+          </a:p>
+          <a:p>
+            <a:pPr lvl="0"/>
+            <a:r>
+              <a:rPr/>
+              <a:t>The implication is direct: → Not all opportunities should be pursued equally — targeting the right deals can lift conversion and revenue without increasing pipeline size.</a:t>
+            </a:r>
+          </a:p>
+        </p:txBody>
+      </p:sp>
+    </p:spTree>
+  </p:cSld>
+  <p:timing>
+    <p:tnLst>
+      <p:par>
+        <p:cTn id="1" dur="indefinite" restart="never" nodeType="tmRoot">
+          <p:childTnLst>
+            <p:seq concurrent="1" nextAc="seek">
+              <p:cTn id="2" dur="indefinite" nodeType="mainSeq">
+                <p:childTnLst>
+                  <p:par>
+                    <p:cTn id="3" fill="hold">
+                      <p:stCondLst>
+                        <p:cond delay="indefinite"/>
+                      </p:stCondLst>
+                      <p:childTnLst>
+                        <p:par>
+                          <p:cTn id="4" fill="hold">
+                            <p:stCondLst>
+                              <p:cond delay="0"/>
+                            </p:stCondLst>
+                            <p:childTnLst>
+                              <p:par>
+                                <p:cTn id="5" presetID="1" presetClass="entr" presetSubtype="0" fill="hold" grpId="0" nodeType="clickEffect">
+                                  <p:stCondLst>
+                                    <p:cond delay="0"/>
+                                  </p:stCondLst>
+                                  <p:childTnLst>
+                                    <p:set>
+                                      <p:cBhvr>
+                                        <p:cTn id="6" dur="1" fill="hold">
+                                          <p:stCondLst>
+                                            <p:cond delay="0"/>
+                                          </p:stCondLst>
+                                        </p:cTn>
+                                        <p:tgtEl>
+                                          <p:spTgt spid="4">
+                                            <p:txEl>
+                                              <p:pRg st="0" end="0"/>
+                                            </p:txEl>
+                                          </p:spTgt>
+                                        </p:tgtEl>
+                                        <p:attrNameLst>
+                                          <p:attrName>style.visibility</p:attrName>
+                                        </p:attrNameLst>
+                                      </p:cBhvr>
+                                      <p:to>
+                                        <p:strVal val="visible"/>
+                                      </p:to>
+                                    </p:set>
+                                  </p:childTnLst>
+                                </p:cTn>
+                              </p:par>
+                            </p:childTnLst>
+                          </p:cTn>
+                        </p:par>
+                      </p:childTnLst>
+                    </p:cTn>
+                  </p:par>
+                  <p:par>
+                    <p:cTn id="7" fill="hold">
+                      <p:stCondLst>
+                        <p:cond delay="indefinite"/>
+                      </p:stCondLst>
+                      <p:childTnLst>
+                        <p:par>
+                          <p:cTn id="8" fill="hold">
+                            <p:stCondLst>
+                              <p:cond delay="0"/>
+                            </p:stCondLst>
+                            <p:childTnLst>
+                              <p:par>
+                                <p:cTn id="9" presetID="1" presetClass="entr" presetSubtype="0" fill="hold" grpId="0" nodeType="clickEffect">
+                                  <p:stCondLst>
+                                    <p:cond delay="0"/>
+                                  </p:stCondLst>
+                                  <p:childTnLst>
+                                    <p:set>
+                                      <p:cBhvr>
+                                        <p:cTn id="10" dur="1" fill="hold">
+                                          <p:stCondLst>
+                                            <p:cond delay="0"/>
+                                          </p:stCondLst>
+                                        </p:cTn>
+                                        <p:tgtEl>
+                                          <p:spTgt spid="4">
+                                            <p:txEl>
+                                              <p:pRg st="1" end="1"/>
+                                            </p:txEl>
+                                          </p:spTgt>
+                                        </p:tgtEl>
+                                        <p:attrNameLst>
+                                          <p:attrName>style.visibility</p:attrName>
+                                        </p:attrNameLst>
+                                      </p:cBhvr>
+                                      <p:to>
+                                        <p:strVal val="visible"/>
+                                      </p:to>
+                                    </p:set>
+                                  </p:childTnLst>
+                                </p:cTn>
+                              </p:par>
+                            </p:childTnLst>
+                          </p:cTn>
+                        </p:par>
+                      </p:childTnLst>
+                    </p:cTn>
+                  </p:par>
+                  <p:par>
+                    <p:cTn id="11" fill="hold">
+                      <p:stCondLst>
+                        <p:cond delay="indefinite"/>
+                      </p:stCondLst>
+                      <p:childTnLst>
+                        <p:par>
+                          <p:cTn id="12" fill="hold">
+                            <p:stCondLst>
+                              <p:cond delay="0"/>
+                            </p:stCondLst>
+                            <p:childTnLst>
+                              <p:par>
+                                <p:cTn id="13" presetID="1" presetClass="entr" presetSubtype="0" fill="hold" grpId="0" nodeType="clickEffect">
+                                  <p:stCondLst>
+                                    <p:cond delay="0"/>
+                                  </p:stCondLst>
+                                  <p:childTnLst>
+                                    <p:set>
+                                      <p:cBhvr>
+                                        <p:cTn id="14" dur="1" fill="hold">
+                                          <p:stCondLst>
+                                            <p:cond delay="0"/>
+                                          </p:stCondLst>
+                                        </p:cTn>
+                                        <p:tgtEl>
+                                          <p:spTgt spid="4">
+                                            <p:txEl>
+                                              <p:pRg st="2" end="2"/>
+                                            </p:txEl>
+                                          </p:spTgt>
+                                        </p:tgtEl>
+                                        <p:attrNameLst>
+                                          <p:attrName>style.visibility</p:attrName>
+                                        </p:attrNameLst>
+                                      </p:cBhvr>
+                                      <p:to>
+                                        <p:strVal val="visible"/>
+                                      </p:to>
+                                    </p:set>
+                                  </p:childTnLst>
+                                </p:cTn>
+                              </p:par>
+                            </p:childTnLst>
+                          </p:cTn>
+                        </p:par>
+                      </p:childTnLst>
+                    </p:cTn>
+                  </p:par>
+                  <p:par>
+                    <p:cTn id="15" fill="hold">
+                      <p:stCondLst>
+                        <p:cond delay="indefinite"/>
+                      </p:stCondLst>
+                      <p:childTnLst>
+                        <p:par>
+                          <p:cTn id="16" fill="hold">
+                            <p:stCondLst>
+                              <p:cond delay="0"/>
+                            </p:stCondLst>
+                            <p:childTnLst>
+                              <p:par>
+                                <p:cTn id="17" presetID="1" presetClass="entr" presetSubtype="0" fill="hold" grpId="0" nodeType="clickEffect">
+                                  <p:stCondLst>
+                                    <p:cond delay="0"/>
+                                  </p:stCondLst>
+                                  <p:childTnLst>
+                                    <p:set>
+                                      <p:cBhvr>
+                                        <p:cTn id="18" dur="1" fill="hold">
+                                          <p:stCondLst>
+                                            <p:cond delay="0"/>
+                                          </p:stCondLst>
+                                        </p:cTn>
+                                        <p:tgtEl>
+                                          <p:spTgt spid="4">
+                                            <p:txEl>
+                                              <p:pRg st="3" end="3"/>
+                                            </p:txEl>
+                                          </p:spTgt>
+                                        </p:tgtEl>
+                                        <p:attrNameLst>
+                                          <p:attrName>style.visibility</p:attrName>
+                                        </p:attrNameLst>
+                                      </p:cBhvr>
+                                      <p:to>
+                                        <p:strVal val="visible"/>
+                                      </p:to>
+                                    </p:set>
+                                  </p:childTnLst>
+                                </p:cTn>
+                              </p:par>
+                            </p:childTnLst>
+                          </p:cTn>
+                        </p:par>
+                      </p:childTnLst>
+                    </p:cTn>
+                  </p:par>
+                </p:childTnLst>
+              </p:cTn>
+              <p:prevCondLst>
+                <p:cond evt="onPrev" delay="0">
+                  <p:tgtEl>
+                    <p:sldTgt/>
+                  </p:tgtEl>
+                </p:cond>
+              </p:prevCondLst>
+              <p:nextCondLst>
+                <p:cond evt="onNext" delay="0">
+                  <p:tgtEl>
+                    <p:sldTgt/>
+                  </p:tgtEl>
+                </p:cond>
+              </p:nextCondLst>
+            </p:seq>
+          </p:childTnLst>
+        </p:cTn>
+      </p:par>
+    </p:tnLst>
+    <p:bldLst>
+      <p:bldP spid="4" grpId="0" uiExpand="1" build="p"/>
+    </p:bldLst>
+  </p:timing>
+</p:sld>
+</file>
+
+<file path=ppt/slides/slide7.xml><?xml version="1.0" encoding="utf-8"?>
+<p:sld xmlns:a="http://schemas.openxmlformats.org/drawingml/2006/main" xmlns:r="http://schemas.openxmlformats.org/officeDocument/2006/relationships" xmlns:p="http://schemas.openxmlformats.org/presentationml/2006/main">
+  <p:cSld>
+    <p:spTree>
+      <p:nvGrpSpPr>
+        <p:cNvPr id="1" name=""/>
+        <p:cNvGrpSpPr/>
+        <p:nvPr/>
+      </p:nvGrpSpPr>
+      <p:grpSpPr>
+        <a:xfrm>
+          <a:off x="0" y="0"/>
+          <a:ext cx="0" cy="0"/>
+          <a:chOff x="0" y="0"/>
+          <a:chExt cx="0" cy="0"/>
+        </a:xfrm>
+      </p:grpSpPr>
+      <p:sp>
+        <p:nvSpPr>
+          <p:cNvPr id="2" name="Title 1"/>
+          <p:cNvSpPr>
+            <a:spLocks noGrp="1"/>
+          </p:cNvSpPr>
+          <p:nvPr>
+            <p:ph type="title"/>
+          </p:nvPr>
+        </p:nvSpPr>
+        <p:spPr/>
+        <p:txBody>
+          <a:bodyPr/>
+          <a:lstStyle/>
+          <a:p>
+            <a:pPr lvl="0" indent="0" marL="0">
+              <a:buNone/>
+            </a:pPr>
+            <a:r>
+              <a:rPr/>
+              <a:t>Therefore, we propose two modelling use cases: prioritization and forecasting, plus additional data-driven commercial opportunities.</a:t>
+            </a:r>
+          </a:p>
+        </p:txBody>
+      </p:sp>
+      <p:sp>
+        <p:nvSpPr>
+          <p:cNvPr id="3" name="Content Placeholder 2"/>
+          <p:cNvSpPr>
+            <a:spLocks noGrp="1"/>
+          </p:cNvSpPr>
+          <p:nvPr>
+            <p:ph idx="1" sz="half"/>
+          </p:nvPr>
+        </p:nvSpPr>
+        <p:spPr/>
+        <p:txBody>
+          <a:bodyPr/>
+          <a:lstStyle/>
+          <a:p>
+            <a:pPr lvl="0" indent="0" marL="0">
+              <a:spcBef>
+                <a:spcPts val="3000"/>
+              </a:spcBef>
+              <a:buNone/>
+            </a:pPr>
+            <a:r>
+              <a:rPr b="1"/>
+              <a:t>Selected for this project</a:t>
+            </a:r>
+          </a:p>
+          <a:p>
+            <a:pPr lvl="0"/>
+            <a:r>
+              <a:rPr b="1"/>
+              <a:t>Process prioritization</a:t>
+            </a:r>
+            <a:r>
+              <a:rPr/>
+              <a:t>: rank opportunities by win propensity and support decisions on where sales effort should focus first.</a:t>
+            </a:r>
+          </a:p>
+          <a:p>
+            <a:pPr lvl="0"/>
+            <a:r>
+              <a:rPr b="1"/>
+              <a:t>Opportunity sizing &amp; forecasting</a:t>
+            </a:r>
+            <a:r>
+              <a:rPr/>
+              <a:t>: estimate deal value and aggregate expected sales for planning, prioritization, and budget visibility.</a:t>
+            </a:r>
+          </a:p>
+        </p:txBody>
+      </p:sp>
+      <p:sp>
+        <p:nvSpPr>
+          <p:cNvPr id="4" name="Content Placeholder 3"/>
+          <p:cNvSpPr>
+            <a:spLocks noGrp="1"/>
+          </p:cNvSpPr>
+          <p:nvPr>
+            <p:ph idx="2" sz="half"/>
+          </p:nvPr>
+        </p:nvSpPr>
+        <p:spPr/>
+        <p:txBody>
+          <a:bodyPr/>
+          <a:lstStyle/>
+          <a:p>
+            <a:pPr lvl="0" indent="0" marL="0">
+              <a:spcBef>
+                <a:spcPts val="3000"/>
+              </a:spcBef>
+              <a:buNone/>
+            </a:pPr>
+            <a:r>
+              <a:rPr b="1"/>
+              <a:t>Additional opportunities identified in the data</a:t>
+            </a:r>
+          </a:p>
+          <a:p>
+            <a:pPr lvl="0"/>
+            <a:r>
+              <a:rPr b="1"/>
+              <a:t>Channel optimization</a:t>
+            </a:r>
+            <a:r>
+              <a:rPr/>
+              <a:t>: test what-if scenarios around route-to-market and engagement model choices.</a:t>
+            </a:r>
+          </a:p>
+          <a:p>
+            <a:pPr lvl="0"/>
+            <a:r>
+              <a:rPr b="1"/>
+              <a:t>Secondary market segmentation</a:t>
+            </a:r>
+            <a:r>
+              <a:rPr/>
+              <a:t>: create actionable commercial segments from predicted value and conversion potential.</a:t>
+            </a:r>
+          </a:p>
+          <a:p>
+            <a:pPr lvl="0"/>
+            <a:r>
+              <a:rPr b="1"/>
+              <a:t>Early warning systems</a:t>
+            </a:r>
+            <a:r>
+              <a:rPr/>
+              <a:t>: flag opportunities that are likely to deteriorate or stall.</a:t>
+            </a:r>
+          </a:p>
+          <a:p>
+            <a:pPr lvl="0"/>
+            <a:r>
+              <a:rPr b="1"/>
+              <a:t>Budget allocation</a:t>
+            </a:r>
+            <a:r>
+              <a:rPr/>
+              <a:t>: guide sales effort and product-focus decisions across segments, regions, and product lines.</a:t>
+            </a:r>
+          </a:p>
+        </p:txBody>
+      </p:sp>
+    </p:spTree>
+  </p:cSld>
+  <p:timing>
+    <p:tnLst>
+      <p:par>
+        <p:cTn id="1" dur="indefinite" restart="never" nodeType="tmRoot">
+          <p:childTnLst>
+            <p:seq concurrent="1" nextAc="seek">
+              <p:cTn id="2" dur="indefinite" nodeType="mainSeq">
+                <p:childTnLst>
+                  <p:par>
+                    <p:cTn id="3" fill="hold">
+                      <p:stCondLst>
+                        <p:cond delay="indefinite"/>
+                      </p:stCondLst>
+                      <p:childTnLst>
+                        <p:par>
+                          <p:cTn id="4" fill="hold">
+                            <p:stCondLst>
+                              <p:cond delay="0"/>
+                            </p:stCondLst>
+                            <p:childTnLst>
+                              <p:par>
+                                <p:cTn id="5" presetID="1" presetClass="entr" presetSubtype="0" fill="hold" grpId="0" nodeType="clickEffect">
+                                  <p:stCondLst>
+                                    <p:cond delay="0"/>
+                                  </p:stCondLst>
+                                  <p:childTnLst>
+                                    <p:set>
+                                      <p:cBhvr>
+                                        <p:cTn id="6" dur="1" fill="hold">
+                                          <p:stCondLst>
+                                            <p:cond delay="0"/>
+                                          </p:stCondLst>
+                                        </p:cTn>
+                                        <p:tgtEl>
+                                          <p:spTgt spid="3">
+                                            <p:txEl>
+                                              <p:pRg st="1" end="1"/>
+                                            </p:txEl>
+                                          </p:spTgt>
+                                        </p:tgtEl>
+                                        <p:attrNameLst>
+                                          <p:attrName>style.visibility</p:attrName>
+                                        </p:attrNameLst>
+                                      </p:cBhvr>
+                                      <p:to>
+                                        <p:strVal val="visible"/>
+                                      </p:to>
+                                    </p:set>
+                                  </p:childTnLst>
+                                </p:cTn>
+                              </p:par>
+                            </p:childTnLst>
+                          </p:cTn>
+                        </p:par>
+                      </p:childTnLst>
+                    </p:cTn>
+                  </p:par>
+                  <p:par>
+                    <p:cTn id="7" fill="hold">
+                      <p:stCondLst>
+                        <p:cond delay="indefinite"/>
+                      </p:stCondLst>
+                      <p:childTnLst>
+                        <p:par>
+                          <p:cTn id="8" fill="hold">
+                            <p:stCondLst>
+                              <p:cond delay="0"/>
+                            </p:stCondLst>
+                            <p:childTnLst>
+                              <p:par>
+                                <p:cTn id="9" presetID="1" presetClass="entr" presetSubtype="0" fill="hold" grpId="0" nodeType="clickEffect">
+                                  <p:stCondLst>
+                                    <p:cond delay="0"/>
+                                  </p:stCondLst>
+                                  <p:childTnLst>
+                                    <p:set>
+                                      <p:cBhvr>
+                                        <p:cTn id="10" dur="1" fill="hold">
+                                          <p:stCondLst>
+                                            <p:cond delay="0"/>
+                                          </p:stCondLst>
+                                        </p:cTn>
+                                        <p:tgtEl>
+                                          <p:spTgt spid="3">
+                                            <p:txEl>
+                                              <p:pRg st="2" end="2"/>
+                                            </p:txEl>
+                                          </p:spTgt>
+                                        </p:tgtEl>
+                                        <p:attrNameLst>
+                                          <p:attrName>style.visibility</p:attrName>
+                                        </p:attrNameLst>
+                                      </p:cBhvr>
+                                      <p:to>
+                                        <p:strVal val="visible"/>
+                                      </p:to>
+                                    </p:set>
+                                  </p:childTnLst>
+                                </p:cTn>
+                              </p:par>
+                            </p:childTnLst>
+                          </p:cTn>
+                        </p:par>
+                      </p:childTnLst>
+                    </p:cTn>
+                  </p:par>
+                  <p:par>
+                    <p:cTn id="11" fill="hold">
+                      <p:stCondLst>
+                        <p:cond delay="indefinite"/>
+                      </p:stCondLst>
+                      <p:childTnLst>
+                        <p:par>
+                          <p:cTn id="12" fill="hold">
+                            <p:stCondLst>
+                              <p:cond delay="0"/>
+                            </p:stCondLst>
+                            <p:childTnLst>
+                              <p:par>
+                                <p:cTn id="13" presetID="1" presetClass="entr" presetSubtype="0" fill="hold" grpId="0" nodeType="clickEffect">
+                                  <p:stCondLst>
+                                    <p:cond delay="0"/>
+                                  </p:stCondLst>
+                                  <p:childTnLst>
+                                    <p:set>
+                                      <p:cBhvr>
+                                        <p:cTn id="14" dur="1" fill="hold">
+                                          <p:stCondLst>
+                                            <p:cond delay="0"/>
+                                          </p:stCondLst>
+                                        </p:cTn>
+                                        <p:tgtEl>
+                                          <p:spTgt spid="4">
+                                            <p:txEl>
+                                              <p:pRg st="1" end="1"/>
+                                            </p:txEl>
+                                          </p:spTgt>
+                                        </p:tgtEl>
+                                        <p:attrNameLst>
+                                          <p:attrName>style.visibility</p:attrName>
+                                        </p:attrNameLst>
+                                      </p:cBhvr>
+                                      <p:to>
+                                        <p:strVal val="visible"/>
+                                      </p:to>
+                                    </p:set>
+                                  </p:childTnLst>
+                                </p:cTn>
+                              </p:par>
+                            </p:childTnLst>
+                          </p:cTn>
+                        </p:par>
+                      </p:childTnLst>
+                    </p:cTn>
+                  </p:par>
+                  <p:par>
+                    <p:cTn id="15" fill="hold">
+                      <p:stCondLst>
+                        <p:cond delay="indefinite"/>
+                      </p:stCondLst>
+                      <p:childTnLst>
+                        <p:par>
+                          <p:cTn id="16" fill="hold">
+                            <p:stCondLst>
+                              <p:cond delay="0"/>
+                            </p:stCondLst>
+                            <p:childTnLst>
+                              <p:par>
+                                <p:cTn id="17" presetID="1" presetClass="entr" presetSubtype="0" fill="hold" grpId="0" nodeType="clickEffect">
+                                  <p:stCondLst>
+                                    <p:cond delay="0"/>
+                                  </p:stCondLst>
+                                  <p:childTnLst>
+                                    <p:set>
+                                      <p:cBhvr>
+                                        <p:cTn id="18" dur="1" fill="hold">
+                                          <p:stCondLst>
+                                            <p:cond delay="0"/>
+                                          </p:stCondLst>
+                                        </p:cTn>
+                                        <p:tgtEl>
+                                          <p:spTgt spid="4">
+                                            <p:txEl>
+                                              <p:pRg st="2" end="2"/>
+                                            </p:txEl>
+                                          </p:spTgt>
+                                        </p:tgtEl>
+                                        <p:attrNameLst>
+                                          <p:attrName>style.visibility</p:attrName>
+                                        </p:attrNameLst>
+                                      </p:cBhvr>
+                                      <p:to>
+                                        <p:strVal val="visible"/>
+                                      </p:to>
+                                    </p:set>
+                                  </p:childTnLst>
+                                </p:cTn>
+                              </p:par>
+                            </p:childTnLst>
+                          </p:cTn>
+                        </p:par>
+                      </p:childTnLst>
+                    </p:cTn>
+                  </p:par>
+                  <p:par>
+                    <p:cTn id="19" fill="hold">
+                      <p:stCondLst>
+                        <p:cond delay="indefinite"/>
+                      </p:stCondLst>
+                      <p:childTnLst>
+                        <p:par>
+                          <p:cTn id="20" fill="hold">
+                            <p:stCondLst>
+                              <p:cond delay="0"/>
+                            </p:stCondLst>
+                            <p:childTnLst>
+                              <p:par>
+                                <p:cTn id="21" presetID="1" presetClass="entr" presetSubtype="0" fill="hold" grpId="0" nodeType="clickEffect">
+                                  <p:stCondLst>
+                                    <p:cond delay="0"/>
+                                  </p:stCondLst>
+                                  <p:childTnLst>
+                                    <p:set>
+                                      <p:cBhvr>
+                                        <p:cTn id="22" dur="1" fill="hold">
+                                          <p:stCondLst>
+                                            <p:cond delay="0"/>
+                                          </p:stCondLst>
+                                        </p:cTn>
+                                        <p:tgtEl>
+                                          <p:spTgt spid="4">
+                                            <p:txEl>
+                                              <p:pRg st="3" end="3"/>
+                                            </p:txEl>
+                                          </p:spTgt>
+                                        </p:tgtEl>
+                                        <p:attrNameLst>
+                                          <p:attrName>style.visibility</p:attrName>
+                                        </p:attrNameLst>
+                                      </p:cBhvr>
+                                      <p:to>
+                                        <p:strVal val="visible"/>
+                                      </p:to>
+                                    </p:set>
+                                  </p:childTnLst>
+                                </p:cTn>
+                              </p:par>
+                            </p:childTnLst>
+                          </p:cTn>
+                        </p:par>
+                      </p:childTnLst>
+                    </p:cTn>
+                  </p:par>
+                  <p:par>
+                    <p:cTn id="23" fill="hold">
+                      <p:stCondLst>
+                        <p:cond delay="indefinite"/>
+                      </p:stCondLst>
+                      <p:childTnLst>
+                        <p:par>
+                          <p:cTn id="24" fill="hold">
+                            <p:stCondLst>
+                              <p:cond delay="0"/>
+                            </p:stCondLst>
+                            <p:childTnLst>
+                              <p:par>
+                                <p:cTn id="25" presetID="1" presetClass="entr" presetSubtype="0" fill="hold" grpId="0" nodeType="clickEffect">
+                                  <p:stCondLst>
+                                    <p:cond delay="0"/>
+                                  </p:stCondLst>
+                                  <p:childTnLst>
+                                    <p:set>
+                                      <p:cBhvr>
+                                        <p:cTn id="26" dur="1" fill="hold">
+                                          <p:stCondLst>
+                                            <p:cond delay="0"/>
+                                          </p:stCondLst>
+                                        </p:cTn>
+                                        <p:tgtEl>
+                                          <p:spTgt spid="4">
+                                            <p:txEl>
+                                              <p:pRg st="4" end="4"/>
+                                            </p:txEl>
+                                          </p:spTgt>
+                                        </p:tgtEl>
+                                        <p:attrNameLst>
+                                          <p:attrName>style.visibility</p:attrName>
+                                        </p:attrNameLst>
+                                      </p:cBhvr>
+                                      <p:to>
+                                        <p:strVal val="visible"/>
+                                      </p:to>
+                                    </p:set>
+                                  </p:childTnLst>
+                                </p:cTn>
+                              </p:par>
+                            </p:childTnLst>
+                          </p:cTn>
+                        </p:par>
+                      </p:childTnLst>
+                    </p:cTn>
+                  </p:par>
+                </p:childTnLst>
+              </p:cTn>
+              <p:prevCondLst>
+                <p:cond evt="onPrev" delay="0">
+                  <p:tgtEl>
+                    <p:sldTgt/>
+                  </p:tgtEl>
+                </p:cond>
+              </p:prevCondLst>
+              <p:nextCondLst>
+                <p:cond evt="onNext" delay="0">
+                  <p:tgtEl>
+                    <p:sldTgt/>
+                  </p:tgtEl>
+                </p:cond>
+              </p:nextCondLst>
+            </p:seq>
+          </p:childTnLst>
+        </p:cTn>
+      </p:par>
+    </p:tnLst>
+    <p:bldLst>
+      <p:bldP spid="3" grpId="0" uiExpand="1" build="p"/>
+      <p:bldP spid="4" grpId="0" uiExpand="1" build="p"/>
+    </p:bldLst>
+  </p:timing>
+</p:sld>
+</file>
+
+<file path=ppt/slides/slide8.xml><?xml version="1.0" encoding="utf-8"?>
+<p:sld xmlns:a="http://schemas.openxmlformats.org/drawingml/2006/main" xmlns:r="http://schemas.openxmlformats.org/officeDocument/2006/relationships" xmlns:p="http://schemas.openxmlformats.org/presentationml/2006/main">
+  <p:cSld>
+    <p:spTree>
+      <p:nvGrpSpPr>
+        <p:cNvPr id="1" name=""/>
+        <p:cNvGrpSpPr/>
+        <p:nvPr/>
+      </p:nvGrpSpPr>
+      <p:grpSpPr>
+        <a:xfrm>
+          <a:off x="0" y="0"/>
+          <a:ext cx="0" cy="0"/>
+          <a:chOff x="0" y="0"/>
+          <a:chExt cx="0" cy="0"/>
+        </a:xfrm>
+      </p:grpSpPr>
+      <p:sp>
+        <p:nvSpPr>
+          <p:cNvPr id="2" name="Title 1"/>
+          <p:cNvSpPr>
+            <a:spLocks noGrp="1"/>
+          </p:cNvSpPr>
+          <p:nvPr>
+            <p:ph type="title"/>
+          </p:nvPr>
+        </p:nvSpPr>
+        <p:spPr>
+          <a:xfrm>
+            <a:off x="722313" y="3305176"/>
+            <a:ext cx="7772400" cy="1021556"/>
+          </a:xfrm>
+        </p:spPr>
+        <p:txBody>
+          <a:bodyPr/>
+          <a:lstStyle/>
+          <a:p>
+            <a:pPr lvl="0" indent="0" marL="0">
+              <a:buNone/>
+            </a:pPr>
+            <a:r>
+              <a:rPr/>
+              <a:t>Exploratory data analysis</a:t>
+            </a:r>
+          </a:p>
+        </p:txBody>
+      </p:sp>
+    </p:spTree>
+  </p:cSld>
+</p:sld>
+</file>
+
+<file path=ppt/slides/slide9.xml><?xml version="1.0" encoding="utf-8"?>
+<p:sld xmlns:a="http://schemas.openxmlformats.org/drawingml/2006/main" xmlns:r="http://schemas.openxmlformats.org/officeDocument/2006/relationships" xmlns:p="http://schemas.openxmlformats.org/presentationml/2006/main">
+  <p:cSld>
+    <p:spTree>
+      <p:nvGrpSpPr>
+        <p:cNvPr id="1" name=""/>
+        <p:cNvGrpSpPr/>
+        <p:nvPr/>
+      </p:nvGrpSpPr>
+      <p:grpSpPr>
+        <a:xfrm>
+          <a:off x="0" y="0"/>
+          <a:ext cx="0" cy="0"/>
+          <a:chOff x="0" y="0"/>
+          <a:chExt cx="0" cy="0"/>
+        </a:xfrm>
+      </p:grpSpPr>
+      <p:sp>
+        <p:nvSpPr>
+          <p:cNvPr id="2" name="Title 1"/>
+          <p:cNvSpPr>
+            <a:spLocks noGrp="1"/>
+          </p:cNvSpPr>
+          <p:nvPr>
+            <p:ph type="title"/>
+          </p:nvPr>
+        </p:nvSpPr>
+        <p:spPr/>
+        <p:txBody>
+          <a:bodyPr/>
+          <a:lstStyle/>
+          <a:p>
+            <a:pPr lvl="0" indent="0" marL="0">
+              <a:buNone/>
+            </a:pPr>
+            <a:r>
+              <a:rPr/>
+              <a:t>The dataset was analyzed and prepared with the two use cases in mind, which shaped the EDA focus and modelling choices</a:t>
+            </a:r>
+          </a:p>
+        </p:txBody>
+      </p:sp>
+      <p:sp>
+        <p:nvSpPr>
+          <p:cNvPr id="3" name="Content Placeholder 2"/>
+          <p:cNvSpPr>
+            <a:spLocks noGrp="1"/>
+          </p:cNvSpPr>
+          <p:nvPr>
+            <p:ph idx="1" sz="half"/>
+          </p:nvPr>
+        </p:nvSpPr>
+        <p:spPr/>
+        <p:txBody>
+          <a:bodyPr/>
+          <a:lstStyle/>
+          <a:p>
+            <a:pPr lvl="0"/>
+            <a:r>
+              <a:rPr b="1"/>
+              <a:t>Scale</a:t>
+            </a:r>
+            <a:r>
+              <a:rPr/>
+              <a:t>: 78,025 sales opportunities and </a:t>
+            </a:r>
+            <a:r>
+              <a:rPr b="1"/>
+              <a:t>19 variables</a:t>
+            </a:r>
+            <a:r>
+              <a:rPr/>
+              <a:t>.</a:t>
+            </a:r>
+          </a:p>
+          <a:p>
+            <a:pPr lvl="0"/>
+            <a:r>
+              <a:rPr/>
+              <a:t>Validation checks flagged duplicates and process-consistency issues before modelling. Key preparation findings:</a:t>
+            </a:r>
+          </a:p>
+          <a:p>
+            <a:pPr lvl="1"/>
+            <a:r>
+              <a:rPr b="1"/>
+              <a:t>196 duplicated opportunity IDs</a:t>
+            </a:r>
+            <a:r>
+              <a:rPr/>
+              <a:t> (removed)</a:t>
+            </a:r>
+          </a:p>
+          <a:p>
+            <a:pPr lvl="1"/>
+            <a:r>
+              <a:rPr b="1"/>
+              <a:t>2047 zero amount opportunities</a:t>
+            </a:r>
+            <a:r>
+              <a:rPr/>
+              <a:t> (removed)</a:t>
+            </a:r>
+          </a:p>
+          <a:p>
+            <a:pPr lvl="1"/>
+            <a:r>
+              <a:rPr b="1"/>
+              <a:t>12,921 rows</a:t>
+            </a:r>
+            <a:r>
+              <a:rPr/>
+              <a:t> where stage ratios do not sum closely to 1 (kept)</a:t>
+            </a:r>
+          </a:p>
+          <a:p>
+            <a:pPr lvl="1"/>
+            <a:r>
+              <a:rPr/>
+              <a:t>And other problems such as apparent data input issues, missing values, and outliers that were handled with specific transformations rather than row removal.</a:t>
+            </a:r>
+          </a:p>
+          <a:p>
+            <a:pPr lvl="0"/>
+            <a:r>
+              <a:rPr/>
+              <a:t>For the modelling experiments shown here, the sample used </a:t>
+            </a:r>
+            <a:r>
+              <a:rPr b="1"/>
+              <a:t>75,819 eligible rows</a:t>
+            </a:r>
+            <a:r>
+              <a:rPr/>
+              <a:t> out of </a:t>
+            </a:r>
+            <a:r>
+              <a:rPr b="1"/>
+              <a:t>78,025 total rows</a:t>
+            </a:r>
+            <a:r>
+              <a:rPr/>
+              <a:t> with valid targets.</a:t>
+            </a:r>
+          </a:p>
+        </p:txBody>
+      </p:sp>
+      <p:pic>
+        <p:nvPicPr>
+          <p:cNvPr descr="assets/number_of_problems.png" id="0" name="Picture 1"/>
+          <p:cNvPicPr>
+            <a:picLocks noGrp="1" noChangeAspect="1"/>
+          </p:cNvPicPr>
+          <p:nvPr/>
+        </p:nvPicPr>
+        <p:blipFill>
+          <a:blip r:embed="rId2"/>
+          <a:stretch>
+            <a:fillRect/>
+          </a:stretch>
+        </p:blipFill>
+        <p:spPr bwMode="auto">
+          <a:xfrm>
+            <a:off x="4648200" y="1498600"/>
+            <a:ext cx="4038600" cy="2273300"/>
+          </a:xfrm>
+          <a:prstGeom prst="rect">
+            <a:avLst/>
+          </a:prstGeom>
+          <a:noFill/>
+          <a:ln w="9525">
+            <a:noFill/>
+            <a:headEnd/>
+            <a:tailEnd/>
+          </a:ln>
+        </p:spPr>
+      </p:pic>
+      <p:sp>
+        <p:nvSpPr>
+          <p:cNvPr id="1" name="TextBox 3"/>
+          <p:cNvSpPr txBox="1"/>
+          <p:nvPr/>
+        </p:nvSpPr>
+        <p:spPr>
+          <a:xfrm>
+            <a:off x="4648200" y="4076700"/>
+            <a:ext cx="4038600" cy="508000"/>
+          </a:xfrm>
+          <a:prstGeom prst="rect">
+            <a:avLst/>
+          </a:prstGeom>
+          <a:noFill/>
+        </p:spPr>
+        <p:txBody>
+          <a:bodyPr/>
+          <a:lstStyle/>
+          <a:p>
+            <a:pPr lvl="0" indent="0" marL="0" algn="ctr">
+              <a:buNone/>
+            </a:pPr>
+            <a:r>
+              <a:rPr/>
+              <a:t>Problems identified in the data</a:t>
             </a:r>
           </a:p>
         </p:txBody>
@@ -8386,2375 +11688,6 @@
     </p:tnLst>
     <p:bldLst>
       <p:bldP spid="3" grpId="0" uiExpand="1" build="p"/>
-    </p:bldLst>
-  </p:timing>
-</p:sld>
-</file>
-
-<file path=ppt/slides/slide25.xml><?xml version="1.0" encoding="utf-8"?>
-<p:sld xmlns:a="http://schemas.openxmlformats.org/drawingml/2006/main" xmlns:r="http://schemas.openxmlformats.org/officeDocument/2006/relationships" xmlns:p="http://schemas.openxmlformats.org/presentationml/2006/main">
-  <p:cSld>
-    <p:spTree>
-      <p:nvGrpSpPr>
-        <p:cNvPr id="1" name=""/>
-        <p:cNvGrpSpPr/>
-        <p:nvPr/>
-      </p:nvGrpSpPr>
-      <p:grpSpPr>
-        <a:xfrm>
-          <a:off x="0" y="0"/>
-          <a:ext cx="0" cy="0"/>
-          <a:chOff x="0" y="0"/>
-          <a:chExt cx="0" cy="0"/>
-        </a:xfrm>
-      </p:grpSpPr>
-      <p:sp>
-        <p:nvSpPr>
-          <p:cNvPr id="3" name="Content Placeholder 2"/>
-          <p:cNvSpPr>
-            <a:spLocks noGrp="1"/>
-          </p:cNvSpPr>
-          <p:nvPr>
-            <p:ph idx="1"/>
-          </p:nvPr>
-        </p:nvSpPr>
-        <p:spPr/>
-        <p:txBody>
-          <a:bodyPr/>
-          <a:lstStyle/>
-          <a:p>
-            <a:pPr lvl="0" indent="0" marL="0">
-              <a:spcBef>
-                <a:spcPts val="3000"/>
-              </a:spcBef>
-              <a:buNone/>
-            </a:pPr>
-            <a:r>
-              <a:rPr b="1"/>
-              <a:t>Thank you</a:t>
-            </a:r>
-          </a:p>
-          <a:p>
-            <a:pPr lvl="0" indent="0" marL="0">
-              <a:buNone/>
-            </a:pPr>
-            <a:r>
-              <a:rPr/>
-              <a:t>Questions, caveats, and next steps</a:t>
-            </a:r>
-          </a:p>
-        </p:txBody>
-      </p:sp>
-    </p:spTree>
-  </p:cSld>
-</p:sld>
-</file>
-
-<file path=ppt/slides/slide3.xml><?xml version="1.0" encoding="utf-8"?>
-<p:sld xmlns:a="http://schemas.openxmlformats.org/drawingml/2006/main" xmlns:r="http://schemas.openxmlformats.org/officeDocument/2006/relationships" xmlns:p="http://schemas.openxmlformats.org/presentationml/2006/main">
-  <p:cSld>
-    <p:spTree>
-      <p:nvGrpSpPr>
-        <p:cNvPr id="1" name=""/>
-        <p:cNvGrpSpPr/>
-        <p:nvPr/>
-      </p:nvGrpSpPr>
-      <p:grpSpPr>
-        <a:xfrm>
-          <a:off x="0" y="0"/>
-          <a:ext cx="0" cy="0"/>
-          <a:chOff x="0" y="0"/>
-          <a:chExt cx="0" cy="0"/>
-        </a:xfrm>
-      </p:grpSpPr>
-      <p:sp>
-        <p:nvSpPr>
-          <p:cNvPr id="2" name="Title 1"/>
-          <p:cNvSpPr>
-            <a:spLocks noGrp="1"/>
-          </p:cNvSpPr>
-          <p:nvPr>
-            <p:ph type="title"/>
-          </p:nvPr>
-        </p:nvSpPr>
-        <p:spPr/>
-        <p:txBody>
-          <a:bodyPr/>
-          <a:lstStyle/>
-          <a:p>
-            <a:pPr lvl="0" indent="0" marL="0">
-              <a:buNone/>
-            </a:pPr>
-            <a:r>
-              <a:rPr/>
-              <a:t>Agenda</a:t>
-            </a:r>
-          </a:p>
-        </p:txBody>
-      </p:sp>
-      <p:sp>
-        <p:nvSpPr>
-          <p:cNvPr id="3" name="Content Placeholder 2"/>
-          <p:cNvSpPr>
-            <a:spLocks noGrp="1"/>
-          </p:cNvSpPr>
-          <p:nvPr>
-            <p:ph idx="1"/>
-          </p:nvPr>
-        </p:nvSpPr>
-        <p:spPr/>
-        <p:txBody>
-          <a:bodyPr/>
-          <a:lstStyle/>
-          <a:p>
-            <a:pPr lvl="0" indent="-342900" marL="342900">
-              <a:buAutoNum type="arabicPeriod"/>
-            </a:pPr>
-            <a:r>
-              <a:rPr/>
-              <a:t>Business framing and process assumptions</a:t>
-            </a:r>
-          </a:p>
-          <a:p>
-            <a:pPr lvl="0" indent="-342900" marL="342900">
-              <a:buAutoNum type="arabicPeriod"/>
-            </a:pPr>
-            <a:r>
-              <a:rPr/>
-              <a:t>Dataset and target overview</a:t>
-            </a:r>
-          </a:p>
-          <a:p>
-            <a:pPr lvl="0" indent="-342900" marL="342900">
-              <a:buAutoNum type="arabicPeriod"/>
-            </a:pPr>
-            <a:r>
-              <a:rPr/>
-              <a:t>EDA findings that matter for prioritization and forecasting</a:t>
-            </a:r>
-          </a:p>
-          <a:p>
-            <a:pPr lvl="0" indent="-342900" marL="342900">
-              <a:buAutoNum type="arabicPeriod"/>
-            </a:pPr>
-            <a:r>
-              <a:rPr/>
-              <a:t>Modelling approach and model outputs</a:t>
-            </a:r>
-          </a:p>
-          <a:p>
-            <a:pPr lvl="0" indent="-342900" marL="342900">
-              <a:buAutoNum type="arabicPeriod"/>
-            </a:pPr>
-            <a:r>
-              <a:rPr/>
-              <a:t>Application simulations</a:t>
-            </a:r>
-          </a:p>
-          <a:p>
-            <a:pPr lvl="0" indent="-342900" marL="342900">
-              <a:buAutoNum type="arabicPeriod"/>
-            </a:pPr>
-            <a:r>
-              <a:rPr/>
-              <a:t>Conclusions and next steps</a:t>
-            </a:r>
-          </a:p>
-        </p:txBody>
-      </p:sp>
-    </p:spTree>
-  </p:cSld>
-  <p:timing>
-    <p:tnLst>
-      <p:par>
-        <p:cTn id="1" dur="indefinite" restart="never" nodeType="tmRoot">
-          <p:childTnLst>
-            <p:seq concurrent="1" nextAc="seek">
-              <p:cTn id="2" dur="indefinite" nodeType="mainSeq">
-                <p:childTnLst>
-                  <p:par>
-                    <p:cTn id="3" fill="hold">
-                      <p:stCondLst>
-                        <p:cond delay="indefinite"/>
-                      </p:stCondLst>
-                      <p:childTnLst>
-                        <p:par>
-                          <p:cTn id="4" fill="hold">
-                            <p:stCondLst>
-                              <p:cond delay="0"/>
-                            </p:stCondLst>
-                            <p:childTnLst>
-                              <p:par>
-                                <p:cTn id="5" presetID="1" presetClass="entr" presetSubtype="0" fill="hold" grpId="0" nodeType="clickEffect">
-                                  <p:stCondLst>
-                                    <p:cond delay="0"/>
-                                  </p:stCondLst>
-                                  <p:childTnLst>
-                                    <p:set>
-                                      <p:cBhvr>
-                                        <p:cTn id="6" dur="1" fill="hold">
-                                          <p:stCondLst>
-                                            <p:cond delay="0"/>
-                                          </p:stCondLst>
-                                        </p:cTn>
-                                        <p:tgtEl>
-                                          <p:spTgt spid="3">
-                                            <p:txEl>
-                                              <p:pRg st="0" end="0"/>
-                                            </p:txEl>
-                                          </p:spTgt>
-                                        </p:tgtEl>
-                                        <p:attrNameLst>
-                                          <p:attrName>style.visibility</p:attrName>
-                                        </p:attrNameLst>
-                                      </p:cBhvr>
-                                      <p:to>
-                                        <p:strVal val="visible"/>
-                                      </p:to>
-                                    </p:set>
-                                  </p:childTnLst>
-                                </p:cTn>
-                              </p:par>
-                            </p:childTnLst>
-                          </p:cTn>
-                        </p:par>
-                      </p:childTnLst>
-                    </p:cTn>
-                  </p:par>
-                  <p:par>
-                    <p:cTn id="7" fill="hold">
-                      <p:stCondLst>
-                        <p:cond delay="indefinite"/>
-                      </p:stCondLst>
-                      <p:childTnLst>
-                        <p:par>
-                          <p:cTn id="8" fill="hold">
-                            <p:stCondLst>
-                              <p:cond delay="0"/>
-                            </p:stCondLst>
-                            <p:childTnLst>
-                              <p:par>
-                                <p:cTn id="9" presetID="1" presetClass="entr" presetSubtype="0" fill="hold" grpId="0" nodeType="clickEffect">
-                                  <p:stCondLst>
-                                    <p:cond delay="0"/>
-                                  </p:stCondLst>
-                                  <p:childTnLst>
-                                    <p:set>
-                                      <p:cBhvr>
-                                        <p:cTn id="10" dur="1" fill="hold">
-                                          <p:stCondLst>
-                                            <p:cond delay="0"/>
-                                          </p:stCondLst>
-                                        </p:cTn>
-                                        <p:tgtEl>
-                                          <p:spTgt spid="3">
-                                            <p:txEl>
-                                              <p:pRg st="1" end="1"/>
-                                            </p:txEl>
-                                          </p:spTgt>
-                                        </p:tgtEl>
-                                        <p:attrNameLst>
-                                          <p:attrName>style.visibility</p:attrName>
-                                        </p:attrNameLst>
-                                      </p:cBhvr>
-                                      <p:to>
-                                        <p:strVal val="visible"/>
-                                      </p:to>
-                                    </p:set>
-                                  </p:childTnLst>
-                                </p:cTn>
-                              </p:par>
-                            </p:childTnLst>
-                          </p:cTn>
-                        </p:par>
-                      </p:childTnLst>
-                    </p:cTn>
-                  </p:par>
-                  <p:par>
-                    <p:cTn id="11" fill="hold">
-                      <p:stCondLst>
-                        <p:cond delay="indefinite"/>
-                      </p:stCondLst>
-                      <p:childTnLst>
-                        <p:par>
-                          <p:cTn id="12" fill="hold">
-                            <p:stCondLst>
-                              <p:cond delay="0"/>
-                            </p:stCondLst>
-                            <p:childTnLst>
-                              <p:par>
-                                <p:cTn id="13" presetID="1" presetClass="entr" presetSubtype="0" fill="hold" grpId="0" nodeType="clickEffect">
-                                  <p:stCondLst>
-                                    <p:cond delay="0"/>
-                                  </p:stCondLst>
-                                  <p:childTnLst>
-                                    <p:set>
-                                      <p:cBhvr>
-                                        <p:cTn id="14" dur="1" fill="hold">
-                                          <p:stCondLst>
-                                            <p:cond delay="0"/>
-                                          </p:stCondLst>
-                                        </p:cTn>
-                                        <p:tgtEl>
-                                          <p:spTgt spid="3">
-                                            <p:txEl>
-                                              <p:pRg st="2" end="2"/>
-                                            </p:txEl>
-                                          </p:spTgt>
-                                        </p:tgtEl>
-                                        <p:attrNameLst>
-                                          <p:attrName>style.visibility</p:attrName>
-                                        </p:attrNameLst>
-                                      </p:cBhvr>
-                                      <p:to>
-                                        <p:strVal val="visible"/>
-                                      </p:to>
-                                    </p:set>
-                                  </p:childTnLst>
-                                </p:cTn>
-                              </p:par>
-                            </p:childTnLst>
-                          </p:cTn>
-                        </p:par>
-                      </p:childTnLst>
-                    </p:cTn>
-                  </p:par>
-                  <p:par>
-                    <p:cTn id="15" fill="hold">
-                      <p:stCondLst>
-                        <p:cond delay="indefinite"/>
-                      </p:stCondLst>
-                      <p:childTnLst>
-                        <p:par>
-                          <p:cTn id="16" fill="hold">
-                            <p:stCondLst>
-                              <p:cond delay="0"/>
-                            </p:stCondLst>
-                            <p:childTnLst>
-                              <p:par>
-                                <p:cTn id="17" presetID="1" presetClass="entr" presetSubtype="0" fill="hold" grpId="0" nodeType="clickEffect">
-                                  <p:stCondLst>
-                                    <p:cond delay="0"/>
-                                  </p:stCondLst>
-                                  <p:childTnLst>
-                                    <p:set>
-                                      <p:cBhvr>
-                                        <p:cTn id="18" dur="1" fill="hold">
-                                          <p:stCondLst>
-                                            <p:cond delay="0"/>
-                                          </p:stCondLst>
-                                        </p:cTn>
-                                        <p:tgtEl>
-                                          <p:spTgt spid="3">
-                                            <p:txEl>
-                                              <p:pRg st="3" end="3"/>
-                                            </p:txEl>
-                                          </p:spTgt>
-                                        </p:tgtEl>
-                                        <p:attrNameLst>
-                                          <p:attrName>style.visibility</p:attrName>
-                                        </p:attrNameLst>
-                                      </p:cBhvr>
-                                      <p:to>
-                                        <p:strVal val="visible"/>
-                                      </p:to>
-                                    </p:set>
-                                  </p:childTnLst>
-                                </p:cTn>
-                              </p:par>
-                            </p:childTnLst>
-                          </p:cTn>
-                        </p:par>
-                      </p:childTnLst>
-                    </p:cTn>
-                  </p:par>
-                  <p:par>
-                    <p:cTn id="19" fill="hold">
-                      <p:stCondLst>
-                        <p:cond delay="indefinite"/>
-                      </p:stCondLst>
-                      <p:childTnLst>
-                        <p:par>
-                          <p:cTn id="20" fill="hold">
-                            <p:stCondLst>
-                              <p:cond delay="0"/>
-                            </p:stCondLst>
-                            <p:childTnLst>
-                              <p:par>
-                                <p:cTn id="21" presetID="1" presetClass="entr" presetSubtype="0" fill="hold" grpId="0" nodeType="clickEffect">
-                                  <p:stCondLst>
-                                    <p:cond delay="0"/>
-                                  </p:stCondLst>
-                                  <p:childTnLst>
-                                    <p:set>
-                                      <p:cBhvr>
-                                        <p:cTn id="22" dur="1" fill="hold">
-                                          <p:stCondLst>
-                                            <p:cond delay="0"/>
-                                          </p:stCondLst>
-                                        </p:cTn>
-                                        <p:tgtEl>
-                                          <p:spTgt spid="3">
-                                            <p:txEl>
-                                              <p:pRg st="4" end="4"/>
-                                            </p:txEl>
-                                          </p:spTgt>
-                                        </p:tgtEl>
-                                        <p:attrNameLst>
-                                          <p:attrName>style.visibility</p:attrName>
-                                        </p:attrNameLst>
-                                      </p:cBhvr>
-                                      <p:to>
-                                        <p:strVal val="visible"/>
-                                      </p:to>
-                                    </p:set>
-                                  </p:childTnLst>
-                                </p:cTn>
-                              </p:par>
-                            </p:childTnLst>
-                          </p:cTn>
-                        </p:par>
-                      </p:childTnLst>
-                    </p:cTn>
-                  </p:par>
-                  <p:par>
-                    <p:cTn id="23" fill="hold">
-                      <p:stCondLst>
-                        <p:cond delay="indefinite"/>
-                      </p:stCondLst>
-                      <p:childTnLst>
-                        <p:par>
-                          <p:cTn id="24" fill="hold">
-                            <p:stCondLst>
-                              <p:cond delay="0"/>
-                            </p:stCondLst>
-                            <p:childTnLst>
-                              <p:par>
-                                <p:cTn id="25" presetID="1" presetClass="entr" presetSubtype="0" fill="hold" grpId="0" nodeType="clickEffect">
-                                  <p:stCondLst>
-                                    <p:cond delay="0"/>
-                                  </p:stCondLst>
-                                  <p:childTnLst>
-                                    <p:set>
-                                      <p:cBhvr>
-                                        <p:cTn id="26" dur="1" fill="hold">
-                                          <p:stCondLst>
-                                            <p:cond delay="0"/>
-                                          </p:stCondLst>
-                                        </p:cTn>
-                                        <p:tgtEl>
-                                          <p:spTgt spid="3">
-                                            <p:txEl>
-                                              <p:pRg st="5" end="5"/>
-                                            </p:txEl>
-                                          </p:spTgt>
-                                        </p:tgtEl>
-                                        <p:attrNameLst>
-                                          <p:attrName>style.visibility</p:attrName>
-                                        </p:attrNameLst>
-                                      </p:cBhvr>
-                                      <p:to>
-                                        <p:strVal val="visible"/>
-                                      </p:to>
-                                    </p:set>
-                                  </p:childTnLst>
-                                </p:cTn>
-                              </p:par>
-                            </p:childTnLst>
-                          </p:cTn>
-                        </p:par>
-                      </p:childTnLst>
-                    </p:cTn>
-                  </p:par>
-                </p:childTnLst>
-              </p:cTn>
-              <p:prevCondLst>
-                <p:cond evt="onPrev" delay="0">
-                  <p:tgtEl>
-                    <p:sldTgt/>
-                  </p:tgtEl>
-                </p:cond>
-              </p:prevCondLst>
-              <p:nextCondLst>
-                <p:cond evt="onNext" delay="0">
-                  <p:tgtEl>
-                    <p:sldTgt/>
-                  </p:tgtEl>
-                </p:cond>
-              </p:nextCondLst>
-            </p:seq>
-          </p:childTnLst>
-        </p:cTn>
-      </p:par>
-    </p:tnLst>
-    <p:bldLst>
-      <p:bldP spid="3" grpId="0" uiExpand="1" build="p"/>
-    </p:bldLst>
-  </p:timing>
-</p:sld>
-</file>
-
-<file path=ppt/slides/slide4.xml><?xml version="1.0" encoding="utf-8"?>
-<p:sld xmlns:a="http://schemas.openxmlformats.org/drawingml/2006/main" xmlns:r="http://schemas.openxmlformats.org/officeDocument/2006/relationships" xmlns:p="http://schemas.openxmlformats.org/presentationml/2006/main">
-  <p:cSld>
-    <p:spTree>
-      <p:nvGrpSpPr>
-        <p:cNvPr id="1" name=""/>
-        <p:cNvGrpSpPr/>
-        <p:nvPr/>
-      </p:nvGrpSpPr>
-      <p:grpSpPr>
-        <a:xfrm>
-          <a:off x="0" y="0"/>
-          <a:ext cx="0" cy="0"/>
-          <a:chOff x="0" y="0"/>
-          <a:chExt cx="0" cy="0"/>
-        </a:xfrm>
-      </p:grpSpPr>
-      <p:sp>
-        <p:nvSpPr>
-          <p:cNvPr id="2" name="Title 1"/>
-          <p:cNvSpPr>
-            <a:spLocks noGrp="1"/>
-          </p:cNvSpPr>
-          <p:nvPr>
-            <p:ph type="title"/>
-          </p:nvPr>
-        </p:nvSpPr>
-        <p:spPr>
-          <a:xfrm>
-            <a:off x="722313" y="3305176"/>
-            <a:ext cx="7772400" cy="1021556"/>
-          </a:xfrm>
-        </p:spPr>
-        <p:txBody>
-          <a:bodyPr/>
-          <a:lstStyle/>
-          <a:p>
-            <a:pPr lvl="0" indent="0" marL="0">
-              <a:buNone/>
-            </a:pPr>
-            <a:r>
-              <a:rPr/>
-              <a:t>Business framing</a:t>
-            </a:r>
-          </a:p>
-        </p:txBody>
-      </p:sp>
-    </p:spTree>
-  </p:cSld>
-</p:sld>
-</file>
-
-<file path=ppt/slides/slide5.xml><?xml version="1.0" encoding="utf-8"?>
-<p:sld xmlns:a="http://schemas.openxmlformats.org/drawingml/2006/main" xmlns:r="http://schemas.openxmlformats.org/officeDocument/2006/relationships" xmlns:p="http://schemas.openxmlformats.org/presentationml/2006/main">
-  <p:cSld>
-    <p:spTree>
-      <p:nvGrpSpPr>
-        <p:cNvPr id="1" name=""/>
-        <p:cNvGrpSpPr/>
-        <p:nvPr/>
-      </p:nvGrpSpPr>
-      <p:grpSpPr>
-        <a:xfrm>
-          <a:off x="0" y="0"/>
-          <a:ext cx="0" cy="0"/>
-          <a:chOff x="0" y="0"/>
-          <a:chExt cx="0" cy="0"/>
-        </a:xfrm>
-      </p:grpSpPr>
-      <p:sp>
-        <p:nvSpPr>
-          <p:cNvPr id="2" name="Title 1"/>
-          <p:cNvSpPr>
-            <a:spLocks noGrp="1"/>
-          </p:cNvSpPr>
-          <p:nvPr>
-            <p:ph type="title"/>
-          </p:nvPr>
-        </p:nvSpPr>
-        <p:spPr/>
-        <p:txBody>
-          <a:bodyPr/>
-          <a:lstStyle/>
-          <a:p>
-            <a:pPr lvl="0" indent="0" marL="0">
-              <a:buNone/>
-            </a:pPr>
-            <a:r>
-              <a:rPr/>
-              <a:t>The sales process is non-linear, and the data captures its current state</a:t>
-            </a:r>
-          </a:p>
-        </p:txBody>
-      </p:sp>
-      <p:sp>
-        <p:nvSpPr>
-          <p:cNvPr id="3" name="Content Placeholder 2"/>
-          <p:cNvSpPr>
-            <a:spLocks noGrp="1"/>
-          </p:cNvSpPr>
-          <p:nvPr>
-            <p:ph idx="1" sz="half"/>
-          </p:nvPr>
-        </p:nvSpPr>
-        <p:spPr/>
-        <p:txBody>
-          <a:bodyPr/>
-          <a:lstStyle/>
-          <a:p>
-            <a:pPr lvl="0"/>
-            <a:r>
-              <a:rPr/>
-              <a:t>The sales process tracks auto-parts opportunities across both new leads and existing customers.</a:t>
-            </a:r>
-          </a:p>
-          <a:p>
-            <a:pPr lvl="0"/>
-            <a:r>
-              <a:rPr/>
-              <a:t>Opportunities transition—sometimes non-linearly—between the stages Identified / Qualifying, Qualified / Validating, and Validated / Gaining Agreement.</a:t>
-            </a:r>
-          </a:p>
-          <a:p>
-            <a:pPr lvl="0"/>
-            <a:r>
-              <a:rPr/>
-              <a:t>Each opportunity ultimately resolves as either a win or a loss.</a:t>
-            </a:r>
-          </a:p>
-          <a:p>
-            <a:pPr lvl="0"/>
-            <a:r>
-              <a:rPr/>
-              <a:t>Sales teams maintain an estimated deal value, which is updated as the opportunity progresses.</a:t>
-            </a:r>
-          </a:p>
-          <a:p>
-            <a:pPr lvl="0"/>
-            <a:r>
-              <a:rPr/>
-              <a:t>The dataset primarily captures the latest snapshot per opportunity, limiting visibility into full stage transitions over time.</a:t>
-            </a:r>
-          </a:p>
-          <a:p>
-            <a:pPr lvl="0"/>
-            <a:r>
-              <a:rPr/>
-              <a:t>As a result, modelling relies on aggregate time-in-stage metrics and other snapshot features to represent the current state of each opportunity.</a:t>
-            </a:r>
-          </a:p>
-        </p:txBody>
-      </p:sp>
-      <p:pic>
-        <p:nvPicPr>
-          <p:cNvPr descr="assets/process.png" id="0" name="Picture 1"/>
-          <p:cNvPicPr>
-            <a:picLocks noGrp="1" noChangeAspect="1"/>
-          </p:cNvPicPr>
-          <p:nvPr/>
-        </p:nvPicPr>
-        <p:blipFill>
-          <a:blip r:embed="rId2"/>
-          <a:stretch>
-            <a:fillRect/>
-          </a:stretch>
-        </p:blipFill>
-        <p:spPr bwMode="auto">
-          <a:xfrm>
-            <a:off x="4978400" y="1193800"/>
-            <a:ext cx="3390900" cy="3390900"/>
-          </a:xfrm>
-          <a:prstGeom prst="rect">
-            <a:avLst/>
-          </a:prstGeom>
-          <a:noFill/>
-          <a:ln w="9525">
-            <a:noFill/>
-            <a:headEnd/>
-            <a:tailEnd/>
-          </a:ln>
-        </p:spPr>
-      </p:pic>
-    </p:spTree>
-  </p:cSld>
-  <p:timing>
-    <p:tnLst>
-      <p:par>
-        <p:cTn id="1" dur="indefinite" restart="never" nodeType="tmRoot">
-          <p:childTnLst>
-            <p:seq concurrent="1" nextAc="seek">
-              <p:cTn id="2" dur="indefinite" nodeType="mainSeq">
-                <p:childTnLst>
-                  <p:par>
-                    <p:cTn id="3" fill="hold">
-                      <p:stCondLst>
-                        <p:cond delay="indefinite"/>
-                      </p:stCondLst>
-                      <p:childTnLst>
-                        <p:par>
-                          <p:cTn id="4" fill="hold">
-                            <p:stCondLst>
-                              <p:cond delay="0"/>
-                            </p:stCondLst>
-                            <p:childTnLst>
-                              <p:par>
-                                <p:cTn id="5" presetID="1" presetClass="entr" presetSubtype="0" fill="hold" grpId="0" nodeType="clickEffect">
-                                  <p:stCondLst>
-                                    <p:cond delay="0"/>
-                                  </p:stCondLst>
-                                  <p:childTnLst>
-                                    <p:set>
-                                      <p:cBhvr>
-                                        <p:cTn id="6" dur="1" fill="hold">
-                                          <p:stCondLst>
-                                            <p:cond delay="0"/>
-                                          </p:stCondLst>
-                                        </p:cTn>
-                                        <p:tgtEl>
-                                          <p:spTgt spid="3">
-                                            <p:txEl>
-                                              <p:pRg st="0" end="0"/>
-                                            </p:txEl>
-                                          </p:spTgt>
-                                        </p:tgtEl>
-                                        <p:attrNameLst>
-                                          <p:attrName>style.visibility</p:attrName>
-                                        </p:attrNameLst>
-                                      </p:cBhvr>
-                                      <p:to>
-                                        <p:strVal val="visible"/>
-                                      </p:to>
-                                    </p:set>
-                                  </p:childTnLst>
-                                </p:cTn>
-                              </p:par>
-                            </p:childTnLst>
-                          </p:cTn>
-                        </p:par>
-                      </p:childTnLst>
-                    </p:cTn>
-                  </p:par>
-                  <p:par>
-                    <p:cTn id="7" fill="hold">
-                      <p:stCondLst>
-                        <p:cond delay="indefinite"/>
-                      </p:stCondLst>
-                      <p:childTnLst>
-                        <p:par>
-                          <p:cTn id="8" fill="hold">
-                            <p:stCondLst>
-                              <p:cond delay="0"/>
-                            </p:stCondLst>
-                            <p:childTnLst>
-                              <p:par>
-                                <p:cTn id="9" presetID="1" presetClass="entr" presetSubtype="0" fill="hold" grpId="0" nodeType="clickEffect">
-                                  <p:stCondLst>
-                                    <p:cond delay="0"/>
-                                  </p:stCondLst>
-                                  <p:childTnLst>
-                                    <p:set>
-                                      <p:cBhvr>
-                                        <p:cTn id="10" dur="1" fill="hold">
-                                          <p:stCondLst>
-                                            <p:cond delay="0"/>
-                                          </p:stCondLst>
-                                        </p:cTn>
-                                        <p:tgtEl>
-                                          <p:spTgt spid="3">
-                                            <p:txEl>
-                                              <p:pRg st="1" end="1"/>
-                                            </p:txEl>
-                                          </p:spTgt>
-                                        </p:tgtEl>
-                                        <p:attrNameLst>
-                                          <p:attrName>style.visibility</p:attrName>
-                                        </p:attrNameLst>
-                                      </p:cBhvr>
-                                      <p:to>
-                                        <p:strVal val="visible"/>
-                                      </p:to>
-                                    </p:set>
-                                  </p:childTnLst>
-                                </p:cTn>
-                              </p:par>
-                            </p:childTnLst>
-                          </p:cTn>
-                        </p:par>
-                      </p:childTnLst>
-                    </p:cTn>
-                  </p:par>
-                  <p:par>
-                    <p:cTn id="11" fill="hold">
-                      <p:stCondLst>
-                        <p:cond delay="indefinite"/>
-                      </p:stCondLst>
-                      <p:childTnLst>
-                        <p:par>
-                          <p:cTn id="12" fill="hold">
-                            <p:stCondLst>
-                              <p:cond delay="0"/>
-                            </p:stCondLst>
-                            <p:childTnLst>
-                              <p:par>
-                                <p:cTn id="13" presetID="1" presetClass="entr" presetSubtype="0" fill="hold" grpId="0" nodeType="clickEffect">
-                                  <p:stCondLst>
-                                    <p:cond delay="0"/>
-                                  </p:stCondLst>
-                                  <p:childTnLst>
-                                    <p:set>
-                                      <p:cBhvr>
-                                        <p:cTn id="14" dur="1" fill="hold">
-                                          <p:stCondLst>
-                                            <p:cond delay="0"/>
-                                          </p:stCondLst>
-                                        </p:cTn>
-                                        <p:tgtEl>
-                                          <p:spTgt spid="3">
-                                            <p:txEl>
-                                              <p:pRg st="2" end="2"/>
-                                            </p:txEl>
-                                          </p:spTgt>
-                                        </p:tgtEl>
-                                        <p:attrNameLst>
-                                          <p:attrName>style.visibility</p:attrName>
-                                        </p:attrNameLst>
-                                      </p:cBhvr>
-                                      <p:to>
-                                        <p:strVal val="visible"/>
-                                      </p:to>
-                                    </p:set>
-                                  </p:childTnLst>
-                                </p:cTn>
-                              </p:par>
-                            </p:childTnLst>
-                          </p:cTn>
-                        </p:par>
-                      </p:childTnLst>
-                    </p:cTn>
-                  </p:par>
-                  <p:par>
-                    <p:cTn id="15" fill="hold">
-                      <p:stCondLst>
-                        <p:cond delay="indefinite"/>
-                      </p:stCondLst>
-                      <p:childTnLst>
-                        <p:par>
-                          <p:cTn id="16" fill="hold">
-                            <p:stCondLst>
-                              <p:cond delay="0"/>
-                            </p:stCondLst>
-                            <p:childTnLst>
-                              <p:par>
-                                <p:cTn id="17" presetID="1" presetClass="entr" presetSubtype="0" fill="hold" grpId="0" nodeType="clickEffect">
-                                  <p:stCondLst>
-                                    <p:cond delay="0"/>
-                                  </p:stCondLst>
-                                  <p:childTnLst>
-                                    <p:set>
-                                      <p:cBhvr>
-                                        <p:cTn id="18" dur="1" fill="hold">
-                                          <p:stCondLst>
-                                            <p:cond delay="0"/>
-                                          </p:stCondLst>
-                                        </p:cTn>
-                                        <p:tgtEl>
-                                          <p:spTgt spid="3">
-                                            <p:txEl>
-                                              <p:pRg st="3" end="3"/>
-                                            </p:txEl>
-                                          </p:spTgt>
-                                        </p:tgtEl>
-                                        <p:attrNameLst>
-                                          <p:attrName>style.visibility</p:attrName>
-                                        </p:attrNameLst>
-                                      </p:cBhvr>
-                                      <p:to>
-                                        <p:strVal val="visible"/>
-                                      </p:to>
-                                    </p:set>
-                                  </p:childTnLst>
-                                </p:cTn>
-                              </p:par>
-                            </p:childTnLst>
-                          </p:cTn>
-                        </p:par>
-                      </p:childTnLst>
-                    </p:cTn>
-                  </p:par>
-                  <p:par>
-                    <p:cTn id="19" fill="hold">
-                      <p:stCondLst>
-                        <p:cond delay="indefinite"/>
-                      </p:stCondLst>
-                      <p:childTnLst>
-                        <p:par>
-                          <p:cTn id="20" fill="hold">
-                            <p:stCondLst>
-                              <p:cond delay="0"/>
-                            </p:stCondLst>
-                            <p:childTnLst>
-                              <p:par>
-                                <p:cTn id="21" presetID="1" presetClass="entr" presetSubtype="0" fill="hold" grpId="0" nodeType="clickEffect">
-                                  <p:stCondLst>
-                                    <p:cond delay="0"/>
-                                  </p:stCondLst>
-                                  <p:childTnLst>
-                                    <p:set>
-                                      <p:cBhvr>
-                                        <p:cTn id="22" dur="1" fill="hold">
-                                          <p:stCondLst>
-                                            <p:cond delay="0"/>
-                                          </p:stCondLst>
-                                        </p:cTn>
-                                        <p:tgtEl>
-                                          <p:spTgt spid="3">
-                                            <p:txEl>
-                                              <p:pRg st="4" end="4"/>
-                                            </p:txEl>
-                                          </p:spTgt>
-                                        </p:tgtEl>
-                                        <p:attrNameLst>
-                                          <p:attrName>style.visibility</p:attrName>
-                                        </p:attrNameLst>
-                                      </p:cBhvr>
-                                      <p:to>
-                                        <p:strVal val="visible"/>
-                                      </p:to>
-                                    </p:set>
-                                  </p:childTnLst>
-                                </p:cTn>
-                              </p:par>
-                            </p:childTnLst>
-                          </p:cTn>
-                        </p:par>
-                      </p:childTnLst>
-                    </p:cTn>
-                  </p:par>
-                  <p:par>
-                    <p:cTn id="23" fill="hold">
-                      <p:stCondLst>
-                        <p:cond delay="indefinite"/>
-                      </p:stCondLst>
-                      <p:childTnLst>
-                        <p:par>
-                          <p:cTn id="24" fill="hold">
-                            <p:stCondLst>
-                              <p:cond delay="0"/>
-                            </p:stCondLst>
-                            <p:childTnLst>
-                              <p:par>
-                                <p:cTn id="25" presetID="1" presetClass="entr" presetSubtype="0" fill="hold" grpId="0" nodeType="clickEffect">
-                                  <p:stCondLst>
-                                    <p:cond delay="0"/>
-                                  </p:stCondLst>
-                                  <p:childTnLst>
-                                    <p:set>
-                                      <p:cBhvr>
-                                        <p:cTn id="26" dur="1" fill="hold">
-                                          <p:stCondLst>
-                                            <p:cond delay="0"/>
-                                          </p:stCondLst>
-                                        </p:cTn>
-                                        <p:tgtEl>
-                                          <p:spTgt spid="3">
-                                            <p:txEl>
-                                              <p:pRg st="5" end="5"/>
-                                            </p:txEl>
-                                          </p:spTgt>
-                                        </p:tgtEl>
-                                        <p:attrNameLst>
-                                          <p:attrName>style.visibility</p:attrName>
-                                        </p:attrNameLst>
-                                      </p:cBhvr>
-                                      <p:to>
-                                        <p:strVal val="visible"/>
-                                      </p:to>
-                                    </p:set>
-                                  </p:childTnLst>
-                                </p:cTn>
-                              </p:par>
-                            </p:childTnLst>
-                          </p:cTn>
-                        </p:par>
-                      </p:childTnLst>
-                    </p:cTn>
-                  </p:par>
-                </p:childTnLst>
-              </p:cTn>
-              <p:prevCondLst>
-                <p:cond evt="onPrev" delay="0">
-                  <p:tgtEl>
-                    <p:sldTgt/>
-                  </p:tgtEl>
-                </p:cond>
-              </p:prevCondLst>
-              <p:nextCondLst>
-                <p:cond evt="onNext" delay="0">
-                  <p:tgtEl>
-                    <p:sldTgt/>
-                  </p:tgtEl>
-                </p:cond>
-              </p:nextCondLst>
-            </p:seq>
-          </p:childTnLst>
-        </p:cTn>
-      </p:par>
-    </p:tnLst>
-    <p:bldLst>
-      <p:bldP spid="3" grpId="0" uiExpand="1" build="p"/>
-    </p:bldLst>
-  </p:timing>
-</p:sld>
-</file>
-
-<file path=ppt/slides/slide6.xml><?xml version="1.0" encoding="utf-8"?>
-<p:sld xmlns:a="http://schemas.openxmlformats.org/drawingml/2006/main" xmlns:r="http://schemas.openxmlformats.org/officeDocument/2006/relationships" xmlns:p="http://schemas.openxmlformats.org/presentationml/2006/main">
-  <p:cSld>
-    <p:spTree>
-      <p:nvGrpSpPr>
-        <p:cNvPr id="1" name=""/>
-        <p:cNvGrpSpPr/>
-        <p:nvPr/>
-      </p:nvGrpSpPr>
-      <p:grpSpPr>
-        <a:xfrm>
-          <a:off x="0" y="0"/>
-          <a:ext cx="0" cy="0"/>
-          <a:chOff x="0" y="0"/>
-          <a:chExt cx="0" cy="0"/>
-        </a:xfrm>
-      </p:grpSpPr>
-      <p:sp>
-        <p:nvSpPr>
-          <p:cNvPr id="2" name="Title 1"/>
-          <p:cNvSpPr>
-            <a:spLocks noGrp="1"/>
-          </p:cNvSpPr>
-          <p:nvPr>
-            <p:ph type="title"/>
-          </p:nvPr>
-        </p:nvSpPr>
-        <p:spPr/>
-        <p:txBody>
-          <a:bodyPr/>
-          <a:lstStyle/>
-          <a:p>
-            <a:pPr lvl="0" indent="0" marL="0">
-              <a:buNone/>
-            </a:pPr>
-            <a:r>
-              <a:rPr/>
-              <a:t>The opportunity set is broader than the two use cases developed in this project</a:t>
-            </a:r>
-          </a:p>
-        </p:txBody>
-      </p:sp>
-      <p:sp>
-        <p:nvSpPr>
-          <p:cNvPr id="3" name="Content Placeholder 2"/>
-          <p:cNvSpPr>
-            <a:spLocks noGrp="1"/>
-          </p:cNvSpPr>
-          <p:nvPr>
-            <p:ph idx="1" sz="half"/>
-          </p:nvPr>
-        </p:nvSpPr>
-        <p:spPr/>
-        <p:txBody>
-          <a:bodyPr/>
-          <a:lstStyle/>
-          <a:p>
-            <a:pPr lvl="0" indent="0" marL="0">
-              <a:spcBef>
-                <a:spcPts val="3000"/>
-              </a:spcBef>
-              <a:buNone/>
-            </a:pPr>
-            <a:r>
-              <a:rPr b="1"/>
-              <a:t>Selected for this project</a:t>
-            </a:r>
-          </a:p>
-          <a:p>
-            <a:pPr lvl="0"/>
-            <a:r>
-              <a:rPr b="1"/>
-              <a:t>Process prioritization</a:t>
-            </a:r>
-            <a:r>
-              <a:rPr/>
-              <a:t>: rank opportunities by win propensity and support decisions on where sales effort should focus first.</a:t>
-            </a:r>
-          </a:p>
-          <a:p>
-            <a:pPr lvl="0"/>
-            <a:r>
-              <a:rPr b="1"/>
-              <a:t>Opportunity sizing &amp; forecasting</a:t>
-            </a:r>
-            <a:r>
-              <a:rPr/>
-              <a:t>: estimate deal value and aggregate expected sales for planning, prioritization, and budget visibility.</a:t>
-            </a:r>
-          </a:p>
-        </p:txBody>
-      </p:sp>
-      <p:sp>
-        <p:nvSpPr>
-          <p:cNvPr id="4" name="Content Placeholder 3"/>
-          <p:cNvSpPr>
-            <a:spLocks noGrp="1"/>
-          </p:cNvSpPr>
-          <p:nvPr>
-            <p:ph idx="2" sz="half"/>
-          </p:nvPr>
-        </p:nvSpPr>
-        <p:spPr/>
-        <p:txBody>
-          <a:bodyPr/>
-          <a:lstStyle/>
-          <a:p>
-            <a:pPr lvl="0" indent="0" marL="0">
-              <a:spcBef>
-                <a:spcPts val="3000"/>
-              </a:spcBef>
-              <a:buNone/>
-            </a:pPr>
-            <a:r>
-              <a:rPr b="1"/>
-              <a:t>Additional opportunities identified in the data</a:t>
-            </a:r>
-          </a:p>
-          <a:p>
-            <a:pPr lvl="0"/>
-            <a:r>
-              <a:rPr b="1"/>
-              <a:t>Channel optimization</a:t>
-            </a:r>
-            <a:r>
-              <a:rPr/>
-              <a:t>: test what-if scenarios around route-to-market and engagement model choices.</a:t>
-            </a:r>
-          </a:p>
-          <a:p>
-            <a:pPr lvl="0"/>
-            <a:r>
-              <a:rPr b="1"/>
-              <a:t>Secondary market segmentation</a:t>
-            </a:r>
-            <a:r>
-              <a:rPr/>
-              <a:t>: create actionable commercial segments from predicted value and conversion potential.</a:t>
-            </a:r>
-          </a:p>
-          <a:p>
-            <a:pPr lvl="0"/>
-            <a:r>
-              <a:rPr b="1"/>
-              <a:t>Early warning systems</a:t>
-            </a:r>
-            <a:r>
-              <a:rPr/>
-              <a:t>: flag opportunities that are likely to deteriorate or stall.</a:t>
-            </a:r>
-          </a:p>
-          <a:p>
-            <a:pPr lvl="0"/>
-            <a:r>
-              <a:rPr b="1"/>
-              <a:t>Budget allocation</a:t>
-            </a:r>
-            <a:r>
-              <a:rPr/>
-              <a:t>: guide sales effort and product-focus decisions across segments, regions, and product lines.</a:t>
-            </a:r>
-          </a:p>
-        </p:txBody>
-      </p:sp>
-    </p:spTree>
-  </p:cSld>
-  <p:timing>
-    <p:tnLst>
-      <p:par>
-        <p:cTn id="1" dur="indefinite" restart="never" nodeType="tmRoot">
-          <p:childTnLst>
-            <p:seq concurrent="1" nextAc="seek">
-              <p:cTn id="2" dur="indefinite" nodeType="mainSeq">
-                <p:childTnLst>
-                  <p:par>
-                    <p:cTn id="3" fill="hold">
-                      <p:stCondLst>
-                        <p:cond delay="indefinite"/>
-                      </p:stCondLst>
-                      <p:childTnLst>
-                        <p:par>
-                          <p:cTn id="4" fill="hold">
-                            <p:stCondLst>
-                              <p:cond delay="0"/>
-                            </p:stCondLst>
-                            <p:childTnLst>
-                              <p:par>
-                                <p:cTn id="5" presetID="1" presetClass="entr" presetSubtype="0" fill="hold" grpId="0" nodeType="clickEffect">
-                                  <p:stCondLst>
-                                    <p:cond delay="0"/>
-                                  </p:stCondLst>
-                                  <p:childTnLst>
-                                    <p:set>
-                                      <p:cBhvr>
-                                        <p:cTn id="6" dur="1" fill="hold">
-                                          <p:stCondLst>
-                                            <p:cond delay="0"/>
-                                          </p:stCondLst>
-                                        </p:cTn>
-                                        <p:tgtEl>
-                                          <p:spTgt spid="3">
-                                            <p:txEl>
-                                              <p:pRg st="1" end="1"/>
-                                            </p:txEl>
-                                          </p:spTgt>
-                                        </p:tgtEl>
-                                        <p:attrNameLst>
-                                          <p:attrName>style.visibility</p:attrName>
-                                        </p:attrNameLst>
-                                      </p:cBhvr>
-                                      <p:to>
-                                        <p:strVal val="visible"/>
-                                      </p:to>
-                                    </p:set>
-                                  </p:childTnLst>
-                                </p:cTn>
-                              </p:par>
-                            </p:childTnLst>
-                          </p:cTn>
-                        </p:par>
-                      </p:childTnLst>
-                    </p:cTn>
-                  </p:par>
-                  <p:par>
-                    <p:cTn id="7" fill="hold">
-                      <p:stCondLst>
-                        <p:cond delay="indefinite"/>
-                      </p:stCondLst>
-                      <p:childTnLst>
-                        <p:par>
-                          <p:cTn id="8" fill="hold">
-                            <p:stCondLst>
-                              <p:cond delay="0"/>
-                            </p:stCondLst>
-                            <p:childTnLst>
-                              <p:par>
-                                <p:cTn id="9" presetID="1" presetClass="entr" presetSubtype="0" fill="hold" grpId="0" nodeType="clickEffect">
-                                  <p:stCondLst>
-                                    <p:cond delay="0"/>
-                                  </p:stCondLst>
-                                  <p:childTnLst>
-                                    <p:set>
-                                      <p:cBhvr>
-                                        <p:cTn id="10" dur="1" fill="hold">
-                                          <p:stCondLst>
-                                            <p:cond delay="0"/>
-                                          </p:stCondLst>
-                                        </p:cTn>
-                                        <p:tgtEl>
-                                          <p:spTgt spid="3">
-                                            <p:txEl>
-                                              <p:pRg st="2" end="2"/>
-                                            </p:txEl>
-                                          </p:spTgt>
-                                        </p:tgtEl>
-                                        <p:attrNameLst>
-                                          <p:attrName>style.visibility</p:attrName>
-                                        </p:attrNameLst>
-                                      </p:cBhvr>
-                                      <p:to>
-                                        <p:strVal val="visible"/>
-                                      </p:to>
-                                    </p:set>
-                                  </p:childTnLst>
-                                </p:cTn>
-                              </p:par>
-                            </p:childTnLst>
-                          </p:cTn>
-                        </p:par>
-                      </p:childTnLst>
-                    </p:cTn>
-                  </p:par>
-                  <p:par>
-                    <p:cTn id="11" fill="hold">
-                      <p:stCondLst>
-                        <p:cond delay="indefinite"/>
-                      </p:stCondLst>
-                      <p:childTnLst>
-                        <p:par>
-                          <p:cTn id="12" fill="hold">
-                            <p:stCondLst>
-                              <p:cond delay="0"/>
-                            </p:stCondLst>
-                            <p:childTnLst>
-                              <p:par>
-                                <p:cTn id="13" presetID="1" presetClass="entr" presetSubtype="0" fill="hold" grpId="0" nodeType="clickEffect">
-                                  <p:stCondLst>
-                                    <p:cond delay="0"/>
-                                  </p:stCondLst>
-                                  <p:childTnLst>
-                                    <p:set>
-                                      <p:cBhvr>
-                                        <p:cTn id="14" dur="1" fill="hold">
-                                          <p:stCondLst>
-                                            <p:cond delay="0"/>
-                                          </p:stCondLst>
-                                        </p:cTn>
-                                        <p:tgtEl>
-                                          <p:spTgt spid="4">
-                                            <p:txEl>
-                                              <p:pRg st="1" end="1"/>
-                                            </p:txEl>
-                                          </p:spTgt>
-                                        </p:tgtEl>
-                                        <p:attrNameLst>
-                                          <p:attrName>style.visibility</p:attrName>
-                                        </p:attrNameLst>
-                                      </p:cBhvr>
-                                      <p:to>
-                                        <p:strVal val="visible"/>
-                                      </p:to>
-                                    </p:set>
-                                  </p:childTnLst>
-                                </p:cTn>
-                              </p:par>
-                            </p:childTnLst>
-                          </p:cTn>
-                        </p:par>
-                      </p:childTnLst>
-                    </p:cTn>
-                  </p:par>
-                  <p:par>
-                    <p:cTn id="15" fill="hold">
-                      <p:stCondLst>
-                        <p:cond delay="indefinite"/>
-                      </p:stCondLst>
-                      <p:childTnLst>
-                        <p:par>
-                          <p:cTn id="16" fill="hold">
-                            <p:stCondLst>
-                              <p:cond delay="0"/>
-                            </p:stCondLst>
-                            <p:childTnLst>
-                              <p:par>
-                                <p:cTn id="17" presetID="1" presetClass="entr" presetSubtype="0" fill="hold" grpId="0" nodeType="clickEffect">
-                                  <p:stCondLst>
-                                    <p:cond delay="0"/>
-                                  </p:stCondLst>
-                                  <p:childTnLst>
-                                    <p:set>
-                                      <p:cBhvr>
-                                        <p:cTn id="18" dur="1" fill="hold">
-                                          <p:stCondLst>
-                                            <p:cond delay="0"/>
-                                          </p:stCondLst>
-                                        </p:cTn>
-                                        <p:tgtEl>
-                                          <p:spTgt spid="4">
-                                            <p:txEl>
-                                              <p:pRg st="2" end="2"/>
-                                            </p:txEl>
-                                          </p:spTgt>
-                                        </p:tgtEl>
-                                        <p:attrNameLst>
-                                          <p:attrName>style.visibility</p:attrName>
-                                        </p:attrNameLst>
-                                      </p:cBhvr>
-                                      <p:to>
-                                        <p:strVal val="visible"/>
-                                      </p:to>
-                                    </p:set>
-                                  </p:childTnLst>
-                                </p:cTn>
-                              </p:par>
-                            </p:childTnLst>
-                          </p:cTn>
-                        </p:par>
-                      </p:childTnLst>
-                    </p:cTn>
-                  </p:par>
-                  <p:par>
-                    <p:cTn id="19" fill="hold">
-                      <p:stCondLst>
-                        <p:cond delay="indefinite"/>
-                      </p:stCondLst>
-                      <p:childTnLst>
-                        <p:par>
-                          <p:cTn id="20" fill="hold">
-                            <p:stCondLst>
-                              <p:cond delay="0"/>
-                            </p:stCondLst>
-                            <p:childTnLst>
-                              <p:par>
-                                <p:cTn id="21" presetID="1" presetClass="entr" presetSubtype="0" fill="hold" grpId="0" nodeType="clickEffect">
-                                  <p:stCondLst>
-                                    <p:cond delay="0"/>
-                                  </p:stCondLst>
-                                  <p:childTnLst>
-                                    <p:set>
-                                      <p:cBhvr>
-                                        <p:cTn id="22" dur="1" fill="hold">
-                                          <p:stCondLst>
-                                            <p:cond delay="0"/>
-                                          </p:stCondLst>
-                                        </p:cTn>
-                                        <p:tgtEl>
-                                          <p:spTgt spid="4">
-                                            <p:txEl>
-                                              <p:pRg st="3" end="3"/>
-                                            </p:txEl>
-                                          </p:spTgt>
-                                        </p:tgtEl>
-                                        <p:attrNameLst>
-                                          <p:attrName>style.visibility</p:attrName>
-                                        </p:attrNameLst>
-                                      </p:cBhvr>
-                                      <p:to>
-                                        <p:strVal val="visible"/>
-                                      </p:to>
-                                    </p:set>
-                                  </p:childTnLst>
-                                </p:cTn>
-                              </p:par>
-                            </p:childTnLst>
-                          </p:cTn>
-                        </p:par>
-                      </p:childTnLst>
-                    </p:cTn>
-                  </p:par>
-                  <p:par>
-                    <p:cTn id="23" fill="hold">
-                      <p:stCondLst>
-                        <p:cond delay="indefinite"/>
-                      </p:stCondLst>
-                      <p:childTnLst>
-                        <p:par>
-                          <p:cTn id="24" fill="hold">
-                            <p:stCondLst>
-                              <p:cond delay="0"/>
-                            </p:stCondLst>
-                            <p:childTnLst>
-                              <p:par>
-                                <p:cTn id="25" presetID="1" presetClass="entr" presetSubtype="0" fill="hold" grpId="0" nodeType="clickEffect">
-                                  <p:stCondLst>
-                                    <p:cond delay="0"/>
-                                  </p:stCondLst>
-                                  <p:childTnLst>
-                                    <p:set>
-                                      <p:cBhvr>
-                                        <p:cTn id="26" dur="1" fill="hold">
-                                          <p:stCondLst>
-                                            <p:cond delay="0"/>
-                                          </p:stCondLst>
-                                        </p:cTn>
-                                        <p:tgtEl>
-                                          <p:spTgt spid="4">
-                                            <p:txEl>
-                                              <p:pRg st="4" end="4"/>
-                                            </p:txEl>
-                                          </p:spTgt>
-                                        </p:tgtEl>
-                                        <p:attrNameLst>
-                                          <p:attrName>style.visibility</p:attrName>
-                                        </p:attrNameLst>
-                                      </p:cBhvr>
-                                      <p:to>
-                                        <p:strVal val="visible"/>
-                                      </p:to>
-                                    </p:set>
-                                  </p:childTnLst>
-                                </p:cTn>
-                              </p:par>
-                            </p:childTnLst>
-                          </p:cTn>
-                        </p:par>
-                      </p:childTnLst>
-                    </p:cTn>
-                  </p:par>
-                </p:childTnLst>
-              </p:cTn>
-              <p:prevCondLst>
-                <p:cond evt="onPrev" delay="0">
-                  <p:tgtEl>
-                    <p:sldTgt/>
-                  </p:tgtEl>
-                </p:cond>
-              </p:prevCondLst>
-              <p:nextCondLst>
-                <p:cond evt="onNext" delay="0">
-                  <p:tgtEl>
-                    <p:sldTgt/>
-                  </p:tgtEl>
-                </p:cond>
-              </p:nextCondLst>
-            </p:seq>
-          </p:childTnLst>
-        </p:cTn>
-      </p:par>
-    </p:tnLst>
-    <p:bldLst>
-      <p:bldP spid="3" grpId="0" uiExpand="1" build="p"/>
-      <p:bldP spid="4" grpId="0" uiExpand="1" build="p"/>
-    </p:bldLst>
-  </p:timing>
-</p:sld>
-</file>
-
-<file path=ppt/slides/slide7.xml><?xml version="1.0" encoding="utf-8"?>
-<p:sld xmlns:a="http://schemas.openxmlformats.org/drawingml/2006/main" xmlns:r="http://schemas.openxmlformats.org/officeDocument/2006/relationships" xmlns:p="http://schemas.openxmlformats.org/presentationml/2006/main">
-  <p:cSld>
-    <p:spTree>
-      <p:nvGrpSpPr>
-        <p:cNvPr id="1" name=""/>
-        <p:cNvGrpSpPr/>
-        <p:nvPr/>
-      </p:nvGrpSpPr>
-      <p:grpSpPr>
-        <a:xfrm>
-          <a:off x="0" y="0"/>
-          <a:ext cx="0" cy="0"/>
-          <a:chOff x="0" y="0"/>
-          <a:chExt cx="0" cy="0"/>
-        </a:xfrm>
-      </p:grpSpPr>
-      <p:sp>
-        <p:nvSpPr>
-          <p:cNvPr id="2" name="Title 1"/>
-          <p:cNvSpPr>
-            <a:spLocks noGrp="1"/>
-          </p:cNvSpPr>
-          <p:nvPr>
-            <p:ph type="title"/>
-          </p:nvPr>
-        </p:nvSpPr>
-        <p:spPr>
-          <a:xfrm>
-            <a:off x="722313" y="3305176"/>
-            <a:ext cx="7772400" cy="1021556"/>
-          </a:xfrm>
-        </p:spPr>
-        <p:txBody>
-          <a:bodyPr/>
-          <a:lstStyle/>
-          <a:p>
-            <a:pPr lvl="0" indent="0" marL="0">
-              <a:buNone/>
-            </a:pPr>
-            <a:r>
-              <a:rPr/>
-              <a:t>Exploratory data analysis</a:t>
-            </a:r>
-          </a:p>
-        </p:txBody>
-      </p:sp>
-    </p:spTree>
-  </p:cSld>
-</p:sld>
-</file>
-
-<file path=ppt/slides/slide8.xml><?xml version="1.0" encoding="utf-8"?>
-<p:sld xmlns:a="http://schemas.openxmlformats.org/drawingml/2006/main" xmlns:r="http://schemas.openxmlformats.org/officeDocument/2006/relationships" xmlns:p="http://schemas.openxmlformats.org/presentationml/2006/main">
-  <p:cSld>
-    <p:spTree>
-      <p:nvGrpSpPr>
-        <p:cNvPr id="1" name=""/>
-        <p:cNvGrpSpPr/>
-        <p:nvPr/>
-      </p:nvGrpSpPr>
-      <p:grpSpPr>
-        <a:xfrm>
-          <a:off x="0" y="0"/>
-          <a:ext cx="0" cy="0"/>
-          <a:chOff x="0" y="0"/>
-          <a:chExt cx="0" cy="0"/>
-        </a:xfrm>
-      </p:grpSpPr>
-      <p:sp>
-        <p:nvSpPr>
-          <p:cNvPr id="2" name="Title 1"/>
-          <p:cNvSpPr>
-            <a:spLocks noGrp="1"/>
-          </p:cNvSpPr>
-          <p:nvPr>
-            <p:ph type="title"/>
-          </p:nvPr>
-        </p:nvSpPr>
-        <p:spPr/>
-        <p:txBody>
-          <a:bodyPr/>
-          <a:lstStyle/>
-          <a:p>
-            <a:pPr lvl="0" indent="0" marL="0">
-              <a:buNone/>
-            </a:pPr>
-            <a:r>
-              <a:rPr/>
-              <a:t>The dataset was analyzed and prepared with the two use cases in mind, which shaped the EDA focus and modelling choices</a:t>
-            </a:r>
-          </a:p>
-        </p:txBody>
-      </p:sp>
-      <p:sp>
-        <p:nvSpPr>
-          <p:cNvPr id="3" name="Content Placeholder 2"/>
-          <p:cNvSpPr>
-            <a:spLocks noGrp="1"/>
-          </p:cNvSpPr>
-          <p:nvPr>
-            <p:ph idx="1" sz="half"/>
-          </p:nvPr>
-        </p:nvSpPr>
-        <p:spPr/>
-        <p:txBody>
-          <a:bodyPr/>
-          <a:lstStyle/>
-          <a:p>
-            <a:pPr lvl="0"/>
-            <a:r>
-              <a:rPr b="1"/>
-              <a:t>Scale</a:t>
-            </a:r>
-            <a:r>
-              <a:rPr/>
-              <a:t>: 78,025 sales opportunities and </a:t>
-            </a:r>
-            <a:r>
-              <a:rPr b="1"/>
-              <a:t>19 variables</a:t>
-            </a:r>
-            <a:r>
-              <a:rPr/>
-              <a:t>.</a:t>
-            </a:r>
-          </a:p>
-          <a:p>
-            <a:pPr lvl="0"/>
-            <a:r>
-              <a:rPr/>
-              <a:t>Validation checks flagged duplicates and process-consistency issues before modelling. Key preparation findings:</a:t>
-            </a:r>
-          </a:p>
-          <a:p>
-            <a:pPr lvl="1"/>
-            <a:r>
-              <a:rPr b="1"/>
-              <a:t>196 duplicated opportunity IDs</a:t>
-            </a:r>
-            <a:r>
-              <a:rPr/>
-              <a:t> (removed)</a:t>
-            </a:r>
-          </a:p>
-          <a:p>
-            <a:pPr lvl="1"/>
-            <a:r>
-              <a:rPr/>
-              <a:t>** zero amount opportunities** (removed)</a:t>
-            </a:r>
-          </a:p>
-          <a:p>
-            <a:pPr lvl="1"/>
-            <a:r>
-              <a:rPr b="1"/>
-              <a:t>12,921 rows</a:t>
-            </a:r>
-            <a:r>
-              <a:rPr/>
-              <a:t> where stage ratios do not sum closely to 1 (kept)</a:t>
-            </a:r>
-          </a:p>
-          <a:p>
-            <a:pPr lvl="0"/>
-            <a:r>
-              <a:rPr/>
-              <a:t>For the modelling experiments shown here, the sample used </a:t>
-            </a:r>
-            <a:r>
-              <a:rPr b="1"/>
-              <a:t>75,819 eligible rows</a:t>
-            </a:r>
-            <a:r>
-              <a:rPr/>
-              <a:t> out of </a:t>
-            </a:r>
-            <a:r>
-              <a:rPr b="1"/>
-              <a:t>78,025 total rows</a:t>
-            </a:r>
-            <a:r>
-              <a:rPr/>
-              <a:t> with valid targets.</a:t>
-            </a:r>
-          </a:p>
-        </p:txBody>
-      </p:sp>
-      <p:sp>
-        <p:nvSpPr>
-          <p:cNvPr id="4" name="Content Placeholder 3"/>
-          <p:cNvSpPr>
-            <a:spLocks noGrp="1"/>
-          </p:cNvSpPr>
-          <p:nvPr>
-            <p:ph idx="2" sz="half"/>
-          </p:nvPr>
-        </p:nvSpPr>
-        <p:spPr/>
-        <p:txBody>
-          <a:bodyPr/>
-          <a:lstStyle/>
-          <a:p>
-            <a:pPr lvl="0" indent="0" marL="0">
-              <a:buNone/>
-            </a:pPr>
-            <a:r>
-              <a:rPr/>
-              <a:t>TO PUT A PLOT/TABLE WITH DATA HERE.</a:t>
-            </a:r>
-          </a:p>
-        </p:txBody>
-      </p:sp>
-    </p:spTree>
-  </p:cSld>
-  <p:timing>
-    <p:tnLst>
-      <p:par>
-        <p:cTn id="1" dur="indefinite" restart="never" nodeType="tmRoot">
-          <p:childTnLst>
-            <p:seq concurrent="1" nextAc="seek">
-              <p:cTn id="2" dur="indefinite" nodeType="mainSeq">
-                <p:childTnLst>
-                  <p:par>
-                    <p:cTn id="3" fill="hold">
-                      <p:stCondLst>
-                        <p:cond delay="indefinite"/>
-                      </p:stCondLst>
-                      <p:childTnLst>
-                        <p:par>
-                          <p:cTn id="4" fill="hold">
-                            <p:stCondLst>
-                              <p:cond delay="0"/>
-                            </p:stCondLst>
-                            <p:childTnLst>
-                              <p:par>
-                                <p:cTn id="5" presetID="1" presetClass="entr" presetSubtype="0" fill="hold" grpId="0" nodeType="clickEffect">
-                                  <p:stCondLst>
-                                    <p:cond delay="0"/>
-                                  </p:stCondLst>
-                                  <p:childTnLst>
-                                    <p:set>
-                                      <p:cBhvr>
-                                        <p:cTn id="6" dur="1" fill="hold">
-                                          <p:stCondLst>
-                                            <p:cond delay="0"/>
-                                          </p:stCondLst>
-                                        </p:cTn>
-                                        <p:tgtEl>
-                                          <p:spTgt spid="3">
-                                            <p:txEl>
-                                              <p:pRg st="0" end="0"/>
-                                            </p:txEl>
-                                          </p:spTgt>
-                                        </p:tgtEl>
-                                        <p:attrNameLst>
-                                          <p:attrName>style.visibility</p:attrName>
-                                        </p:attrNameLst>
-                                      </p:cBhvr>
-                                      <p:to>
-                                        <p:strVal val="visible"/>
-                                      </p:to>
-                                    </p:set>
-                                  </p:childTnLst>
-                                </p:cTn>
-                              </p:par>
-                            </p:childTnLst>
-                          </p:cTn>
-                        </p:par>
-                      </p:childTnLst>
-                    </p:cTn>
-                  </p:par>
-                  <p:par>
-                    <p:cTn id="7" fill="hold">
-                      <p:stCondLst>
-                        <p:cond delay="indefinite"/>
-                      </p:stCondLst>
-                      <p:childTnLst>
-                        <p:par>
-                          <p:cTn id="8" fill="hold">
-                            <p:stCondLst>
-                              <p:cond delay="0"/>
-                            </p:stCondLst>
-                            <p:childTnLst>
-                              <p:par>
-                                <p:cTn id="9" presetID="1" presetClass="entr" presetSubtype="0" fill="hold" grpId="0" nodeType="clickEffect">
-                                  <p:stCondLst>
-                                    <p:cond delay="0"/>
-                                  </p:stCondLst>
-                                  <p:childTnLst>
-                                    <p:set>
-                                      <p:cBhvr>
-                                        <p:cTn id="10" dur="1" fill="hold">
-                                          <p:stCondLst>
-                                            <p:cond delay="0"/>
-                                          </p:stCondLst>
-                                        </p:cTn>
-                                        <p:tgtEl>
-                                          <p:spTgt spid="3">
-                                            <p:txEl>
-                                              <p:pRg st="1" end="1"/>
-                                            </p:txEl>
-                                          </p:spTgt>
-                                        </p:tgtEl>
-                                        <p:attrNameLst>
-                                          <p:attrName>style.visibility</p:attrName>
-                                        </p:attrNameLst>
-                                      </p:cBhvr>
-                                      <p:to>
-                                        <p:strVal val="visible"/>
-                                      </p:to>
-                                    </p:set>
-                                  </p:childTnLst>
-                                </p:cTn>
-                              </p:par>
-                            </p:childTnLst>
-                          </p:cTn>
-                        </p:par>
-                      </p:childTnLst>
-                    </p:cTn>
-                  </p:par>
-                  <p:par>
-                    <p:cTn id="11" fill="hold">
-                      <p:stCondLst>
-                        <p:cond delay="indefinite"/>
-                      </p:stCondLst>
-                      <p:childTnLst>
-                        <p:par>
-                          <p:cTn id="12" fill="hold">
-                            <p:stCondLst>
-                              <p:cond delay="0"/>
-                            </p:stCondLst>
-                            <p:childTnLst>
-                              <p:par>
-                                <p:cTn id="13" presetID="1" presetClass="entr" presetSubtype="0" fill="hold" grpId="0" nodeType="clickEffect">
-                                  <p:stCondLst>
-                                    <p:cond delay="0"/>
-                                  </p:stCondLst>
-                                  <p:childTnLst>
-                                    <p:set>
-                                      <p:cBhvr>
-                                        <p:cTn id="14" dur="1" fill="hold">
-                                          <p:stCondLst>
-                                            <p:cond delay="0"/>
-                                          </p:stCondLst>
-                                        </p:cTn>
-                                        <p:tgtEl>
-                                          <p:spTgt spid="3">
-                                            <p:txEl>
-                                              <p:pRg st="2" end="2"/>
-                                            </p:txEl>
-                                          </p:spTgt>
-                                        </p:tgtEl>
-                                        <p:attrNameLst>
-                                          <p:attrName>style.visibility</p:attrName>
-                                        </p:attrNameLst>
-                                      </p:cBhvr>
-                                      <p:to>
-                                        <p:strVal val="visible"/>
-                                      </p:to>
-                                    </p:set>
-                                  </p:childTnLst>
-                                </p:cTn>
-                              </p:par>
-                            </p:childTnLst>
-                          </p:cTn>
-                        </p:par>
-                      </p:childTnLst>
-                    </p:cTn>
-                  </p:par>
-                  <p:par>
-                    <p:cTn id="15" fill="hold">
-                      <p:stCondLst>
-                        <p:cond delay="indefinite"/>
-                      </p:stCondLst>
-                      <p:childTnLst>
-                        <p:par>
-                          <p:cTn id="16" fill="hold">
-                            <p:stCondLst>
-                              <p:cond delay="0"/>
-                            </p:stCondLst>
-                            <p:childTnLst>
-                              <p:par>
-                                <p:cTn id="17" presetID="1" presetClass="entr" presetSubtype="0" fill="hold" grpId="0" nodeType="clickEffect">
-                                  <p:stCondLst>
-                                    <p:cond delay="0"/>
-                                  </p:stCondLst>
-                                  <p:childTnLst>
-                                    <p:set>
-                                      <p:cBhvr>
-                                        <p:cTn id="18" dur="1" fill="hold">
-                                          <p:stCondLst>
-                                            <p:cond delay="0"/>
-                                          </p:stCondLst>
-                                        </p:cTn>
-                                        <p:tgtEl>
-                                          <p:spTgt spid="3">
-                                            <p:txEl>
-                                              <p:pRg st="3" end="3"/>
-                                            </p:txEl>
-                                          </p:spTgt>
-                                        </p:tgtEl>
-                                        <p:attrNameLst>
-                                          <p:attrName>style.visibility</p:attrName>
-                                        </p:attrNameLst>
-                                      </p:cBhvr>
-                                      <p:to>
-                                        <p:strVal val="visible"/>
-                                      </p:to>
-                                    </p:set>
-                                  </p:childTnLst>
-                                </p:cTn>
-                              </p:par>
-                            </p:childTnLst>
-                          </p:cTn>
-                        </p:par>
-                      </p:childTnLst>
-                    </p:cTn>
-                  </p:par>
-                  <p:par>
-                    <p:cTn id="19" fill="hold">
-                      <p:stCondLst>
-                        <p:cond delay="indefinite"/>
-                      </p:stCondLst>
-                      <p:childTnLst>
-                        <p:par>
-                          <p:cTn id="20" fill="hold">
-                            <p:stCondLst>
-                              <p:cond delay="0"/>
-                            </p:stCondLst>
-                            <p:childTnLst>
-                              <p:par>
-                                <p:cTn id="21" presetID="1" presetClass="entr" presetSubtype="0" fill="hold" grpId="0" nodeType="clickEffect">
-                                  <p:stCondLst>
-                                    <p:cond delay="0"/>
-                                  </p:stCondLst>
-                                  <p:childTnLst>
-                                    <p:set>
-                                      <p:cBhvr>
-                                        <p:cTn id="22" dur="1" fill="hold">
-                                          <p:stCondLst>
-                                            <p:cond delay="0"/>
-                                          </p:stCondLst>
-                                        </p:cTn>
-                                        <p:tgtEl>
-                                          <p:spTgt spid="3">
-                                            <p:txEl>
-                                              <p:pRg st="4" end="4"/>
-                                            </p:txEl>
-                                          </p:spTgt>
-                                        </p:tgtEl>
-                                        <p:attrNameLst>
-                                          <p:attrName>style.visibility</p:attrName>
-                                        </p:attrNameLst>
-                                      </p:cBhvr>
-                                      <p:to>
-                                        <p:strVal val="visible"/>
-                                      </p:to>
-                                    </p:set>
-                                  </p:childTnLst>
-                                </p:cTn>
-                              </p:par>
-                            </p:childTnLst>
-                          </p:cTn>
-                        </p:par>
-                      </p:childTnLst>
-                    </p:cTn>
-                  </p:par>
-                  <p:par>
-                    <p:cTn id="23" fill="hold">
-                      <p:stCondLst>
-                        <p:cond delay="indefinite"/>
-                      </p:stCondLst>
-                      <p:childTnLst>
-                        <p:par>
-                          <p:cTn id="24" fill="hold">
-                            <p:stCondLst>
-                              <p:cond delay="0"/>
-                            </p:stCondLst>
-                            <p:childTnLst>
-                              <p:par>
-                                <p:cTn id="25" presetID="1" presetClass="entr" presetSubtype="0" fill="hold" grpId="0" nodeType="clickEffect">
-                                  <p:stCondLst>
-                                    <p:cond delay="0"/>
-                                  </p:stCondLst>
-                                  <p:childTnLst>
-                                    <p:set>
-                                      <p:cBhvr>
-                                        <p:cTn id="26" dur="1" fill="hold">
-                                          <p:stCondLst>
-                                            <p:cond delay="0"/>
-                                          </p:stCondLst>
-                                        </p:cTn>
-                                        <p:tgtEl>
-                                          <p:spTgt spid="3">
-                                            <p:txEl>
-                                              <p:pRg st="5" end="5"/>
-                                            </p:txEl>
-                                          </p:spTgt>
-                                        </p:tgtEl>
-                                        <p:attrNameLst>
-                                          <p:attrName>style.visibility</p:attrName>
-                                        </p:attrNameLst>
-                                      </p:cBhvr>
-                                      <p:to>
-                                        <p:strVal val="visible"/>
-                                      </p:to>
-                                    </p:set>
-                                  </p:childTnLst>
-                                </p:cTn>
-                              </p:par>
-                            </p:childTnLst>
-                          </p:cTn>
-                        </p:par>
-                      </p:childTnLst>
-                    </p:cTn>
-                  </p:par>
-                </p:childTnLst>
-              </p:cTn>
-              <p:prevCondLst>
-                <p:cond evt="onPrev" delay="0">
-                  <p:tgtEl>
-                    <p:sldTgt/>
-                  </p:tgtEl>
-                </p:cond>
-              </p:prevCondLst>
-              <p:nextCondLst>
-                <p:cond evt="onNext" delay="0">
-                  <p:tgtEl>
-                    <p:sldTgt/>
-                  </p:tgtEl>
-                </p:cond>
-              </p:nextCondLst>
-            </p:seq>
-          </p:childTnLst>
-        </p:cTn>
-      </p:par>
-    </p:tnLst>
-    <p:bldLst>
-      <p:bldP spid="3" grpId="0" uiExpand="1" build="p"/>
-    </p:bldLst>
-  </p:timing>
-</p:sld>
-</file>
-
-<file path=ppt/slides/slide9.xml><?xml version="1.0" encoding="utf-8"?>
-<p:sld xmlns:a="http://schemas.openxmlformats.org/drawingml/2006/main" xmlns:r="http://schemas.openxmlformats.org/officeDocument/2006/relationships" xmlns:p="http://schemas.openxmlformats.org/presentationml/2006/main">
-  <p:cSld>
-    <p:spTree>
-      <p:nvGrpSpPr>
-        <p:cNvPr id="1" name=""/>
-        <p:cNvGrpSpPr/>
-        <p:nvPr/>
-      </p:nvGrpSpPr>
-      <p:grpSpPr>
-        <a:xfrm>
-          <a:off x="0" y="0"/>
-          <a:ext cx="0" cy="0"/>
-          <a:chOff x="0" y="0"/>
-          <a:chExt cx="0" cy="0"/>
-        </a:xfrm>
-      </p:grpSpPr>
-      <p:sp>
-        <p:nvSpPr>
-          <p:cNvPr id="2" name="Title 1"/>
-          <p:cNvSpPr>
-            <a:spLocks noGrp="1"/>
-          </p:cNvSpPr>
-          <p:nvPr>
-            <p:ph type="title"/>
-          </p:nvPr>
-        </p:nvSpPr>
-        <p:spPr/>
-        <p:txBody>
-          <a:bodyPr/>
-          <a:lstStyle/>
-          <a:p>
-            <a:pPr lvl="0" indent="0" marL="0">
-              <a:buNone/>
-            </a:pPr>
-            <a:r>
-              <a:rPr/>
-              <a:t>The eligible modelling sample wins 22.7% of the time, with a heavily skewed amount distribution</a:t>
-            </a:r>
-          </a:p>
-        </p:txBody>
-      </p:sp>
-      <p:pic>
-        <p:nvPicPr>
-          <p:cNvPr descr="assets/eda_amount_win_rate.png" id="0" name="Picture 1"/>
-          <p:cNvPicPr>
-            <a:picLocks noGrp="1" noChangeAspect="1"/>
-          </p:cNvPicPr>
-          <p:nvPr/>
-        </p:nvPicPr>
-        <p:blipFill>
-          <a:blip r:embed="rId2"/>
-          <a:stretch>
-            <a:fillRect/>
-          </a:stretch>
-        </p:blipFill>
-        <p:spPr bwMode="auto">
-          <a:xfrm>
-            <a:off x="457200" y="1765300"/>
-            <a:ext cx="4038600" cy="2247900"/>
-          </a:xfrm>
-          <a:prstGeom prst="rect">
-            <a:avLst/>
-          </a:prstGeom>
-          <a:noFill/>
-          <a:ln w="9525">
-            <a:noFill/>
-            <a:headEnd/>
-            <a:tailEnd/>
-          </a:ln>
-        </p:spPr>
-      </p:pic>
-      <p:sp>
-        <p:nvSpPr>
-          <p:cNvPr id="4" name="Content Placeholder 3"/>
-          <p:cNvSpPr>
-            <a:spLocks noGrp="1"/>
-          </p:cNvSpPr>
-          <p:nvPr>
-            <p:ph idx="2" sz="half"/>
-          </p:nvPr>
-        </p:nvSpPr>
-        <p:spPr/>
-        <p:txBody>
-          <a:bodyPr/>
-          <a:lstStyle/>
-          <a:p>
-            <a:pPr lvl="0"/>
-            <a:r>
-              <a:rPr/>
-              <a:t>The cleaned modelling sample is still dominated by lower-value opportunities, so volume sits overwhelmingly in the left side of the amount distribution.</a:t>
-            </a:r>
-          </a:p>
-          <a:p>
-            <a:pPr lvl="0"/>
-            <a:r>
-              <a:rPr/>
-              <a:t>Even with that skew, observed win rate improves as amount bands get larger, which supports using amount as a </a:t>
-            </a:r>
-            <a:r>
-              <a:rPr b="1"/>
-              <a:t>commercial value lens</a:t>
-            </a:r>
-            <a:r>
-              <a:rPr/>
-              <a:t> alongside propensity.</a:t>
-            </a:r>
-          </a:p>
-          <a:p>
-            <a:pPr lvl="0"/>
-            <a:r>
-              <a:rPr/>
-              <a:t>The opportunity mix remains loss-heavy overall (</a:t>
-            </a:r>
-            <a:r>
-              <a:rPr b="1"/>
-              <a:t>22.7% won / 77.3% lost</a:t>
-            </a:r>
-            <a:r>
-              <a:rPr/>
-              <a:t>), so the main operating challenge is still selective prioritization rather than broad-brush pursuit.</a:t>
-            </a:r>
-          </a:p>
-        </p:txBody>
-      </p:sp>
-    </p:spTree>
-  </p:cSld>
-  <p:timing>
-    <p:tnLst>
-      <p:par>
-        <p:cTn id="1" dur="indefinite" restart="never" nodeType="tmRoot">
-          <p:childTnLst>
-            <p:seq concurrent="1" nextAc="seek">
-              <p:cTn id="2" dur="indefinite" nodeType="mainSeq">
-                <p:childTnLst>
-                  <p:par>
-                    <p:cTn id="3" fill="hold">
-                      <p:stCondLst>
-                        <p:cond delay="indefinite"/>
-                      </p:stCondLst>
-                      <p:childTnLst>
-                        <p:par>
-                          <p:cTn id="4" fill="hold">
-                            <p:stCondLst>
-                              <p:cond delay="0"/>
-                            </p:stCondLst>
-                            <p:childTnLst>
-                              <p:par>
-                                <p:cTn id="5" presetID="1" presetClass="entr" presetSubtype="0" fill="hold" grpId="0" nodeType="clickEffect">
-                                  <p:stCondLst>
-                                    <p:cond delay="0"/>
-                                  </p:stCondLst>
-                                  <p:childTnLst>
-                                    <p:set>
-                                      <p:cBhvr>
-                                        <p:cTn id="6" dur="1" fill="hold">
-                                          <p:stCondLst>
-                                            <p:cond delay="0"/>
-                                          </p:stCondLst>
-                                        </p:cTn>
-                                        <p:tgtEl>
-                                          <p:spTgt spid="4">
-                                            <p:txEl>
-                                              <p:pRg st="0" end="0"/>
-                                            </p:txEl>
-                                          </p:spTgt>
-                                        </p:tgtEl>
-                                        <p:attrNameLst>
-                                          <p:attrName>style.visibility</p:attrName>
-                                        </p:attrNameLst>
-                                      </p:cBhvr>
-                                      <p:to>
-                                        <p:strVal val="visible"/>
-                                      </p:to>
-                                    </p:set>
-                                  </p:childTnLst>
-                                </p:cTn>
-                              </p:par>
-                            </p:childTnLst>
-                          </p:cTn>
-                        </p:par>
-                      </p:childTnLst>
-                    </p:cTn>
-                  </p:par>
-                  <p:par>
-                    <p:cTn id="7" fill="hold">
-                      <p:stCondLst>
-                        <p:cond delay="indefinite"/>
-                      </p:stCondLst>
-                      <p:childTnLst>
-                        <p:par>
-                          <p:cTn id="8" fill="hold">
-                            <p:stCondLst>
-                              <p:cond delay="0"/>
-                            </p:stCondLst>
-                            <p:childTnLst>
-                              <p:par>
-                                <p:cTn id="9" presetID="1" presetClass="entr" presetSubtype="0" fill="hold" grpId="0" nodeType="clickEffect">
-                                  <p:stCondLst>
-                                    <p:cond delay="0"/>
-                                  </p:stCondLst>
-                                  <p:childTnLst>
-                                    <p:set>
-                                      <p:cBhvr>
-                                        <p:cTn id="10" dur="1" fill="hold">
-                                          <p:stCondLst>
-                                            <p:cond delay="0"/>
-                                          </p:stCondLst>
-                                        </p:cTn>
-                                        <p:tgtEl>
-                                          <p:spTgt spid="4">
-                                            <p:txEl>
-                                              <p:pRg st="1" end="1"/>
-                                            </p:txEl>
-                                          </p:spTgt>
-                                        </p:tgtEl>
-                                        <p:attrNameLst>
-                                          <p:attrName>style.visibility</p:attrName>
-                                        </p:attrNameLst>
-                                      </p:cBhvr>
-                                      <p:to>
-                                        <p:strVal val="visible"/>
-                                      </p:to>
-                                    </p:set>
-                                  </p:childTnLst>
-                                </p:cTn>
-                              </p:par>
-                            </p:childTnLst>
-                          </p:cTn>
-                        </p:par>
-                      </p:childTnLst>
-                    </p:cTn>
-                  </p:par>
-                  <p:par>
-                    <p:cTn id="11" fill="hold">
-                      <p:stCondLst>
-                        <p:cond delay="indefinite"/>
-                      </p:stCondLst>
-                      <p:childTnLst>
-                        <p:par>
-                          <p:cTn id="12" fill="hold">
-                            <p:stCondLst>
-                              <p:cond delay="0"/>
-                            </p:stCondLst>
-                            <p:childTnLst>
-                              <p:par>
-                                <p:cTn id="13" presetID="1" presetClass="entr" presetSubtype="0" fill="hold" grpId="0" nodeType="clickEffect">
-                                  <p:stCondLst>
-                                    <p:cond delay="0"/>
-                                  </p:stCondLst>
-                                  <p:childTnLst>
-                                    <p:set>
-                                      <p:cBhvr>
-                                        <p:cTn id="14" dur="1" fill="hold">
-                                          <p:stCondLst>
-                                            <p:cond delay="0"/>
-                                          </p:stCondLst>
-                                        </p:cTn>
-                                        <p:tgtEl>
-                                          <p:spTgt spid="4">
-                                            <p:txEl>
-                                              <p:pRg st="2" end="2"/>
-                                            </p:txEl>
-                                          </p:spTgt>
-                                        </p:tgtEl>
-                                        <p:attrNameLst>
-                                          <p:attrName>style.visibility</p:attrName>
-                                        </p:attrNameLst>
-                                      </p:cBhvr>
-                                      <p:to>
-                                        <p:strVal val="visible"/>
-                                      </p:to>
-                                    </p:set>
-                                  </p:childTnLst>
-                                </p:cTn>
-                              </p:par>
-                            </p:childTnLst>
-                          </p:cTn>
-                        </p:par>
-                      </p:childTnLst>
-                    </p:cTn>
-                  </p:par>
-                </p:childTnLst>
-              </p:cTn>
-              <p:prevCondLst>
-                <p:cond evt="onPrev" delay="0">
-                  <p:tgtEl>
-                    <p:sldTgt/>
-                  </p:tgtEl>
-                </p:cond>
-              </p:prevCondLst>
-              <p:nextCondLst>
-                <p:cond evt="onNext" delay="0">
-                  <p:tgtEl>
-                    <p:sldTgt/>
-                  </p:tgtEl>
-                </p:cond>
-              </p:nextCondLst>
-            </p:seq>
-          </p:childTnLst>
-        </p:cTn>
-      </p:par>
-    </p:tnLst>
-    <p:bldLst>
-      <p:bldP spid="4" grpId="0" uiExpand="1" build="p"/>
     </p:bldLst>
   </p:timing>
 </p:sld>

--- a/slidedeck/presentation.pptx
+++ b/slidedeck/presentation.pptx
@@ -36,6 +36,7 @@
     <p:sldId id="284" r:id="rId30"/>
     <p:sldId id="285" r:id="rId31"/>
     <p:sldId id="286" r:id="rId32"/>
+    <p:sldId id="287" r:id="rId33"/>
   </p:sldIdLst>
   <p:sldSz cx="9144000" cy="5143500" type="screen16x9"/>
   <p:notesSz cx="6858000" cy="9144000"/>
@@ -5380,7 +5381,7 @@
             </a:pPr>
             <a:r>
               <a:rPr/>
-              <a:t>Amount regression supports planning, but is weaker than classification</a:t>
+              <a:t>Amount regression is not reliable at deal level, but highly accurate at portfolio level for planning</a:t>
             </a:r>
           </a:p>
         </p:txBody>
@@ -6112,66 +6113,17 @@
           <a:bodyPr/>
           <a:lstStyle/>
           <a:p>
-            <a:pPr lvl="0" indent="0" marL="0">
-              <a:buNone/>
-            </a:pPr>
-            <a:r>
-              <a:rPr/>
-              <a:t>The model ranking is highly concentrated:</a:t>
-            </a:r>
-          </a:p>
-          <a:p>
             <a:pPr lvl="0"/>
             <a:r>
-              <a:rPr b="1"/>
-              <a:t>Top decile</a:t>
-            </a:r>
-            <a:r>
-              <a:rPr/>
-              <a:t> runs at </a:t>
-            </a:r>
-            <a:r>
-              <a:rPr b="1"/>
-              <a:t>3.52× lift</a:t>
-            </a:r>
-            <a:r>
-              <a:rPr/>
-              <a:t>, with an observed win rate of </a:t>
-            </a:r>
-            <a:r>
-              <a:rPr b="1"/>
-              <a:t>80.0%</a:t>
-            </a:r>
-            <a:r>
-              <a:rPr/>
-              <a:t> versus </a:t>
-            </a:r>
-            <a:r>
-              <a:rPr b="1"/>
-              <a:t>22.7%</a:t>
-            </a:r>
-            <a:r>
-              <a:rPr/>
-              <a:t> overall.</a:t>
+              <a:rPr/>
+              <a:t>Sales effort is currently spread across low-probability deals → the model shows that concentrating on the top deciles can triple efficiency.</a:t>
             </a:r>
           </a:p>
           <a:p>
             <a:pPr lvl="0"/>
             <a:r>
-              <a:rPr b="1"/>
-              <a:t>Ninth decile</a:t>
-            </a:r>
-            <a:r>
-              <a:rPr/>
-              <a:t> is also well above average at </a:t>
-            </a:r>
-            <a:r>
-              <a:rPr b="1"/>
-              <a:t>2.38× lift</a:t>
-            </a:r>
-            <a:r>
-              <a:rPr/>
-              <a:t>, while deciles 1–6 remain below baseline.</a:t>
+              <a:rPr/>
+              <a:t>We propose to automatically embed this in the CRM at opportunity creation to prioritize high-propensity deals (e.g. top 1-2 deciles) and set clear thresholds for pipeline reviews and resource allocation.</a:t>
             </a:r>
           </a:p>
           <a:p>
@@ -6253,7 +6205,7 @@
                                         <p:tgtEl>
                                           <p:spTgt spid="3">
                                             <p:txEl>
-                                              <p:pRg st="1" end="1"/>
+                                              <p:pRg st="0" end="0"/>
                                             </p:txEl>
                                           </p:spTgt>
                                         </p:tgtEl>
@@ -6302,7 +6254,7 @@
                                         <p:tgtEl>
                                           <p:spTgt spid="3">
                                             <p:txEl>
-                                              <p:pRg st="2" end="2"/>
+                                              <p:pRg st="1" end="1"/>
                                             </p:txEl>
                                           </p:spTgt>
                                         </p:tgtEl>
@@ -6425,7 +6377,7 @@
             <a:pPr lvl="0"/>
             <a:r>
               <a:rPr/>
-              <a:t>The classification model performs well (AUROC 0.88), enabling effective prioritization, while the regression model is weaker (Mean Absolute Error ~$74K; R² 0.13) but still useful for aggregate forecasting and directional insights.</a:t>
+              <a:t>The classification model performs well (AUROC 0.88), enabling effective prioritization, while the regression model is not reliable at the deal level (MAE ~$74K; R² 0.13) but is still accurate enough for aggregate forecasting and directional planning.</a:t>
             </a:r>
           </a:p>
           <a:p>
@@ -6761,6 +6713,13 @@
             <a:pPr lvl="0"/>
             <a:r>
               <a:rPr/>
+              <a:t>Model is better at forecasting aggregate sales than individual-opportunity amounts, which is common in this type of data.</a:t>
+            </a:r>
+          </a:p>
+          <a:p>
+            <a:pPr lvl="1"/>
+            <a:r>
+              <a:rPr/>
               <a:t>Aggregate actual amount: </a:t>
             </a:r>
             <a:r>
@@ -6773,7 +6732,7 @@
             </a:r>
           </a:p>
           <a:p>
-            <a:pPr lvl="0"/>
+            <a:pPr lvl="1"/>
             <a:r>
               <a:rPr/>
               <a:t>Aggregate predicted amount: </a:t>
@@ -6788,7 +6747,7 @@
             </a:r>
           </a:p>
           <a:p>
-            <a:pPr lvl="0"/>
+            <a:pPr lvl="1"/>
             <a:r>
               <a:rPr/>
               <a:t>Mean absolute error per opportunity: </a:t>
@@ -6806,15 +6765,7 @@
             <a:pPr lvl="0"/>
             <a:r>
               <a:rPr/>
-              <a:t>The forecasting story is therefore strongest at the </a:t>
-            </a:r>
-            <a:r>
-              <a:rPr b="1"/>
-              <a:t>portfolio level</a:t>
-            </a:r>
-            <a:r>
-              <a:rPr/>
-              <a:t>, not at the individual-opportunity level.</a:t>
+              <a:t>We propose automatically calculating and adding this to the CRM at opportunity creation for aggregate planning and scenario analysis, but not for precise opportunity-level decisions because its value is strongest at the portfolio level.</a:t>
             </a:r>
           </a:p>
         </p:txBody>
@@ -7025,6 +6976,55 @@
                       </p:childTnLst>
                     </p:cTn>
                   </p:par>
+                  <p:par>
+                    <p:cTn id="19" fill="hold">
+                      <p:stCondLst>
+                        <p:cond delay="indefinite"/>
+                      </p:stCondLst>
+                      <p:childTnLst>
+                        <p:par>
+                          <p:cTn id="20" fill="hold">
+                            <p:stCondLst>
+                              <p:cond delay="0"/>
+                            </p:stCondLst>
+                            <p:childTnLst>
+                              <p:par>
+                                <p:cTn id="21" presetID="1" presetClass="entr" presetSubtype="0" fill="hold" grpId="0" nodeType="clickEffect">
+                                  <p:stCondLst>
+                                    <p:cond delay="0"/>
+                                  </p:stCondLst>
+                                  <p:childTnLst>
+                                    <p:set>
+                                      <p:cBhvr>
+                                        <p:cTn id="22" dur="1" fill="hold">
+                                          <p:stCondLst>
+                                            <p:cond delay="0"/>
+                                          </p:stCondLst>
+                                        </p:cTn>
+                                        <p:tgtEl>
+                                          <p:spTgt spid="4">
+                                            <p:txEl>
+                                              <p:pRg st="4" end="4"/>
+                                            </p:txEl>
+                                          </p:spTgt>
+                                        </p:tgtEl>
+                                        <p:attrNameLst>
+                                          <p:attrName>style.visibility</p:attrName>
+                                        </p:attrNameLst>
+                                      </p:cBhvr>
+                                      <p:to>
+                                        <p:strVal val="visible"/>
+                                      </p:to>
+                                    </p:set>
+                                  </p:childTnLst>
+                                </p:cTn>
+                              </p:par>
+                            </p:childTnLst>
+                          </p:cTn>
+                        </p:par>
+                      </p:childTnLst>
+                    </p:cTn>
+                  </p:par>
                 </p:childTnLst>
               </p:cTn>
               <p:prevCondLst>
@@ -7212,6 +7212,13 @@
             <a:r>
               <a:rPr/>
               <a:t>Acts as a bridge between prioritization and forecasting, aligning effort with both likelihood and deal size.</a:t>
+            </a:r>
+          </a:p>
+          <a:p>
+            <a:pPr lvl="0"/>
+            <a:r>
+              <a:rPr/>
+              <a:t>We propose embedding this in the CRM to set clear thresholds for sales focus (e.g., top 10% of opportunities by expected value = high priority), while providing a more nuanced view of opportunity value than win propensity alone.</a:t>
             </a:r>
           </a:p>
         </p:txBody>
@@ -7422,6 +7429,55 @@
                       </p:childTnLst>
                     </p:cTn>
                   </p:par>
+                  <p:par>
+                    <p:cTn id="19" fill="hold">
+                      <p:stCondLst>
+                        <p:cond delay="indefinite"/>
+                      </p:stCondLst>
+                      <p:childTnLst>
+                        <p:par>
+                          <p:cTn id="20" fill="hold">
+                            <p:stCondLst>
+                              <p:cond delay="0"/>
+                            </p:stCondLst>
+                            <p:childTnLst>
+                              <p:par>
+                                <p:cTn id="21" presetID="1" presetClass="entr" presetSubtype="0" fill="hold" grpId="0" nodeType="clickEffect">
+                                  <p:stCondLst>
+                                    <p:cond delay="0"/>
+                                  </p:stCondLst>
+                                  <p:childTnLst>
+                                    <p:set>
+                                      <p:cBhvr>
+                                        <p:cTn id="22" dur="1" fill="hold">
+                                          <p:stCondLst>
+                                            <p:cond delay="0"/>
+                                          </p:stCondLst>
+                                        </p:cTn>
+                                        <p:tgtEl>
+                                          <p:spTgt spid="4">
+                                            <p:txEl>
+                                              <p:pRg st="4" end="4"/>
+                                            </p:txEl>
+                                          </p:spTgt>
+                                        </p:tgtEl>
+                                        <p:attrNameLst>
+                                          <p:attrName>style.visibility</p:attrName>
+                                        </p:attrNameLst>
+                                      </p:cBhvr>
+                                      <p:to>
+                                        <p:strVal val="visible"/>
+                                      </p:to>
+                                    </p:set>
+                                  </p:childTnLst>
+                                </p:cTn>
+                              </p:par>
+                            </p:childTnLst>
+                          </p:cTn>
+                        </p:par>
+                      </p:childTnLst>
+                    </p:cTn>
+                  </p:par>
                 </p:childTnLst>
               </p:cTn>
               <p:prevCondLst>
@@ -7524,6 +7580,932 @@
             <p:ph type="title"/>
           </p:nvPr>
         </p:nvSpPr>
+        <p:spPr/>
+        <p:txBody>
+          <a:bodyPr/>
+          <a:lstStyle/>
+          <a:p>
+            <a:pPr lvl="0" indent="0" marL="0">
+              <a:buNone/>
+            </a:pPr>
+            <a:r>
+              <a:rPr/>
+              <a:t>How this integrates into sales workflow</a:t>
+            </a:r>
+          </a:p>
+        </p:txBody>
+      </p:sp>
+      <p:sp>
+        <p:nvSpPr>
+          <p:cNvPr id="3" name="Content Placeholder 2"/>
+          <p:cNvSpPr>
+            <a:spLocks noGrp="1"/>
+          </p:cNvSpPr>
+          <p:nvPr>
+            <p:ph idx="1" sz="half"/>
+          </p:nvPr>
+        </p:nvSpPr>
+        <p:spPr/>
+        <p:txBody>
+          <a:bodyPr/>
+          <a:lstStyle/>
+          <a:p>
+            <a:pPr lvl="0" indent="0" marL="0">
+              <a:spcBef>
+                <a:spcPts val="3000"/>
+              </a:spcBef>
+              <a:buNone/>
+            </a:pPr>
+            <a:r>
+              <a:rPr b="1"/>
+              <a:t>Operational flow</a:t>
+            </a:r>
+          </a:p>
+          <a:p>
+            <a:pPr lvl="0" indent="0" marL="0">
+              <a:buNone/>
+            </a:pPr>
+            <a:r>
+              <a:rPr b="1"/>
+              <a:t>Opportunity created</a:t>
+            </a:r>
+            <a:r>
+              <a:rPr/>
+              <a:t> → </a:t>
+            </a:r>
+            <a:r>
+              <a:rPr b="1"/>
+              <a:t>score + expected value generated</a:t>
+            </a:r>
+          </a:p>
+          <a:p>
+            <a:pPr lvl="0"/>
+            <a:r>
+              <a:rPr/>
+              <a:t>As soon as a new opportunity enters the CRM, the workflow generates:</a:t>
+            </a:r>
+          </a:p>
+          <a:p>
+            <a:pPr lvl="1"/>
+            <a:r>
+              <a:rPr b="1"/>
+              <a:t>win-propensity score</a:t>
+            </a:r>
+          </a:p>
+          <a:p>
+            <a:pPr lvl="1"/>
+            <a:r>
+              <a:rPr b="1"/>
+              <a:t>predicted amount</a:t>
+            </a:r>
+          </a:p>
+          <a:p>
+            <a:pPr lvl="1"/>
+            <a:r>
+              <a:rPr b="1"/>
+              <a:t>expected value = E[Amount] × P(Win)</a:t>
+            </a:r>
+          </a:p>
+          <a:p>
+            <a:pPr lvl="0" indent="0" marL="0">
+              <a:spcBef>
+                <a:spcPts val="3000"/>
+              </a:spcBef>
+              <a:buNone/>
+            </a:pPr>
+            <a:r>
+              <a:rPr b="1"/>
+              <a:t>CRM displays</a:t>
+            </a:r>
+          </a:p>
+          <a:p>
+            <a:pPr lvl="0"/>
+            <a:r>
+              <a:rPr b="1"/>
+              <a:t>Priority tier</a:t>
+            </a:r>
+            <a:r>
+              <a:rPr/>
+              <a:t>: Top 10%, Top 25%, Top 50%, etc.</a:t>
+            </a:r>
+          </a:p>
+          <a:p>
+            <a:pPr lvl="0"/>
+            <a:r>
+              <a:rPr b="1"/>
+              <a:t>Suggested action</a:t>
+            </a:r>
+            <a:r>
+              <a:rPr/>
+              <a:t>: focus / monitor / deprioritize</a:t>
+            </a:r>
+          </a:p>
+          <a:p>
+            <a:pPr lvl="0"/>
+            <a:r>
+              <a:rPr/>
+              <a:t>This gives frontline teams a simple operating signal without exposing model internals.</a:t>
+            </a:r>
+          </a:p>
+        </p:txBody>
+      </p:sp>
+      <p:sp>
+        <p:nvSpPr>
+          <p:cNvPr id="4" name="Content Placeholder 3"/>
+          <p:cNvSpPr>
+            <a:spLocks noGrp="1"/>
+          </p:cNvSpPr>
+          <p:nvPr>
+            <p:ph idx="2" sz="half"/>
+          </p:nvPr>
+        </p:nvSpPr>
+        <p:spPr/>
+        <p:txBody>
+          <a:bodyPr/>
+          <a:lstStyle/>
+          <a:p>
+            <a:pPr lvl="0" indent="0" marL="0">
+              <a:spcBef>
+                <a:spcPts val="3000"/>
+              </a:spcBef>
+              <a:buNone/>
+            </a:pPr>
+            <a:r>
+              <a:rPr b="1"/>
+              <a:t>Weekly pipeline reviews</a:t>
+            </a:r>
+          </a:p>
+          <a:p>
+            <a:pPr lvl="0"/>
+            <a:r>
+              <a:rPr/>
+              <a:t>Use </a:t>
+            </a:r>
+            <a:r>
+              <a:rPr b="1"/>
+              <a:t>threshold-based filtering</a:t>
+            </a:r>
+            <a:r>
+              <a:rPr/>
+              <a:t> to narrow the active pipeline before review.</a:t>
+            </a:r>
+          </a:p>
+          <a:p>
+            <a:pPr lvl="0"/>
+            <a:r>
+              <a:rPr/>
+              <a:t>Focus reviews on opportunities above the agreed propensity or expected-value cutoff.</a:t>
+            </a:r>
+          </a:p>
+          <a:p>
+            <a:pPr lvl="0"/>
+            <a:r>
+              <a:rPr/>
+              <a:t>Align rep attention, manager escalation, and follow-up cadence to those thresholds.</a:t>
+            </a:r>
+          </a:p>
+          <a:p>
+            <a:pPr lvl="0" indent="0" marL="0">
+              <a:spcBef>
+                <a:spcPts val="3000"/>
+              </a:spcBef>
+              <a:buNone/>
+            </a:pPr>
+            <a:r>
+              <a:rPr b="1"/>
+              <a:t>Management view</a:t>
+            </a:r>
+          </a:p>
+          <a:p>
+            <a:pPr lvl="0"/>
+            <a:r>
+              <a:rPr b="1"/>
+              <a:t>Forecast = sum of predicted values</a:t>
+            </a:r>
+            <a:r>
+              <a:rPr/>
+              <a:t> across the active pipeline.</a:t>
+            </a:r>
+          </a:p>
+          <a:p>
+            <a:pPr lvl="0"/>
+            <a:r>
+              <a:rPr/>
+              <a:t>Leadership can compare forecast by region, route to market, owner, or priority tier.</a:t>
+            </a:r>
+          </a:p>
+          <a:p>
+            <a:pPr lvl="0"/>
+            <a:r>
+              <a:rPr/>
+              <a:t>This connects daily triage decisions to portfolio-level revenue planning.</a:t>
+            </a:r>
+          </a:p>
+        </p:txBody>
+      </p:sp>
+    </p:spTree>
+  </p:cSld>
+  <p:timing>
+    <p:tnLst>
+      <p:par>
+        <p:cTn id="1" dur="indefinite" restart="never" nodeType="tmRoot">
+          <p:childTnLst>
+            <p:seq concurrent="1" nextAc="seek">
+              <p:cTn id="2" dur="indefinite" nodeType="mainSeq">
+                <p:childTnLst>
+                  <p:par>
+                    <p:cTn id="3" fill="hold">
+                      <p:stCondLst>
+                        <p:cond delay="indefinite"/>
+                      </p:stCondLst>
+                      <p:childTnLst>
+                        <p:par>
+                          <p:cTn id="4" fill="hold">
+                            <p:stCondLst>
+                              <p:cond delay="0"/>
+                            </p:stCondLst>
+                            <p:childTnLst>
+                              <p:par>
+                                <p:cTn id="5" presetID="1" presetClass="entr" presetSubtype="0" fill="hold" grpId="0" nodeType="clickEffect">
+                                  <p:stCondLst>
+                                    <p:cond delay="0"/>
+                                  </p:stCondLst>
+                                  <p:childTnLst>
+                                    <p:set>
+                                      <p:cBhvr>
+                                        <p:cTn id="6" dur="1" fill="hold">
+                                          <p:stCondLst>
+                                            <p:cond delay="0"/>
+                                          </p:stCondLst>
+                                        </p:cTn>
+                                        <p:tgtEl>
+                                          <p:spTgt spid="3">
+                                            <p:txEl>
+                                              <p:pRg st="2" end="2"/>
+                                            </p:txEl>
+                                          </p:spTgt>
+                                        </p:tgtEl>
+                                        <p:attrNameLst>
+                                          <p:attrName>style.visibility</p:attrName>
+                                        </p:attrNameLst>
+                                      </p:cBhvr>
+                                      <p:to>
+                                        <p:strVal val="visible"/>
+                                      </p:to>
+                                    </p:set>
+                                  </p:childTnLst>
+                                </p:cTn>
+                              </p:par>
+                            </p:childTnLst>
+                          </p:cTn>
+                        </p:par>
+                      </p:childTnLst>
+                    </p:cTn>
+                  </p:par>
+                  <p:par>
+                    <p:cTn id="7" fill="hold">
+                      <p:stCondLst>
+                        <p:cond delay="indefinite"/>
+                      </p:stCondLst>
+                      <p:childTnLst>
+                        <p:par>
+                          <p:cTn id="8" fill="hold">
+                            <p:stCondLst>
+                              <p:cond delay="0"/>
+                            </p:stCondLst>
+                            <p:childTnLst>
+                              <p:par>
+                                <p:cTn id="9" presetID="1" presetClass="entr" presetSubtype="0" fill="hold" grpId="0" nodeType="clickEffect">
+                                  <p:stCondLst>
+                                    <p:cond delay="0"/>
+                                  </p:stCondLst>
+                                  <p:childTnLst>
+                                    <p:set>
+                                      <p:cBhvr>
+                                        <p:cTn id="10" dur="1" fill="hold">
+                                          <p:stCondLst>
+                                            <p:cond delay="0"/>
+                                          </p:stCondLst>
+                                        </p:cTn>
+                                        <p:tgtEl>
+                                          <p:spTgt spid="3">
+                                            <p:txEl>
+                                              <p:pRg st="3" end="3"/>
+                                            </p:txEl>
+                                          </p:spTgt>
+                                        </p:tgtEl>
+                                        <p:attrNameLst>
+                                          <p:attrName>style.visibility</p:attrName>
+                                        </p:attrNameLst>
+                                      </p:cBhvr>
+                                      <p:to>
+                                        <p:strVal val="visible"/>
+                                      </p:to>
+                                    </p:set>
+                                  </p:childTnLst>
+                                </p:cTn>
+                              </p:par>
+                            </p:childTnLst>
+                          </p:cTn>
+                        </p:par>
+                      </p:childTnLst>
+                    </p:cTn>
+                  </p:par>
+                  <p:par>
+                    <p:cTn id="11" fill="hold">
+                      <p:stCondLst>
+                        <p:cond delay="indefinite"/>
+                      </p:stCondLst>
+                      <p:childTnLst>
+                        <p:par>
+                          <p:cTn id="12" fill="hold">
+                            <p:stCondLst>
+                              <p:cond delay="0"/>
+                            </p:stCondLst>
+                            <p:childTnLst>
+                              <p:par>
+                                <p:cTn id="13" presetID="1" presetClass="entr" presetSubtype="0" fill="hold" grpId="0" nodeType="clickEffect">
+                                  <p:stCondLst>
+                                    <p:cond delay="0"/>
+                                  </p:stCondLst>
+                                  <p:childTnLst>
+                                    <p:set>
+                                      <p:cBhvr>
+                                        <p:cTn id="14" dur="1" fill="hold">
+                                          <p:stCondLst>
+                                            <p:cond delay="0"/>
+                                          </p:stCondLst>
+                                        </p:cTn>
+                                        <p:tgtEl>
+                                          <p:spTgt spid="3">
+                                            <p:txEl>
+                                              <p:pRg st="4" end="4"/>
+                                            </p:txEl>
+                                          </p:spTgt>
+                                        </p:tgtEl>
+                                        <p:attrNameLst>
+                                          <p:attrName>style.visibility</p:attrName>
+                                        </p:attrNameLst>
+                                      </p:cBhvr>
+                                      <p:to>
+                                        <p:strVal val="visible"/>
+                                      </p:to>
+                                    </p:set>
+                                  </p:childTnLst>
+                                </p:cTn>
+                              </p:par>
+                            </p:childTnLst>
+                          </p:cTn>
+                        </p:par>
+                      </p:childTnLst>
+                    </p:cTn>
+                  </p:par>
+                  <p:par>
+                    <p:cTn id="15" fill="hold">
+                      <p:stCondLst>
+                        <p:cond delay="indefinite"/>
+                      </p:stCondLst>
+                      <p:childTnLst>
+                        <p:par>
+                          <p:cTn id="16" fill="hold">
+                            <p:stCondLst>
+                              <p:cond delay="0"/>
+                            </p:stCondLst>
+                            <p:childTnLst>
+                              <p:par>
+                                <p:cTn id="17" presetID="1" presetClass="entr" presetSubtype="0" fill="hold" grpId="0" nodeType="clickEffect">
+                                  <p:stCondLst>
+                                    <p:cond delay="0"/>
+                                  </p:stCondLst>
+                                  <p:childTnLst>
+                                    <p:set>
+                                      <p:cBhvr>
+                                        <p:cTn id="18" dur="1" fill="hold">
+                                          <p:stCondLst>
+                                            <p:cond delay="0"/>
+                                          </p:stCondLst>
+                                        </p:cTn>
+                                        <p:tgtEl>
+                                          <p:spTgt spid="3">
+                                            <p:txEl>
+                                              <p:pRg st="5" end="5"/>
+                                            </p:txEl>
+                                          </p:spTgt>
+                                        </p:tgtEl>
+                                        <p:attrNameLst>
+                                          <p:attrName>style.visibility</p:attrName>
+                                        </p:attrNameLst>
+                                      </p:cBhvr>
+                                      <p:to>
+                                        <p:strVal val="visible"/>
+                                      </p:to>
+                                    </p:set>
+                                  </p:childTnLst>
+                                </p:cTn>
+                              </p:par>
+                            </p:childTnLst>
+                          </p:cTn>
+                        </p:par>
+                      </p:childTnLst>
+                    </p:cTn>
+                  </p:par>
+                  <p:par>
+                    <p:cTn id="19" fill="hold">
+                      <p:stCondLst>
+                        <p:cond delay="indefinite"/>
+                      </p:stCondLst>
+                      <p:childTnLst>
+                        <p:par>
+                          <p:cTn id="20" fill="hold">
+                            <p:stCondLst>
+                              <p:cond delay="0"/>
+                            </p:stCondLst>
+                            <p:childTnLst>
+                              <p:par>
+                                <p:cTn id="21" presetID="1" presetClass="entr" presetSubtype="0" fill="hold" grpId="0" nodeType="clickEffect">
+                                  <p:stCondLst>
+                                    <p:cond delay="0"/>
+                                  </p:stCondLst>
+                                  <p:childTnLst>
+                                    <p:set>
+                                      <p:cBhvr>
+                                        <p:cTn id="22" dur="1" fill="hold">
+                                          <p:stCondLst>
+                                            <p:cond delay="0"/>
+                                          </p:stCondLst>
+                                        </p:cTn>
+                                        <p:tgtEl>
+                                          <p:spTgt spid="3">
+                                            <p:txEl>
+                                              <p:pRg st="7" end="7"/>
+                                            </p:txEl>
+                                          </p:spTgt>
+                                        </p:tgtEl>
+                                        <p:attrNameLst>
+                                          <p:attrName>style.visibility</p:attrName>
+                                        </p:attrNameLst>
+                                      </p:cBhvr>
+                                      <p:to>
+                                        <p:strVal val="visible"/>
+                                      </p:to>
+                                    </p:set>
+                                  </p:childTnLst>
+                                </p:cTn>
+                              </p:par>
+                            </p:childTnLst>
+                          </p:cTn>
+                        </p:par>
+                      </p:childTnLst>
+                    </p:cTn>
+                  </p:par>
+                  <p:par>
+                    <p:cTn id="23" fill="hold">
+                      <p:stCondLst>
+                        <p:cond delay="indefinite"/>
+                      </p:stCondLst>
+                      <p:childTnLst>
+                        <p:par>
+                          <p:cTn id="24" fill="hold">
+                            <p:stCondLst>
+                              <p:cond delay="0"/>
+                            </p:stCondLst>
+                            <p:childTnLst>
+                              <p:par>
+                                <p:cTn id="25" presetID="1" presetClass="entr" presetSubtype="0" fill="hold" grpId="0" nodeType="clickEffect">
+                                  <p:stCondLst>
+                                    <p:cond delay="0"/>
+                                  </p:stCondLst>
+                                  <p:childTnLst>
+                                    <p:set>
+                                      <p:cBhvr>
+                                        <p:cTn id="26" dur="1" fill="hold">
+                                          <p:stCondLst>
+                                            <p:cond delay="0"/>
+                                          </p:stCondLst>
+                                        </p:cTn>
+                                        <p:tgtEl>
+                                          <p:spTgt spid="3">
+                                            <p:txEl>
+                                              <p:pRg st="8" end="8"/>
+                                            </p:txEl>
+                                          </p:spTgt>
+                                        </p:tgtEl>
+                                        <p:attrNameLst>
+                                          <p:attrName>style.visibility</p:attrName>
+                                        </p:attrNameLst>
+                                      </p:cBhvr>
+                                      <p:to>
+                                        <p:strVal val="visible"/>
+                                      </p:to>
+                                    </p:set>
+                                  </p:childTnLst>
+                                </p:cTn>
+                              </p:par>
+                            </p:childTnLst>
+                          </p:cTn>
+                        </p:par>
+                      </p:childTnLst>
+                    </p:cTn>
+                  </p:par>
+                  <p:par>
+                    <p:cTn id="27" fill="hold">
+                      <p:stCondLst>
+                        <p:cond delay="indefinite"/>
+                      </p:stCondLst>
+                      <p:childTnLst>
+                        <p:par>
+                          <p:cTn id="28" fill="hold">
+                            <p:stCondLst>
+                              <p:cond delay="0"/>
+                            </p:stCondLst>
+                            <p:childTnLst>
+                              <p:par>
+                                <p:cTn id="29" presetID="1" presetClass="entr" presetSubtype="0" fill="hold" grpId="0" nodeType="clickEffect">
+                                  <p:stCondLst>
+                                    <p:cond delay="0"/>
+                                  </p:stCondLst>
+                                  <p:childTnLst>
+                                    <p:set>
+                                      <p:cBhvr>
+                                        <p:cTn id="30" dur="1" fill="hold">
+                                          <p:stCondLst>
+                                            <p:cond delay="0"/>
+                                          </p:stCondLst>
+                                        </p:cTn>
+                                        <p:tgtEl>
+                                          <p:spTgt spid="3">
+                                            <p:txEl>
+                                              <p:pRg st="9" end="9"/>
+                                            </p:txEl>
+                                          </p:spTgt>
+                                        </p:tgtEl>
+                                        <p:attrNameLst>
+                                          <p:attrName>style.visibility</p:attrName>
+                                        </p:attrNameLst>
+                                      </p:cBhvr>
+                                      <p:to>
+                                        <p:strVal val="visible"/>
+                                      </p:to>
+                                    </p:set>
+                                  </p:childTnLst>
+                                </p:cTn>
+                              </p:par>
+                            </p:childTnLst>
+                          </p:cTn>
+                        </p:par>
+                      </p:childTnLst>
+                    </p:cTn>
+                  </p:par>
+                  <p:par>
+                    <p:cTn id="31" fill="hold">
+                      <p:stCondLst>
+                        <p:cond delay="indefinite"/>
+                      </p:stCondLst>
+                      <p:childTnLst>
+                        <p:par>
+                          <p:cTn id="32" fill="hold">
+                            <p:stCondLst>
+                              <p:cond delay="0"/>
+                            </p:stCondLst>
+                            <p:childTnLst>
+                              <p:par>
+                                <p:cTn id="33" presetID="1" presetClass="entr" presetSubtype="0" fill="hold" grpId="0" nodeType="clickEffect">
+                                  <p:stCondLst>
+                                    <p:cond delay="0"/>
+                                  </p:stCondLst>
+                                  <p:childTnLst>
+                                    <p:set>
+                                      <p:cBhvr>
+                                        <p:cTn id="34" dur="1" fill="hold">
+                                          <p:stCondLst>
+                                            <p:cond delay="0"/>
+                                          </p:stCondLst>
+                                        </p:cTn>
+                                        <p:tgtEl>
+                                          <p:spTgt spid="4">
+                                            <p:txEl>
+                                              <p:pRg st="1" end="1"/>
+                                            </p:txEl>
+                                          </p:spTgt>
+                                        </p:tgtEl>
+                                        <p:attrNameLst>
+                                          <p:attrName>style.visibility</p:attrName>
+                                        </p:attrNameLst>
+                                      </p:cBhvr>
+                                      <p:to>
+                                        <p:strVal val="visible"/>
+                                      </p:to>
+                                    </p:set>
+                                  </p:childTnLst>
+                                </p:cTn>
+                              </p:par>
+                            </p:childTnLst>
+                          </p:cTn>
+                        </p:par>
+                      </p:childTnLst>
+                    </p:cTn>
+                  </p:par>
+                  <p:par>
+                    <p:cTn id="35" fill="hold">
+                      <p:stCondLst>
+                        <p:cond delay="indefinite"/>
+                      </p:stCondLst>
+                      <p:childTnLst>
+                        <p:par>
+                          <p:cTn id="36" fill="hold">
+                            <p:stCondLst>
+                              <p:cond delay="0"/>
+                            </p:stCondLst>
+                            <p:childTnLst>
+                              <p:par>
+                                <p:cTn id="37" presetID="1" presetClass="entr" presetSubtype="0" fill="hold" grpId="0" nodeType="clickEffect">
+                                  <p:stCondLst>
+                                    <p:cond delay="0"/>
+                                  </p:stCondLst>
+                                  <p:childTnLst>
+                                    <p:set>
+                                      <p:cBhvr>
+                                        <p:cTn id="38" dur="1" fill="hold">
+                                          <p:stCondLst>
+                                            <p:cond delay="0"/>
+                                          </p:stCondLst>
+                                        </p:cTn>
+                                        <p:tgtEl>
+                                          <p:spTgt spid="4">
+                                            <p:txEl>
+                                              <p:pRg st="2" end="2"/>
+                                            </p:txEl>
+                                          </p:spTgt>
+                                        </p:tgtEl>
+                                        <p:attrNameLst>
+                                          <p:attrName>style.visibility</p:attrName>
+                                        </p:attrNameLst>
+                                      </p:cBhvr>
+                                      <p:to>
+                                        <p:strVal val="visible"/>
+                                      </p:to>
+                                    </p:set>
+                                  </p:childTnLst>
+                                </p:cTn>
+                              </p:par>
+                            </p:childTnLst>
+                          </p:cTn>
+                        </p:par>
+                      </p:childTnLst>
+                    </p:cTn>
+                  </p:par>
+                  <p:par>
+                    <p:cTn id="39" fill="hold">
+                      <p:stCondLst>
+                        <p:cond delay="indefinite"/>
+                      </p:stCondLst>
+                      <p:childTnLst>
+                        <p:par>
+                          <p:cTn id="40" fill="hold">
+                            <p:stCondLst>
+                              <p:cond delay="0"/>
+                            </p:stCondLst>
+                            <p:childTnLst>
+                              <p:par>
+                                <p:cTn id="41" presetID="1" presetClass="entr" presetSubtype="0" fill="hold" grpId="0" nodeType="clickEffect">
+                                  <p:stCondLst>
+                                    <p:cond delay="0"/>
+                                  </p:stCondLst>
+                                  <p:childTnLst>
+                                    <p:set>
+                                      <p:cBhvr>
+                                        <p:cTn id="42" dur="1" fill="hold">
+                                          <p:stCondLst>
+                                            <p:cond delay="0"/>
+                                          </p:stCondLst>
+                                        </p:cTn>
+                                        <p:tgtEl>
+                                          <p:spTgt spid="4">
+                                            <p:txEl>
+                                              <p:pRg st="3" end="3"/>
+                                            </p:txEl>
+                                          </p:spTgt>
+                                        </p:tgtEl>
+                                        <p:attrNameLst>
+                                          <p:attrName>style.visibility</p:attrName>
+                                        </p:attrNameLst>
+                                      </p:cBhvr>
+                                      <p:to>
+                                        <p:strVal val="visible"/>
+                                      </p:to>
+                                    </p:set>
+                                  </p:childTnLst>
+                                </p:cTn>
+                              </p:par>
+                            </p:childTnLst>
+                          </p:cTn>
+                        </p:par>
+                      </p:childTnLst>
+                    </p:cTn>
+                  </p:par>
+                  <p:par>
+                    <p:cTn id="43" fill="hold">
+                      <p:stCondLst>
+                        <p:cond delay="indefinite"/>
+                      </p:stCondLst>
+                      <p:childTnLst>
+                        <p:par>
+                          <p:cTn id="44" fill="hold">
+                            <p:stCondLst>
+                              <p:cond delay="0"/>
+                            </p:stCondLst>
+                            <p:childTnLst>
+                              <p:par>
+                                <p:cTn id="45" presetID="1" presetClass="entr" presetSubtype="0" fill="hold" grpId="0" nodeType="clickEffect">
+                                  <p:stCondLst>
+                                    <p:cond delay="0"/>
+                                  </p:stCondLst>
+                                  <p:childTnLst>
+                                    <p:set>
+                                      <p:cBhvr>
+                                        <p:cTn id="46" dur="1" fill="hold">
+                                          <p:stCondLst>
+                                            <p:cond delay="0"/>
+                                          </p:stCondLst>
+                                        </p:cTn>
+                                        <p:tgtEl>
+                                          <p:spTgt spid="4">
+                                            <p:txEl>
+                                              <p:pRg st="5" end="5"/>
+                                            </p:txEl>
+                                          </p:spTgt>
+                                        </p:tgtEl>
+                                        <p:attrNameLst>
+                                          <p:attrName>style.visibility</p:attrName>
+                                        </p:attrNameLst>
+                                      </p:cBhvr>
+                                      <p:to>
+                                        <p:strVal val="visible"/>
+                                      </p:to>
+                                    </p:set>
+                                  </p:childTnLst>
+                                </p:cTn>
+                              </p:par>
+                            </p:childTnLst>
+                          </p:cTn>
+                        </p:par>
+                      </p:childTnLst>
+                    </p:cTn>
+                  </p:par>
+                  <p:par>
+                    <p:cTn id="47" fill="hold">
+                      <p:stCondLst>
+                        <p:cond delay="indefinite"/>
+                      </p:stCondLst>
+                      <p:childTnLst>
+                        <p:par>
+                          <p:cTn id="48" fill="hold">
+                            <p:stCondLst>
+                              <p:cond delay="0"/>
+                            </p:stCondLst>
+                            <p:childTnLst>
+                              <p:par>
+                                <p:cTn id="49" presetID="1" presetClass="entr" presetSubtype="0" fill="hold" grpId="0" nodeType="clickEffect">
+                                  <p:stCondLst>
+                                    <p:cond delay="0"/>
+                                  </p:stCondLst>
+                                  <p:childTnLst>
+                                    <p:set>
+                                      <p:cBhvr>
+                                        <p:cTn id="50" dur="1" fill="hold">
+                                          <p:stCondLst>
+                                            <p:cond delay="0"/>
+                                          </p:stCondLst>
+                                        </p:cTn>
+                                        <p:tgtEl>
+                                          <p:spTgt spid="4">
+                                            <p:txEl>
+                                              <p:pRg st="6" end="6"/>
+                                            </p:txEl>
+                                          </p:spTgt>
+                                        </p:tgtEl>
+                                        <p:attrNameLst>
+                                          <p:attrName>style.visibility</p:attrName>
+                                        </p:attrNameLst>
+                                      </p:cBhvr>
+                                      <p:to>
+                                        <p:strVal val="visible"/>
+                                      </p:to>
+                                    </p:set>
+                                  </p:childTnLst>
+                                </p:cTn>
+                              </p:par>
+                            </p:childTnLst>
+                          </p:cTn>
+                        </p:par>
+                      </p:childTnLst>
+                    </p:cTn>
+                  </p:par>
+                  <p:par>
+                    <p:cTn id="51" fill="hold">
+                      <p:stCondLst>
+                        <p:cond delay="indefinite"/>
+                      </p:stCondLst>
+                      <p:childTnLst>
+                        <p:par>
+                          <p:cTn id="52" fill="hold">
+                            <p:stCondLst>
+                              <p:cond delay="0"/>
+                            </p:stCondLst>
+                            <p:childTnLst>
+                              <p:par>
+                                <p:cTn id="53" presetID="1" presetClass="entr" presetSubtype="0" fill="hold" grpId="0" nodeType="clickEffect">
+                                  <p:stCondLst>
+                                    <p:cond delay="0"/>
+                                  </p:stCondLst>
+                                  <p:childTnLst>
+                                    <p:set>
+                                      <p:cBhvr>
+                                        <p:cTn id="54" dur="1" fill="hold">
+                                          <p:stCondLst>
+                                            <p:cond delay="0"/>
+                                          </p:stCondLst>
+                                        </p:cTn>
+                                        <p:tgtEl>
+                                          <p:spTgt spid="4">
+                                            <p:txEl>
+                                              <p:pRg st="7" end="7"/>
+                                            </p:txEl>
+                                          </p:spTgt>
+                                        </p:tgtEl>
+                                        <p:attrNameLst>
+                                          <p:attrName>style.visibility</p:attrName>
+                                        </p:attrNameLst>
+                                      </p:cBhvr>
+                                      <p:to>
+                                        <p:strVal val="visible"/>
+                                      </p:to>
+                                    </p:set>
+                                  </p:childTnLst>
+                                </p:cTn>
+                              </p:par>
+                            </p:childTnLst>
+                          </p:cTn>
+                        </p:par>
+                      </p:childTnLst>
+                    </p:cTn>
+                  </p:par>
+                </p:childTnLst>
+              </p:cTn>
+              <p:prevCondLst>
+                <p:cond evt="onPrev" delay="0">
+                  <p:tgtEl>
+                    <p:sldTgt/>
+                  </p:tgtEl>
+                </p:cond>
+              </p:prevCondLst>
+              <p:nextCondLst>
+                <p:cond evt="onNext" delay="0">
+                  <p:tgtEl>
+                    <p:sldTgt/>
+                  </p:tgtEl>
+                </p:cond>
+              </p:nextCondLst>
+            </p:seq>
+          </p:childTnLst>
+        </p:cTn>
+      </p:par>
+    </p:tnLst>
+    <p:bldLst>
+      <p:bldP spid="3" grpId="0" uiExpand="1" build="p"/>
+      <p:bldP spid="4" grpId="0" uiExpand="1" build="p"/>
+    </p:bldLst>
+  </p:timing>
+</p:sld>
+</file>
+
+<file path=ppt/slides/slide25.xml><?xml version="1.0" encoding="utf-8"?>
+<p:sld xmlns:a="http://schemas.openxmlformats.org/drawingml/2006/main" xmlns:r="http://schemas.openxmlformats.org/officeDocument/2006/relationships" xmlns:p="http://schemas.openxmlformats.org/presentationml/2006/main">
+  <p:cSld>
+    <p:spTree>
+      <p:nvGrpSpPr>
+        <p:cNvPr id="1" name=""/>
+        <p:cNvGrpSpPr/>
+        <p:nvPr/>
+      </p:nvGrpSpPr>
+      <p:grpSpPr>
+        <a:xfrm>
+          <a:off x="0" y="0"/>
+          <a:ext cx="0" cy="0"/>
+          <a:chOff x="0" y="0"/>
+          <a:chExt cx="0" cy="0"/>
+        </a:xfrm>
+      </p:grpSpPr>
+      <p:sp>
+        <p:nvSpPr>
+          <p:cNvPr id="2" name="Title 1"/>
+          <p:cNvSpPr>
+            <a:spLocks noGrp="1"/>
+          </p:cNvSpPr>
+          <p:nvPr>
+            <p:ph type="title"/>
+          </p:nvPr>
+        </p:nvSpPr>
         <p:spPr>
           <a:xfrm>
             <a:off x="722313" y="3305176"/>
@@ -7549,7 +8531,7 @@
 </p:sld>
 </file>
 
-<file path=ppt/slides/slide25.xml><?xml version="1.0" encoding="utf-8"?>
+<file path=ppt/slides/slide26.xml><?xml version="1.0" encoding="utf-8"?>
 <p:sld xmlns:a="http://schemas.openxmlformats.org/drawingml/2006/main" xmlns:r="http://schemas.openxmlformats.org/officeDocument/2006/relationships" xmlns:p="http://schemas.openxmlformats.org/presentationml/2006/main">
   <p:cSld>
     <p:spTree>
@@ -8225,7 +9207,7 @@
 </p:sld>
 </file>
 
-<file path=ppt/slides/slide26.xml><?xml version="1.0" encoding="utf-8"?>
+<file path=ppt/slides/slide27.xml><?xml version="1.0" encoding="utf-8"?>
 <p:sld xmlns:a="http://schemas.openxmlformats.org/drawingml/2006/main" xmlns:r="http://schemas.openxmlformats.org/officeDocument/2006/relationships" xmlns:p="http://schemas.openxmlformats.org/presentationml/2006/main">
   <p:cSld>
     <p:spTree>
@@ -8993,7 +9975,7 @@
 </p:sld>
 </file>
 
-<file path=ppt/slides/slide27.xml><?xml version="1.0" encoding="utf-8"?>
+<file path=ppt/slides/slide28.xml><?xml version="1.0" encoding="utf-8"?>
 <p:sld xmlns:a="http://schemas.openxmlformats.org/drawingml/2006/main" xmlns:r="http://schemas.openxmlformats.org/officeDocument/2006/relationships" xmlns:p="http://schemas.openxmlformats.org/presentationml/2006/main">
   <p:cSld>
     <p:spTree>
@@ -9035,87 +10017,7 @@
             </a:pPr>
             <a:r>
               <a:rPr/>
-              <a:t>Annex</a:t>
-            </a:r>
-          </a:p>
-        </p:txBody>
-      </p:sp>
-    </p:spTree>
-  </p:cSld>
-</p:sld>
-</file>
-
-<file path=ppt/slides/slide28.xml><?xml version="1.0" encoding="utf-8"?>
-<p:sld xmlns:a="http://schemas.openxmlformats.org/drawingml/2006/main" xmlns:r="http://schemas.openxmlformats.org/officeDocument/2006/relationships" xmlns:p="http://schemas.openxmlformats.org/presentationml/2006/main">
-  <p:cSld>
-    <p:spTree>
-      <p:nvGrpSpPr>
-        <p:cNvPr id="1" name=""/>
-        <p:cNvGrpSpPr/>
-        <p:nvPr/>
-      </p:nvGrpSpPr>
-      <p:grpSpPr>
-        <a:xfrm>
-          <a:off x="0" y="0"/>
-          <a:ext cx="0" cy="0"/>
-          <a:chOff x="0" y="0"/>
-          <a:chExt cx="0" cy="0"/>
-        </a:xfrm>
-      </p:grpSpPr>
-      <p:sp>
-        <p:nvSpPr>
-          <p:cNvPr id="2" name="Title 1"/>
-          <p:cNvSpPr>
-            <a:spLocks noGrp="1"/>
-          </p:cNvSpPr>
-          <p:nvPr>
-            <p:ph type="title"/>
-          </p:nvPr>
-        </p:nvSpPr>
-        <p:spPr/>
-        <p:txBody>
-          <a:bodyPr/>
-          <a:lstStyle/>
-          <a:p>
-            <a:pPr lvl="0" indent="0" marL="0">
-              <a:buNone/>
-            </a:pPr>
-            <a:r>
-              <a:rPr/>
-              <a:t>Annex: classification CV leaderboard</a:t>
-            </a:r>
-          </a:p>
-        </p:txBody>
-      </p:sp>
-      <p:sp>
-        <p:nvSpPr>
-          <p:cNvPr id="3" name="Content Placeholder 2"/>
-          <p:cNvSpPr>
-            <a:spLocks noGrp="1"/>
-          </p:cNvSpPr>
-          <p:nvPr>
-            <p:ph idx="1"/>
-          </p:nvPr>
-        </p:nvSpPr>
-        <p:spPr/>
-        <p:txBody>
-          <a:bodyPr/>
-          <a:lstStyle/>
-          <a:p>
-            <a:pPr lvl="0" indent="0" marL="0">
-              <a:buNone/>
-            </a:pPr>
-            <a:r>
-              <a:rPr/>
-              <a:t>Selected model in main deck: </a:t>
-            </a:r>
-            <a:r>
-              <a:rPr b="1"/>
-              <a:t>logit_binned_ohe</a:t>
-            </a:r>
-            <a:r>
-              <a:rPr/>
-              <a:t>.</a:t>
+              <a:t>Thank you</a:t>
             </a:r>
           </a:p>
         </p:txBody>
@@ -9144,31 +10046,6 @@
       </p:grpSpPr>
       <p:sp>
         <p:nvSpPr>
-          <p:cNvPr id="2" name="Title 1"/>
-          <p:cNvSpPr>
-            <a:spLocks noGrp="1"/>
-          </p:cNvSpPr>
-          <p:nvPr>
-            <p:ph type="title"/>
-          </p:nvPr>
-        </p:nvSpPr>
-        <p:spPr/>
-        <p:txBody>
-          <a:bodyPr/>
-          <a:lstStyle/>
-          <a:p>
-            <a:pPr lvl="0" indent="0" marL="0">
-              <a:buNone/>
-            </a:pPr>
-            <a:r>
-              <a:rPr/>
-              <a:t>Annex: regression CV leaderboard</a:t>
-            </a:r>
-          </a:p>
-        </p:txBody>
-      </p:sp>
-      <p:sp>
-        <p:nvSpPr>
           <p:cNvPr id="3" name="Content Placeholder 2"/>
           <p:cNvSpPr>
             <a:spLocks noGrp="1"/>
@@ -9187,15 +10064,7 @@
             </a:pPr>
             <a:r>
               <a:rPr/>
-              <a:t>Selected model in main deck: </a:t>
-            </a:r>
-            <a:r>
-              <a:rPr b="1"/>
-              <a:t>classic_linear_standard_scaler</a:t>
-            </a:r>
-            <a:r>
-              <a:rPr/>
-              <a:t>.</a:t>
+              <a:t>Questions, comments, and feedback are welcome!</a:t>
             </a:r>
           </a:p>
         </p:txBody>
@@ -9691,7 +10560,7 @@
             </a:pPr>
             <a:r>
               <a:rPr/>
-              <a:t>Thank you</a:t>
+              <a:t>Annex</a:t>
             </a:r>
           </a:p>
         </p:txBody>
@@ -9720,6 +10589,31 @@
       </p:grpSpPr>
       <p:sp>
         <p:nvSpPr>
+          <p:cNvPr id="2" name="Title 1"/>
+          <p:cNvSpPr>
+            <a:spLocks noGrp="1"/>
+          </p:cNvSpPr>
+          <p:nvPr>
+            <p:ph type="title"/>
+          </p:nvPr>
+        </p:nvSpPr>
+        <p:spPr/>
+        <p:txBody>
+          <a:bodyPr/>
+          <a:lstStyle/>
+          <a:p>
+            <a:pPr lvl="0" indent="0" marL="0">
+              <a:buNone/>
+            </a:pPr>
+            <a:r>
+              <a:rPr/>
+              <a:t>Annex: classification CV leaderboard</a:t>
+            </a:r>
+          </a:p>
+        </p:txBody>
+      </p:sp>
+      <p:sp>
+        <p:nvSpPr>
           <p:cNvPr id="3" name="Content Placeholder 2"/>
           <p:cNvSpPr>
             <a:spLocks noGrp="1"/>
@@ -9738,7 +10632,95 @@
             </a:pPr>
             <a:r>
               <a:rPr/>
-              <a:t>Questions, comments, and feedback are welcome!</a:t>
+              <a:t>Selected model in main deck: </a:t>
+            </a:r>
+            <a:r>
+              <a:rPr b="1"/>
+              <a:t>logit_binned_ohe</a:t>
+            </a:r>
+            <a:r>
+              <a:rPr/>
+              <a:t>.</a:t>
+            </a:r>
+          </a:p>
+        </p:txBody>
+      </p:sp>
+    </p:spTree>
+  </p:cSld>
+</p:sld>
+</file>
+
+<file path=ppt/slides/slide32.xml><?xml version="1.0" encoding="utf-8"?>
+<p:sld xmlns:a="http://schemas.openxmlformats.org/drawingml/2006/main" xmlns:r="http://schemas.openxmlformats.org/officeDocument/2006/relationships" xmlns:p="http://schemas.openxmlformats.org/presentationml/2006/main">
+  <p:cSld>
+    <p:spTree>
+      <p:nvGrpSpPr>
+        <p:cNvPr id="1" name=""/>
+        <p:cNvGrpSpPr/>
+        <p:nvPr/>
+      </p:nvGrpSpPr>
+      <p:grpSpPr>
+        <a:xfrm>
+          <a:off x="0" y="0"/>
+          <a:ext cx="0" cy="0"/>
+          <a:chOff x="0" y="0"/>
+          <a:chExt cx="0" cy="0"/>
+        </a:xfrm>
+      </p:grpSpPr>
+      <p:sp>
+        <p:nvSpPr>
+          <p:cNvPr id="2" name="Title 1"/>
+          <p:cNvSpPr>
+            <a:spLocks noGrp="1"/>
+          </p:cNvSpPr>
+          <p:nvPr>
+            <p:ph type="title"/>
+          </p:nvPr>
+        </p:nvSpPr>
+        <p:spPr/>
+        <p:txBody>
+          <a:bodyPr/>
+          <a:lstStyle/>
+          <a:p>
+            <a:pPr lvl="0" indent="0" marL="0">
+              <a:buNone/>
+            </a:pPr>
+            <a:r>
+              <a:rPr/>
+              <a:t>Annex: regression CV leaderboard</a:t>
+            </a:r>
+          </a:p>
+        </p:txBody>
+      </p:sp>
+      <p:sp>
+        <p:nvSpPr>
+          <p:cNvPr id="3" name="Content Placeholder 2"/>
+          <p:cNvSpPr>
+            <a:spLocks noGrp="1"/>
+          </p:cNvSpPr>
+          <p:nvPr>
+            <p:ph idx="1"/>
+          </p:nvPr>
+        </p:nvSpPr>
+        <p:spPr/>
+        <p:txBody>
+          <a:bodyPr/>
+          <a:lstStyle/>
+          <a:p>
+            <a:pPr lvl="0" indent="0" marL="0">
+              <a:buNone/>
+            </a:pPr>
+            <a:r>
+              <a:rPr/>
+              <a:t>Selected model in main deck: </a:t>
+            </a:r>
+            <a:r>
+              <a:rPr b="1"/>
+              <a:t>classic_linear_standard_scaler</a:t>
+            </a:r>
+            <a:r>
+              <a:rPr/>
+              <a:t>.</a:t>
             </a:r>
           </a:p>
         </p:txBody>

--- a/slidedeck/presentation.pptx
+++ b/slidedeck/presentation.pptx
@@ -37,6 +37,7 @@
     <p:sldId id="285" r:id="rId31"/>
     <p:sldId id="286" r:id="rId32"/>
     <p:sldId id="287" r:id="rId33"/>
+    <p:sldId id="288" r:id="rId34"/>
   </p:sldIdLst>
   <p:sldSz cx="9144000" cy="5143500" type="screen16x9"/>
   <p:notesSz cx="6858000" cy="9144000"/>
@@ -3229,7 +3230,7 @@
             </a:pPr>
             <a:r>
               <a:rPr/>
-              <a:t>For any business operations, we recommend segmenting clients by client size</a:t>
+              <a:t>Align coverage and service models to client size, focusing scalable playbooks on small clients and dedicated effort on high-value accounts.</a:t>
             </a:r>
           </a:p>
         </p:txBody>
@@ -3539,7 +3540,7 @@
             </a:pPr>
             <a:r>
               <a:rPr/>
-              <a:t>We also recommend starting with a simple marketing funnel segmentation</a:t>
+              <a:t>Treat acquisition and expansion as distinct growth engines, each with its own playbook and resource model.</a:t>
             </a:r>
           </a:p>
         </p:txBody>
@@ -4332,31 +4333,36 @@
           </a:p>
         </p:txBody>
       </p:sp>
-      <p:sp>
-        <p:nvSpPr>
-          <p:cNvPr id="4" name="Content Placeholder 3"/>
-          <p:cNvSpPr>
-            <a:spLocks noGrp="1"/>
-          </p:cNvSpPr>
-          <p:nvPr>
-            <p:ph idx="2" sz="half"/>
-          </p:nvPr>
-        </p:nvSpPr>
-        <p:spPr/>
-        <p:txBody>
-          <a:bodyPr/>
-          <a:lstStyle/>
-          <a:p>
-            <a:pPr lvl="0" indent="0" marL="0">
-              <a:buNone/>
-            </a:pPr>
-            <a:r>
-              <a:rPr/>
-              <a:t>SOME KIND OF DIAGRAM.</a:t>
-            </a:r>
-          </a:p>
-        </p:txBody>
-      </p:sp>
+      <p:pic>
+        <p:nvPicPr>
+          <p:cNvPr descr="assets/model_split_treemap.png" id="0" name="Picture 1"/>
+          <p:cNvPicPr>
+            <a:picLocks noGrp="1" noChangeAspect="1"/>
+          </p:cNvPicPr>
+          <p:nvPr/>
+        </p:nvPicPr>
+        <p:blipFill>
+          <a:blip r:embed="rId2"/>
+          <a:stretch>
+            <a:fillRect/>
+          </a:stretch>
+        </p:blipFill>
+        <p:spPr bwMode="auto">
+          <a:xfrm>
+            <a:off x="4648200" y="1612900"/>
+            <a:ext cx="4038600" cy="2552700"/>
+          </a:xfrm>
+          <a:prstGeom prst="rect">
+            <a:avLst/>
+          </a:prstGeom>
+          <a:noFill/>
+          <a:ln w="9525">
+            <a:noFill/>
+            <a:headEnd/>
+            <a:tailEnd/>
+          </a:ln>
+        </p:spPr>
+      </p:pic>
     </p:spTree>
   </p:cSld>
   <p:timing>
@@ -4824,7 +4830,7 @@
             </a:pPr>
             <a:r>
               <a:rPr/>
-              <a:t>Win/loss classification is the stronger operational model</a:t>
+              <a:t>Prioritization classification model enables immediate and precise reallocation of sales effort</a:t>
             </a:r>
           </a:p>
         </p:txBody>
@@ -4888,7 +4894,7 @@
             </a:r>
             <a:r>
               <a:rPr b="1"/>
-              <a:t>Logistic Regression over supervisedly binned and one-hot encoded features</a:t>
+              <a:t>Logistic Regression over supervisedly binned and one-hot encoded features with balanced class weights</a:t>
             </a:r>
             <a:r>
               <a:rPr/>
@@ -4898,11 +4904,11 @@
               <a:rPr>
                 <a:latin typeface="Courier"/>
               </a:rPr>
-              <a:t>logit_binned_ohe</a:t>
-            </a:r>
-            <a:r>
-              <a:rPr/>
-              <a:t>).</a:t>
+              <a:t>logit_binned_ohe_balanced</a:t>
+            </a:r>
+            <a:r>
+              <a:rPr/>
+              <a:t>). [^1]</a:t>
             </a:r>
           </a:p>
         </p:txBody>
@@ -4928,11 +4934,28 @@
                 <a:tableStyleId>{5C22544A-7EE6-4342-B048-85BDC9FD1C3A}</a:tableStyleId>
               </a:tblPr>
               <a:tblGrid>
-                <a:gridCol w="1346200"/>
-                <a:gridCol w="1346200"/>
-                <a:gridCol w="1346200"/>
+                <a:gridCol w="1003300"/>
+                <a:gridCol w="1003300"/>
+                <a:gridCol w="1003300"/>
+                <a:gridCol w="1003300"/>
               </a:tblGrid>
               <a:tr h="0">
+                <a:tc>
+                  <a:txBody>
+                    <a:bodyPr/>
+                    <a:lstStyle/>
+                    <a:p>
+                      <a:pPr lvl="0" indent="0" marL="0">
+                        <a:buNone/>
+                      </a:pPr>
+                      <a:r>
+                        <a:rPr/>
+                        <a:t>Model</a:t>
+                      </a:r>
+                    </a:p>
+                  </a:txBody>
+                  <a:tcPr/>
+                </a:tc>
                 <a:tc>
                   <a:txBody>
                     <a:bodyPr/>
@@ -4993,6 +5016,21 @@
                       </a:pPr>
                       <a:r>
                         <a:rPr/>
+                        <a:t>Selected</a:t>
+                      </a:r>
+                    </a:p>
+                  </a:txBody>
+                </a:tc>
+                <a:tc>
+                  <a:txBody>
+                    <a:bodyPr/>
+                    <a:lstStyle/>
+                    <a:p>
+                      <a:pPr lvl="0" indent="0" marL="0">
+                        <a:buNone/>
+                      </a:pPr>
+                      <a:r>
+                        <a:rPr/>
                         <a:t>CV</a:t>
                       </a:r>
                     </a:p>
@@ -5023,13 +5061,28 @@
                       </a:pPr>
                       <a:r>
                         <a:rPr/>
-                        <a:t>0.700</a:t>
+                        <a:t>0.698</a:t>
                       </a:r>
                     </a:p>
                   </a:txBody>
                 </a:tc>
               </a:tr>
               <a:tr h="0">
+                <a:tc>
+                  <a:txBody>
+                    <a:bodyPr/>
+                    <a:lstStyle/>
+                    <a:p>
+                      <a:pPr lvl="0" indent="0" marL="0">
+                        <a:buNone/>
+                      </a:pPr>
+                      <a:r>
+                        <a:rPr/>
+                        <a:t>Selected</a:t>
+                      </a:r>
+                    </a:p>
+                  </a:txBody>
+                </a:tc>
                 <a:tc>
                   <a:txBody>
                     <a:bodyPr/>
@@ -5070,7 +5123,131 @@
                       </a:pPr>
                       <a:r>
                         <a:rPr/>
-                        <a:t>0.695</a:t>
+                        <a:t>0.693</a:t>
+                      </a:r>
+                    </a:p>
+                  </a:txBody>
+                </a:tc>
+              </a:tr>
+              <a:tr h="0">
+                <a:tc>
+                  <a:txBody>
+                    <a:bodyPr/>
+                    <a:lstStyle/>
+                    <a:p>
+                      <a:pPr lvl="0" indent="0" marL="0">
+                        <a:buNone/>
+                      </a:pPr>
+                      <a:r>
+                        <a:rPr/>
+                        <a:t>Baseline</a:t>
+                      </a:r>
+                    </a:p>
+                  </a:txBody>
+                </a:tc>
+                <a:tc>
+                  <a:txBody>
+                    <a:bodyPr/>
+                    <a:lstStyle/>
+                    <a:p>
+                      <a:pPr lvl="0" indent="0" marL="0">
+                        <a:buNone/>
+                      </a:pPr>
+                      <a:r>
+                        <a:rPr/>
+                        <a:t>CV</a:t>
+                      </a:r>
+                    </a:p>
+                  </a:txBody>
+                </a:tc>
+                <a:tc>
+                  <a:txBody>
+                    <a:bodyPr/>
+                    <a:lstStyle/>
+                    <a:p>
+                      <a:pPr lvl="0" indent="0" marL="0" algn="r">
+                        <a:buNone/>
+                      </a:pPr>
+                      <a:r>
+                        <a:rPr/>
+                        <a:t>0.502</a:t>
+                      </a:r>
+                    </a:p>
+                  </a:txBody>
+                </a:tc>
+                <a:tc>
+                  <a:txBody>
+                    <a:bodyPr/>
+                    <a:lstStyle/>
+                    <a:p>
+                      <a:pPr lvl="0" indent="0" marL="0" algn="r">
+                        <a:buNone/>
+                      </a:pPr>
+                      <a:r>
+                        <a:rPr/>
+                        <a:t>0.228</a:t>
+                      </a:r>
+                    </a:p>
+                  </a:txBody>
+                </a:tc>
+              </a:tr>
+              <a:tr h="0">
+                <a:tc>
+                  <a:txBody>
+                    <a:bodyPr/>
+                    <a:lstStyle/>
+                    <a:p>
+                      <a:pPr lvl="0" indent="0" marL="0">
+                        <a:buNone/>
+                      </a:pPr>
+                      <a:r>
+                        <a:rPr/>
+                        <a:t>Baseline</a:t>
+                      </a:r>
+                    </a:p>
+                  </a:txBody>
+                </a:tc>
+                <a:tc>
+                  <a:txBody>
+                    <a:bodyPr/>
+                    <a:lstStyle/>
+                    <a:p>
+                      <a:pPr lvl="0" indent="0" marL="0">
+                        <a:buNone/>
+                      </a:pPr>
+                      <a:r>
+                        <a:rPr/>
+                        <a:t>Held-out test</a:t>
+                      </a:r>
+                    </a:p>
+                  </a:txBody>
+                </a:tc>
+                <a:tc>
+                  <a:txBody>
+                    <a:bodyPr/>
+                    <a:lstStyle/>
+                    <a:p>
+                      <a:pPr lvl="0" indent="0" marL="0" algn="r">
+                        <a:buNone/>
+                      </a:pPr>
+                      <a:r>
+                        <a:rPr/>
+                        <a:t>0.505</a:t>
+                      </a:r>
+                    </a:p>
+                  </a:txBody>
+                </a:tc>
+                <a:tc>
+                  <a:txBody>
+                    <a:bodyPr/>
+                    <a:lstStyle/>
+                    <a:p>
+                      <a:pPr lvl="0" indent="0" marL="0" algn="r">
+                        <a:buNone/>
+                      </a:pPr>
+                      <a:r>
+                        <a:rPr/>
+                        <a:t>0.229</a:t>
                       </a:r>
                     </a:p>
                   </a:txBody>
@@ -5082,7 +5259,7 @@
       </p:graphicFrame>
       <p:pic>
         <p:nvPicPr>
-          <p:cNvPr descr="assets/classification_importance.png" id="0" name="Picture 1"/>
+          <p:cNvPr descr="assets/classification_roc.png" id="0" name="Picture 1"/>
           <p:cNvPicPr>
             <a:picLocks noGrp="1" noChangeAspect="1"/>
           </p:cNvPicPr>
@@ -5096,8 +5273,8 @@
         </p:blipFill>
         <p:spPr bwMode="auto">
           <a:xfrm>
-            <a:off x="4635500" y="1778000"/>
-            <a:ext cx="4038600" cy="2667000"/>
+            <a:off x="4800600" y="1625600"/>
+            <a:ext cx="3708400" cy="2959100"/>
           </a:xfrm>
           <a:prstGeom prst="rect">
             <a:avLst/>
@@ -5363,6 +5540,53 @@
       </p:grpSpPr>
       <p:sp>
         <p:nvSpPr>
+          <p:cNvPr id="3" name="Content Placeholder 2"/>
+          <p:cNvSpPr>
+            <a:spLocks noGrp="1"/>
+          </p:cNvSpPr>
+          <p:nvPr>
+            <p:ph idx="1"/>
+          </p:nvPr>
+        </p:nvSpPr>
+        <p:spPr/>
+        <p:txBody>
+          <a:bodyPr/>
+          <a:lstStyle/>
+          <a:p>
+            <a:pPr lvl="0" indent="0" marL="0">
+              <a:buNone/>
+            </a:pPr>
+            <a:r>
+              <a:rPr/>
+              <a:t>This simulation is based on held-out test-set predictions. [^1]: We still do not recommend the higher-scoring XGBoost variants for deployment here because of their black-box nature and because they were not part of the covered modelling stack.</a:t>
+            </a:r>
+          </a:p>
+        </p:txBody>
+      </p:sp>
+    </p:spTree>
+  </p:cSld>
+</p:sld>
+</file>
+
+<file path=ppt/slides/slide18.xml><?xml version="1.0" encoding="utf-8"?>
+<p:sld xmlns:a="http://schemas.openxmlformats.org/drawingml/2006/main" xmlns:r="http://schemas.openxmlformats.org/officeDocument/2006/relationships" xmlns:p="http://schemas.openxmlformats.org/presentationml/2006/main">
+  <p:cSld>
+    <p:spTree>
+      <p:nvGrpSpPr>
+        <p:cNvPr id="1" name=""/>
+        <p:cNvGrpSpPr/>
+        <p:nvPr/>
+      </p:nvGrpSpPr>
+      <p:grpSpPr>
+        <a:xfrm>
+          <a:off x="0" y="0"/>
+          <a:ext cx="0" cy="0"/>
+          <a:chOff x="0" y="0"/>
+          <a:chExt cx="0" cy="0"/>
+        </a:xfrm>
+      </p:grpSpPr>
+      <p:sp>
+        <p:nvSpPr>
           <p:cNvPr id="2" name="Title 1"/>
           <p:cNvSpPr>
             <a:spLocks noGrp="1"/>
@@ -5381,19 +5605,19 @@
             </a:pPr>
             <a:r>
               <a:rPr/>
-              <a:t>Amount regression is not reliable at deal level, but highly accurate at portfolio level for planning</a:t>
+              <a:t>Use amount model for portfolio forecasting, not deal decisions</a:t>
             </a:r>
           </a:p>
         </p:txBody>
       </p:sp>
       <p:sp>
         <p:nvSpPr>
-          <p:cNvPr id="3" name="Text Placeholder 2"/>
+          <p:cNvPr id="3" name="Content Placeholder 2"/>
           <p:cNvSpPr>
             <a:spLocks noGrp="1"/>
           </p:cNvSpPr>
           <p:nvPr>
-            <p:ph idx="1" type="body"/>
+            <p:ph idx="1" sz="half"/>
           </p:nvPr>
         </p:nvSpPr>
         <p:spPr/>
@@ -5434,25 +5658,18 @@
             <a:pPr lvl="0"/>
             <a:r>
               <a:rPr/>
-              <a:t>Also uses the full dynamic snapshot, so amount estimates reflect both customer context and current process state.</a:t>
+              <a:t>Specific transformations tested: log-transforming amount variables and supervised binning.</a:t>
             </a:r>
           </a:p>
           <a:p>
             <a:pPr lvl="0"/>
             <a:r>
               <a:rPr/>
-              <a:t>Specific transformations tested: log-transforming amount variables and supervised binning.</a:t>
-            </a:r>
-          </a:p>
-          <a:p>
-            <a:pPr lvl="0"/>
-            <a:r>
-              <a:rPr/>
               <a:t>Selected final regression model: </a:t>
             </a:r>
             <a:r>
               <a:rPr b="1"/>
-              <a:t>Classic linear regression with standard scaled input</a:t>
+              <a:t>XGBoost regressor</a:t>
             </a:r>
             <a:r>
               <a:rPr/>
@@ -5462,235 +5679,33 @@
               <a:rPr>
                 <a:latin typeface="Courier"/>
               </a:rPr>
-              <a:t>classic_linear_standard_scaler</a:t>
+              <a:t>xgboost</a:t>
             </a:r>
             <a:r>
               <a:rPr/>
               <a:t>).</a:t>
+            </a:r>
+          </a:p>
+          <a:p>
+            <a:pPr lvl="0" indent="0" marL="0">
+              <a:buNone/>
+            </a:pPr>
+            <a:r>
+              <a:rPr b="1"/>
+              <a:t>CV</a:t>
+            </a:r>
+          </a:p>
+          <a:p>
+            <a:pPr lvl="0" indent="0" marL="0">
+              <a:buNone/>
+            </a:pPr>
+            <a:r>
+              <a:rPr b="1"/>
+              <a:t>Held-out test</a:t>
             </a:r>
           </a:p>
         </p:txBody>
       </p:sp>
-      <p:graphicFrame>
-        <p:nvGraphicFramePr>
-          <p:cNvPr id="6" name="Content Placeholder 5"/>
-          <p:cNvGraphicFramePr>
-            <a:graphicFrameLocks noGrp="1"/>
-          </p:cNvGraphicFramePr>
-          <p:nvPr>
-            <p:ph idx="1"/>
-          </p:nvPr>
-        </p:nvGraphicFramePr>
-        <p:xfrm>
-          <a:off x="457200" y="1625600"/>
-          <a:ext cx="4038600" cy="2959100"/>
-        </p:xfrm>
-        <a:graphic>
-          <a:graphicData uri="http://schemas.openxmlformats.org/drawingml/2006/table">
-            <a:tbl>
-              <a:tblPr firstRow="1" bandRow="1">
-                <a:tableStyleId>{5C22544A-7EE6-4342-B048-85BDC9FD1C3A}</a:tableStyleId>
-              </a:tblPr>
-              <a:tblGrid>
-                <a:gridCol w="1003300"/>
-                <a:gridCol w="1003300"/>
-                <a:gridCol w="1003300"/>
-                <a:gridCol w="1003300"/>
-              </a:tblGrid>
-              <a:tr h="0">
-                <a:tc>
-                  <a:txBody>
-                    <a:bodyPr/>
-                    <a:lstStyle/>
-                    <a:p>
-                      <a:pPr lvl="0" indent="0" marL="0">
-                        <a:buNone/>
-                      </a:pPr>
-                      <a:r>
-                        <a:rPr/>
-                        <a:t>Split</a:t>
-                      </a:r>
-                    </a:p>
-                  </a:txBody>
-                  <a:tcPr/>
-                </a:tc>
-                <a:tc>
-                  <a:txBody>
-                    <a:bodyPr/>
-                    <a:lstStyle/>
-                    <a:p>
-                      <a:pPr lvl="0" indent="0" marL="0" algn="r">
-                        <a:buNone/>
-                      </a:pPr>
-                      <a:r>
-                        <a:rPr/>
-                        <a:t>R²</a:t>
-                      </a:r>
-                    </a:p>
-                  </a:txBody>
-                  <a:tcPr/>
-                </a:tc>
-                <a:tc>
-                  <a:txBody>
-                    <a:bodyPr/>
-                    <a:lstStyle/>
-                    <a:p>
-                      <a:pPr lvl="0" indent="0" marL="0" algn="r">
-                        <a:buNone/>
-                      </a:pPr>
-                      <a:r>
-                        <a:rPr/>
-                        <a:t>MAE</a:t>
-                      </a:r>
-                    </a:p>
-                  </a:txBody>
-                  <a:tcPr/>
-                </a:tc>
-                <a:tc>
-                  <a:txBody>
-                    <a:bodyPr/>
-                    <a:lstStyle/>
-                    <a:p>
-                      <a:pPr lvl="0" indent="0" marL="0" algn="r">
-                        <a:buNone/>
-                      </a:pPr>
-                      <a:r>
-                        <a:rPr/>
-                        <a:t>Median APE</a:t>
-                      </a:r>
-                    </a:p>
-                  </a:txBody>
-                  <a:tcPr/>
-                </a:tc>
-              </a:tr>
-              <a:tr h="0">
-                <a:tc>
-                  <a:txBody>
-                    <a:bodyPr/>
-                    <a:lstStyle/>
-                    <a:p>
-                      <a:pPr lvl="0" indent="0" marL="0">
-                        <a:buNone/>
-                      </a:pPr>
-                      <a:r>
-                        <a:rPr/>
-                        <a:t>CV</a:t>
-                      </a:r>
-                    </a:p>
-                  </a:txBody>
-                </a:tc>
-                <a:tc>
-                  <a:txBody>
-                    <a:bodyPr/>
-                    <a:lstStyle/>
-                    <a:p>
-                      <a:pPr lvl="0" indent="0" marL="0" algn="r">
-                        <a:buNone/>
-                      </a:pPr>
-                      <a:r>
-                        <a:rPr/>
-                        <a:t>0.134</a:t>
-                      </a:r>
-                    </a:p>
-                  </a:txBody>
-                </a:tc>
-                <a:tc>
-                  <a:txBody>
-                    <a:bodyPr/>
-                    <a:lstStyle/>
-                    <a:p>
-                      <a:pPr lvl="0" indent="0" marL="0" algn="r">
-                        <a:buNone/>
-                      </a:pPr>
-                      <a:r>
-                        <a:rPr/>
-                        <a:t>74.3k USD</a:t>
-                      </a:r>
-                    </a:p>
-                  </a:txBody>
-                </a:tc>
-                <a:tc>
-                  <a:txBody>
-                    <a:bodyPr/>
-                    <a:lstStyle/>
-                    <a:p>
-                      <a:pPr lvl="0" indent="0" marL="0" algn="r">
-                        <a:buNone/>
-                      </a:pPr>
-                      <a:r>
-                        <a:rPr/>
-                        <a:t>78.9%</a:t>
-                      </a:r>
-                    </a:p>
-                  </a:txBody>
-                </a:tc>
-              </a:tr>
-              <a:tr h="0">
-                <a:tc>
-                  <a:txBody>
-                    <a:bodyPr/>
-                    <a:lstStyle/>
-                    <a:p>
-                      <a:pPr lvl="0" indent="0" marL="0">
-                        <a:buNone/>
-                      </a:pPr>
-                      <a:r>
-                        <a:rPr/>
-                        <a:t>Held-out test</a:t>
-                      </a:r>
-                    </a:p>
-                  </a:txBody>
-                </a:tc>
-                <a:tc>
-                  <a:txBody>
-                    <a:bodyPr/>
-                    <a:lstStyle/>
-                    <a:p>
-                      <a:pPr lvl="0" indent="0" marL="0" algn="r">
-                        <a:buNone/>
-                      </a:pPr>
-                      <a:r>
-                        <a:rPr/>
-                        <a:t>0.135</a:t>
-                      </a:r>
-                    </a:p>
-                  </a:txBody>
-                </a:tc>
-                <a:tc>
-                  <a:txBody>
-                    <a:bodyPr/>
-                    <a:lstStyle/>
-                    <a:p>
-                      <a:pPr lvl="0" indent="0" marL="0" algn="r">
-                        <a:buNone/>
-                      </a:pPr>
-                      <a:r>
-                        <a:rPr/>
-                        <a:t>74.0k USD</a:t>
-                      </a:r>
-                    </a:p>
-                  </a:txBody>
-                </a:tc>
-                <a:tc>
-                  <a:txBody>
-                    <a:bodyPr/>
-                    <a:lstStyle/>
-                    <a:p>
-                      <a:pPr lvl="0" indent="0" marL="0" algn="r">
-                        <a:buNone/>
-                      </a:pPr>
-                      <a:r>
-                        <a:rPr/>
-                        <a:t>78.5%</a:t>
-                      </a:r>
-                    </a:p>
-                  </a:txBody>
-                </a:tc>
-              </a:tr>
-            </a:tbl>
-          </a:graphicData>
-        </a:graphic>
-      </p:graphicFrame>
       <p:pic>
         <p:nvPicPr>
           <p:cNvPr descr="assets/regression_importance.png" id="0" name="Picture 1"/>
@@ -5707,8 +5722,746 @@
         </p:blipFill>
         <p:spPr bwMode="auto">
           <a:xfrm>
-            <a:off x="4635500" y="1765300"/>
-            <a:ext cx="4038600" cy="2692400"/>
+            <a:off x="4648200" y="1562100"/>
+            <a:ext cx="4038600" cy="2654300"/>
+          </a:xfrm>
+          <a:prstGeom prst="rect">
+            <a:avLst/>
+          </a:prstGeom>
+          <a:noFill/>
+          <a:ln w="9525">
+            <a:noFill/>
+            <a:headEnd/>
+            <a:tailEnd/>
+          </a:ln>
+        </p:spPr>
+      </p:pic>
+    </p:spTree>
+  </p:cSld>
+  <p:timing>
+    <p:tnLst>
+      <p:par>
+        <p:cTn id="1" dur="indefinite" restart="never" nodeType="tmRoot">
+          <p:childTnLst>
+            <p:seq concurrent="1" nextAc="seek">
+              <p:cTn id="2" dur="indefinite" nodeType="mainSeq">
+                <p:childTnLst>
+                  <p:par>
+                    <p:cTn id="3" fill="hold">
+                      <p:stCondLst>
+                        <p:cond delay="indefinite"/>
+                      </p:stCondLst>
+                      <p:childTnLst>
+                        <p:par>
+                          <p:cTn id="4" fill="hold">
+                            <p:stCondLst>
+                              <p:cond delay="0"/>
+                            </p:stCondLst>
+                            <p:childTnLst>
+                              <p:par>
+                                <p:cTn id="5" presetID="1" presetClass="entr" presetSubtype="0" fill="hold" grpId="0" nodeType="clickEffect">
+                                  <p:stCondLst>
+                                    <p:cond delay="0"/>
+                                  </p:stCondLst>
+                                  <p:childTnLst>
+                                    <p:set>
+                                      <p:cBhvr>
+                                        <p:cTn id="6" dur="1" fill="hold">
+                                          <p:stCondLst>
+                                            <p:cond delay="0"/>
+                                          </p:stCondLst>
+                                        </p:cTn>
+                                        <p:tgtEl>
+                                          <p:spTgt spid="3">
+                                            <p:txEl>
+                                              <p:pRg st="0" end="0"/>
+                                            </p:txEl>
+                                          </p:spTgt>
+                                        </p:tgtEl>
+                                        <p:attrNameLst>
+                                          <p:attrName>style.visibility</p:attrName>
+                                        </p:attrNameLst>
+                                      </p:cBhvr>
+                                      <p:to>
+                                        <p:strVal val="visible"/>
+                                      </p:to>
+                                    </p:set>
+                                  </p:childTnLst>
+                                </p:cTn>
+                              </p:par>
+                            </p:childTnLst>
+                          </p:cTn>
+                        </p:par>
+                      </p:childTnLst>
+                    </p:cTn>
+                  </p:par>
+                  <p:par>
+                    <p:cTn id="7" fill="hold">
+                      <p:stCondLst>
+                        <p:cond delay="indefinite"/>
+                      </p:stCondLst>
+                      <p:childTnLst>
+                        <p:par>
+                          <p:cTn id="8" fill="hold">
+                            <p:stCondLst>
+                              <p:cond delay="0"/>
+                            </p:stCondLst>
+                            <p:childTnLst>
+                              <p:par>
+                                <p:cTn id="9" presetID="1" presetClass="entr" presetSubtype="0" fill="hold" grpId="0" nodeType="clickEffect">
+                                  <p:stCondLst>
+                                    <p:cond delay="0"/>
+                                  </p:stCondLst>
+                                  <p:childTnLst>
+                                    <p:set>
+                                      <p:cBhvr>
+                                        <p:cTn id="10" dur="1" fill="hold">
+                                          <p:stCondLst>
+                                            <p:cond delay="0"/>
+                                          </p:stCondLst>
+                                        </p:cTn>
+                                        <p:tgtEl>
+                                          <p:spTgt spid="3">
+                                            <p:txEl>
+                                              <p:pRg st="1" end="1"/>
+                                            </p:txEl>
+                                          </p:spTgt>
+                                        </p:tgtEl>
+                                        <p:attrNameLst>
+                                          <p:attrName>style.visibility</p:attrName>
+                                        </p:attrNameLst>
+                                      </p:cBhvr>
+                                      <p:to>
+                                        <p:strVal val="visible"/>
+                                      </p:to>
+                                    </p:set>
+                                  </p:childTnLst>
+                                </p:cTn>
+                              </p:par>
+                            </p:childTnLst>
+                          </p:cTn>
+                        </p:par>
+                      </p:childTnLst>
+                    </p:cTn>
+                  </p:par>
+                  <p:par>
+                    <p:cTn id="11" fill="hold">
+                      <p:stCondLst>
+                        <p:cond delay="indefinite"/>
+                      </p:stCondLst>
+                      <p:childTnLst>
+                        <p:par>
+                          <p:cTn id="12" fill="hold">
+                            <p:stCondLst>
+                              <p:cond delay="0"/>
+                            </p:stCondLst>
+                            <p:childTnLst>
+                              <p:par>
+                                <p:cTn id="13" presetID="1" presetClass="entr" presetSubtype="0" fill="hold" grpId="0" nodeType="clickEffect">
+                                  <p:stCondLst>
+                                    <p:cond delay="0"/>
+                                  </p:stCondLst>
+                                  <p:childTnLst>
+                                    <p:set>
+                                      <p:cBhvr>
+                                        <p:cTn id="14" dur="1" fill="hold">
+                                          <p:stCondLst>
+                                            <p:cond delay="0"/>
+                                          </p:stCondLst>
+                                        </p:cTn>
+                                        <p:tgtEl>
+                                          <p:spTgt spid="3">
+                                            <p:txEl>
+                                              <p:pRg st="2" end="2"/>
+                                            </p:txEl>
+                                          </p:spTgt>
+                                        </p:tgtEl>
+                                        <p:attrNameLst>
+                                          <p:attrName>style.visibility</p:attrName>
+                                        </p:attrNameLst>
+                                      </p:cBhvr>
+                                      <p:to>
+                                        <p:strVal val="visible"/>
+                                      </p:to>
+                                    </p:set>
+                                  </p:childTnLst>
+                                </p:cTn>
+                              </p:par>
+                            </p:childTnLst>
+                          </p:cTn>
+                        </p:par>
+                      </p:childTnLst>
+                    </p:cTn>
+                  </p:par>
+                  <p:par>
+                    <p:cTn id="15" fill="hold">
+                      <p:stCondLst>
+                        <p:cond delay="indefinite"/>
+                      </p:stCondLst>
+                      <p:childTnLst>
+                        <p:par>
+                          <p:cTn id="16" fill="hold">
+                            <p:stCondLst>
+                              <p:cond delay="0"/>
+                            </p:stCondLst>
+                            <p:childTnLst>
+                              <p:par>
+                                <p:cTn id="17" presetID="1" presetClass="entr" presetSubtype="0" fill="hold" grpId="0" nodeType="clickEffect">
+                                  <p:stCondLst>
+                                    <p:cond delay="0"/>
+                                  </p:stCondLst>
+                                  <p:childTnLst>
+                                    <p:set>
+                                      <p:cBhvr>
+                                        <p:cTn id="18" dur="1" fill="hold">
+                                          <p:stCondLst>
+                                            <p:cond delay="0"/>
+                                          </p:stCondLst>
+                                        </p:cTn>
+                                        <p:tgtEl>
+                                          <p:spTgt spid="3">
+                                            <p:txEl>
+                                              <p:pRg st="3" end="3"/>
+                                            </p:txEl>
+                                          </p:spTgt>
+                                        </p:tgtEl>
+                                        <p:attrNameLst>
+                                          <p:attrName>style.visibility</p:attrName>
+                                        </p:attrNameLst>
+                                      </p:cBhvr>
+                                      <p:to>
+                                        <p:strVal val="visible"/>
+                                      </p:to>
+                                    </p:set>
+                                  </p:childTnLst>
+                                </p:cTn>
+                              </p:par>
+                            </p:childTnLst>
+                          </p:cTn>
+                        </p:par>
+                      </p:childTnLst>
+                    </p:cTn>
+                  </p:par>
+                </p:childTnLst>
+              </p:cTn>
+              <p:prevCondLst>
+                <p:cond evt="onPrev" delay="0">
+                  <p:tgtEl>
+                    <p:sldTgt/>
+                  </p:tgtEl>
+                </p:cond>
+              </p:prevCondLst>
+              <p:nextCondLst>
+                <p:cond evt="onNext" delay="0">
+                  <p:tgtEl>
+                    <p:sldTgt/>
+                  </p:tgtEl>
+                </p:cond>
+              </p:nextCondLst>
+            </p:seq>
+          </p:childTnLst>
+        </p:cTn>
+      </p:par>
+    </p:tnLst>
+    <p:bldLst>
+      <p:bldP spid="3" grpId="0" uiExpand="1" build="p"/>
+    </p:bldLst>
+  </p:timing>
+</p:sld>
+</file>
+
+<file path=ppt/slides/slide19.xml><?xml version="1.0" encoding="utf-8"?>
+<p:sld xmlns:a="http://schemas.openxmlformats.org/drawingml/2006/main" xmlns:r="http://schemas.openxmlformats.org/officeDocument/2006/relationships" xmlns:p="http://schemas.openxmlformats.org/presentationml/2006/main">
+  <p:cSld>
+    <p:spTree>
+      <p:nvGrpSpPr>
+        <p:cNvPr id="1" name=""/>
+        <p:cNvGrpSpPr/>
+        <p:nvPr/>
+      </p:nvGrpSpPr>
+      <p:grpSpPr>
+        <a:xfrm>
+          <a:off x="0" y="0"/>
+          <a:ext cx="0" cy="0"/>
+          <a:chOff x="0" y="0"/>
+          <a:chExt cx="0" cy="0"/>
+        </a:xfrm>
+      </p:grpSpPr>
+      <p:sp>
+        <p:nvSpPr>
+          <p:cNvPr id="2" name="Title 1"/>
+          <p:cNvSpPr>
+            <a:spLocks noGrp="1"/>
+          </p:cNvSpPr>
+          <p:nvPr>
+            <p:ph type="title"/>
+          </p:nvPr>
+        </p:nvSpPr>
+        <p:spPr>
+          <a:xfrm>
+            <a:off x="722313" y="3305176"/>
+            <a:ext cx="7772400" cy="1021556"/>
+          </a:xfrm>
+        </p:spPr>
+        <p:txBody>
+          <a:bodyPr/>
+          <a:lstStyle/>
+          <a:p>
+            <a:pPr lvl="0" indent="0" marL="0">
+              <a:buNone/>
+            </a:pPr>
+            <a:r>
+              <a:rPr/>
+              <a:t>Application simulation</a:t>
+            </a:r>
+          </a:p>
+        </p:txBody>
+      </p:sp>
+    </p:spTree>
+  </p:cSld>
+</p:sld>
+</file>
+
+<file path=ppt/slides/slide2.xml><?xml version="1.0" encoding="utf-8"?>
+<p:sld xmlns:a="http://schemas.openxmlformats.org/drawingml/2006/main" xmlns:r="http://schemas.openxmlformats.org/officeDocument/2006/relationships" xmlns:p="http://schemas.openxmlformats.org/presentationml/2006/main">
+  <p:cSld>
+    <p:spTree>
+      <p:nvGrpSpPr>
+        <p:cNvPr id="1" name=""/>
+        <p:cNvGrpSpPr/>
+        <p:nvPr/>
+      </p:nvGrpSpPr>
+      <p:grpSpPr>
+        <a:xfrm>
+          <a:off x="0" y="0"/>
+          <a:ext cx="0" cy="0"/>
+          <a:chOff x="0" y="0"/>
+          <a:chExt cx="0" cy="0"/>
+        </a:xfrm>
+      </p:grpSpPr>
+      <p:sp>
+        <p:nvSpPr>
+          <p:cNvPr id="2" name="Title 1"/>
+          <p:cNvSpPr>
+            <a:spLocks noGrp="1"/>
+          </p:cNvSpPr>
+          <p:nvPr>
+            <p:ph type="title"/>
+          </p:nvPr>
+        </p:nvSpPr>
+        <p:spPr/>
+        <p:txBody>
+          <a:bodyPr/>
+          <a:lstStyle/>
+          <a:p>
+            <a:pPr lvl="0" indent="0" marL="0">
+              <a:buNone/>
+            </a:pPr>
+            <a:r>
+              <a:rPr/>
+              <a:t>Executive Summary</a:t>
+            </a:r>
+          </a:p>
+        </p:txBody>
+      </p:sp>
+      <p:sp>
+        <p:nvSpPr>
+          <p:cNvPr id="3" name="Content Placeholder 2"/>
+          <p:cNvSpPr>
+            <a:spLocks noGrp="1"/>
+          </p:cNvSpPr>
+          <p:nvPr>
+            <p:ph idx="1"/>
+          </p:nvPr>
+        </p:nvSpPr>
+        <p:spPr/>
+        <p:txBody>
+          <a:bodyPr/>
+          <a:lstStyle/>
+          <a:p>
+            <a:pPr lvl="0"/>
+            <a:r>
+              <a:rPr/>
+              <a:t>This analysis examines an auto-parts sales opportunity pipeline, identifying structural inefficiencies (i.e. CRM input errors, lack of prioritization, and inaccurate forecasting) that drive a structurally low 22.7% conversion rate.</a:t>
+            </a:r>
+          </a:p>
+          <a:p>
+            <a:pPr lvl="0"/>
+            <a:r>
+              <a:rPr/>
+              <a:t>We propose two models: a win/loss classifier (AUROC 0.88) for opportunity prioritization, and a regression model for deal sizing and aggregate forecasting (reliable at portfolio level, not per deal).</a:t>
+            </a:r>
+          </a:p>
+          <a:p>
+            <a:pPr lvl="0"/>
+            <a:r>
+              <a:rPr/>
+              <a:t>Focusing on the top 20% of opportunities lifts conversion from 22.7% to ~67%; the top 10% captures ~44% of total pipeline value.</a:t>
+            </a:r>
+          </a:p>
+          <a:p>
+            <a:pPr lvl="0"/>
+            <a:r>
+              <a:rPr/>
+              <a:t>We recommend embedding scores in the CRM at opportunity creation, piloting via A/B test, and setting clear thresholds to operationalize prioritization in sales workflows.</a:t>
+            </a:r>
+          </a:p>
+        </p:txBody>
+      </p:sp>
+    </p:spTree>
+  </p:cSld>
+  <p:timing>
+    <p:tnLst>
+      <p:par>
+        <p:cTn id="1" dur="indefinite" restart="never" nodeType="tmRoot">
+          <p:childTnLst>
+            <p:seq concurrent="1" nextAc="seek">
+              <p:cTn id="2" dur="indefinite" nodeType="mainSeq">
+                <p:childTnLst>
+                  <p:par>
+                    <p:cTn id="3" fill="hold">
+                      <p:stCondLst>
+                        <p:cond delay="indefinite"/>
+                      </p:stCondLst>
+                      <p:childTnLst>
+                        <p:par>
+                          <p:cTn id="4" fill="hold">
+                            <p:stCondLst>
+                              <p:cond delay="0"/>
+                            </p:stCondLst>
+                            <p:childTnLst>
+                              <p:par>
+                                <p:cTn id="5" presetID="1" presetClass="entr" presetSubtype="0" fill="hold" grpId="0" nodeType="clickEffect">
+                                  <p:stCondLst>
+                                    <p:cond delay="0"/>
+                                  </p:stCondLst>
+                                  <p:childTnLst>
+                                    <p:set>
+                                      <p:cBhvr>
+                                        <p:cTn id="6" dur="1" fill="hold">
+                                          <p:stCondLst>
+                                            <p:cond delay="0"/>
+                                          </p:stCondLst>
+                                        </p:cTn>
+                                        <p:tgtEl>
+                                          <p:spTgt spid="3">
+                                            <p:txEl>
+                                              <p:pRg st="0" end="0"/>
+                                            </p:txEl>
+                                          </p:spTgt>
+                                        </p:tgtEl>
+                                        <p:attrNameLst>
+                                          <p:attrName>style.visibility</p:attrName>
+                                        </p:attrNameLst>
+                                      </p:cBhvr>
+                                      <p:to>
+                                        <p:strVal val="visible"/>
+                                      </p:to>
+                                    </p:set>
+                                  </p:childTnLst>
+                                </p:cTn>
+                              </p:par>
+                            </p:childTnLst>
+                          </p:cTn>
+                        </p:par>
+                      </p:childTnLst>
+                    </p:cTn>
+                  </p:par>
+                  <p:par>
+                    <p:cTn id="7" fill="hold">
+                      <p:stCondLst>
+                        <p:cond delay="indefinite"/>
+                      </p:stCondLst>
+                      <p:childTnLst>
+                        <p:par>
+                          <p:cTn id="8" fill="hold">
+                            <p:stCondLst>
+                              <p:cond delay="0"/>
+                            </p:stCondLst>
+                            <p:childTnLst>
+                              <p:par>
+                                <p:cTn id="9" presetID="1" presetClass="entr" presetSubtype="0" fill="hold" grpId="0" nodeType="clickEffect">
+                                  <p:stCondLst>
+                                    <p:cond delay="0"/>
+                                  </p:stCondLst>
+                                  <p:childTnLst>
+                                    <p:set>
+                                      <p:cBhvr>
+                                        <p:cTn id="10" dur="1" fill="hold">
+                                          <p:stCondLst>
+                                            <p:cond delay="0"/>
+                                          </p:stCondLst>
+                                        </p:cTn>
+                                        <p:tgtEl>
+                                          <p:spTgt spid="3">
+                                            <p:txEl>
+                                              <p:pRg st="1" end="1"/>
+                                            </p:txEl>
+                                          </p:spTgt>
+                                        </p:tgtEl>
+                                        <p:attrNameLst>
+                                          <p:attrName>style.visibility</p:attrName>
+                                        </p:attrNameLst>
+                                      </p:cBhvr>
+                                      <p:to>
+                                        <p:strVal val="visible"/>
+                                      </p:to>
+                                    </p:set>
+                                  </p:childTnLst>
+                                </p:cTn>
+                              </p:par>
+                            </p:childTnLst>
+                          </p:cTn>
+                        </p:par>
+                      </p:childTnLst>
+                    </p:cTn>
+                  </p:par>
+                  <p:par>
+                    <p:cTn id="11" fill="hold">
+                      <p:stCondLst>
+                        <p:cond delay="indefinite"/>
+                      </p:stCondLst>
+                      <p:childTnLst>
+                        <p:par>
+                          <p:cTn id="12" fill="hold">
+                            <p:stCondLst>
+                              <p:cond delay="0"/>
+                            </p:stCondLst>
+                            <p:childTnLst>
+                              <p:par>
+                                <p:cTn id="13" presetID="1" presetClass="entr" presetSubtype="0" fill="hold" grpId="0" nodeType="clickEffect">
+                                  <p:stCondLst>
+                                    <p:cond delay="0"/>
+                                  </p:stCondLst>
+                                  <p:childTnLst>
+                                    <p:set>
+                                      <p:cBhvr>
+                                        <p:cTn id="14" dur="1" fill="hold">
+                                          <p:stCondLst>
+                                            <p:cond delay="0"/>
+                                          </p:stCondLst>
+                                        </p:cTn>
+                                        <p:tgtEl>
+                                          <p:spTgt spid="3">
+                                            <p:txEl>
+                                              <p:pRg st="2" end="2"/>
+                                            </p:txEl>
+                                          </p:spTgt>
+                                        </p:tgtEl>
+                                        <p:attrNameLst>
+                                          <p:attrName>style.visibility</p:attrName>
+                                        </p:attrNameLst>
+                                      </p:cBhvr>
+                                      <p:to>
+                                        <p:strVal val="visible"/>
+                                      </p:to>
+                                    </p:set>
+                                  </p:childTnLst>
+                                </p:cTn>
+                              </p:par>
+                            </p:childTnLst>
+                          </p:cTn>
+                        </p:par>
+                      </p:childTnLst>
+                    </p:cTn>
+                  </p:par>
+                  <p:par>
+                    <p:cTn id="15" fill="hold">
+                      <p:stCondLst>
+                        <p:cond delay="indefinite"/>
+                      </p:stCondLst>
+                      <p:childTnLst>
+                        <p:par>
+                          <p:cTn id="16" fill="hold">
+                            <p:stCondLst>
+                              <p:cond delay="0"/>
+                            </p:stCondLst>
+                            <p:childTnLst>
+                              <p:par>
+                                <p:cTn id="17" presetID="1" presetClass="entr" presetSubtype="0" fill="hold" grpId="0" nodeType="clickEffect">
+                                  <p:stCondLst>
+                                    <p:cond delay="0"/>
+                                  </p:stCondLst>
+                                  <p:childTnLst>
+                                    <p:set>
+                                      <p:cBhvr>
+                                        <p:cTn id="18" dur="1" fill="hold">
+                                          <p:stCondLst>
+                                            <p:cond delay="0"/>
+                                          </p:stCondLst>
+                                        </p:cTn>
+                                        <p:tgtEl>
+                                          <p:spTgt spid="3">
+                                            <p:txEl>
+                                              <p:pRg st="3" end="3"/>
+                                            </p:txEl>
+                                          </p:spTgt>
+                                        </p:tgtEl>
+                                        <p:attrNameLst>
+                                          <p:attrName>style.visibility</p:attrName>
+                                        </p:attrNameLst>
+                                      </p:cBhvr>
+                                      <p:to>
+                                        <p:strVal val="visible"/>
+                                      </p:to>
+                                    </p:set>
+                                  </p:childTnLst>
+                                </p:cTn>
+                              </p:par>
+                            </p:childTnLst>
+                          </p:cTn>
+                        </p:par>
+                      </p:childTnLst>
+                    </p:cTn>
+                  </p:par>
+                </p:childTnLst>
+              </p:cTn>
+              <p:prevCondLst>
+                <p:cond evt="onPrev" delay="0">
+                  <p:tgtEl>
+                    <p:sldTgt/>
+                  </p:tgtEl>
+                </p:cond>
+              </p:prevCondLst>
+              <p:nextCondLst>
+                <p:cond evt="onNext" delay="0">
+                  <p:tgtEl>
+                    <p:sldTgt/>
+                  </p:tgtEl>
+                </p:cond>
+              </p:nextCondLst>
+            </p:seq>
+          </p:childTnLst>
+        </p:cTn>
+      </p:par>
+    </p:tnLst>
+    <p:bldLst>
+      <p:bldP spid="3" grpId="0" uiExpand="1" build="p"/>
+    </p:bldLst>
+  </p:timing>
+</p:sld>
+</file>
+
+<file path=ppt/slides/slide20.xml><?xml version="1.0" encoding="utf-8"?>
+<p:sld xmlns:a="http://schemas.openxmlformats.org/drawingml/2006/main" xmlns:r="http://schemas.openxmlformats.org/officeDocument/2006/relationships" xmlns:p="http://schemas.openxmlformats.org/presentationml/2006/main">
+  <p:cSld>
+    <p:spTree>
+      <p:nvGrpSpPr>
+        <p:cNvPr id="1" name=""/>
+        <p:cNvGrpSpPr/>
+        <p:nvPr/>
+      </p:nvGrpSpPr>
+      <p:grpSpPr>
+        <a:xfrm>
+          <a:off x="0" y="0"/>
+          <a:ext cx="0" cy="0"/>
+          <a:chOff x="0" y="0"/>
+          <a:chExt cx="0" cy="0"/>
+        </a:xfrm>
+      </p:grpSpPr>
+      <p:sp>
+        <p:nvSpPr>
+          <p:cNvPr id="2" name="Title 1"/>
+          <p:cNvSpPr>
+            <a:spLocks noGrp="1"/>
+          </p:cNvSpPr>
+          <p:nvPr>
+            <p:ph type="title"/>
+          </p:nvPr>
+        </p:nvSpPr>
+        <p:spPr/>
+        <p:txBody>
+          <a:bodyPr/>
+          <a:lstStyle/>
+          <a:p>
+            <a:pPr lvl="0" indent="0" marL="0">
+              <a:buNone/>
+            </a:pPr>
+            <a:r>
+              <a:rPr/>
+              <a:t>Tripling conversion is achievable by focusing on the top 20% of opportunities, without increasing pipeline size</a:t>
+            </a:r>
+          </a:p>
+        </p:txBody>
+      </p:sp>
+      <p:sp>
+        <p:nvSpPr>
+          <p:cNvPr id="3" name="Content Placeholder 2"/>
+          <p:cNvSpPr>
+            <a:spLocks noGrp="1"/>
+          </p:cNvSpPr>
+          <p:nvPr>
+            <p:ph idx="1" sz="half"/>
+          </p:nvPr>
+        </p:nvSpPr>
+        <p:spPr/>
+        <p:txBody>
+          <a:bodyPr/>
+          <a:lstStyle/>
+          <a:p>
+            <a:pPr lvl="0"/>
+            <a:r>
+              <a:rPr/>
+              <a:t>Sales effort is currently spread across low-probability deals → concentrating on top deciles can triple conversion efficiency.</a:t>
+            </a:r>
+          </a:p>
+          <a:p>
+            <a:pPr lvl="1"/>
+            <a:r>
+              <a:rPr/>
+              <a:t>Top decile: 3.52× lift.</a:t>
+            </a:r>
+          </a:p>
+          <a:p>
+            <a:pPr lvl="1"/>
+            <a:r>
+              <a:rPr/>
+              <a:t>Ninth decile: 2.38× lift.</a:t>
+            </a:r>
+          </a:p>
+          <a:p>
+            <a:pPr lvl="1"/>
+            <a:r>
+              <a:rPr/>
+              <a:t>Eight decile: 1.66× lift.</a:t>
+            </a:r>
+          </a:p>
+          <a:p>
+            <a:pPr lvl="0"/>
+            <a:r>
+              <a:rPr/>
+              <a:t>We propose to automatically embed this in the CRM at opportunity creation to prioritize high-propensity deals (e.g. top 1-2 deciles) and set clear thresholds for pipeline reviews and resource allocation.</a:t>
+            </a:r>
+          </a:p>
+          <a:p>
+            <a:pPr lvl="0" indent="0" marL="0">
+              <a:buNone/>
+            </a:pPr>
+            <a:r>
+              <a:rPr/>
+              <a:t>This simulation is based on held-out test-set predictions.</a:t>
+            </a:r>
+          </a:p>
+        </p:txBody>
+      </p:sp>
+      <p:pic>
+        <p:nvPicPr>
+          <p:cNvPr descr="assets/sim_prioritization.png" id="0" name="Picture 1"/>
+          <p:cNvPicPr>
+            <a:picLocks noGrp="1" noChangeAspect="1"/>
+          </p:cNvPicPr>
+          <p:nvPr/>
+        </p:nvPicPr>
+        <p:blipFill>
+          <a:blip r:embed="rId2"/>
+          <a:stretch>
+            <a:fillRect/>
+          </a:stretch>
+        </p:blipFill>
+        <p:spPr bwMode="auto">
+          <a:xfrm>
+            <a:off x="4648200" y="1638300"/>
+            <a:ext cx="4038600" cy="2489200"/>
           </a:xfrm>
           <a:prstGeom prst="rect">
             <a:avLst/>
@@ -6004,59 +6757,7 @@
 </p:sld>
 </file>
 
-<file path=ppt/slides/slide18.xml><?xml version="1.0" encoding="utf-8"?>
-<p:sld xmlns:a="http://schemas.openxmlformats.org/drawingml/2006/main" xmlns:r="http://schemas.openxmlformats.org/officeDocument/2006/relationships" xmlns:p="http://schemas.openxmlformats.org/presentationml/2006/main">
-  <p:cSld>
-    <p:spTree>
-      <p:nvGrpSpPr>
-        <p:cNvPr id="1" name=""/>
-        <p:cNvGrpSpPr/>
-        <p:nvPr/>
-      </p:nvGrpSpPr>
-      <p:grpSpPr>
-        <a:xfrm>
-          <a:off x="0" y="0"/>
-          <a:ext cx="0" cy="0"/>
-          <a:chOff x="0" y="0"/>
-          <a:chExt cx="0" cy="0"/>
-        </a:xfrm>
-      </p:grpSpPr>
-      <p:sp>
-        <p:nvSpPr>
-          <p:cNvPr id="2" name="Title 1"/>
-          <p:cNvSpPr>
-            <a:spLocks noGrp="1"/>
-          </p:cNvSpPr>
-          <p:nvPr>
-            <p:ph type="title"/>
-          </p:nvPr>
-        </p:nvSpPr>
-        <p:spPr>
-          <a:xfrm>
-            <a:off x="722313" y="3305176"/>
-            <a:ext cx="7772400" cy="1021556"/>
-          </a:xfrm>
-        </p:spPr>
-        <p:txBody>
-          <a:bodyPr/>
-          <a:lstStyle/>
-          <a:p>
-            <a:pPr lvl="0" indent="0" marL="0">
-              <a:buNone/>
-            </a:pPr>
-            <a:r>
-              <a:rPr/>
-              <a:t>Application simulation</a:t>
-            </a:r>
-          </a:p>
-        </p:txBody>
-      </p:sp>
-    </p:spTree>
-  </p:cSld>
-</p:sld>
-</file>
-
-<file path=ppt/slides/slide19.xml><?xml version="1.0" encoding="utf-8"?>
+<file path=ppt/slides/slide21.xml><?xml version="1.0" encoding="utf-8"?>
 <p:sld xmlns:a="http://schemas.openxmlformats.org/drawingml/2006/main" xmlns:r="http://schemas.openxmlformats.org/officeDocument/2006/relationships" xmlns:p="http://schemas.openxmlformats.org/presentationml/2006/main">
   <p:cSld>
     <p:spTree>
@@ -6093,574 +6794,7 @@
             </a:pPr>
             <a:r>
               <a:rPr/>
-              <a:t>Prioritization simulation: the top propensity decile delivers 3.5× lift versus the average held-out win rate</a:t>
-            </a:r>
-          </a:p>
-        </p:txBody>
-      </p:sp>
-      <p:sp>
-        <p:nvSpPr>
-          <p:cNvPr id="3" name="Content Placeholder 2"/>
-          <p:cNvSpPr>
-            <a:spLocks noGrp="1"/>
-          </p:cNvSpPr>
-          <p:nvPr>
-            <p:ph idx="1" sz="half"/>
-          </p:nvPr>
-        </p:nvSpPr>
-        <p:spPr/>
-        <p:txBody>
-          <a:bodyPr/>
-          <a:lstStyle/>
-          <a:p>
-            <a:pPr lvl="0"/>
-            <a:r>
-              <a:rPr/>
-              <a:t>Sales effort is currently spread across low-probability deals → the model shows that concentrating on the top deciles can triple efficiency.</a:t>
-            </a:r>
-          </a:p>
-          <a:p>
-            <a:pPr lvl="0"/>
-            <a:r>
-              <a:rPr/>
-              <a:t>We propose to automatically embed this in the CRM at opportunity creation to prioritize high-propensity deals (e.g. top 1-2 deciles) and set clear thresholds for pipeline reviews and resource allocation.</a:t>
-            </a:r>
-          </a:p>
-          <a:p>
-            <a:pPr lvl="0" indent="0" marL="0">
-              <a:buNone/>
-            </a:pPr>
-            <a:r>
-              <a:rPr/>
-              <a:t>This simulation is based on held-out test-set predictions.</a:t>
-            </a:r>
-          </a:p>
-        </p:txBody>
-      </p:sp>
-      <p:pic>
-        <p:nvPicPr>
-          <p:cNvPr descr="assets/sim_prioritization.png" id="0" name="Picture 1"/>
-          <p:cNvPicPr>
-            <a:picLocks noGrp="1" noChangeAspect="1"/>
-          </p:cNvPicPr>
-          <p:nvPr/>
-        </p:nvPicPr>
-        <p:blipFill>
-          <a:blip r:embed="rId2"/>
-          <a:stretch>
-            <a:fillRect/>
-          </a:stretch>
-        </p:blipFill>
-        <p:spPr bwMode="auto">
-          <a:xfrm>
-            <a:off x="4648200" y="1638300"/>
-            <a:ext cx="4038600" cy="2501900"/>
-          </a:xfrm>
-          <a:prstGeom prst="rect">
-            <a:avLst/>
-          </a:prstGeom>
-          <a:noFill/>
-          <a:ln w="9525">
-            <a:noFill/>
-            <a:headEnd/>
-            <a:tailEnd/>
-          </a:ln>
-        </p:spPr>
-      </p:pic>
-    </p:spTree>
-  </p:cSld>
-  <p:timing>
-    <p:tnLst>
-      <p:par>
-        <p:cTn id="1" dur="indefinite" restart="never" nodeType="tmRoot">
-          <p:childTnLst>
-            <p:seq concurrent="1" nextAc="seek">
-              <p:cTn id="2" dur="indefinite" nodeType="mainSeq">
-                <p:childTnLst>
-                  <p:par>
-                    <p:cTn id="3" fill="hold">
-                      <p:stCondLst>
-                        <p:cond delay="indefinite"/>
-                      </p:stCondLst>
-                      <p:childTnLst>
-                        <p:par>
-                          <p:cTn id="4" fill="hold">
-                            <p:stCondLst>
-                              <p:cond delay="0"/>
-                            </p:stCondLst>
-                            <p:childTnLst>
-                              <p:par>
-                                <p:cTn id="5" presetID="1" presetClass="entr" presetSubtype="0" fill="hold" grpId="0" nodeType="clickEffect">
-                                  <p:stCondLst>
-                                    <p:cond delay="0"/>
-                                  </p:stCondLst>
-                                  <p:childTnLst>
-                                    <p:set>
-                                      <p:cBhvr>
-                                        <p:cTn id="6" dur="1" fill="hold">
-                                          <p:stCondLst>
-                                            <p:cond delay="0"/>
-                                          </p:stCondLst>
-                                        </p:cTn>
-                                        <p:tgtEl>
-                                          <p:spTgt spid="3">
-                                            <p:txEl>
-                                              <p:pRg st="0" end="0"/>
-                                            </p:txEl>
-                                          </p:spTgt>
-                                        </p:tgtEl>
-                                        <p:attrNameLst>
-                                          <p:attrName>style.visibility</p:attrName>
-                                        </p:attrNameLst>
-                                      </p:cBhvr>
-                                      <p:to>
-                                        <p:strVal val="visible"/>
-                                      </p:to>
-                                    </p:set>
-                                  </p:childTnLst>
-                                </p:cTn>
-                              </p:par>
-                            </p:childTnLst>
-                          </p:cTn>
-                        </p:par>
-                      </p:childTnLst>
-                    </p:cTn>
-                  </p:par>
-                  <p:par>
-                    <p:cTn id="7" fill="hold">
-                      <p:stCondLst>
-                        <p:cond delay="indefinite"/>
-                      </p:stCondLst>
-                      <p:childTnLst>
-                        <p:par>
-                          <p:cTn id="8" fill="hold">
-                            <p:stCondLst>
-                              <p:cond delay="0"/>
-                            </p:stCondLst>
-                            <p:childTnLst>
-                              <p:par>
-                                <p:cTn id="9" presetID="1" presetClass="entr" presetSubtype="0" fill="hold" grpId="0" nodeType="clickEffect">
-                                  <p:stCondLst>
-                                    <p:cond delay="0"/>
-                                  </p:stCondLst>
-                                  <p:childTnLst>
-                                    <p:set>
-                                      <p:cBhvr>
-                                        <p:cTn id="10" dur="1" fill="hold">
-                                          <p:stCondLst>
-                                            <p:cond delay="0"/>
-                                          </p:stCondLst>
-                                        </p:cTn>
-                                        <p:tgtEl>
-                                          <p:spTgt spid="3">
-                                            <p:txEl>
-                                              <p:pRg st="1" end="1"/>
-                                            </p:txEl>
-                                          </p:spTgt>
-                                        </p:tgtEl>
-                                        <p:attrNameLst>
-                                          <p:attrName>style.visibility</p:attrName>
-                                        </p:attrNameLst>
-                                      </p:cBhvr>
-                                      <p:to>
-                                        <p:strVal val="visible"/>
-                                      </p:to>
-                                    </p:set>
-                                  </p:childTnLst>
-                                </p:cTn>
-                              </p:par>
-                            </p:childTnLst>
-                          </p:cTn>
-                        </p:par>
-                      </p:childTnLst>
-                    </p:cTn>
-                  </p:par>
-                </p:childTnLst>
-              </p:cTn>
-              <p:prevCondLst>
-                <p:cond evt="onPrev" delay="0">
-                  <p:tgtEl>
-                    <p:sldTgt/>
-                  </p:tgtEl>
-                </p:cond>
-              </p:prevCondLst>
-              <p:nextCondLst>
-                <p:cond evt="onNext" delay="0">
-                  <p:tgtEl>
-                    <p:sldTgt/>
-                  </p:tgtEl>
-                </p:cond>
-              </p:nextCondLst>
-            </p:seq>
-          </p:childTnLst>
-        </p:cTn>
-      </p:par>
-    </p:tnLst>
-    <p:bldLst>
-      <p:bldP spid="3" grpId="0" uiExpand="1" build="p"/>
-    </p:bldLst>
-  </p:timing>
-</p:sld>
-</file>
-
-<file path=ppt/slides/slide2.xml><?xml version="1.0" encoding="utf-8"?>
-<p:sld xmlns:a="http://schemas.openxmlformats.org/drawingml/2006/main" xmlns:r="http://schemas.openxmlformats.org/officeDocument/2006/relationships" xmlns:p="http://schemas.openxmlformats.org/presentationml/2006/main">
-  <p:cSld>
-    <p:spTree>
-      <p:nvGrpSpPr>
-        <p:cNvPr id="1" name=""/>
-        <p:cNvGrpSpPr/>
-        <p:nvPr/>
-      </p:nvGrpSpPr>
-      <p:grpSpPr>
-        <a:xfrm>
-          <a:off x="0" y="0"/>
-          <a:ext cx="0" cy="0"/>
-          <a:chOff x="0" y="0"/>
-          <a:chExt cx="0" cy="0"/>
-        </a:xfrm>
-      </p:grpSpPr>
-      <p:sp>
-        <p:nvSpPr>
-          <p:cNvPr id="2" name="Title 1"/>
-          <p:cNvSpPr>
-            <a:spLocks noGrp="1"/>
-          </p:cNvSpPr>
-          <p:nvPr>
-            <p:ph type="title"/>
-          </p:nvPr>
-        </p:nvSpPr>
-        <p:spPr/>
-        <p:txBody>
-          <a:bodyPr/>
-          <a:lstStyle/>
-          <a:p>
-            <a:pPr lvl="0" indent="0" marL="0">
-              <a:buNone/>
-            </a:pPr>
-            <a:r>
-              <a:rPr/>
-              <a:t>Executive Summary</a:t>
-            </a:r>
-          </a:p>
-        </p:txBody>
-      </p:sp>
-      <p:sp>
-        <p:nvSpPr>
-          <p:cNvPr id="3" name="Content Placeholder 2"/>
-          <p:cNvSpPr>
-            <a:spLocks noGrp="1"/>
-          </p:cNvSpPr>
-          <p:nvPr>
-            <p:ph idx="1"/>
-          </p:nvPr>
-        </p:nvSpPr>
-        <p:spPr/>
-        <p:txBody>
-          <a:bodyPr/>
-          <a:lstStyle/>
-          <a:p>
-            <a:pPr lvl="0"/>
-            <a:r>
-              <a:rPr/>
-              <a:t>The current sales process for auto parts opportunities shows both opportunities in structural inefficiencies and also data quality issues (e.g., data input issues, lack of prioritization, inaccurate forecasting), which are driving suboptimal sales force performance.</a:t>
-            </a:r>
-          </a:p>
-          <a:p>
-            <a:pPr lvl="0"/>
-            <a:r>
-              <a:rPr/>
-              <a:t>For dealing with the structural inefficiencies, we propose a classification model to predict win/loss and support opportunity prioritization, and a regression model to estimate deal size for a priori sizing and forecasting.</a:t>
-            </a:r>
-          </a:p>
-          <a:p>
-            <a:pPr lvl="0"/>
-            <a:r>
-              <a:rPr/>
-              <a:t>The classification model performs well (AUROC 0.88), enabling effective prioritization, while the regression model is not reliable at the deal level (MAE ~$74K; R² 0.13) but is still accurate enough for aggregate forecasting and directional planning.</a:t>
-            </a:r>
-          </a:p>
-          <a:p>
-            <a:pPr lvl="0"/>
-            <a:r>
-              <a:rPr/>
-              <a:t>We recommend piloting the classification model first, while using the regression model as a complementary tool for portfolio-level planning.</a:t>
-            </a:r>
-          </a:p>
-        </p:txBody>
-      </p:sp>
-    </p:spTree>
-  </p:cSld>
-  <p:timing>
-    <p:tnLst>
-      <p:par>
-        <p:cTn id="1" dur="indefinite" restart="never" nodeType="tmRoot">
-          <p:childTnLst>
-            <p:seq concurrent="1" nextAc="seek">
-              <p:cTn id="2" dur="indefinite" nodeType="mainSeq">
-                <p:childTnLst>
-                  <p:par>
-                    <p:cTn id="3" fill="hold">
-                      <p:stCondLst>
-                        <p:cond delay="indefinite"/>
-                      </p:stCondLst>
-                      <p:childTnLst>
-                        <p:par>
-                          <p:cTn id="4" fill="hold">
-                            <p:stCondLst>
-                              <p:cond delay="0"/>
-                            </p:stCondLst>
-                            <p:childTnLst>
-                              <p:par>
-                                <p:cTn id="5" presetID="1" presetClass="entr" presetSubtype="0" fill="hold" grpId="0" nodeType="clickEffect">
-                                  <p:stCondLst>
-                                    <p:cond delay="0"/>
-                                  </p:stCondLst>
-                                  <p:childTnLst>
-                                    <p:set>
-                                      <p:cBhvr>
-                                        <p:cTn id="6" dur="1" fill="hold">
-                                          <p:stCondLst>
-                                            <p:cond delay="0"/>
-                                          </p:stCondLst>
-                                        </p:cTn>
-                                        <p:tgtEl>
-                                          <p:spTgt spid="3">
-                                            <p:txEl>
-                                              <p:pRg st="0" end="0"/>
-                                            </p:txEl>
-                                          </p:spTgt>
-                                        </p:tgtEl>
-                                        <p:attrNameLst>
-                                          <p:attrName>style.visibility</p:attrName>
-                                        </p:attrNameLst>
-                                      </p:cBhvr>
-                                      <p:to>
-                                        <p:strVal val="visible"/>
-                                      </p:to>
-                                    </p:set>
-                                  </p:childTnLst>
-                                </p:cTn>
-                              </p:par>
-                            </p:childTnLst>
-                          </p:cTn>
-                        </p:par>
-                      </p:childTnLst>
-                    </p:cTn>
-                  </p:par>
-                  <p:par>
-                    <p:cTn id="7" fill="hold">
-                      <p:stCondLst>
-                        <p:cond delay="indefinite"/>
-                      </p:stCondLst>
-                      <p:childTnLst>
-                        <p:par>
-                          <p:cTn id="8" fill="hold">
-                            <p:stCondLst>
-                              <p:cond delay="0"/>
-                            </p:stCondLst>
-                            <p:childTnLst>
-                              <p:par>
-                                <p:cTn id="9" presetID="1" presetClass="entr" presetSubtype="0" fill="hold" grpId="0" nodeType="clickEffect">
-                                  <p:stCondLst>
-                                    <p:cond delay="0"/>
-                                  </p:stCondLst>
-                                  <p:childTnLst>
-                                    <p:set>
-                                      <p:cBhvr>
-                                        <p:cTn id="10" dur="1" fill="hold">
-                                          <p:stCondLst>
-                                            <p:cond delay="0"/>
-                                          </p:stCondLst>
-                                        </p:cTn>
-                                        <p:tgtEl>
-                                          <p:spTgt spid="3">
-                                            <p:txEl>
-                                              <p:pRg st="1" end="1"/>
-                                            </p:txEl>
-                                          </p:spTgt>
-                                        </p:tgtEl>
-                                        <p:attrNameLst>
-                                          <p:attrName>style.visibility</p:attrName>
-                                        </p:attrNameLst>
-                                      </p:cBhvr>
-                                      <p:to>
-                                        <p:strVal val="visible"/>
-                                      </p:to>
-                                    </p:set>
-                                  </p:childTnLst>
-                                </p:cTn>
-                              </p:par>
-                            </p:childTnLst>
-                          </p:cTn>
-                        </p:par>
-                      </p:childTnLst>
-                    </p:cTn>
-                  </p:par>
-                  <p:par>
-                    <p:cTn id="11" fill="hold">
-                      <p:stCondLst>
-                        <p:cond delay="indefinite"/>
-                      </p:stCondLst>
-                      <p:childTnLst>
-                        <p:par>
-                          <p:cTn id="12" fill="hold">
-                            <p:stCondLst>
-                              <p:cond delay="0"/>
-                            </p:stCondLst>
-                            <p:childTnLst>
-                              <p:par>
-                                <p:cTn id="13" presetID="1" presetClass="entr" presetSubtype="0" fill="hold" grpId="0" nodeType="clickEffect">
-                                  <p:stCondLst>
-                                    <p:cond delay="0"/>
-                                  </p:stCondLst>
-                                  <p:childTnLst>
-                                    <p:set>
-                                      <p:cBhvr>
-                                        <p:cTn id="14" dur="1" fill="hold">
-                                          <p:stCondLst>
-                                            <p:cond delay="0"/>
-                                          </p:stCondLst>
-                                        </p:cTn>
-                                        <p:tgtEl>
-                                          <p:spTgt spid="3">
-                                            <p:txEl>
-                                              <p:pRg st="2" end="2"/>
-                                            </p:txEl>
-                                          </p:spTgt>
-                                        </p:tgtEl>
-                                        <p:attrNameLst>
-                                          <p:attrName>style.visibility</p:attrName>
-                                        </p:attrNameLst>
-                                      </p:cBhvr>
-                                      <p:to>
-                                        <p:strVal val="visible"/>
-                                      </p:to>
-                                    </p:set>
-                                  </p:childTnLst>
-                                </p:cTn>
-                              </p:par>
-                            </p:childTnLst>
-                          </p:cTn>
-                        </p:par>
-                      </p:childTnLst>
-                    </p:cTn>
-                  </p:par>
-                  <p:par>
-                    <p:cTn id="15" fill="hold">
-                      <p:stCondLst>
-                        <p:cond delay="indefinite"/>
-                      </p:stCondLst>
-                      <p:childTnLst>
-                        <p:par>
-                          <p:cTn id="16" fill="hold">
-                            <p:stCondLst>
-                              <p:cond delay="0"/>
-                            </p:stCondLst>
-                            <p:childTnLst>
-                              <p:par>
-                                <p:cTn id="17" presetID="1" presetClass="entr" presetSubtype="0" fill="hold" grpId="0" nodeType="clickEffect">
-                                  <p:stCondLst>
-                                    <p:cond delay="0"/>
-                                  </p:stCondLst>
-                                  <p:childTnLst>
-                                    <p:set>
-                                      <p:cBhvr>
-                                        <p:cTn id="18" dur="1" fill="hold">
-                                          <p:stCondLst>
-                                            <p:cond delay="0"/>
-                                          </p:stCondLst>
-                                        </p:cTn>
-                                        <p:tgtEl>
-                                          <p:spTgt spid="3">
-                                            <p:txEl>
-                                              <p:pRg st="3" end="3"/>
-                                            </p:txEl>
-                                          </p:spTgt>
-                                        </p:tgtEl>
-                                        <p:attrNameLst>
-                                          <p:attrName>style.visibility</p:attrName>
-                                        </p:attrNameLst>
-                                      </p:cBhvr>
-                                      <p:to>
-                                        <p:strVal val="visible"/>
-                                      </p:to>
-                                    </p:set>
-                                  </p:childTnLst>
-                                </p:cTn>
-                              </p:par>
-                            </p:childTnLst>
-                          </p:cTn>
-                        </p:par>
-                      </p:childTnLst>
-                    </p:cTn>
-                  </p:par>
-                </p:childTnLst>
-              </p:cTn>
-              <p:prevCondLst>
-                <p:cond evt="onPrev" delay="0">
-                  <p:tgtEl>
-                    <p:sldTgt/>
-                  </p:tgtEl>
-                </p:cond>
-              </p:prevCondLst>
-              <p:nextCondLst>
-                <p:cond evt="onNext" delay="0">
-                  <p:tgtEl>
-                    <p:sldTgt/>
-                  </p:tgtEl>
-                </p:cond>
-              </p:nextCondLst>
-            </p:seq>
-          </p:childTnLst>
-        </p:cTn>
-      </p:par>
-    </p:tnLst>
-    <p:bldLst>
-      <p:bldP spid="3" grpId="0" uiExpand="1" build="p"/>
-    </p:bldLst>
-  </p:timing>
-</p:sld>
-</file>
-
-<file path=ppt/slides/slide20.xml><?xml version="1.0" encoding="utf-8"?>
-<p:sld xmlns:a="http://schemas.openxmlformats.org/drawingml/2006/main" xmlns:r="http://schemas.openxmlformats.org/officeDocument/2006/relationships" xmlns:p="http://schemas.openxmlformats.org/presentationml/2006/main">
-  <p:cSld>
-    <p:spTree>
-      <p:nvGrpSpPr>
-        <p:cNvPr id="1" name=""/>
-        <p:cNvGrpSpPr/>
-        <p:nvPr/>
-      </p:nvGrpSpPr>
-      <p:grpSpPr>
-        <a:xfrm>
-          <a:off x="0" y="0"/>
-          <a:ext cx="0" cy="0"/>
-          <a:chOff x="0" y="0"/>
-          <a:chExt cx="0" cy="0"/>
-        </a:xfrm>
-      </p:grpSpPr>
-      <p:sp>
-        <p:nvSpPr>
-          <p:cNvPr id="2" name="Title 1"/>
-          <p:cNvSpPr>
-            <a:spLocks noGrp="1"/>
-          </p:cNvSpPr>
-          <p:nvPr>
-            <p:ph type="title"/>
-          </p:nvPr>
-        </p:nvSpPr>
-        <p:spPr/>
-        <p:txBody>
-          <a:bodyPr/>
-          <a:lstStyle/>
-          <a:p>
-            <a:pPr lvl="0" indent="0" marL="0">
-              <a:buNone/>
-            </a:pPr>
-            <a:r>
-              <a:rPr/>
-              <a:t>Forecast simulation: predicted total sales closely matches the observed aggregate total</a:t>
+              <a:t>Leverage the opportunity sizing model for accurate aggregate forecasting, not individual deal sizing</a:t>
             </a:r>
           </a:p>
         </p:txBody>
@@ -6681,7 +6815,7 @@
         </p:blipFill>
         <p:spPr bwMode="auto">
           <a:xfrm>
-            <a:off x="457200" y="1638300"/>
+            <a:off x="457200" y="1651000"/>
             <a:ext cx="4038600" cy="2489200"/>
           </a:xfrm>
           <a:prstGeom prst="rect">
@@ -6739,7 +6873,7 @@
             </a:r>
             <a:r>
               <a:rPr b="1"/>
-              <a:t>2.139B USD</a:t>
+              <a:t>2.142B USD</a:t>
             </a:r>
             <a:r>
               <a:rPr/>
@@ -6754,7 +6888,7 @@
             </a:r>
             <a:r>
               <a:rPr b="1"/>
-              <a:t>74.0k USD</a:t>
+              <a:t>71.9k USD</a:t>
             </a:r>
             <a:r>
               <a:rPr/>
@@ -7053,7 +7187,7 @@
 </p:sld>
 </file>
 
-<file path=ppt/slides/slide21.xml><?xml version="1.0" encoding="utf-8"?>
+<file path=ppt/slides/slide22.xml><?xml version="1.0" encoding="utf-8"?>
 <p:sld xmlns:a="http://schemas.openxmlformats.org/drawingml/2006/main" xmlns:r="http://schemas.openxmlformats.org/officeDocument/2006/relationships" xmlns:p="http://schemas.openxmlformats.org/presentationml/2006/main">
   <p:cSld>
     <p:spTree>
@@ -7100,7 +7234,7 @@
 </p:sld>
 </file>
 
-<file path=ppt/slides/slide22.xml><?xml version="1.0" encoding="utf-8"?>
+<file path=ppt/slides/slide23.xml><?xml version="1.0" encoding="utf-8"?>
 <p:sld xmlns:a="http://schemas.openxmlformats.org/drawingml/2006/main" xmlns:r="http://schemas.openxmlformats.org/officeDocument/2006/relationships" xmlns:p="http://schemas.openxmlformats.org/presentationml/2006/main">
   <p:cSld>
     <p:spTree>
@@ -7137,7 +7271,7 @@
             </a:pPr>
             <a:r>
               <a:rPr/>
-              <a:t>Expected-value thresholding captures realized value much faster than a broad-pipeline approach</a:t>
+              <a:t>Concentration (~44% value capture at top 10%) makes expected-value prioritization a key revenue lever</a:t>
             </a:r>
           </a:p>
         </p:txBody>
@@ -7158,8 +7292,8 @@
         </p:blipFill>
         <p:spPr bwMode="auto">
           <a:xfrm>
-            <a:off x="457200" y="1663700"/>
-            <a:ext cx="4038600" cy="2451100"/>
+            <a:off x="457200" y="1282700"/>
+            <a:ext cx="4038600" cy="3200400"/>
           </a:xfrm>
           <a:prstGeom prst="rect">
             <a:avLst/>
@@ -7190,35 +7324,35 @@
             <a:pPr lvl="0"/>
             <a:r>
               <a:rPr/>
-              <a:t>Rank and filter pipeline by expected value to concentrate effort where it matters most.</a:t>
+              <a:t>Rank the pipeline using expected value (E[Amount] × P(Win)), not just propensity especially under limited sales capacity.</a:t>
+            </a:r>
+          </a:p>
+          <a:p>
+            <a:pPr lvl="1"/>
+            <a:r>
+              <a:rPr/>
+              <a:t>At top 10%, expected-value ranking captures 43.6% of won revenue vs 34.9% with propensity-only.</a:t>
+            </a:r>
+          </a:p>
+          <a:p>
+            <a:pPr lvl="1"/>
+            <a:r>
+              <a:rPr/>
+              <a:t>At top 25%, the comparison is 70.9% vs 66.9%, so deal-size information matters most when capacity is tight.</a:t>
+            </a:r>
+          </a:p>
+          <a:p>
+            <a:pPr lvl="1"/>
+            <a:r>
+              <a:rPr/>
+              <a:t>While overoptimistic, rankings remain directionally valid and can be calibrated in-model in follow-up iterations.</a:t>
             </a:r>
           </a:p>
           <a:p>
             <a:pPr lvl="0"/>
             <a:r>
               <a:rPr/>
-              <a:t>~44% of value captured in top 10% of opportunities, ~68% in top 25%.</a:t>
-            </a:r>
-          </a:p>
-          <a:p>
-            <a:pPr lvl="0"/>
-            <a:r>
-              <a:rPr/>
-              <a:t>Shifting from broad coverage to value-based prioritization materially accelerates revenue capture.</a:t>
-            </a:r>
-          </a:p>
-          <a:p>
-            <a:pPr lvl="0"/>
-            <a:r>
-              <a:rPr/>
-              <a:t>Acts as a bridge between prioritization and forecasting, aligning effort with both likelihood and deal size.</a:t>
-            </a:r>
-          </a:p>
-          <a:p>
-            <a:pPr lvl="0"/>
-            <a:r>
-              <a:rPr/>
-              <a:t>We propose embedding this in the CRM to set clear thresholds for sales focus (e.g., top 10% of opportunities by expected value = high priority), while providing a more nuanced view of opportunity value than win propensity alone.</a:t>
+              <a:t>We propose embedding this in the CRM to set clear thresholds (e.g., top 10% = high priority) and guide sales focus with a more economically relevant ranking than win propensity alone.</a:t>
             </a:r>
           </a:p>
         </p:txBody>
@@ -7506,7 +7640,7 @@
 </p:sld>
 </file>
 
-<file path=ppt/slides/slide23.xml><?xml version="1.0" encoding="utf-8"?>
+<file path=ppt/slides/slide24.xml><?xml version="1.0" encoding="utf-8"?>
 <p:sld xmlns:a="http://schemas.openxmlformats.org/drawingml/2006/main" xmlns:r="http://schemas.openxmlformats.org/officeDocument/2006/relationships" xmlns:p="http://schemas.openxmlformats.org/presentationml/2006/main">
   <p:cSld>
     <p:spTree>
@@ -7543,7 +7677,7 @@
             </a:pPr>
             <a:r>
               <a:rPr/>
-              <a:t>This simulation is based on held-out test-set predictions.</a:t>
+              <a:t>This simulation is based on held-out test-set predictions. This analysis assumes that the opportunity amount is actually related to the final deal amount, which is not necessarily the case.</a:t>
             </a:r>
           </a:p>
         </p:txBody>
@@ -7553,7 +7687,7 @@
 </p:sld>
 </file>
 
-<file path=ppt/slides/slide24.xml><?xml version="1.0" encoding="utf-8"?>
+<file path=ppt/slides/slide25.xml><?xml version="1.0" encoding="utf-8"?>
 <p:sld xmlns:a="http://schemas.openxmlformats.org/drawingml/2006/main" xmlns:r="http://schemas.openxmlformats.org/officeDocument/2006/relationships" xmlns:p="http://schemas.openxmlformats.org/presentationml/2006/main">
   <p:cSld>
     <p:spTree>
@@ -7590,7 +7724,7 @@
             </a:pPr>
             <a:r>
               <a:rPr/>
-              <a:t>How this integrates into sales workflow</a:t>
+              <a:t>Turn models into daily sales decisions via CRM integration</a:t>
             </a:r>
           </a:p>
         </p:txBody>
@@ -8479,7 +8613,7 @@
 </p:sld>
 </file>
 
-<file path=ppt/slides/slide25.xml><?xml version="1.0" encoding="utf-8"?>
+<file path=ppt/slides/slide26.xml><?xml version="1.0" encoding="utf-8"?>
 <p:sld xmlns:a="http://schemas.openxmlformats.org/drawingml/2006/main" xmlns:r="http://schemas.openxmlformats.org/officeDocument/2006/relationships" xmlns:p="http://schemas.openxmlformats.org/presentationml/2006/main">
   <p:cSld>
     <p:spTree>
@@ -8531,682 +8665,6 @@
 </p:sld>
 </file>
 
-<file path=ppt/slides/slide26.xml><?xml version="1.0" encoding="utf-8"?>
-<p:sld xmlns:a="http://schemas.openxmlformats.org/drawingml/2006/main" xmlns:r="http://schemas.openxmlformats.org/officeDocument/2006/relationships" xmlns:p="http://schemas.openxmlformats.org/presentationml/2006/main">
-  <p:cSld>
-    <p:spTree>
-      <p:nvGrpSpPr>
-        <p:cNvPr id="1" name=""/>
-        <p:cNvGrpSpPr/>
-        <p:nvPr/>
-      </p:nvGrpSpPr>
-      <p:grpSpPr>
-        <a:xfrm>
-          <a:off x="0" y="0"/>
-          <a:ext cx="0" cy="0"/>
-          <a:chOff x="0" y="0"/>
-          <a:chExt cx="0" cy="0"/>
-        </a:xfrm>
-      </p:grpSpPr>
-      <p:sp>
-        <p:nvSpPr>
-          <p:cNvPr id="2" name="Title 1"/>
-          <p:cNvSpPr>
-            <a:spLocks noGrp="1"/>
-          </p:cNvSpPr>
-          <p:nvPr>
-            <p:ph type="title"/>
-          </p:nvPr>
-        </p:nvSpPr>
-        <p:spPr/>
-        <p:txBody>
-          <a:bodyPr/>
-          <a:lstStyle/>
-          <a:p>
-            <a:pPr lvl="0" indent="0" marL="0">
-              <a:buNone/>
-            </a:pPr>
-            <a:r>
-              <a:rPr/>
-              <a:t>What this means for commercial decision-making</a:t>
-            </a:r>
-          </a:p>
-        </p:txBody>
-      </p:sp>
-      <p:sp>
-        <p:nvSpPr>
-          <p:cNvPr id="3" name="Content Placeholder 2"/>
-          <p:cNvSpPr>
-            <a:spLocks noGrp="1"/>
-          </p:cNvSpPr>
-          <p:nvPr>
-            <p:ph idx="1"/>
-          </p:nvPr>
-        </p:nvSpPr>
-        <p:spPr/>
-        <p:txBody>
-          <a:bodyPr/>
-          <a:lstStyle/>
-          <a:p>
-            <a:pPr lvl="0"/>
-            <a:r>
-              <a:rPr/>
-              <a:t>Two clear decision levers:</a:t>
-            </a:r>
-          </a:p>
-          <a:p>
-            <a:pPr lvl="1"/>
-            <a:r>
-              <a:rPr b="1"/>
-              <a:t>Result model</a:t>
-            </a:r>
-            <a:r>
-              <a:rPr/>
-              <a:t> → prioritization of the pipeline</a:t>
-            </a:r>
-          </a:p>
-          <a:p>
-            <a:pPr lvl="1"/>
-            <a:r>
-              <a:rPr b="1"/>
-              <a:t>Amount model</a:t>
-            </a:r>
-            <a:r>
-              <a:rPr/>
-              <a:t> → sizing and aggregate forecasting</a:t>
-            </a:r>
-          </a:p>
-          <a:p>
-            <a:pPr lvl="0"/>
-            <a:r>
-              <a:rPr/>
-              <a:t>Two models consistently applied:</a:t>
-            </a:r>
-          </a:p>
-          <a:p>
-            <a:pPr lvl="1"/>
-            <a:r>
-              <a:rPr b="1"/>
-              <a:t>Win/loss classification</a:t>
-            </a:r>
-            <a:r>
-              <a:rPr/>
-              <a:t> to rank opportunities by likelihood to close</a:t>
-            </a:r>
-          </a:p>
-          <a:p>
-            <a:pPr lvl="1"/>
-            <a:r>
-              <a:rPr b="1"/>
-              <a:t>Regression</a:t>
-            </a:r>
-            <a:r>
-              <a:rPr/>
-              <a:t> to estimate deal size based on current pipeline state</a:t>
-            </a:r>
-          </a:p>
-          <a:p>
-            <a:pPr lvl="0"/>
-            <a:r>
-              <a:rPr b="1"/>
-              <a:t>Recommendation</a:t>
-            </a:r>
-            <a:r>
-              <a:rPr/>
-              <a:t>:</a:t>
-            </a:r>
-          </a:p>
-          <a:p>
-            <a:pPr lvl="1"/>
-            <a:r>
-              <a:rPr/>
-              <a:t>Pilot the result model first to drive immediate commercial impact through better prioritization</a:t>
-            </a:r>
-          </a:p>
-          <a:p>
-            <a:pPr lvl="1"/>
-            <a:r>
-              <a:rPr/>
-              <a:t>Use the amount model as a planning layer, supporting aggregate forecasts and scenario sizing</a:t>
-            </a:r>
-          </a:p>
-          <a:p>
-            <a:pPr lvl="1"/>
-            <a:r>
-              <a:rPr/>
-              <a:t>Eventually use them together to drive expected-value prioritization, which concentrates effort on the most valuable opportunities and accelerates revenue capture.</a:t>
-            </a:r>
-          </a:p>
-        </p:txBody>
-      </p:sp>
-    </p:spTree>
-  </p:cSld>
-  <p:timing>
-    <p:tnLst>
-      <p:par>
-        <p:cTn id="1" dur="indefinite" restart="never" nodeType="tmRoot">
-          <p:childTnLst>
-            <p:seq concurrent="1" nextAc="seek">
-              <p:cTn id="2" dur="indefinite" nodeType="mainSeq">
-                <p:childTnLst>
-                  <p:par>
-                    <p:cTn id="3" fill="hold">
-                      <p:stCondLst>
-                        <p:cond delay="indefinite"/>
-                      </p:stCondLst>
-                      <p:childTnLst>
-                        <p:par>
-                          <p:cTn id="4" fill="hold">
-                            <p:stCondLst>
-                              <p:cond delay="0"/>
-                            </p:stCondLst>
-                            <p:childTnLst>
-                              <p:par>
-                                <p:cTn id="5" presetID="1" presetClass="entr" presetSubtype="0" fill="hold" grpId="0" nodeType="clickEffect">
-                                  <p:stCondLst>
-                                    <p:cond delay="0"/>
-                                  </p:stCondLst>
-                                  <p:childTnLst>
-                                    <p:set>
-                                      <p:cBhvr>
-                                        <p:cTn id="6" dur="1" fill="hold">
-                                          <p:stCondLst>
-                                            <p:cond delay="0"/>
-                                          </p:stCondLst>
-                                        </p:cTn>
-                                        <p:tgtEl>
-                                          <p:spTgt spid="3">
-                                            <p:txEl>
-                                              <p:pRg st="0" end="0"/>
-                                            </p:txEl>
-                                          </p:spTgt>
-                                        </p:tgtEl>
-                                        <p:attrNameLst>
-                                          <p:attrName>style.visibility</p:attrName>
-                                        </p:attrNameLst>
-                                      </p:cBhvr>
-                                      <p:to>
-                                        <p:strVal val="visible"/>
-                                      </p:to>
-                                    </p:set>
-                                  </p:childTnLst>
-                                </p:cTn>
-                              </p:par>
-                            </p:childTnLst>
-                          </p:cTn>
-                        </p:par>
-                      </p:childTnLst>
-                    </p:cTn>
-                  </p:par>
-                  <p:par>
-                    <p:cTn id="7" fill="hold">
-                      <p:stCondLst>
-                        <p:cond delay="indefinite"/>
-                      </p:stCondLst>
-                      <p:childTnLst>
-                        <p:par>
-                          <p:cTn id="8" fill="hold">
-                            <p:stCondLst>
-                              <p:cond delay="0"/>
-                            </p:stCondLst>
-                            <p:childTnLst>
-                              <p:par>
-                                <p:cTn id="9" presetID="1" presetClass="entr" presetSubtype="0" fill="hold" grpId="0" nodeType="clickEffect">
-                                  <p:stCondLst>
-                                    <p:cond delay="0"/>
-                                  </p:stCondLst>
-                                  <p:childTnLst>
-                                    <p:set>
-                                      <p:cBhvr>
-                                        <p:cTn id="10" dur="1" fill="hold">
-                                          <p:stCondLst>
-                                            <p:cond delay="0"/>
-                                          </p:stCondLst>
-                                        </p:cTn>
-                                        <p:tgtEl>
-                                          <p:spTgt spid="3">
-                                            <p:txEl>
-                                              <p:pRg st="1" end="1"/>
-                                            </p:txEl>
-                                          </p:spTgt>
-                                        </p:tgtEl>
-                                        <p:attrNameLst>
-                                          <p:attrName>style.visibility</p:attrName>
-                                        </p:attrNameLst>
-                                      </p:cBhvr>
-                                      <p:to>
-                                        <p:strVal val="visible"/>
-                                      </p:to>
-                                    </p:set>
-                                  </p:childTnLst>
-                                </p:cTn>
-                              </p:par>
-                            </p:childTnLst>
-                          </p:cTn>
-                        </p:par>
-                      </p:childTnLst>
-                    </p:cTn>
-                  </p:par>
-                  <p:par>
-                    <p:cTn id="11" fill="hold">
-                      <p:stCondLst>
-                        <p:cond delay="indefinite"/>
-                      </p:stCondLst>
-                      <p:childTnLst>
-                        <p:par>
-                          <p:cTn id="12" fill="hold">
-                            <p:stCondLst>
-                              <p:cond delay="0"/>
-                            </p:stCondLst>
-                            <p:childTnLst>
-                              <p:par>
-                                <p:cTn id="13" presetID="1" presetClass="entr" presetSubtype="0" fill="hold" grpId="0" nodeType="clickEffect">
-                                  <p:stCondLst>
-                                    <p:cond delay="0"/>
-                                  </p:stCondLst>
-                                  <p:childTnLst>
-                                    <p:set>
-                                      <p:cBhvr>
-                                        <p:cTn id="14" dur="1" fill="hold">
-                                          <p:stCondLst>
-                                            <p:cond delay="0"/>
-                                          </p:stCondLst>
-                                        </p:cTn>
-                                        <p:tgtEl>
-                                          <p:spTgt spid="3">
-                                            <p:txEl>
-                                              <p:pRg st="2" end="2"/>
-                                            </p:txEl>
-                                          </p:spTgt>
-                                        </p:tgtEl>
-                                        <p:attrNameLst>
-                                          <p:attrName>style.visibility</p:attrName>
-                                        </p:attrNameLst>
-                                      </p:cBhvr>
-                                      <p:to>
-                                        <p:strVal val="visible"/>
-                                      </p:to>
-                                    </p:set>
-                                  </p:childTnLst>
-                                </p:cTn>
-                              </p:par>
-                            </p:childTnLst>
-                          </p:cTn>
-                        </p:par>
-                      </p:childTnLst>
-                    </p:cTn>
-                  </p:par>
-                  <p:par>
-                    <p:cTn id="15" fill="hold">
-                      <p:stCondLst>
-                        <p:cond delay="indefinite"/>
-                      </p:stCondLst>
-                      <p:childTnLst>
-                        <p:par>
-                          <p:cTn id="16" fill="hold">
-                            <p:stCondLst>
-                              <p:cond delay="0"/>
-                            </p:stCondLst>
-                            <p:childTnLst>
-                              <p:par>
-                                <p:cTn id="17" presetID="1" presetClass="entr" presetSubtype="0" fill="hold" grpId="0" nodeType="clickEffect">
-                                  <p:stCondLst>
-                                    <p:cond delay="0"/>
-                                  </p:stCondLst>
-                                  <p:childTnLst>
-                                    <p:set>
-                                      <p:cBhvr>
-                                        <p:cTn id="18" dur="1" fill="hold">
-                                          <p:stCondLst>
-                                            <p:cond delay="0"/>
-                                          </p:stCondLst>
-                                        </p:cTn>
-                                        <p:tgtEl>
-                                          <p:spTgt spid="3">
-                                            <p:txEl>
-                                              <p:pRg st="3" end="3"/>
-                                            </p:txEl>
-                                          </p:spTgt>
-                                        </p:tgtEl>
-                                        <p:attrNameLst>
-                                          <p:attrName>style.visibility</p:attrName>
-                                        </p:attrNameLst>
-                                      </p:cBhvr>
-                                      <p:to>
-                                        <p:strVal val="visible"/>
-                                      </p:to>
-                                    </p:set>
-                                  </p:childTnLst>
-                                </p:cTn>
-                              </p:par>
-                            </p:childTnLst>
-                          </p:cTn>
-                        </p:par>
-                      </p:childTnLst>
-                    </p:cTn>
-                  </p:par>
-                  <p:par>
-                    <p:cTn id="19" fill="hold">
-                      <p:stCondLst>
-                        <p:cond delay="indefinite"/>
-                      </p:stCondLst>
-                      <p:childTnLst>
-                        <p:par>
-                          <p:cTn id="20" fill="hold">
-                            <p:stCondLst>
-                              <p:cond delay="0"/>
-                            </p:stCondLst>
-                            <p:childTnLst>
-                              <p:par>
-                                <p:cTn id="21" presetID="1" presetClass="entr" presetSubtype="0" fill="hold" grpId="0" nodeType="clickEffect">
-                                  <p:stCondLst>
-                                    <p:cond delay="0"/>
-                                  </p:stCondLst>
-                                  <p:childTnLst>
-                                    <p:set>
-                                      <p:cBhvr>
-                                        <p:cTn id="22" dur="1" fill="hold">
-                                          <p:stCondLst>
-                                            <p:cond delay="0"/>
-                                          </p:stCondLst>
-                                        </p:cTn>
-                                        <p:tgtEl>
-                                          <p:spTgt spid="3">
-                                            <p:txEl>
-                                              <p:pRg st="4" end="4"/>
-                                            </p:txEl>
-                                          </p:spTgt>
-                                        </p:tgtEl>
-                                        <p:attrNameLst>
-                                          <p:attrName>style.visibility</p:attrName>
-                                        </p:attrNameLst>
-                                      </p:cBhvr>
-                                      <p:to>
-                                        <p:strVal val="visible"/>
-                                      </p:to>
-                                    </p:set>
-                                  </p:childTnLst>
-                                </p:cTn>
-                              </p:par>
-                            </p:childTnLst>
-                          </p:cTn>
-                        </p:par>
-                      </p:childTnLst>
-                    </p:cTn>
-                  </p:par>
-                  <p:par>
-                    <p:cTn id="23" fill="hold">
-                      <p:stCondLst>
-                        <p:cond delay="indefinite"/>
-                      </p:stCondLst>
-                      <p:childTnLst>
-                        <p:par>
-                          <p:cTn id="24" fill="hold">
-                            <p:stCondLst>
-                              <p:cond delay="0"/>
-                            </p:stCondLst>
-                            <p:childTnLst>
-                              <p:par>
-                                <p:cTn id="25" presetID="1" presetClass="entr" presetSubtype="0" fill="hold" grpId="0" nodeType="clickEffect">
-                                  <p:stCondLst>
-                                    <p:cond delay="0"/>
-                                  </p:stCondLst>
-                                  <p:childTnLst>
-                                    <p:set>
-                                      <p:cBhvr>
-                                        <p:cTn id="26" dur="1" fill="hold">
-                                          <p:stCondLst>
-                                            <p:cond delay="0"/>
-                                          </p:stCondLst>
-                                        </p:cTn>
-                                        <p:tgtEl>
-                                          <p:spTgt spid="3">
-                                            <p:txEl>
-                                              <p:pRg st="5" end="5"/>
-                                            </p:txEl>
-                                          </p:spTgt>
-                                        </p:tgtEl>
-                                        <p:attrNameLst>
-                                          <p:attrName>style.visibility</p:attrName>
-                                        </p:attrNameLst>
-                                      </p:cBhvr>
-                                      <p:to>
-                                        <p:strVal val="visible"/>
-                                      </p:to>
-                                    </p:set>
-                                  </p:childTnLst>
-                                </p:cTn>
-                              </p:par>
-                            </p:childTnLst>
-                          </p:cTn>
-                        </p:par>
-                      </p:childTnLst>
-                    </p:cTn>
-                  </p:par>
-                  <p:par>
-                    <p:cTn id="27" fill="hold">
-                      <p:stCondLst>
-                        <p:cond delay="indefinite"/>
-                      </p:stCondLst>
-                      <p:childTnLst>
-                        <p:par>
-                          <p:cTn id="28" fill="hold">
-                            <p:stCondLst>
-                              <p:cond delay="0"/>
-                            </p:stCondLst>
-                            <p:childTnLst>
-                              <p:par>
-                                <p:cTn id="29" presetID="1" presetClass="entr" presetSubtype="0" fill="hold" grpId="0" nodeType="clickEffect">
-                                  <p:stCondLst>
-                                    <p:cond delay="0"/>
-                                  </p:stCondLst>
-                                  <p:childTnLst>
-                                    <p:set>
-                                      <p:cBhvr>
-                                        <p:cTn id="30" dur="1" fill="hold">
-                                          <p:stCondLst>
-                                            <p:cond delay="0"/>
-                                          </p:stCondLst>
-                                        </p:cTn>
-                                        <p:tgtEl>
-                                          <p:spTgt spid="3">
-                                            <p:txEl>
-                                              <p:pRg st="6" end="6"/>
-                                            </p:txEl>
-                                          </p:spTgt>
-                                        </p:tgtEl>
-                                        <p:attrNameLst>
-                                          <p:attrName>style.visibility</p:attrName>
-                                        </p:attrNameLst>
-                                      </p:cBhvr>
-                                      <p:to>
-                                        <p:strVal val="visible"/>
-                                      </p:to>
-                                    </p:set>
-                                  </p:childTnLst>
-                                </p:cTn>
-                              </p:par>
-                            </p:childTnLst>
-                          </p:cTn>
-                        </p:par>
-                      </p:childTnLst>
-                    </p:cTn>
-                  </p:par>
-                  <p:par>
-                    <p:cTn id="31" fill="hold">
-                      <p:stCondLst>
-                        <p:cond delay="indefinite"/>
-                      </p:stCondLst>
-                      <p:childTnLst>
-                        <p:par>
-                          <p:cTn id="32" fill="hold">
-                            <p:stCondLst>
-                              <p:cond delay="0"/>
-                            </p:stCondLst>
-                            <p:childTnLst>
-                              <p:par>
-                                <p:cTn id="33" presetID="1" presetClass="entr" presetSubtype="0" fill="hold" grpId="0" nodeType="clickEffect">
-                                  <p:stCondLst>
-                                    <p:cond delay="0"/>
-                                  </p:stCondLst>
-                                  <p:childTnLst>
-                                    <p:set>
-                                      <p:cBhvr>
-                                        <p:cTn id="34" dur="1" fill="hold">
-                                          <p:stCondLst>
-                                            <p:cond delay="0"/>
-                                          </p:stCondLst>
-                                        </p:cTn>
-                                        <p:tgtEl>
-                                          <p:spTgt spid="3">
-                                            <p:txEl>
-                                              <p:pRg st="7" end="7"/>
-                                            </p:txEl>
-                                          </p:spTgt>
-                                        </p:tgtEl>
-                                        <p:attrNameLst>
-                                          <p:attrName>style.visibility</p:attrName>
-                                        </p:attrNameLst>
-                                      </p:cBhvr>
-                                      <p:to>
-                                        <p:strVal val="visible"/>
-                                      </p:to>
-                                    </p:set>
-                                  </p:childTnLst>
-                                </p:cTn>
-                              </p:par>
-                            </p:childTnLst>
-                          </p:cTn>
-                        </p:par>
-                      </p:childTnLst>
-                    </p:cTn>
-                  </p:par>
-                  <p:par>
-                    <p:cTn id="35" fill="hold">
-                      <p:stCondLst>
-                        <p:cond delay="indefinite"/>
-                      </p:stCondLst>
-                      <p:childTnLst>
-                        <p:par>
-                          <p:cTn id="36" fill="hold">
-                            <p:stCondLst>
-                              <p:cond delay="0"/>
-                            </p:stCondLst>
-                            <p:childTnLst>
-                              <p:par>
-                                <p:cTn id="37" presetID="1" presetClass="entr" presetSubtype="0" fill="hold" grpId="0" nodeType="clickEffect">
-                                  <p:stCondLst>
-                                    <p:cond delay="0"/>
-                                  </p:stCondLst>
-                                  <p:childTnLst>
-                                    <p:set>
-                                      <p:cBhvr>
-                                        <p:cTn id="38" dur="1" fill="hold">
-                                          <p:stCondLst>
-                                            <p:cond delay="0"/>
-                                          </p:stCondLst>
-                                        </p:cTn>
-                                        <p:tgtEl>
-                                          <p:spTgt spid="3">
-                                            <p:txEl>
-                                              <p:pRg st="8" end="8"/>
-                                            </p:txEl>
-                                          </p:spTgt>
-                                        </p:tgtEl>
-                                        <p:attrNameLst>
-                                          <p:attrName>style.visibility</p:attrName>
-                                        </p:attrNameLst>
-                                      </p:cBhvr>
-                                      <p:to>
-                                        <p:strVal val="visible"/>
-                                      </p:to>
-                                    </p:set>
-                                  </p:childTnLst>
-                                </p:cTn>
-                              </p:par>
-                            </p:childTnLst>
-                          </p:cTn>
-                        </p:par>
-                      </p:childTnLst>
-                    </p:cTn>
-                  </p:par>
-                  <p:par>
-                    <p:cTn id="39" fill="hold">
-                      <p:stCondLst>
-                        <p:cond delay="indefinite"/>
-                      </p:stCondLst>
-                      <p:childTnLst>
-                        <p:par>
-                          <p:cTn id="40" fill="hold">
-                            <p:stCondLst>
-                              <p:cond delay="0"/>
-                            </p:stCondLst>
-                            <p:childTnLst>
-                              <p:par>
-                                <p:cTn id="41" presetID="1" presetClass="entr" presetSubtype="0" fill="hold" grpId="0" nodeType="clickEffect">
-                                  <p:stCondLst>
-                                    <p:cond delay="0"/>
-                                  </p:stCondLst>
-                                  <p:childTnLst>
-                                    <p:set>
-                                      <p:cBhvr>
-                                        <p:cTn id="42" dur="1" fill="hold">
-                                          <p:stCondLst>
-                                            <p:cond delay="0"/>
-                                          </p:stCondLst>
-                                        </p:cTn>
-                                        <p:tgtEl>
-                                          <p:spTgt spid="3">
-                                            <p:txEl>
-                                              <p:pRg st="9" end="9"/>
-                                            </p:txEl>
-                                          </p:spTgt>
-                                        </p:tgtEl>
-                                        <p:attrNameLst>
-                                          <p:attrName>style.visibility</p:attrName>
-                                        </p:attrNameLst>
-                                      </p:cBhvr>
-                                      <p:to>
-                                        <p:strVal val="visible"/>
-                                      </p:to>
-                                    </p:set>
-                                  </p:childTnLst>
-                                </p:cTn>
-                              </p:par>
-                            </p:childTnLst>
-                          </p:cTn>
-                        </p:par>
-                      </p:childTnLst>
-                    </p:cTn>
-                  </p:par>
-                </p:childTnLst>
-              </p:cTn>
-              <p:prevCondLst>
-                <p:cond evt="onPrev" delay="0">
-                  <p:tgtEl>
-                    <p:sldTgt/>
-                  </p:tgtEl>
-                </p:cond>
-              </p:prevCondLst>
-              <p:nextCondLst>
-                <p:cond evt="onNext" delay="0">
-                  <p:tgtEl>
-                    <p:sldTgt/>
-                  </p:tgtEl>
-                </p:cond>
-              </p:nextCondLst>
-            </p:seq>
-          </p:childTnLst>
-        </p:cTn>
-      </p:par>
-    </p:tnLst>
-    <p:bldLst>
-      <p:bldP spid="3" grpId="0" uiExpand="1" build="p"/>
-    </p:bldLst>
-  </p:timing>
-</p:sld>
-</file>
-
 <file path=ppt/slides/slide27.xml><?xml version="1.0" encoding="utf-8"?>
 <p:sld xmlns:a="http://schemas.openxmlformats.org/drawingml/2006/main" xmlns:r="http://schemas.openxmlformats.org/officeDocument/2006/relationships" xmlns:p="http://schemas.openxmlformats.org/presentationml/2006/main">
   <p:cSld>
@@ -9244,7 +8702,7 @@
             </a:pPr>
             <a:r>
               <a:rPr/>
-              <a:t>Next steps</a:t>
+              <a:t>Key takeaways for commercial decision-making</a:t>
             </a:r>
           </a:p>
         </p:txBody>
@@ -9267,84 +8725,84 @@
             <a:pPr lvl="0"/>
             <a:r>
               <a:rPr/>
-              <a:t>Pilot deployment (4–6 weeks):</a:t>
+              <a:t>Prioritization is the highest-impact use case</a:t>
             </a:r>
           </a:p>
           <a:p>
             <a:pPr lvl="1"/>
             <a:r>
               <a:rPr/>
-              <a:t>Embed prioritization scores into CRM workflows</a:t>
+              <a:t>Win/loss model (AUROC 0.88) improves sales focus.</a:t>
             </a:r>
           </a:p>
           <a:p>
             <a:pPr lvl="1"/>
             <a:r>
               <a:rPr/>
-              <a:t>Run A/B test vs. current sales process and measure lift in conversion and revenue</a:t>
+              <a:t>Top 20% of opportunities → conversion ~22.7% → ~67%.</a:t>
             </a:r>
           </a:p>
           <a:p>
             <a:pPr lvl="0"/>
             <a:r>
               <a:rPr/>
-              <a:t>Define operating model:</a:t>
+              <a:t>Forecast at the portfolio level, not the deal level</a:t>
             </a:r>
           </a:p>
           <a:p>
             <a:pPr lvl="1"/>
             <a:r>
               <a:rPr/>
-              <a:t>Set clear thresholds and actions (e.g., top deciles = sales focus)</a:t>
+              <a:t>Amount model is not reliable per deal, but supports aggregate forecasting and planning.</a:t>
+            </a:r>
+          </a:p>
+          <a:p>
+            <a:pPr lvl="0"/>
+            <a:r>
+              <a:rPr/>
+              <a:t>Expected value is the strongest prioritization lever</a:t>
             </a:r>
           </a:p>
           <a:p>
             <a:pPr lvl="1"/>
             <a:r>
               <a:rPr/>
-              <a:t>Align sales incentives and pipeline reviews to model outputs</a:t>
+              <a:t>Combines win propensity × deal size.</a:t>
+            </a:r>
+          </a:p>
+          <a:p>
+            <a:pPr lvl="1"/>
+            <a:r>
+              <a:rPr/>
+              <a:t>Value is concentrated: ~44% in top 10%, ~68% in top 25%.</a:t>
             </a:r>
           </a:p>
           <a:p>
             <a:pPr lvl="0"/>
             <a:r>
               <a:rPr/>
-              <a:t>Monitor performance:</a:t>
+              <a:t>Recommendation</a:t>
             </a:r>
           </a:p>
           <a:p>
             <a:pPr lvl="1"/>
             <a:r>
               <a:rPr/>
-              <a:t>Track conversion lift, cycle time, and revenue per opportunity</a:t>
+              <a:t>Pilot prioritization first (embed in CRM).</a:t>
             </a:r>
           </a:p>
           <a:p>
             <a:pPr lvl="1"/>
             <a:r>
               <a:rPr/>
-              <a:t>Continuously recalibrate thresholds and retrain models</a:t>
-            </a:r>
-          </a:p>
-          <a:p>
-            <a:pPr lvl="0"/>
-            <a:r>
-              <a:rPr/>
-              <a:t>Scale and integrate:</a:t>
+              <a:t>Use forecasting for planning.</a:t>
             </a:r>
           </a:p>
           <a:p>
             <a:pPr lvl="1"/>
             <a:r>
               <a:rPr/>
-              <a:t>Extend to full pipeline and embed in forecasting cadence</a:t>
-            </a:r>
-          </a:p>
-          <a:p>
-            <a:pPr lvl="1"/>
-            <a:r>
-              <a:rPr/>
-              <a:t>Incorporate into commercial planning and resource allocation</a:t>
+              <a:t>Then combine into expected-value prioritization to guide focus and resource allocation.</a:t>
             </a:r>
           </a:p>
         </p:txBody>
@@ -10002,12 +9460,7 @@
             <p:ph type="title"/>
           </p:nvPr>
         </p:nvSpPr>
-        <p:spPr>
-          <a:xfrm>
-            <a:off x="722313" y="3305176"/>
-            <a:ext cx="7772400" cy="1021556"/>
-          </a:xfrm>
-        </p:spPr>
+        <p:spPr/>
         <p:txBody>
           <a:bodyPr/>
           <a:lstStyle/>
@@ -10017,13 +9470,790 @@
             </a:pPr>
             <a:r>
               <a:rPr/>
-              <a:t>Thank you</a:t>
+              <a:t>Pilot, prove, scale: how to operationalize model-driven sales</a:t>
+            </a:r>
+          </a:p>
+        </p:txBody>
+      </p:sp>
+      <p:sp>
+        <p:nvSpPr>
+          <p:cNvPr id="3" name="Content Placeholder 2"/>
+          <p:cNvSpPr>
+            <a:spLocks noGrp="1"/>
+          </p:cNvSpPr>
+          <p:nvPr>
+            <p:ph idx="1"/>
+          </p:nvPr>
+        </p:nvSpPr>
+        <p:spPr/>
+        <p:txBody>
+          <a:bodyPr/>
+          <a:lstStyle/>
+          <a:p>
+            <a:pPr lvl="0"/>
+            <a:r>
+              <a:rPr/>
+              <a:t>Pilot deployment (4–6 weeks):</a:t>
+            </a:r>
+          </a:p>
+          <a:p>
+            <a:pPr lvl="1"/>
+            <a:r>
+              <a:rPr/>
+              <a:t>Embed prioritization scores into CRM workflows</a:t>
+            </a:r>
+          </a:p>
+          <a:p>
+            <a:pPr lvl="1"/>
+            <a:r>
+              <a:rPr/>
+              <a:t>Run A/B test vs. current sales process and measure lift in conversion and revenue</a:t>
+            </a:r>
+          </a:p>
+          <a:p>
+            <a:pPr lvl="0"/>
+            <a:r>
+              <a:rPr/>
+              <a:t>Define operating model (after pilot early results):</a:t>
+            </a:r>
+          </a:p>
+          <a:p>
+            <a:pPr lvl="1"/>
+            <a:r>
+              <a:rPr/>
+              <a:t>Incorporate funnel/client segmentation into the process</a:t>
+            </a:r>
+          </a:p>
+          <a:p>
+            <a:pPr lvl="1"/>
+            <a:r>
+              <a:rPr/>
+              <a:t>Set clear thresholds and actions (e.g., top deciles = sales focus)</a:t>
+            </a:r>
+          </a:p>
+          <a:p>
+            <a:pPr lvl="1"/>
+            <a:r>
+              <a:rPr/>
+              <a:t>Align sales forces with incentives and pipeline reviews to make sure model outputs are used effectively</a:t>
+            </a:r>
+          </a:p>
+          <a:p>
+            <a:pPr lvl="0"/>
+            <a:r>
+              <a:rPr/>
+              <a:t>Monitor performance (starting after deployment):</a:t>
+            </a:r>
+          </a:p>
+          <a:p>
+            <a:pPr lvl="1"/>
+            <a:r>
+              <a:rPr/>
+              <a:t>Track conversion lift, cycle time, and revenue per opportunity</a:t>
+            </a:r>
+          </a:p>
+          <a:p>
+            <a:pPr lvl="1"/>
+            <a:r>
+              <a:rPr/>
+              <a:t>Continuously recalibrate thresholds and retrain models</a:t>
+            </a:r>
+          </a:p>
+          <a:p>
+            <a:pPr lvl="0"/>
+            <a:r>
+              <a:rPr/>
+              <a:t>Scale and integrate (after pilot success):</a:t>
+            </a:r>
+          </a:p>
+          <a:p>
+            <a:pPr lvl="1"/>
+            <a:r>
+              <a:rPr/>
+              <a:t>Extend to full pipeline and embed in forecasting cadence</a:t>
+            </a:r>
+          </a:p>
+          <a:p>
+            <a:pPr lvl="1"/>
+            <a:r>
+              <a:rPr/>
+              <a:t>Incorporate into commercial planning and resource allocation</a:t>
             </a:r>
           </a:p>
         </p:txBody>
       </p:sp>
     </p:spTree>
   </p:cSld>
+  <p:timing>
+    <p:tnLst>
+      <p:par>
+        <p:cTn id="1" dur="indefinite" restart="never" nodeType="tmRoot">
+          <p:childTnLst>
+            <p:seq concurrent="1" nextAc="seek">
+              <p:cTn id="2" dur="indefinite" nodeType="mainSeq">
+                <p:childTnLst>
+                  <p:par>
+                    <p:cTn id="3" fill="hold">
+                      <p:stCondLst>
+                        <p:cond delay="indefinite"/>
+                      </p:stCondLst>
+                      <p:childTnLst>
+                        <p:par>
+                          <p:cTn id="4" fill="hold">
+                            <p:stCondLst>
+                              <p:cond delay="0"/>
+                            </p:stCondLst>
+                            <p:childTnLst>
+                              <p:par>
+                                <p:cTn id="5" presetID="1" presetClass="entr" presetSubtype="0" fill="hold" grpId="0" nodeType="clickEffect">
+                                  <p:stCondLst>
+                                    <p:cond delay="0"/>
+                                  </p:stCondLst>
+                                  <p:childTnLst>
+                                    <p:set>
+                                      <p:cBhvr>
+                                        <p:cTn id="6" dur="1" fill="hold">
+                                          <p:stCondLst>
+                                            <p:cond delay="0"/>
+                                          </p:stCondLst>
+                                        </p:cTn>
+                                        <p:tgtEl>
+                                          <p:spTgt spid="3">
+                                            <p:txEl>
+                                              <p:pRg st="0" end="0"/>
+                                            </p:txEl>
+                                          </p:spTgt>
+                                        </p:tgtEl>
+                                        <p:attrNameLst>
+                                          <p:attrName>style.visibility</p:attrName>
+                                        </p:attrNameLst>
+                                      </p:cBhvr>
+                                      <p:to>
+                                        <p:strVal val="visible"/>
+                                      </p:to>
+                                    </p:set>
+                                  </p:childTnLst>
+                                </p:cTn>
+                              </p:par>
+                            </p:childTnLst>
+                          </p:cTn>
+                        </p:par>
+                      </p:childTnLst>
+                    </p:cTn>
+                  </p:par>
+                  <p:par>
+                    <p:cTn id="7" fill="hold">
+                      <p:stCondLst>
+                        <p:cond delay="indefinite"/>
+                      </p:stCondLst>
+                      <p:childTnLst>
+                        <p:par>
+                          <p:cTn id="8" fill="hold">
+                            <p:stCondLst>
+                              <p:cond delay="0"/>
+                            </p:stCondLst>
+                            <p:childTnLst>
+                              <p:par>
+                                <p:cTn id="9" presetID="1" presetClass="entr" presetSubtype="0" fill="hold" grpId="0" nodeType="clickEffect">
+                                  <p:stCondLst>
+                                    <p:cond delay="0"/>
+                                  </p:stCondLst>
+                                  <p:childTnLst>
+                                    <p:set>
+                                      <p:cBhvr>
+                                        <p:cTn id="10" dur="1" fill="hold">
+                                          <p:stCondLst>
+                                            <p:cond delay="0"/>
+                                          </p:stCondLst>
+                                        </p:cTn>
+                                        <p:tgtEl>
+                                          <p:spTgt spid="3">
+                                            <p:txEl>
+                                              <p:pRg st="1" end="1"/>
+                                            </p:txEl>
+                                          </p:spTgt>
+                                        </p:tgtEl>
+                                        <p:attrNameLst>
+                                          <p:attrName>style.visibility</p:attrName>
+                                        </p:attrNameLst>
+                                      </p:cBhvr>
+                                      <p:to>
+                                        <p:strVal val="visible"/>
+                                      </p:to>
+                                    </p:set>
+                                  </p:childTnLst>
+                                </p:cTn>
+                              </p:par>
+                            </p:childTnLst>
+                          </p:cTn>
+                        </p:par>
+                      </p:childTnLst>
+                    </p:cTn>
+                  </p:par>
+                  <p:par>
+                    <p:cTn id="11" fill="hold">
+                      <p:stCondLst>
+                        <p:cond delay="indefinite"/>
+                      </p:stCondLst>
+                      <p:childTnLst>
+                        <p:par>
+                          <p:cTn id="12" fill="hold">
+                            <p:stCondLst>
+                              <p:cond delay="0"/>
+                            </p:stCondLst>
+                            <p:childTnLst>
+                              <p:par>
+                                <p:cTn id="13" presetID="1" presetClass="entr" presetSubtype="0" fill="hold" grpId="0" nodeType="clickEffect">
+                                  <p:stCondLst>
+                                    <p:cond delay="0"/>
+                                  </p:stCondLst>
+                                  <p:childTnLst>
+                                    <p:set>
+                                      <p:cBhvr>
+                                        <p:cTn id="14" dur="1" fill="hold">
+                                          <p:stCondLst>
+                                            <p:cond delay="0"/>
+                                          </p:stCondLst>
+                                        </p:cTn>
+                                        <p:tgtEl>
+                                          <p:spTgt spid="3">
+                                            <p:txEl>
+                                              <p:pRg st="2" end="2"/>
+                                            </p:txEl>
+                                          </p:spTgt>
+                                        </p:tgtEl>
+                                        <p:attrNameLst>
+                                          <p:attrName>style.visibility</p:attrName>
+                                        </p:attrNameLst>
+                                      </p:cBhvr>
+                                      <p:to>
+                                        <p:strVal val="visible"/>
+                                      </p:to>
+                                    </p:set>
+                                  </p:childTnLst>
+                                </p:cTn>
+                              </p:par>
+                            </p:childTnLst>
+                          </p:cTn>
+                        </p:par>
+                      </p:childTnLst>
+                    </p:cTn>
+                  </p:par>
+                  <p:par>
+                    <p:cTn id="15" fill="hold">
+                      <p:stCondLst>
+                        <p:cond delay="indefinite"/>
+                      </p:stCondLst>
+                      <p:childTnLst>
+                        <p:par>
+                          <p:cTn id="16" fill="hold">
+                            <p:stCondLst>
+                              <p:cond delay="0"/>
+                            </p:stCondLst>
+                            <p:childTnLst>
+                              <p:par>
+                                <p:cTn id="17" presetID="1" presetClass="entr" presetSubtype="0" fill="hold" grpId="0" nodeType="clickEffect">
+                                  <p:stCondLst>
+                                    <p:cond delay="0"/>
+                                  </p:stCondLst>
+                                  <p:childTnLst>
+                                    <p:set>
+                                      <p:cBhvr>
+                                        <p:cTn id="18" dur="1" fill="hold">
+                                          <p:stCondLst>
+                                            <p:cond delay="0"/>
+                                          </p:stCondLst>
+                                        </p:cTn>
+                                        <p:tgtEl>
+                                          <p:spTgt spid="3">
+                                            <p:txEl>
+                                              <p:pRg st="3" end="3"/>
+                                            </p:txEl>
+                                          </p:spTgt>
+                                        </p:tgtEl>
+                                        <p:attrNameLst>
+                                          <p:attrName>style.visibility</p:attrName>
+                                        </p:attrNameLst>
+                                      </p:cBhvr>
+                                      <p:to>
+                                        <p:strVal val="visible"/>
+                                      </p:to>
+                                    </p:set>
+                                  </p:childTnLst>
+                                </p:cTn>
+                              </p:par>
+                            </p:childTnLst>
+                          </p:cTn>
+                        </p:par>
+                      </p:childTnLst>
+                    </p:cTn>
+                  </p:par>
+                  <p:par>
+                    <p:cTn id="19" fill="hold">
+                      <p:stCondLst>
+                        <p:cond delay="indefinite"/>
+                      </p:stCondLst>
+                      <p:childTnLst>
+                        <p:par>
+                          <p:cTn id="20" fill="hold">
+                            <p:stCondLst>
+                              <p:cond delay="0"/>
+                            </p:stCondLst>
+                            <p:childTnLst>
+                              <p:par>
+                                <p:cTn id="21" presetID="1" presetClass="entr" presetSubtype="0" fill="hold" grpId="0" nodeType="clickEffect">
+                                  <p:stCondLst>
+                                    <p:cond delay="0"/>
+                                  </p:stCondLst>
+                                  <p:childTnLst>
+                                    <p:set>
+                                      <p:cBhvr>
+                                        <p:cTn id="22" dur="1" fill="hold">
+                                          <p:stCondLst>
+                                            <p:cond delay="0"/>
+                                          </p:stCondLst>
+                                        </p:cTn>
+                                        <p:tgtEl>
+                                          <p:spTgt spid="3">
+                                            <p:txEl>
+                                              <p:pRg st="4" end="4"/>
+                                            </p:txEl>
+                                          </p:spTgt>
+                                        </p:tgtEl>
+                                        <p:attrNameLst>
+                                          <p:attrName>style.visibility</p:attrName>
+                                        </p:attrNameLst>
+                                      </p:cBhvr>
+                                      <p:to>
+                                        <p:strVal val="visible"/>
+                                      </p:to>
+                                    </p:set>
+                                  </p:childTnLst>
+                                </p:cTn>
+                              </p:par>
+                            </p:childTnLst>
+                          </p:cTn>
+                        </p:par>
+                      </p:childTnLst>
+                    </p:cTn>
+                  </p:par>
+                  <p:par>
+                    <p:cTn id="23" fill="hold">
+                      <p:stCondLst>
+                        <p:cond delay="indefinite"/>
+                      </p:stCondLst>
+                      <p:childTnLst>
+                        <p:par>
+                          <p:cTn id="24" fill="hold">
+                            <p:stCondLst>
+                              <p:cond delay="0"/>
+                            </p:stCondLst>
+                            <p:childTnLst>
+                              <p:par>
+                                <p:cTn id="25" presetID="1" presetClass="entr" presetSubtype="0" fill="hold" grpId="0" nodeType="clickEffect">
+                                  <p:stCondLst>
+                                    <p:cond delay="0"/>
+                                  </p:stCondLst>
+                                  <p:childTnLst>
+                                    <p:set>
+                                      <p:cBhvr>
+                                        <p:cTn id="26" dur="1" fill="hold">
+                                          <p:stCondLst>
+                                            <p:cond delay="0"/>
+                                          </p:stCondLst>
+                                        </p:cTn>
+                                        <p:tgtEl>
+                                          <p:spTgt spid="3">
+                                            <p:txEl>
+                                              <p:pRg st="5" end="5"/>
+                                            </p:txEl>
+                                          </p:spTgt>
+                                        </p:tgtEl>
+                                        <p:attrNameLst>
+                                          <p:attrName>style.visibility</p:attrName>
+                                        </p:attrNameLst>
+                                      </p:cBhvr>
+                                      <p:to>
+                                        <p:strVal val="visible"/>
+                                      </p:to>
+                                    </p:set>
+                                  </p:childTnLst>
+                                </p:cTn>
+                              </p:par>
+                            </p:childTnLst>
+                          </p:cTn>
+                        </p:par>
+                      </p:childTnLst>
+                    </p:cTn>
+                  </p:par>
+                  <p:par>
+                    <p:cTn id="27" fill="hold">
+                      <p:stCondLst>
+                        <p:cond delay="indefinite"/>
+                      </p:stCondLst>
+                      <p:childTnLst>
+                        <p:par>
+                          <p:cTn id="28" fill="hold">
+                            <p:stCondLst>
+                              <p:cond delay="0"/>
+                            </p:stCondLst>
+                            <p:childTnLst>
+                              <p:par>
+                                <p:cTn id="29" presetID="1" presetClass="entr" presetSubtype="0" fill="hold" grpId="0" nodeType="clickEffect">
+                                  <p:stCondLst>
+                                    <p:cond delay="0"/>
+                                  </p:stCondLst>
+                                  <p:childTnLst>
+                                    <p:set>
+                                      <p:cBhvr>
+                                        <p:cTn id="30" dur="1" fill="hold">
+                                          <p:stCondLst>
+                                            <p:cond delay="0"/>
+                                          </p:stCondLst>
+                                        </p:cTn>
+                                        <p:tgtEl>
+                                          <p:spTgt spid="3">
+                                            <p:txEl>
+                                              <p:pRg st="6" end="6"/>
+                                            </p:txEl>
+                                          </p:spTgt>
+                                        </p:tgtEl>
+                                        <p:attrNameLst>
+                                          <p:attrName>style.visibility</p:attrName>
+                                        </p:attrNameLst>
+                                      </p:cBhvr>
+                                      <p:to>
+                                        <p:strVal val="visible"/>
+                                      </p:to>
+                                    </p:set>
+                                  </p:childTnLst>
+                                </p:cTn>
+                              </p:par>
+                            </p:childTnLst>
+                          </p:cTn>
+                        </p:par>
+                      </p:childTnLst>
+                    </p:cTn>
+                  </p:par>
+                  <p:par>
+                    <p:cTn id="31" fill="hold">
+                      <p:stCondLst>
+                        <p:cond delay="indefinite"/>
+                      </p:stCondLst>
+                      <p:childTnLst>
+                        <p:par>
+                          <p:cTn id="32" fill="hold">
+                            <p:stCondLst>
+                              <p:cond delay="0"/>
+                            </p:stCondLst>
+                            <p:childTnLst>
+                              <p:par>
+                                <p:cTn id="33" presetID="1" presetClass="entr" presetSubtype="0" fill="hold" grpId="0" nodeType="clickEffect">
+                                  <p:stCondLst>
+                                    <p:cond delay="0"/>
+                                  </p:stCondLst>
+                                  <p:childTnLst>
+                                    <p:set>
+                                      <p:cBhvr>
+                                        <p:cTn id="34" dur="1" fill="hold">
+                                          <p:stCondLst>
+                                            <p:cond delay="0"/>
+                                          </p:stCondLst>
+                                        </p:cTn>
+                                        <p:tgtEl>
+                                          <p:spTgt spid="3">
+                                            <p:txEl>
+                                              <p:pRg st="7" end="7"/>
+                                            </p:txEl>
+                                          </p:spTgt>
+                                        </p:tgtEl>
+                                        <p:attrNameLst>
+                                          <p:attrName>style.visibility</p:attrName>
+                                        </p:attrNameLst>
+                                      </p:cBhvr>
+                                      <p:to>
+                                        <p:strVal val="visible"/>
+                                      </p:to>
+                                    </p:set>
+                                  </p:childTnLst>
+                                </p:cTn>
+                              </p:par>
+                            </p:childTnLst>
+                          </p:cTn>
+                        </p:par>
+                      </p:childTnLst>
+                    </p:cTn>
+                  </p:par>
+                  <p:par>
+                    <p:cTn id="35" fill="hold">
+                      <p:stCondLst>
+                        <p:cond delay="indefinite"/>
+                      </p:stCondLst>
+                      <p:childTnLst>
+                        <p:par>
+                          <p:cTn id="36" fill="hold">
+                            <p:stCondLst>
+                              <p:cond delay="0"/>
+                            </p:stCondLst>
+                            <p:childTnLst>
+                              <p:par>
+                                <p:cTn id="37" presetID="1" presetClass="entr" presetSubtype="0" fill="hold" grpId="0" nodeType="clickEffect">
+                                  <p:stCondLst>
+                                    <p:cond delay="0"/>
+                                  </p:stCondLst>
+                                  <p:childTnLst>
+                                    <p:set>
+                                      <p:cBhvr>
+                                        <p:cTn id="38" dur="1" fill="hold">
+                                          <p:stCondLst>
+                                            <p:cond delay="0"/>
+                                          </p:stCondLst>
+                                        </p:cTn>
+                                        <p:tgtEl>
+                                          <p:spTgt spid="3">
+                                            <p:txEl>
+                                              <p:pRg st="8" end="8"/>
+                                            </p:txEl>
+                                          </p:spTgt>
+                                        </p:tgtEl>
+                                        <p:attrNameLst>
+                                          <p:attrName>style.visibility</p:attrName>
+                                        </p:attrNameLst>
+                                      </p:cBhvr>
+                                      <p:to>
+                                        <p:strVal val="visible"/>
+                                      </p:to>
+                                    </p:set>
+                                  </p:childTnLst>
+                                </p:cTn>
+                              </p:par>
+                            </p:childTnLst>
+                          </p:cTn>
+                        </p:par>
+                      </p:childTnLst>
+                    </p:cTn>
+                  </p:par>
+                  <p:par>
+                    <p:cTn id="39" fill="hold">
+                      <p:stCondLst>
+                        <p:cond delay="indefinite"/>
+                      </p:stCondLst>
+                      <p:childTnLst>
+                        <p:par>
+                          <p:cTn id="40" fill="hold">
+                            <p:stCondLst>
+                              <p:cond delay="0"/>
+                            </p:stCondLst>
+                            <p:childTnLst>
+                              <p:par>
+                                <p:cTn id="41" presetID="1" presetClass="entr" presetSubtype="0" fill="hold" grpId="0" nodeType="clickEffect">
+                                  <p:stCondLst>
+                                    <p:cond delay="0"/>
+                                  </p:stCondLst>
+                                  <p:childTnLst>
+                                    <p:set>
+                                      <p:cBhvr>
+                                        <p:cTn id="42" dur="1" fill="hold">
+                                          <p:stCondLst>
+                                            <p:cond delay="0"/>
+                                          </p:stCondLst>
+                                        </p:cTn>
+                                        <p:tgtEl>
+                                          <p:spTgt spid="3">
+                                            <p:txEl>
+                                              <p:pRg st="9" end="9"/>
+                                            </p:txEl>
+                                          </p:spTgt>
+                                        </p:tgtEl>
+                                        <p:attrNameLst>
+                                          <p:attrName>style.visibility</p:attrName>
+                                        </p:attrNameLst>
+                                      </p:cBhvr>
+                                      <p:to>
+                                        <p:strVal val="visible"/>
+                                      </p:to>
+                                    </p:set>
+                                  </p:childTnLst>
+                                </p:cTn>
+                              </p:par>
+                            </p:childTnLst>
+                          </p:cTn>
+                        </p:par>
+                      </p:childTnLst>
+                    </p:cTn>
+                  </p:par>
+                  <p:par>
+                    <p:cTn id="43" fill="hold">
+                      <p:stCondLst>
+                        <p:cond delay="indefinite"/>
+                      </p:stCondLst>
+                      <p:childTnLst>
+                        <p:par>
+                          <p:cTn id="44" fill="hold">
+                            <p:stCondLst>
+                              <p:cond delay="0"/>
+                            </p:stCondLst>
+                            <p:childTnLst>
+                              <p:par>
+                                <p:cTn id="45" presetID="1" presetClass="entr" presetSubtype="0" fill="hold" grpId="0" nodeType="clickEffect">
+                                  <p:stCondLst>
+                                    <p:cond delay="0"/>
+                                  </p:stCondLst>
+                                  <p:childTnLst>
+                                    <p:set>
+                                      <p:cBhvr>
+                                        <p:cTn id="46" dur="1" fill="hold">
+                                          <p:stCondLst>
+                                            <p:cond delay="0"/>
+                                          </p:stCondLst>
+                                        </p:cTn>
+                                        <p:tgtEl>
+                                          <p:spTgt spid="3">
+                                            <p:txEl>
+                                              <p:pRg st="10" end="10"/>
+                                            </p:txEl>
+                                          </p:spTgt>
+                                        </p:tgtEl>
+                                        <p:attrNameLst>
+                                          <p:attrName>style.visibility</p:attrName>
+                                        </p:attrNameLst>
+                                      </p:cBhvr>
+                                      <p:to>
+                                        <p:strVal val="visible"/>
+                                      </p:to>
+                                    </p:set>
+                                  </p:childTnLst>
+                                </p:cTn>
+                              </p:par>
+                            </p:childTnLst>
+                          </p:cTn>
+                        </p:par>
+                      </p:childTnLst>
+                    </p:cTn>
+                  </p:par>
+                  <p:par>
+                    <p:cTn id="47" fill="hold">
+                      <p:stCondLst>
+                        <p:cond delay="indefinite"/>
+                      </p:stCondLst>
+                      <p:childTnLst>
+                        <p:par>
+                          <p:cTn id="48" fill="hold">
+                            <p:stCondLst>
+                              <p:cond delay="0"/>
+                            </p:stCondLst>
+                            <p:childTnLst>
+                              <p:par>
+                                <p:cTn id="49" presetID="1" presetClass="entr" presetSubtype="0" fill="hold" grpId="0" nodeType="clickEffect">
+                                  <p:stCondLst>
+                                    <p:cond delay="0"/>
+                                  </p:stCondLst>
+                                  <p:childTnLst>
+                                    <p:set>
+                                      <p:cBhvr>
+                                        <p:cTn id="50" dur="1" fill="hold">
+                                          <p:stCondLst>
+                                            <p:cond delay="0"/>
+                                          </p:stCondLst>
+                                        </p:cTn>
+                                        <p:tgtEl>
+                                          <p:spTgt spid="3">
+                                            <p:txEl>
+                                              <p:pRg st="11" end="11"/>
+                                            </p:txEl>
+                                          </p:spTgt>
+                                        </p:tgtEl>
+                                        <p:attrNameLst>
+                                          <p:attrName>style.visibility</p:attrName>
+                                        </p:attrNameLst>
+                                      </p:cBhvr>
+                                      <p:to>
+                                        <p:strVal val="visible"/>
+                                      </p:to>
+                                    </p:set>
+                                  </p:childTnLst>
+                                </p:cTn>
+                              </p:par>
+                            </p:childTnLst>
+                          </p:cTn>
+                        </p:par>
+                      </p:childTnLst>
+                    </p:cTn>
+                  </p:par>
+                  <p:par>
+                    <p:cTn id="51" fill="hold">
+                      <p:stCondLst>
+                        <p:cond delay="indefinite"/>
+                      </p:stCondLst>
+                      <p:childTnLst>
+                        <p:par>
+                          <p:cTn id="52" fill="hold">
+                            <p:stCondLst>
+                              <p:cond delay="0"/>
+                            </p:stCondLst>
+                            <p:childTnLst>
+                              <p:par>
+                                <p:cTn id="53" presetID="1" presetClass="entr" presetSubtype="0" fill="hold" grpId="0" nodeType="clickEffect">
+                                  <p:stCondLst>
+                                    <p:cond delay="0"/>
+                                  </p:stCondLst>
+                                  <p:childTnLst>
+                                    <p:set>
+                                      <p:cBhvr>
+                                        <p:cTn id="54" dur="1" fill="hold">
+                                          <p:stCondLst>
+                                            <p:cond delay="0"/>
+                                          </p:stCondLst>
+                                        </p:cTn>
+                                        <p:tgtEl>
+                                          <p:spTgt spid="3">
+                                            <p:txEl>
+                                              <p:pRg st="12" end="12"/>
+                                            </p:txEl>
+                                          </p:spTgt>
+                                        </p:tgtEl>
+                                        <p:attrNameLst>
+                                          <p:attrName>style.visibility</p:attrName>
+                                        </p:attrNameLst>
+                                      </p:cBhvr>
+                                      <p:to>
+                                        <p:strVal val="visible"/>
+                                      </p:to>
+                                    </p:set>
+                                  </p:childTnLst>
+                                </p:cTn>
+                              </p:par>
+                            </p:childTnLst>
+                          </p:cTn>
+                        </p:par>
+                      </p:childTnLst>
+                    </p:cTn>
+                  </p:par>
+                </p:childTnLst>
+              </p:cTn>
+              <p:prevCondLst>
+                <p:cond evt="onPrev" delay="0">
+                  <p:tgtEl>
+                    <p:sldTgt/>
+                  </p:tgtEl>
+                </p:cond>
+              </p:prevCondLst>
+              <p:nextCondLst>
+                <p:cond evt="onNext" delay="0">
+                  <p:tgtEl>
+                    <p:sldTgt/>
+                  </p:tgtEl>
+                </p:cond>
+              </p:nextCondLst>
+            </p:seq>
+          </p:childTnLst>
+        </p:cTn>
+      </p:par>
+    </p:tnLst>
+    <p:bldLst>
+      <p:bldP spid="3" grpId="0" uiExpand="1" build="p"/>
+    </p:bldLst>
+  </p:timing>
 </p:sld>
 </file>
 
@@ -10046,15 +10276,20 @@
       </p:grpSpPr>
       <p:sp>
         <p:nvSpPr>
-          <p:cNvPr id="3" name="Content Placeholder 2"/>
+          <p:cNvPr id="2" name="Title 1"/>
           <p:cNvSpPr>
             <a:spLocks noGrp="1"/>
           </p:cNvSpPr>
           <p:nvPr>
-            <p:ph idx="1"/>
+            <p:ph type="title"/>
           </p:nvPr>
         </p:nvSpPr>
-        <p:spPr/>
+        <p:spPr>
+          <a:xfrm>
+            <a:off x="722313" y="3305176"/>
+            <a:ext cx="7772400" cy="1021556"/>
+          </a:xfrm>
+        </p:spPr>
         <p:txBody>
           <a:bodyPr/>
           <a:lstStyle/>
@@ -10064,7 +10299,7 @@
             </a:pPr>
             <a:r>
               <a:rPr/>
-              <a:t>Questions, comments, and feedback are welcome!</a:t>
+              <a:t>Thank you</a:t>
             </a:r>
           </a:p>
         </p:txBody>
@@ -10537,20 +10772,15 @@
       </p:grpSpPr>
       <p:sp>
         <p:nvSpPr>
-          <p:cNvPr id="2" name="Title 1"/>
+          <p:cNvPr id="3" name="Content Placeholder 2"/>
           <p:cNvSpPr>
             <a:spLocks noGrp="1"/>
           </p:cNvSpPr>
           <p:nvPr>
-            <p:ph type="title"/>
+            <p:ph idx="1"/>
           </p:nvPr>
         </p:nvSpPr>
-        <p:spPr>
-          <a:xfrm>
-            <a:off x="722313" y="3305176"/>
-            <a:ext cx="7772400" cy="1021556"/>
-          </a:xfrm>
-        </p:spPr>
+        <p:spPr/>
         <p:txBody>
           <a:bodyPr/>
           <a:lstStyle/>
@@ -10560,7 +10790,7 @@
             </a:pPr>
             <a:r>
               <a:rPr/>
-              <a:t>Annex</a:t>
+              <a:t>Questions, comments, and feedback are welcome!</a:t>
             </a:r>
           </a:p>
         </p:txBody>
@@ -10597,7 +10827,12 @@
             <p:ph type="title"/>
           </p:nvPr>
         </p:nvSpPr>
-        <p:spPr/>
+        <p:spPr>
+          <a:xfrm>
+            <a:off x="722313" y="3305176"/>
+            <a:ext cx="7772400" cy="1021556"/>
+          </a:xfrm>
+        </p:spPr>
         <p:txBody>
           <a:bodyPr/>
           <a:lstStyle/>
@@ -10607,40 +10842,7 @@
             </a:pPr>
             <a:r>
               <a:rPr/>
-              <a:t>Annex: classification CV leaderboard</a:t>
-            </a:r>
-          </a:p>
-        </p:txBody>
-      </p:sp>
-      <p:sp>
-        <p:nvSpPr>
-          <p:cNvPr id="3" name="Content Placeholder 2"/>
-          <p:cNvSpPr>
-            <a:spLocks noGrp="1"/>
-          </p:cNvSpPr>
-          <p:nvPr>
-            <p:ph idx="1"/>
-          </p:nvPr>
-        </p:nvSpPr>
-        <p:spPr/>
-        <p:txBody>
-          <a:bodyPr/>
-          <a:lstStyle/>
-          <a:p>
-            <a:pPr lvl="0" indent="0" marL="0">
-              <a:buNone/>
-            </a:pPr>
-            <a:r>
-              <a:rPr/>
-              <a:t>Selected model in main deck: </a:t>
-            </a:r>
-            <a:r>
-              <a:rPr b="1"/>
-              <a:t>logit_binned_ohe</a:t>
-            </a:r>
-            <a:r>
-              <a:rPr/>
-              <a:t>.</a:t>
+              <a:t>Annex</a:t>
             </a:r>
           </a:p>
         </p:txBody>
@@ -10687,7 +10889,7 @@
             </a:pPr>
             <a:r>
               <a:rPr/>
-              <a:t>Annex: regression CV leaderboard</a:t>
+              <a:t>Annex: classification CV leaderboard</a:t>
             </a:r>
           </a:p>
         </p:txBody>
@@ -10716,7 +10918,87 @@
             </a:r>
             <a:r>
               <a:rPr b="1"/>
-              <a:t>classic_linear_standard_scaler</a:t>
+              <a:t>logit_binned_ohe_balanced</a:t>
+            </a:r>
+            <a:r>
+              <a:rPr/>
+              <a:t>.</a:t>
+            </a:r>
+          </a:p>
+        </p:txBody>
+      </p:sp>
+    </p:spTree>
+  </p:cSld>
+</p:sld>
+</file>
+
+<file path=ppt/slides/slide33.xml><?xml version="1.0" encoding="utf-8"?>
+<p:sld xmlns:a="http://schemas.openxmlformats.org/drawingml/2006/main" xmlns:r="http://schemas.openxmlformats.org/officeDocument/2006/relationships" xmlns:p="http://schemas.openxmlformats.org/presentationml/2006/main">
+  <p:cSld>
+    <p:spTree>
+      <p:nvGrpSpPr>
+        <p:cNvPr id="1" name=""/>
+        <p:cNvGrpSpPr/>
+        <p:nvPr/>
+      </p:nvGrpSpPr>
+      <p:grpSpPr>
+        <a:xfrm>
+          <a:off x="0" y="0"/>
+          <a:ext cx="0" cy="0"/>
+          <a:chOff x="0" y="0"/>
+          <a:chExt cx="0" cy="0"/>
+        </a:xfrm>
+      </p:grpSpPr>
+      <p:sp>
+        <p:nvSpPr>
+          <p:cNvPr id="2" name="Title 1"/>
+          <p:cNvSpPr>
+            <a:spLocks noGrp="1"/>
+          </p:cNvSpPr>
+          <p:nvPr>
+            <p:ph type="title"/>
+          </p:nvPr>
+        </p:nvSpPr>
+        <p:spPr/>
+        <p:txBody>
+          <a:bodyPr/>
+          <a:lstStyle/>
+          <a:p>
+            <a:pPr lvl="0" indent="0" marL="0">
+              <a:buNone/>
+            </a:pPr>
+            <a:r>
+              <a:rPr/>
+              <a:t>Annex: regression CV leaderboard</a:t>
+            </a:r>
+          </a:p>
+        </p:txBody>
+      </p:sp>
+      <p:sp>
+        <p:nvSpPr>
+          <p:cNvPr id="3" name="Content Placeholder 2"/>
+          <p:cNvSpPr>
+            <a:spLocks noGrp="1"/>
+          </p:cNvSpPr>
+          <p:nvPr>
+            <p:ph idx="1"/>
+          </p:nvPr>
+        </p:nvSpPr>
+        <p:spPr/>
+        <p:txBody>
+          <a:bodyPr/>
+          <a:lstStyle/>
+          <a:p>
+            <a:pPr lvl="0" indent="0" marL="0">
+              <a:buNone/>
+            </a:pPr>
+            <a:r>
+              <a:rPr/>
+              <a:t>Selected model in main deck: </a:t>
+            </a:r>
+            <a:r>
+              <a:rPr b="1"/>
+              <a:t>xgboost</a:t>
             </a:r>
             <a:r>
               <a:rPr/>
@@ -10842,14 +11124,14 @@
             <a:pPr lvl="0"/>
             <a:r>
               <a:rPr/>
-              <a:t>The sales process tracks auto-parts opportunities across both new leads and existing customers.</a:t>
+              <a:t>The current sales process tracks auto-parts opportunities across both new leads and existing customers.</a:t>
             </a:r>
           </a:p>
           <a:p>
             <a:pPr lvl="0"/>
             <a:r>
               <a:rPr/>
-              <a:t>Opportunities transition between the stages Identified / Qualifying, Qualified / Validating, and Validated / Gaining Agreement.</a:t>
+              <a:t>Opportunities transition between the stages Data entry → Identified / Qualifying → Qualified / Validating, and Validated / Gaining Agreement → Closed (Win/Loss).</a:t>
             </a:r>
           </a:p>
           <a:p>

--- a/slidedeck/presentation.pptx
+++ b/slidedeck/presentation.pptx
@@ -38,6 +38,11 @@
     <p:sldId id="286" r:id="rId32"/>
     <p:sldId id="287" r:id="rId33"/>
     <p:sldId id="288" r:id="rId34"/>
+    <p:sldId id="289" r:id="rId35"/>
+    <p:sldId id="290" r:id="rId36"/>
+    <p:sldId id="291" r:id="rId37"/>
+    <p:sldId id="292" r:id="rId38"/>
+    <p:sldId id="293" r:id="rId39"/>
   </p:sldIdLst>
   <p:sldSz cx="9144000" cy="5143500" type="screen16x9"/>
   <p:notesSz cx="6858000" cy="9144000"/>
@@ -4216,15 +4221,7 @@
             </a:pPr>
             <a:r>
               <a:rPr/>
-              <a:t>For both classification and regression, we used a </a:t>
-            </a:r>
-            <a:r>
-              <a:rPr b="1"/>
-              <a:t>dynamic snapshot</a:t>
-            </a:r>
-            <a:r>
-              <a:rPr/>
-              <a:t> of the opportunity data, which captures the current state of the sales process and customer context</a:t>
+              <a:t>For both classification and regression, we used an stratified train/test split to ensure realistic evaluation</a:t>
             </a:r>
           </a:p>
         </p:txBody>
@@ -4883,18 +4880,11 @@
             <a:pPr lvl="0"/>
             <a:r>
               <a:rPr/>
-              <a:t>Specific transformations tested: log-transforming amount variables and supervised binning.</a:t>
-            </a:r>
-          </a:p>
-          <a:p>
-            <a:pPr lvl="0"/>
-            <a:r>
-              <a:rPr/>
               <a:t>Selected final logistic model: </a:t>
             </a:r>
             <a:r>
               <a:rPr b="1"/>
-              <a:t>Logistic Regression over supervisedly binned and one-hot encoded features with balanced class weights</a:t>
+              <a:t>Calibrated Logistic Regression over supervisedly binned and one-hot encoded features with balanced class weights</a:t>
             </a:r>
             <a:r>
               <a:rPr/>
@@ -4904,7 +4894,7 @@
               <a:rPr>
                 <a:latin typeface="Courier"/>
               </a:rPr>
-              <a:t>logit_binned_ohe_balanced</a:t>
+              <a:t>logit_binned_ohe_balanced_calibrated</a:t>
             </a:r>
             <a:r>
               <a:rPr/>
@@ -5273,8 +5263,8 @@
         </p:blipFill>
         <p:spPr bwMode="auto">
           <a:xfrm>
-            <a:off x="4800600" y="1625600"/>
-            <a:ext cx="3708400" cy="2959100"/>
+            <a:off x="4927600" y="1625600"/>
+            <a:ext cx="3454400" cy="2959100"/>
           </a:xfrm>
           <a:prstGeom prst="rect">
             <a:avLst/>
@@ -5444,55 +5434,6 @@
                       </p:childTnLst>
                     </p:cTn>
                   </p:par>
-                  <p:par>
-                    <p:cTn id="15" fill="hold">
-                      <p:stCondLst>
-                        <p:cond delay="indefinite"/>
-                      </p:stCondLst>
-                      <p:childTnLst>
-                        <p:par>
-                          <p:cTn id="16" fill="hold">
-                            <p:stCondLst>
-                              <p:cond delay="0"/>
-                            </p:stCondLst>
-                            <p:childTnLst>
-                              <p:par>
-                                <p:cTn id="17" presetID="1" presetClass="entr" presetSubtype="0" fill="hold" grpId="0" nodeType="clickEffect">
-                                  <p:stCondLst>
-                                    <p:cond delay="0"/>
-                                  </p:stCondLst>
-                                  <p:childTnLst>
-                                    <p:set>
-                                      <p:cBhvr>
-                                        <p:cTn id="18" dur="1" fill="hold">
-                                          <p:stCondLst>
-                                            <p:cond delay="0"/>
-                                          </p:stCondLst>
-                                        </p:cTn>
-                                        <p:tgtEl>
-                                          <p:spTgt spid="3">
-                                            <p:txEl>
-                                              <p:pRg st="3" end="3"/>
-                                            </p:txEl>
-                                          </p:spTgt>
-                                        </p:tgtEl>
-                                        <p:attrNameLst>
-                                          <p:attrName>style.visibility</p:attrName>
-                                        </p:attrNameLst>
-                                      </p:cBhvr>
-                                      <p:to>
-                                        <p:strVal val="visible"/>
-                                      </p:to>
-                                    </p:set>
-                                  </p:childTnLst>
-                                </p:cTn>
-                              </p:par>
-                            </p:childTnLst>
-                          </p:cTn>
-                        </p:par>
-                      </p:childTnLst>
-                    </p:cTn>
-                  </p:par>
                 </p:childTnLst>
               </p:cTn>
               <p:prevCondLst>
@@ -5658,13 +5599,6 @@
             <a:pPr lvl="0"/>
             <a:r>
               <a:rPr/>
-              <a:t>Specific transformations tested: log-transforming amount variables and supervised binning.</a:t>
-            </a:r>
-          </a:p>
-          <a:p>
-            <a:pPr lvl="0"/>
-            <a:r>
-              <a:rPr/>
               <a:t>Selected final regression model: </a:t>
             </a:r>
             <a:r>
@@ -5693,15 +5627,6 @@
             <a:r>
               <a:rPr b="1"/>
               <a:t>CV</a:t>
-            </a:r>
-          </a:p>
-          <a:p>
-            <a:pPr lvl="0" indent="0" marL="0">
-              <a:buNone/>
-            </a:pPr>
-            <a:r>
-              <a:rPr b="1"/>
-              <a:t>Held-out test</a:t>
             </a:r>
           </a:p>
         </p:txBody>
@@ -5873,55 +5798,6 @@
                                           <p:spTgt spid="3">
                                             <p:txEl>
                                               <p:pRg st="2" end="2"/>
-                                            </p:txEl>
-                                          </p:spTgt>
-                                        </p:tgtEl>
-                                        <p:attrNameLst>
-                                          <p:attrName>style.visibility</p:attrName>
-                                        </p:attrNameLst>
-                                      </p:cBhvr>
-                                      <p:to>
-                                        <p:strVal val="visible"/>
-                                      </p:to>
-                                    </p:set>
-                                  </p:childTnLst>
-                                </p:cTn>
-                              </p:par>
-                            </p:childTnLst>
-                          </p:cTn>
-                        </p:par>
-                      </p:childTnLst>
-                    </p:cTn>
-                  </p:par>
-                  <p:par>
-                    <p:cTn id="15" fill="hold">
-                      <p:stCondLst>
-                        <p:cond delay="indefinite"/>
-                      </p:stCondLst>
-                      <p:childTnLst>
-                        <p:par>
-                          <p:cTn id="16" fill="hold">
-                            <p:stCondLst>
-                              <p:cond delay="0"/>
-                            </p:stCondLst>
-                            <p:childTnLst>
-                              <p:par>
-                                <p:cTn id="17" presetID="1" presetClass="entr" presetSubtype="0" fill="hold" grpId="0" nodeType="clickEffect">
-                                  <p:stCondLst>
-                                    <p:cond delay="0"/>
-                                  </p:stCondLst>
-                                  <p:childTnLst>
-                                    <p:set>
-                                      <p:cBhvr>
-                                        <p:cTn id="18" dur="1" fill="hold">
-                                          <p:stCondLst>
-                                            <p:cond delay="0"/>
-                                          </p:stCondLst>
-                                        </p:cTn>
-                                        <p:tgtEl>
-                                          <p:spTgt spid="3">
-                                            <p:txEl>
-                                              <p:pRg st="3" end="3"/>
                                             </p:txEl>
                                           </p:spTgt>
                                         </p:tgtEl>
@@ -7271,7 +7147,7 @@
             </a:pPr>
             <a:r>
               <a:rPr/>
-              <a:t>Concentration (~44% value capture at top 10%) makes expected-value prioritization a key revenue lever</a:t>
+              <a:t>Concentration (~45% value capture at top 10%) makes expected-value prioritization a key revenue lever</a:t>
             </a:r>
           </a:p>
         </p:txBody>
@@ -7331,14 +7207,14 @@
             <a:pPr lvl="1"/>
             <a:r>
               <a:rPr/>
-              <a:t>At top 10%, expected-value ranking captures 43.6% of won revenue vs 34.9% with propensity-only.</a:t>
+              <a:t>At top 10%, expected-value ranking captures 45.3% of won revenue vs 34.8% with propensity-only.</a:t>
             </a:r>
           </a:p>
           <a:p>
             <a:pPr lvl="1"/>
             <a:r>
               <a:rPr/>
-              <a:t>At top 25%, the comparison is 70.9% vs 66.9%, so deal-size information matters most when capacity is tight.</a:t>
+              <a:t>At top 25%, the comparison is 71.7% vs 66.8%, so deal-size information matters most when capacity is tight.</a:t>
             </a:r>
           </a:p>
           <a:p>
@@ -7352,7 +7228,7 @@
             <a:pPr lvl="0"/>
             <a:r>
               <a:rPr/>
-              <a:t>We propose embedding this in the CRM to set clear thresholds (e.g., top 10% = high priority) and guide sales focus with a more economically relevant ranking than win propensity alone.</a:t>
+              <a:t>We propose to set clear thresholds (e.g., top 10% = high priority) and embed in the CRM to guide sales focus with a more economically relevant ranking than win propensity alone.</a:t>
             </a:r>
           </a:p>
         </p:txBody>
@@ -10918,7 +10794,7 @@
             </a:r>
             <a:r>
               <a:rPr b="1"/>
-              <a:t>logit_binned_ohe_balanced</a:t>
+              <a:t>logit_binned_ohe_balanced_calibrated</a:t>
             </a:r>
             <a:r>
               <a:rPr/>
@@ -11009,6 +10885,2404 @@
       </p:sp>
     </p:spTree>
   </p:cSld>
+</p:sld>
+</file>
+
+<file path=ppt/slides/slide34.xml><?xml version="1.0" encoding="utf-8"?>
+<p:sld xmlns:a="http://schemas.openxmlformats.org/drawingml/2006/main" xmlns:r="http://schemas.openxmlformats.org/officeDocument/2006/relationships" xmlns:p="http://schemas.openxmlformats.org/presentationml/2006/main">
+  <p:cSld>
+    <p:spTree>
+      <p:nvGrpSpPr>
+        <p:cNvPr id="1" name=""/>
+        <p:cNvGrpSpPr/>
+        <p:nvPr/>
+      </p:nvGrpSpPr>
+      <p:grpSpPr>
+        <a:xfrm>
+          <a:off x="0" y="0"/>
+          <a:ext cx="0" cy="0"/>
+          <a:chOff x="0" y="0"/>
+          <a:chExt cx="0" cy="0"/>
+        </a:xfrm>
+      </p:grpSpPr>
+      <p:sp>
+        <p:nvSpPr>
+          <p:cNvPr id="2" name="Title 1"/>
+          <p:cNvSpPr>
+            <a:spLocks noGrp="1"/>
+          </p:cNvSpPr>
+          <p:nvPr>
+            <p:ph type="title"/>
+          </p:nvPr>
+        </p:nvSpPr>
+        <p:spPr/>
+        <p:txBody>
+          <a:bodyPr/>
+          <a:lstStyle/>
+          <a:p>
+            <a:pPr lvl="0" indent="0" marL="0">
+              <a:buNone/>
+            </a:pPr>
+            <a:r>
+              <a:rPr/>
+              <a:t>Annex: calibration comparison for the selected classifier</a:t>
+            </a:r>
+          </a:p>
+        </p:txBody>
+      </p:sp>
+      <p:pic>
+        <p:nvPicPr>
+          <p:cNvPr descr="assets/annex_calibration_comparison.png" id="0" name="Picture 1"/>
+          <p:cNvPicPr>
+            <a:picLocks noGrp="1" noChangeAspect="1"/>
+          </p:cNvPicPr>
+          <p:nvPr/>
+        </p:nvPicPr>
+        <p:blipFill>
+          <a:blip r:embed="rId2"/>
+          <a:stretch>
+            <a:fillRect/>
+          </a:stretch>
+        </p:blipFill>
+        <p:spPr bwMode="auto">
+          <a:xfrm>
+            <a:off x="457200" y="1498600"/>
+            <a:ext cx="4038600" cy="2781300"/>
+          </a:xfrm>
+          <a:prstGeom prst="rect">
+            <a:avLst/>
+          </a:prstGeom>
+          <a:noFill/>
+          <a:ln w="9525">
+            <a:noFill/>
+            <a:headEnd/>
+            <a:tailEnd/>
+          </a:ln>
+        </p:spPr>
+      </p:pic>
+      <p:sp>
+        <p:nvSpPr>
+          <p:cNvPr id="4" name="Content Placeholder 3"/>
+          <p:cNvSpPr>
+            <a:spLocks noGrp="1"/>
+          </p:cNvSpPr>
+          <p:nvPr>
+            <p:ph idx="2" sz="half"/>
+          </p:nvPr>
+        </p:nvSpPr>
+        <p:spPr/>
+        <p:txBody>
+          <a:bodyPr/>
+          <a:lstStyle/>
+          <a:p>
+            <a:pPr lvl="0"/>
+            <a:r>
+              <a:rPr/>
+              <a:t>The calibrated and non-calibrated variants have almost identical ROC / PR ranking performance, but calibration changes how raw probabilities line up with observed win rates.</a:t>
+            </a:r>
+          </a:p>
+          <a:p>
+            <a:pPr lvl="0"/>
+            <a:r>
+              <a:rPr/>
+              <a:t>The calibrated curve tracks the 45-degree reference more closely through the middle probability range, which is the part used most often for thresholding and expected-value calculations.</a:t>
+            </a:r>
+          </a:p>
+          <a:p>
+            <a:pPr lvl="0"/>
+            <a:r>
+              <a:rPr/>
+              <a:t>This is why the calibrated model is now the deployment candidate: the ranking stays strong, while the probabilities are more usable downstream.</a:t>
+            </a:r>
+          </a:p>
+        </p:txBody>
+      </p:sp>
+    </p:spTree>
+  </p:cSld>
+  <p:timing>
+    <p:tnLst>
+      <p:par>
+        <p:cTn id="1" dur="indefinite" restart="never" nodeType="tmRoot">
+          <p:childTnLst>
+            <p:seq concurrent="1" nextAc="seek">
+              <p:cTn id="2" dur="indefinite" nodeType="mainSeq">
+                <p:childTnLst>
+                  <p:par>
+                    <p:cTn id="3" fill="hold">
+                      <p:stCondLst>
+                        <p:cond delay="indefinite"/>
+                      </p:stCondLst>
+                      <p:childTnLst>
+                        <p:par>
+                          <p:cTn id="4" fill="hold">
+                            <p:stCondLst>
+                              <p:cond delay="0"/>
+                            </p:stCondLst>
+                            <p:childTnLst>
+                              <p:par>
+                                <p:cTn id="5" presetID="1" presetClass="entr" presetSubtype="0" fill="hold" grpId="0" nodeType="clickEffect">
+                                  <p:stCondLst>
+                                    <p:cond delay="0"/>
+                                  </p:stCondLst>
+                                  <p:childTnLst>
+                                    <p:set>
+                                      <p:cBhvr>
+                                        <p:cTn id="6" dur="1" fill="hold">
+                                          <p:stCondLst>
+                                            <p:cond delay="0"/>
+                                          </p:stCondLst>
+                                        </p:cTn>
+                                        <p:tgtEl>
+                                          <p:spTgt spid="4">
+                                            <p:txEl>
+                                              <p:pRg st="0" end="0"/>
+                                            </p:txEl>
+                                          </p:spTgt>
+                                        </p:tgtEl>
+                                        <p:attrNameLst>
+                                          <p:attrName>style.visibility</p:attrName>
+                                        </p:attrNameLst>
+                                      </p:cBhvr>
+                                      <p:to>
+                                        <p:strVal val="visible"/>
+                                      </p:to>
+                                    </p:set>
+                                  </p:childTnLst>
+                                </p:cTn>
+                              </p:par>
+                            </p:childTnLst>
+                          </p:cTn>
+                        </p:par>
+                      </p:childTnLst>
+                    </p:cTn>
+                  </p:par>
+                  <p:par>
+                    <p:cTn id="7" fill="hold">
+                      <p:stCondLst>
+                        <p:cond delay="indefinite"/>
+                      </p:stCondLst>
+                      <p:childTnLst>
+                        <p:par>
+                          <p:cTn id="8" fill="hold">
+                            <p:stCondLst>
+                              <p:cond delay="0"/>
+                            </p:stCondLst>
+                            <p:childTnLst>
+                              <p:par>
+                                <p:cTn id="9" presetID="1" presetClass="entr" presetSubtype="0" fill="hold" grpId="0" nodeType="clickEffect">
+                                  <p:stCondLst>
+                                    <p:cond delay="0"/>
+                                  </p:stCondLst>
+                                  <p:childTnLst>
+                                    <p:set>
+                                      <p:cBhvr>
+                                        <p:cTn id="10" dur="1" fill="hold">
+                                          <p:stCondLst>
+                                            <p:cond delay="0"/>
+                                          </p:stCondLst>
+                                        </p:cTn>
+                                        <p:tgtEl>
+                                          <p:spTgt spid="4">
+                                            <p:txEl>
+                                              <p:pRg st="1" end="1"/>
+                                            </p:txEl>
+                                          </p:spTgt>
+                                        </p:tgtEl>
+                                        <p:attrNameLst>
+                                          <p:attrName>style.visibility</p:attrName>
+                                        </p:attrNameLst>
+                                      </p:cBhvr>
+                                      <p:to>
+                                        <p:strVal val="visible"/>
+                                      </p:to>
+                                    </p:set>
+                                  </p:childTnLst>
+                                </p:cTn>
+                              </p:par>
+                            </p:childTnLst>
+                          </p:cTn>
+                        </p:par>
+                      </p:childTnLst>
+                    </p:cTn>
+                  </p:par>
+                  <p:par>
+                    <p:cTn id="11" fill="hold">
+                      <p:stCondLst>
+                        <p:cond delay="indefinite"/>
+                      </p:stCondLst>
+                      <p:childTnLst>
+                        <p:par>
+                          <p:cTn id="12" fill="hold">
+                            <p:stCondLst>
+                              <p:cond delay="0"/>
+                            </p:stCondLst>
+                            <p:childTnLst>
+                              <p:par>
+                                <p:cTn id="13" presetID="1" presetClass="entr" presetSubtype="0" fill="hold" grpId="0" nodeType="clickEffect">
+                                  <p:stCondLst>
+                                    <p:cond delay="0"/>
+                                  </p:stCondLst>
+                                  <p:childTnLst>
+                                    <p:set>
+                                      <p:cBhvr>
+                                        <p:cTn id="14" dur="1" fill="hold">
+                                          <p:stCondLst>
+                                            <p:cond delay="0"/>
+                                          </p:stCondLst>
+                                        </p:cTn>
+                                        <p:tgtEl>
+                                          <p:spTgt spid="4">
+                                            <p:txEl>
+                                              <p:pRg st="2" end="2"/>
+                                            </p:txEl>
+                                          </p:spTgt>
+                                        </p:tgtEl>
+                                        <p:attrNameLst>
+                                          <p:attrName>style.visibility</p:attrName>
+                                        </p:attrNameLst>
+                                      </p:cBhvr>
+                                      <p:to>
+                                        <p:strVal val="visible"/>
+                                      </p:to>
+                                    </p:set>
+                                  </p:childTnLst>
+                                </p:cTn>
+                              </p:par>
+                            </p:childTnLst>
+                          </p:cTn>
+                        </p:par>
+                      </p:childTnLst>
+                    </p:cTn>
+                  </p:par>
+                </p:childTnLst>
+              </p:cTn>
+              <p:prevCondLst>
+                <p:cond evt="onPrev" delay="0">
+                  <p:tgtEl>
+                    <p:sldTgt/>
+                  </p:tgtEl>
+                </p:cond>
+              </p:prevCondLst>
+              <p:nextCondLst>
+                <p:cond evt="onNext" delay="0">
+                  <p:tgtEl>
+                    <p:sldTgt/>
+                  </p:tgtEl>
+                </p:cond>
+              </p:nextCondLst>
+            </p:seq>
+          </p:childTnLst>
+        </p:cTn>
+      </p:par>
+    </p:tnLst>
+    <p:bldLst>
+      <p:bldP spid="4" grpId="0" uiExpand="1" build="p"/>
+    </p:bldLst>
+  </p:timing>
+</p:sld>
+</file>
+
+<file path=ppt/slides/slide35.xml><?xml version="1.0" encoding="utf-8"?>
+<p:sld xmlns:a="http://schemas.openxmlformats.org/drawingml/2006/main" xmlns:r="http://schemas.openxmlformats.org/officeDocument/2006/relationships" xmlns:p="http://schemas.openxmlformats.org/presentationml/2006/main">
+  <p:cSld>
+    <p:spTree>
+      <p:nvGrpSpPr>
+        <p:cNvPr id="1" name=""/>
+        <p:cNvGrpSpPr/>
+        <p:nvPr/>
+      </p:nvGrpSpPr>
+      <p:grpSpPr>
+        <a:xfrm>
+          <a:off x="0" y="0"/>
+          <a:ext cx="0" cy="0"/>
+          <a:chOff x="0" y="0"/>
+          <a:chExt cx="0" cy="0"/>
+        </a:xfrm>
+      </p:grpSpPr>
+      <p:sp>
+        <p:nvSpPr>
+          <p:cNvPr id="2" name="Title 1"/>
+          <p:cNvSpPr>
+            <a:spLocks noGrp="1"/>
+          </p:cNvSpPr>
+          <p:nvPr>
+            <p:ph type="title"/>
+          </p:nvPr>
+        </p:nvSpPr>
+        <p:spPr/>
+        <p:txBody>
+          <a:bodyPr/>
+          <a:lstStyle/>
+          <a:p>
+            <a:pPr lvl="0" indent="0" marL="0">
+              <a:buNone/>
+            </a:pPr>
+            <a:r>
+              <a:rPr/>
+              <a:t>Annex: hold-out classification report at the selected model’s optimal threshold</a:t>
+            </a:r>
+          </a:p>
+        </p:txBody>
+      </p:sp>
+      <p:sp>
+        <p:nvSpPr>
+          <p:cNvPr id="3" name="Content Placeholder 2"/>
+          <p:cNvSpPr>
+            <a:spLocks noGrp="1"/>
+          </p:cNvSpPr>
+          <p:nvPr>
+            <p:ph idx="1"/>
+          </p:nvPr>
+        </p:nvSpPr>
+        <p:spPr/>
+        <p:txBody>
+          <a:bodyPr/>
+          <a:lstStyle/>
+          <a:p>
+            <a:pPr lvl="0" indent="0" marL="0">
+              <a:buNone/>
+            </a:pPr>
+            <a:r>
+              <a:rPr/>
+              <a:t>Threshold chosen on </a:t>
+            </a:r>
+            <a:r>
+              <a:rPr b="1"/>
+              <a:t>training out-of-fold predictions</a:t>
+            </a:r>
+            <a:r>
+              <a:rPr/>
+              <a:t> by maximizing </a:t>
+            </a:r>
+            <a:r>
+              <a:rPr b="1"/>
+              <a:t>F1</a:t>
+            </a:r>
+            <a:r>
+              <a:rPr/>
+              <a:t> for the selected model: </a:t>
+            </a:r>
+            <a:r>
+              <a:rPr b="1"/>
+              <a:t>31.4%</a:t>
+            </a:r>
+            <a:r>
+              <a:rPr/>
+              <a:t> predicted win probability.</a:t>
+            </a:r>
+          </a:p>
+          <a:p>
+            <a:pPr lvl="0" indent="0" marL="0">
+              <a:buNone/>
+            </a:pPr>
+            <a:r>
+              <a:rPr/>
+              <a:t>Diagnostic note: the threshold is selected on train-side OOF predictions, then evaluated once on the untouched hold-out set shown here.</a:t>
+            </a:r>
+          </a:p>
+        </p:txBody>
+      </p:sp>
+    </p:spTree>
+  </p:cSld>
+</p:sld>
+</file>
+
+<file path=ppt/slides/slide36.xml><?xml version="1.0" encoding="utf-8"?>
+<p:sld xmlns:a="http://schemas.openxmlformats.org/drawingml/2006/main" xmlns:r="http://schemas.openxmlformats.org/officeDocument/2006/relationships" xmlns:p="http://schemas.openxmlformats.org/presentationml/2006/main">
+  <p:cSld>
+    <p:spTree>
+      <p:nvGrpSpPr>
+        <p:cNvPr id="1" name=""/>
+        <p:cNvGrpSpPr/>
+        <p:nvPr/>
+      </p:nvGrpSpPr>
+      <p:grpSpPr>
+        <a:xfrm>
+          <a:off x="0" y="0"/>
+          <a:ext cx="0" cy="0"/>
+          <a:chOff x="0" y="0"/>
+          <a:chExt cx="0" cy="0"/>
+        </a:xfrm>
+      </p:grpSpPr>
+      <p:sp>
+        <p:nvSpPr>
+          <p:cNvPr id="2" name="Title 1"/>
+          <p:cNvSpPr>
+            <a:spLocks noGrp="1"/>
+          </p:cNvSpPr>
+          <p:nvPr>
+            <p:ph type="title"/>
+          </p:nvPr>
+        </p:nvSpPr>
+        <p:spPr/>
+        <p:txBody>
+          <a:bodyPr/>
+          <a:lstStyle/>
+          <a:p>
+            <a:pPr lvl="0" indent="0" marL="0">
+              <a:buNone/>
+            </a:pPr>
+            <a:r>
+              <a:rPr/>
+              <a:t>Annex: regression error by amount bin on the hold-out set</a:t>
+            </a:r>
+          </a:p>
+        </p:txBody>
+      </p:sp>
+      <p:pic>
+        <p:nvPicPr>
+          <p:cNvPr descr="assets/annex_regression_error_bins.png" id="0" name="Picture 1"/>
+          <p:cNvPicPr>
+            <a:picLocks noGrp="1" noChangeAspect="1"/>
+          </p:cNvPicPr>
+          <p:nvPr/>
+        </p:nvPicPr>
+        <p:blipFill>
+          <a:blip r:embed="rId2"/>
+          <a:stretch>
+            <a:fillRect/>
+          </a:stretch>
+        </p:blipFill>
+        <p:spPr bwMode="auto">
+          <a:xfrm>
+            <a:off x="457200" y="1206500"/>
+            <a:ext cx="4038600" cy="3352800"/>
+          </a:xfrm>
+          <a:prstGeom prst="rect">
+            <a:avLst/>
+          </a:prstGeom>
+          <a:noFill/>
+          <a:ln w="9525">
+            <a:noFill/>
+            <a:headEnd/>
+            <a:tailEnd/>
+          </a:ln>
+        </p:spPr>
+      </p:pic>
+      <p:sp>
+        <p:nvSpPr>
+          <p:cNvPr id="4" name="Content Placeholder 3"/>
+          <p:cNvSpPr>
+            <a:spLocks noGrp="1"/>
+          </p:cNvSpPr>
+          <p:nvPr>
+            <p:ph idx="2" sz="half"/>
+          </p:nvPr>
+        </p:nvSpPr>
+        <p:spPr/>
+        <p:txBody>
+          <a:bodyPr/>
+          <a:lstStyle/>
+          <a:p>
+            <a:pPr lvl="0"/>
+            <a:r>
+              <a:rPr/>
+              <a:t>The comparison shows where model error changes most across deal-size bands, instead of averaging everything into one MAE figure.</a:t>
+            </a:r>
+          </a:p>
+          <a:p>
+            <a:pPr lvl="0"/>
+            <a:r>
+              <a:rPr b="1"/>
+              <a:t>XGBoost</a:t>
+            </a:r>
+            <a:r>
+              <a:rPr/>
+              <a:t> is strongest on aggregate, but the transformed linear variants remain competitive in smaller bins.</a:t>
+            </a:r>
+          </a:p>
+          <a:p>
+            <a:pPr lvl="0"/>
+            <a:r>
+              <a:rPr/>
+              <a:t>The log-transform and power-transform variants reduce relative error in lower-value bands, while absolute error still rises materially for the largest opportunities.</a:t>
+            </a:r>
+          </a:p>
+        </p:txBody>
+      </p:sp>
+    </p:spTree>
+  </p:cSld>
+  <p:timing>
+    <p:tnLst>
+      <p:par>
+        <p:cTn id="1" dur="indefinite" restart="never" nodeType="tmRoot">
+          <p:childTnLst>
+            <p:seq concurrent="1" nextAc="seek">
+              <p:cTn id="2" dur="indefinite" nodeType="mainSeq">
+                <p:childTnLst>
+                  <p:par>
+                    <p:cTn id="3" fill="hold">
+                      <p:stCondLst>
+                        <p:cond delay="indefinite"/>
+                      </p:stCondLst>
+                      <p:childTnLst>
+                        <p:par>
+                          <p:cTn id="4" fill="hold">
+                            <p:stCondLst>
+                              <p:cond delay="0"/>
+                            </p:stCondLst>
+                            <p:childTnLst>
+                              <p:par>
+                                <p:cTn id="5" presetID="1" presetClass="entr" presetSubtype="0" fill="hold" grpId="0" nodeType="clickEffect">
+                                  <p:stCondLst>
+                                    <p:cond delay="0"/>
+                                  </p:stCondLst>
+                                  <p:childTnLst>
+                                    <p:set>
+                                      <p:cBhvr>
+                                        <p:cTn id="6" dur="1" fill="hold">
+                                          <p:stCondLst>
+                                            <p:cond delay="0"/>
+                                          </p:stCondLst>
+                                        </p:cTn>
+                                        <p:tgtEl>
+                                          <p:spTgt spid="4">
+                                            <p:txEl>
+                                              <p:pRg st="0" end="0"/>
+                                            </p:txEl>
+                                          </p:spTgt>
+                                        </p:tgtEl>
+                                        <p:attrNameLst>
+                                          <p:attrName>style.visibility</p:attrName>
+                                        </p:attrNameLst>
+                                      </p:cBhvr>
+                                      <p:to>
+                                        <p:strVal val="visible"/>
+                                      </p:to>
+                                    </p:set>
+                                  </p:childTnLst>
+                                </p:cTn>
+                              </p:par>
+                            </p:childTnLst>
+                          </p:cTn>
+                        </p:par>
+                      </p:childTnLst>
+                    </p:cTn>
+                  </p:par>
+                  <p:par>
+                    <p:cTn id="7" fill="hold">
+                      <p:stCondLst>
+                        <p:cond delay="indefinite"/>
+                      </p:stCondLst>
+                      <p:childTnLst>
+                        <p:par>
+                          <p:cTn id="8" fill="hold">
+                            <p:stCondLst>
+                              <p:cond delay="0"/>
+                            </p:stCondLst>
+                            <p:childTnLst>
+                              <p:par>
+                                <p:cTn id="9" presetID="1" presetClass="entr" presetSubtype="0" fill="hold" grpId="0" nodeType="clickEffect">
+                                  <p:stCondLst>
+                                    <p:cond delay="0"/>
+                                  </p:stCondLst>
+                                  <p:childTnLst>
+                                    <p:set>
+                                      <p:cBhvr>
+                                        <p:cTn id="10" dur="1" fill="hold">
+                                          <p:stCondLst>
+                                            <p:cond delay="0"/>
+                                          </p:stCondLst>
+                                        </p:cTn>
+                                        <p:tgtEl>
+                                          <p:spTgt spid="4">
+                                            <p:txEl>
+                                              <p:pRg st="1" end="1"/>
+                                            </p:txEl>
+                                          </p:spTgt>
+                                        </p:tgtEl>
+                                        <p:attrNameLst>
+                                          <p:attrName>style.visibility</p:attrName>
+                                        </p:attrNameLst>
+                                      </p:cBhvr>
+                                      <p:to>
+                                        <p:strVal val="visible"/>
+                                      </p:to>
+                                    </p:set>
+                                  </p:childTnLst>
+                                </p:cTn>
+                              </p:par>
+                            </p:childTnLst>
+                          </p:cTn>
+                        </p:par>
+                      </p:childTnLst>
+                    </p:cTn>
+                  </p:par>
+                  <p:par>
+                    <p:cTn id="11" fill="hold">
+                      <p:stCondLst>
+                        <p:cond delay="indefinite"/>
+                      </p:stCondLst>
+                      <p:childTnLst>
+                        <p:par>
+                          <p:cTn id="12" fill="hold">
+                            <p:stCondLst>
+                              <p:cond delay="0"/>
+                            </p:stCondLst>
+                            <p:childTnLst>
+                              <p:par>
+                                <p:cTn id="13" presetID="1" presetClass="entr" presetSubtype="0" fill="hold" grpId="0" nodeType="clickEffect">
+                                  <p:stCondLst>
+                                    <p:cond delay="0"/>
+                                  </p:stCondLst>
+                                  <p:childTnLst>
+                                    <p:set>
+                                      <p:cBhvr>
+                                        <p:cTn id="14" dur="1" fill="hold">
+                                          <p:stCondLst>
+                                            <p:cond delay="0"/>
+                                          </p:stCondLst>
+                                        </p:cTn>
+                                        <p:tgtEl>
+                                          <p:spTgt spid="4">
+                                            <p:txEl>
+                                              <p:pRg st="2" end="2"/>
+                                            </p:txEl>
+                                          </p:spTgt>
+                                        </p:tgtEl>
+                                        <p:attrNameLst>
+                                          <p:attrName>style.visibility</p:attrName>
+                                        </p:attrNameLst>
+                                      </p:cBhvr>
+                                      <p:to>
+                                        <p:strVal val="visible"/>
+                                      </p:to>
+                                    </p:set>
+                                  </p:childTnLst>
+                                </p:cTn>
+                              </p:par>
+                            </p:childTnLst>
+                          </p:cTn>
+                        </p:par>
+                      </p:childTnLst>
+                    </p:cTn>
+                  </p:par>
+                </p:childTnLst>
+              </p:cTn>
+              <p:prevCondLst>
+                <p:cond evt="onPrev" delay="0">
+                  <p:tgtEl>
+                    <p:sldTgt/>
+                  </p:tgtEl>
+                </p:cond>
+              </p:prevCondLst>
+              <p:nextCondLst>
+                <p:cond evt="onNext" delay="0">
+                  <p:tgtEl>
+                    <p:sldTgt/>
+                  </p:tgtEl>
+                </p:cond>
+              </p:nextCondLst>
+            </p:seq>
+          </p:childTnLst>
+        </p:cTn>
+      </p:par>
+    </p:tnLst>
+    <p:bldLst>
+      <p:bldP spid="4" grpId="0" uiExpand="1" build="p"/>
+    </p:bldLst>
+  </p:timing>
+</p:sld>
+</file>
+
+<file path=ppt/slides/slide37.xml><?xml version="1.0" encoding="utf-8"?>
+<p:sld xmlns:a="http://schemas.openxmlformats.org/drawingml/2006/main" xmlns:r="http://schemas.openxmlformats.org/officeDocument/2006/relationships" xmlns:p="http://schemas.openxmlformats.org/presentationml/2006/main">
+  <p:cSld>
+    <p:spTree>
+      <p:nvGrpSpPr>
+        <p:cNvPr id="1" name=""/>
+        <p:cNvGrpSpPr/>
+        <p:nvPr/>
+      </p:nvGrpSpPr>
+      <p:grpSpPr>
+        <a:xfrm>
+          <a:off x="0" y="0"/>
+          <a:ext cx="0" cy="0"/>
+          <a:chOff x="0" y="0"/>
+          <a:chExt cx="0" cy="0"/>
+        </a:xfrm>
+      </p:grpSpPr>
+      <p:sp>
+        <p:nvSpPr>
+          <p:cNvPr id="2" name="Title 1"/>
+          <p:cNvSpPr>
+            <a:spLocks noGrp="1"/>
+          </p:cNvSpPr>
+          <p:nvPr>
+            <p:ph type="title"/>
+          </p:nvPr>
+        </p:nvSpPr>
+        <p:spPr/>
+        <p:txBody>
+          <a:bodyPr/>
+          <a:lstStyle/>
+          <a:p>
+            <a:pPr lvl="0" indent="0" marL="0">
+              <a:buNone/>
+            </a:pPr>
+            <a:r>
+              <a:rPr/>
+              <a:t>Annex: incremental revenue from effort reallocation on the hold-out set</a:t>
+            </a:r>
+          </a:p>
+        </p:txBody>
+      </p:sp>
+      <p:sp>
+        <p:nvSpPr>
+          <p:cNvPr id="3" name="Content Placeholder 2"/>
+          <p:cNvSpPr>
+            <a:spLocks noGrp="1"/>
+          </p:cNvSpPr>
+          <p:nvPr>
+            <p:ph idx="1"/>
+          </p:nvPr>
+        </p:nvSpPr>
+        <p:spPr/>
+        <p:txBody>
+          <a:bodyPr/>
+          <a:lstStyle/>
+          <a:p>
+            <a:pPr lvl="0" indent="0" marL="0">
+              <a:buNone/>
+            </a:pPr>
+            <a:r>
+              <a:rPr/>
+              <a:t>Baseline conversion across the hold-out set: </a:t>
+            </a:r>
+            <a:r>
+              <a:rPr b="1"/>
+              <a:t>overall win rate = 22.7%</a:t>
+            </a:r>
+            <a:r>
+              <a:rPr/>
+              <a:t>.</a:t>
+            </a:r>
+          </a:p>
+          <a:p>
+            <a:pPr lvl="0" indent="0" marL="0">
+              <a:buNone/>
+            </a:pPr>
+            <a:r>
+              <a:rPr b="1"/>
+              <a:t>Expected-value ranking</a:t>
+            </a:r>
+            <a:r>
+              <a:rPr/>
+              <a:t> (</a:t>
+            </a:r>
+            <a:r>
+              <a:rPr>
+                <a:latin typeface="Courier"/>
+              </a:rPr>
+              <a:t>predicted win probability × realized amount</a:t>
+            </a:r>
+            <a:r>
+              <a:rPr/>
+              <a:t>)</a:t>
+            </a:r>
+          </a:p>
+          <a:p>
+            <a:pPr lvl="0" indent="0" marL="0">
+              <a:buNone/>
+            </a:pPr>
+            <a:r>
+              <a:rPr b="1"/>
+              <a:t>Probability-only ranking</a:t>
+            </a:r>
+            <a:r>
+              <a:rPr/>
+              <a:t> (</a:t>
+            </a:r>
+            <a:r>
+              <a:rPr>
+                <a:latin typeface="Courier"/>
+              </a:rPr>
+              <a:t>y_proba</a:t>
+            </a:r>
+            <a:r>
+              <a:rPr/>
+              <a:t>)</a:t>
+            </a:r>
+          </a:p>
+          <a:p>
+            <a:pPr lvl="0"/>
+            <a:r>
+              <a:rPr b="1"/>
+              <a:t>Top 10%</a:t>
+            </a:r>
+            <a:r>
+              <a:rPr/>
+              <a:t>: EV ranking leads by </a:t>
+            </a:r>
+            <a:r>
+              <a:rPr b="1"/>
+              <a:t>+8.6M</a:t>
+            </a:r>
+            <a:r>
+              <a:rPr/>
+              <a:t> incremental revenue at the base assumption (</a:t>
+            </a:r>
+            <a:r>
+              <a:rPr>
+                <a:latin typeface="Courier"/>
+              </a:rPr>
+              <a:t>λ = 0.3</a:t>
+            </a:r>
+            <a:r>
+              <a:rPr/>
+              <a:t>), because the top slice concentrates much more forecasted value even though its win rate is lower than the probability-only slice.</a:t>
+            </a:r>
+          </a:p>
+          <a:p>
+            <a:pPr lvl="0"/>
+            <a:r>
+              <a:rPr b="1"/>
+              <a:t>Top 25%</a:t>
+            </a:r>
+            <a:r>
+              <a:rPr/>
+              <a:t>: EV ranking still leads by </a:t>
+            </a:r>
+            <a:r>
+              <a:rPr b="1"/>
+              <a:t>+5.3M</a:t>
+            </a:r>
+            <a:r>
+              <a:rPr/>
+              <a:t> at the base assumption, showing that forecasted amount continues to matter once the slice widens.</a:t>
+            </a:r>
+          </a:p>
+          <a:p>
+            <a:pPr lvl="0"/>
+            <a:r>
+              <a:rPr b="1"/>
+              <a:t>Top 50%</a:t>
+            </a:r>
+            <a:r>
+              <a:rPr/>
+              <a:t>: EV ranking leads by </a:t>
+            </a:r>
+            <a:r>
+              <a:rPr b="1"/>
+              <a:t>+2.7M</a:t>
+            </a:r>
+            <a:r>
+              <a:rPr/>
+              <a:t> at the base assumption; the two strategies become much closer once coverage broadens.</a:t>
+            </a:r>
+          </a:p>
+          <a:p>
+            <a:pPr lvl="0" indent="0" marL="0">
+              <a:buNone/>
+            </a:pPr>
+            <a:r>
+              <a:rPr/>
+              <a:t>Interpretation note: this is still a </a:t>
+            </a:r>
+            <a:r>
+              <a:rPr b="1"/>
+              <a:t>scenario-sizing exercise</a:t>
+            </a:r>
+            <a:r>
+              <a:rPr/>
+              <a:t>, but it is now closer to an operational story: ranking uses forecasted amount, and the intervention is modeled as an additive improvement in segment win rate rather than a multiplicative probability shock.</a:t>
+            </a:r>
+          </a:p>
+        </p:txBody>
+      </p:sp>
+    </p:spTree>
+  </p:cSld>
+  <p:timing>
+    <p:tnLst>
+      <p:par>
+        <p:cTn id="1" dur="indefinite" restart="never" nodeType="tmRoot">
+          <p:childTnLst>
+            <p:seq concurrent="1" nextAc="seek">
+              <p:cTn id="2" dur="indefinite" nodeType="mainSeq">
+                <p:childTnLst>
+                  <p:par>
+                    <p:cTn id="3" fill="hold">
+                      <p:stCondLst>
+                        <p:cond delay="indefinite"/>
+                      </p:stCondLst>
+                      <p:childTnLst>
+                        <p:par>
+                          <p:cTn id="4" fill="hold">
+                            <p:stCondLst>
+                              <p:cond delay="0"/>
+                            </p:stCondLst>
+                            <p:childTnLst>
+                              <p:par>
+                                <p:cTn id="5" presetID="1" presetClass="entr" presetSubtype="0" fill="hold" grpId="0" nodeType="clickEffect">
+                                  <p:stCondLst>
+                                    <p:cond delay="0"/>
+                                  </p:stCondLst>
+                                  <p:childTnLst>
+                                    <p:set>
+                                      <p:cBhvr>
+                                        <p:cTn id="6" dur="1" fill="hold">
+                                          <p:stCondLst>
+                                            <p:cond delay="0"/>
+                                          </p:stCondLst>
+                                        </p:cTn>
+                                        <p:tgtEl>
+                                          <p:spTgt spid="3">
+                                            <p:txEl>
+                                              <p:pRg st="3" end="3"/>
+                                            </p:txEl>
+                                          </p:spTgt>
+                                        </p:tgtEl>
+                                        <p:attrNameLst>
+                                          <p:attrName>style.visibility</p:attrName>
+                                        </p:attrNameLst>
+                                      </p:cBhvr>
+                                      <p:to>
+                                        <p:strVal val="visible"/>
+                                      </p:to>
+                                    </p:set>
+                                  </p:childTnLst>
+                                </p:cTn>
+                              </p:par>
+                            </p:childTnLst>
+                          </p:cTn>
+                        </p:par>
+                      </p:childTnLst>
+                    </p:cTn>
+                  </p:par>
+                  <p:par>
+                    <p:cTn id="7" fill="hold">
+                      <p:stCondLst>
+                        <p:cond delay="indefinite"/>
+                      </p:stCondLst>
+                      <p:childTnLst>
+                        <p:par>
+                          <p:cTn id="8" fill="hold">
+                            <p:stCondLst>
+                              <p:cond delay="0"/>
+                            </p:stCondLst>
+                            <p:childTnLst>
+                              <p:par>
+                                <p:cTn id="9" presetID="1" presetClass="entr" presetSubtype="0" fill="hold" grpId="0" nodeType="clickEffect">
+                                  <p:stCondLst>
+                                    <p:cond delay="0"/>
+                                  </p:stCondLst>
+                                  <p:childTnLst>
+                                    <p:set>
+                                      <p:cBhvr>
+                                        <p:cTn id="10" dur="1" fill="hold">
+                                          <p:stCondLst>
+                                            <p:cond delay="0"/>
+                                          </p:stCondLst>
+                                        </p:cTn>
+                                        <p:tgtEl>
+                                          <p:spTgt spid="3">
+                                            <p:txEl>
+                                              <p:pRg st="4" end="4"/>
+                                            </p:txEl>
+                                          </p:spTgt>
+                                        </p:tgtEl>
+                                        <p:attrNameLst>
+                                          <p:attrName>style.visibility</p:attrName>
+                                        </p:attrNameLst>
+                                      </p:cBhvr>
+                                      <p:to>
+                                        <p:strVal val="visible"/>
+                                      </p:to>
+                                    </p:set>
+                                  </p:childTnLst>
+                                </p:cTn>
+                              </p:par>
+                            </p:childTnLst>
+                          </p:cTn>
+                        </p:par>
+                      </p:childTnLst>
+                    </p:cTn>
+                  </p:par>
+                  <p:par>
+                    <p:cTn id="11" fill="hold">
+                      <p:stCondLst>
+                        <p:cond delay="indefinite"/>
+                      </p:stCondLst>
+                      <p:childTnLst>
+                        <p:par>
+                          <p:cTn id="12" fill="hold">
+                            <p:stCondLst>
+                              <p:cond delay="0"/>
+                            </p:stCondLst>
+                            <p:childTnLst>
+                              <p:par>
+                                <p:cTn id="13" presetID="1" presetClass="entr" presetSubtype="0" fill="hold" grpId="0" nodeType="clickEffect">
+                                  <p:stCondLst>
+                                    <p:cond delay="0"/>
+                                  </p:stCondLst>
+                                  <p:childTnLst>
+                                    <p:set>
+                                      <p:cBhvr>
+                                        <p:cTn id="14" dur="1" fill="hold">
+                                          <p:stCondLst>
+                                            <p:cond delay="0"/>
+                                          </p:stCondLst>
+                                        </p:cTn>
+                                        <p:tgtEl>
+                                          <p:spTgt spid="3">
+                                            <p:txEl>
+                                              <p:pRg st="5" end="5"/>
+                                            </p:txEl>
+                                          </p:spTgt>
+                                        </p:tgtEl>
+                                        <p:attrNameLst>
+                                          <p:attrName>style.visibility</p:attrName>
+                                        </p:attrNameLst>
+                                      </p:cBhvr>
+                                      <p:to>
+                                        <p:strVal val="visible"/>
+                                      </p:to>
+                                    </p:set>
+                                  </p:childTnLst>
+                                </p:cTn>
+                              </p:par>
+                            </p:childTnLst>
+                          </p:cTn>
+                        </p:par>
+                      </p:childTnLst>
+                    </p:cTn>
+                  </p:par>
+                </p:childTnLst>
+              </p:cTn>
+              <p:prevCondLst>
+                <p:cond evt="onPrev" delay="0">
+                  <p:tgtEl>
+                    <p:sldTgt/>
+                  </p:tgtEl>
+                </p:cond>
+              </p:prevCondLst>
+              <p:nextCondLst>
+                <p:cond evt="onNext" delay="0">
+                  <p:tgtEl>
+                    <p:sldTgt/>
+                  </p:tgtEl>
+                </p:cond>
+              </p:nextCondLst>
+            </p:seq>
+          </p:childTnLst>
+        </p:cTn>
+      </p:par>
+    </p:tnLst>
+    <p:bldLst>
+      <p:bldP spid="3" grpId="0" uiExpand="1" build="p"/>
+    </p:bldLst>
+  </p:timing>
+</p:sld>
+</file>
+
+<file path=ppt/slides/slide38.xml><?xml version="1.0" encoding="utf-8"?>
+<p:sld xmlns:a="http://schemas.openxmlformats.org/drawingml/2006/main" xmlns:r="http://schemas.openxmlformats.org/officeDocument/2006/relationships" xmlns:p="http://schemas.openxmlformats.org/presentationml/2006/main">
+  <p:cSld>
+    <p:spTree>
+      <p:nvGrpSpPr>
+        <p:cNvPr id="1" name=""/>
+        <p:cNvGrpSpPr/>
+        <p:nvPr/>
+      </p:nvGrpSpPr>
+      <p:grpSpPr>
+        <a:xfrm>
+          <a:off x="0" y="0"/>
+          <a:ext cx="0" cy="0"/>
+          <a:chOff x="0" y="0"/>
+          <a:chExt cx="0" cy="0"/>
+        </a:xfrm>
+      </p:grpSpPr>
+      <p:sp>
+        <p:nvSpPr>
+          <p:cNvPr id="2" name="Title 1"/>
+          <p:cNvSpPr>
+            <a:spLocks noGrp="1"/>
+          </p:cNvSpPr>
+          <p:nvPr>
+            <p:ph type="title"/>
+          </p:nvPr>
+        </p:nvSpPr>
+        <p:spPr/>
+        <p:txBody>
+          <a:bodyPr/>
+          <a:lstStyle/>
+          <a:p>
+            <a:pPr lvl="0" indent="0" marL="0">
+              <a:buNone/>
+            </a:pPr>
+            <a:r>
+              <a:rPr/>
+              <a:t>Annex: methodology behind the incremental revenue sizing exercise</a:t>
+            </a:r>
+          </a:p>
+        </p:txBody>
+      </p:sp>
+      <p:sp>
+        <p:nvSpPr>
+          <p:cNvPr id="3" name="Content Placeholder 2"/>
+          <p:cNvSpPr>
+            <a:spLocks noGrp="1"/>
+          </p:cNvSpPr>
+          <p:nvPr>
+            <p:ph idx="1" sz="half"/>
+          </p:nvPr>
+        </p:nvSpPr>
+        <p:spPr/>
+        <p:txBody>
+          <a:bodyPr/>
+          <a:lstStyle/>
+          <a:p>
+            <a:pPr lvl="0"/>
+            <a:r>
+              <a:rPr/>
+              <a:t>Start from the </a:t>
+            </a:r>
+            <a:r>
+              <a:rPr b="1"/>
+              <a:t>hold-out test set</a:t>
+            </a:r>
+            <a:r>
+              <a:rPr/>
+              <a:t> and define the portfolio baseline as the overall observed win rate.</a:t>
+            </a:r>
+          </a:p>
+          <a:p>
+            <a:pPr lvl="0"/>
+            <a:r>
+              <a:rPr/>
+              <a:t>Create two ranking rules:</a:t>
+            </a:r>
+          </a:p>
+          <a:p>
+            <a:pPr lvl="1"/>
+            <a:r>
+              <a:rPr b="1"/>
+              <a:t>Expected-value ranking</a:t>
+            </a:r>
+            <a:r>
+              <a:rPr/>
+              <a:t> = predicted win probability × forecasted amount</a:t>
+            </a:r>
+          </a:p>
+          <a:p>
+            <a:pPr lvl="1"/>
+            <a:r>
+              <a:rPr b="1"/>
+              <a:t>Probability-only ranking</a:t>
+            </a:r>
+            <a:r>
+              <a:rPr/>
+              <a:t> = predicted win probability</a:t>
+            </a:r>
+          </a:p>
+          <a:p>
+            <a:pPr lvl="0"/>
+            <a:r>
+              <a:rPr/>
+              <a:t>For each cutoff (</a:t>
+            </a:r>
+            <a:r>
+              <a:rPr b="1"/>
+              <a:t>10%, 25%, 50%</a:t>
+            </a:r>
+            <a:r>
+              <a:rPr/>
+              <a:t>), keep only the top-ranked slice and measure:</a:t>
+            </a:r>
+          </a:p>
+          <a:p>
+            <a:pPr lvl="1"/>
+            <a:r>
+              <a:rPr/>
+              <a:t>number of opportunities in the slice</a:t>
+            </a:r>
+          </a:p>
+          <a:p>
+            <a:pPr lvl="1"/>
+            <a:r>
+              <a:rPr/>
+              <a:t>forecasted amount already sitting inside that slice</a:t>
+            </a:r>
+          </a:p>
+          <a:p>
+            <a:pPr lvl="1"/>
+            <a:r>
+              <a:rPr/>
+              <a:t>observed conversion rate in that slice</a:t>
+            </a:r>
+          </a:p>
+          <a:p>
+            <a:pPr lvl="0"/>
+            <a:r>
+              <a:rPr/>
+              <a:t>Compute the </a:t>
+            </a:r>
+            <a:r>
+              <a:rPr b="1"/>
+              <a:t>conversion lift vs the portfolio baseline</a:t>
+            </a:r>
+            <a:r>
+              <a:rPr/>
+              <a:t>.</a:t>
+            </a:r>
+          </a:p>
+        </p:txBody>
+      </p:sp>
+      <p:sp>
+        <p:nvSpPr>
+          <p:cNvPr id="4" name="Content Placeholder 3"/>
+          <p:cNvSpPr>
+            <a:spLocks noGrp="1"/>
+          </p:cNvSpPr>
+          <p:nvPr>
+            <p:ph idx="2" sz="half"/>
+          </p:nvPr>
+        </p:nvSpPr>
+        <p:spPr/>
+        <p:txBody>
+          <a:bodyPr/>
+          <a:lstStyle/>
+          <a:p>
+            <a:pPr lvl="0"/>
+            <a:r>
+              <a:rPr/>
+              <a:t>Translate that conversion lift into a revenue estimate by assuming sales action adds a </a:t>
+            </a:r>
+            <a:r>
+              <a:rPr b="1"/>
+              <a:t>win-rate bonus</a:t>
+            </a:r>
+            <a:r>
+              <a:rPr/>
+              <a:t> to the selected segment.</a:t>
+            </a:r>
+          </a:p>
+          <a:p>
+            <a:pPr lvl="0"/>
+            <a:r>
+              <a:rPr/>
+              <a:t>The bonus is defined as a fraction of the observed conversion lift:</a:t>
+            </a:r>
+          </a:p>
+          <a:p>
+            <a:pPr lvl="1"/>
+            <a:r>
+              <a:rPr b="1"/>
+              <a:t>conservative</a:t>
+            </a:r>
+            <a:r>
+              <a:rPr/>
+              <a:t>: recover </a:t>
+            </a:r>
+            <a:r>
+              <a:rPr b="1"/>
+              <a:t>20%</a:t>
+            </a:r>
+            <a:r>
+              <a:rPr/>
+              <a:t> of that advantage</a:t>
+            </a:r>
+          </a:p>
+          <a:p>
+            <a:pPr lvl="1"/>
+            <a:r>
+              <a:rPr b="1"/>
+              <a:t>base</a:t>
+            </a:r>
+            <a:r>
+              <a:rPr/>
+              <a:t>: recover </a:t>
+            </a:r>
+            <a:r>
+              <a:rPr b="1"/>
+              <a:t>30%</a:t>
+            </a:r>
+          </a:p>
+          <a:p>
+            <a:pPr lvl="1"/>
+            <a:r>
+              <a:rPr b="1"/>
+              <a:t>aggressive</a:t>
+            </a:r>
+            <a:r>
+              <a:rPr/>
+              <a:t>: recover </a:t>
+            </a:r>
+            <a:r>
+              <a:rPr b="1"/>
+              <a:t>40%</a:t>
+            </a:r>
+          </a:p>
+          <a:p>
+            <a:pPr lvl="0"/>
+            <a:r>
+              <a:rPr/>
+              <a:t>Incremental revenue is then estimated as:</a:t>
+            </a:r>
+          </a:p>
+          <a:p>
+            <a:pPr lvl="1" indent="0" marL="342900">
+              <a:buNone/>
+            </a:pPr>
+            <a:r>
+              <a:rPr b="1"/>
+              <a:t>forecasted amount inside the slice × win-rate bonus</a:t>
+            </a:r>
+          </a:p>
+          <a:p>
+            <a:pPr lvl="0"/>
+            <a:r>
+              <a:rPr/>
+              <a:t>This is a </a:t>
+            </a:r>
+            <a:r>
+              <a:rPr b="1"/>
+              <a:t>sizing heuristic</a:t>
+            </a:r>
+            <a:r>
+              <a:rPr/>
+              <a:t>, not a causal estimate:</a:t>
+            </a:r>
+          </a:p>
+          <a:p>
+            <a:pPr lvl="1"/>
+            <a:r>
+              <a:rPr/>
+              <a:t>it assumes sales effort can recover part of the observed conversion gap</a:t>
+            </a:r>
+          </a:p>
+          <a:p>
+            <a:pPr lvl="1"/>
+            <a:r>
+              <a:rPr/>
+              <a:t>it uses hold-out forecasted amounts rather than realized future deal outcomes</a:t>
+            </a:r>
+          </a:p>
+          <a:p>
+            <a:pPr lvl="1"/>
+            <a:r>
+              <a:rPr/>
+              <a:t>it is best read as a way to compare ranking policies under the same assumptions</a:t>
+            </a:r>
+          </a:p>
+        </p:txBody>
+      </p:sp>
+    </p:spTree>
+  </p:cSld>
+  <p:timing>
+    <p:tnLst>
+      <p:par>
+        <p:cTn id="1" dur="indefinite" restart="never" nodeType="tmRoot">
+          <p:childTnLst>
+            <p:seq concurrent="1" nextAc="seek">
+              <p:cTn id="2" dur="indefinite" nodeType="mainSeq">
+                <p:childTnLst>
+                  <p:par>
+                    <p:cTn id="3" fill="hold">
+                      <p:stCondLst>
+                        <p:cond delay="indefinite"/>
+                      </p:stCondLst>
+                      <p:childTnLst>
+                        <p:par>
+                          <p:cTn id="4" fill="hold">
+                            <p:stCondLst>
+                              <p:cond delay="0"/>
+                            </p:stCondLst>
+                            <p:childTnLst>
+                              <p:par>
+                                <p:cTn id="5" presetID="1" presetClass="entr" presetSubtype="0" fill="hold" grpId="0" nodeType="clickEffect">
+                                  <p:stCondLst>
+                                    <p:cond delay="0"/>
+                                  </p:stCondLst>
+                                  <p:childTnLst>
+                                    <p:set>
+                                      <p:cBhvr>
+                                        <p:cTn id="6" dur="1" fill="hold">
+                                          <p:stCondLst>
+                                            <p:cond delay="0"/>
+                                          </p:stCondLst>
+                                        </p:cTn>
+                                        <p:tgtEl>
+                                          <p:spTgt spid="3">
+                                            <p:txEl>
+                                              <p:pRg st="0" end="0"/>
+                                            </p:txEl>
+                                          </p:spTgt>
+                                        </p:tgtEl>
+                                        <p:attrNameLst>
+                                          <p:attrName>style.visibility</p:attrName>
+                                        </p:attrNameLst>
+                                      </p:cBhvr>
+                                      <p:to>
+                                        <p:strVal val="visible"/>
+                                      </p:to>
+                                    </p:set>
+                                  </p:childTnLst>
+                                </p:cTn>
+                              </p:par>
+                            </p:childTnLst>
+                          </p:cTn>
+                        </p:par>
+                      </p:childTnLst>
+                    </p:cTn>
+                  </p:par>
+                  <p:par>
+                    <p:cTn id="7" fill="hold">
+                      <p:stCondLst>
+                        <p:cond delay="indefinite"/>
+                      </p:stCondLst>
+                      <p:childTnLst>
+                        <p:par>
+                          <p:cTn id="8" fill="hold">
+                            <p:stCondLst>
+                              <p:cond delay="0"/>
+                            </p:stCondLst>
+                            <p:childTnLst>
+                              <p:par>
+                                <p:cTn id="9" presetID="1" presetClass="entr" presetSubtype="0" fill="hold" grpId="0" nodeType="clickEffect">
+                                  <p:stCondLst>
+                                    <p:cond delay="0"/>
+                                  </p:stCondLst>
+                                  <p:childTnLst>
+                                    <p:set>
+                                      <p:cBhvr>
+                                        <p:cTn id="10" dur="1" fill="hold">
+                                          <p:stCondLst>
+                                            <p:cond delay="0"/>
+                                          </p:stCondLst>
+                                        </p:cTn>
+                                        <p:tgtEl>
+                                          <p:spTgt spid="3">
+                                            <p:txEl>
+                                              <p:pRg st="1" end="1"/>
+                                            </p:txEl>
+                                          </p:spTgt>
+                                        </p:tgtEl>
+                                        <p:attrNameLst>
+                                          <p:attrName>style.visibility</p:attrName>
+                                        </p:attrNameLst>
+                                      </p:cBhvr>
+                                      <p:to>
+                                        <p:strVal val="visible"/>
+                                      </p:to>
+                                    </p:set>
+                                  </p:childTnLst>
+                                </p:cTn>
+                              </p:par>
+                            </p:childTnLst>
+                          </p:cTn>
+                        </p:par>
+                      </p:childTnLst>
+                    </p:cTn>
+                  </p:par>
+                  <p:par>
+                    <p:cTn id="11" fill="hold">
+                      <p:stCondLst>
+                        <p:cond delay="indefinite"/>
+                      </p:stCondLst>
+                      <p:childTnLst>
+                        <p:par>
+                          <p:cTn id="12" fill="hold">
+                            <p:stCondLst>
+                              <p:cond delay="0"/>
+                            </p:stCondLst>
+                            <p:childTnLst>
+                              <p:par>
+                                <p:cTn id="13" presetID="1" presetClass="entr" presetSubtype="0" fill="hold" grpId="0" nodeType="clickEffect">
+                                  <p:stCondLst>
+                                    <p:cond delay="0"/>
+                                  </p:stCondLst>
+                                  <p:childTnLst>
+                                    <p:set>
+                                      <p:cBhvr>
+                                        <p:cTn id="14" dur="1" fill="hold">
+                                          <p:stCondLst>
+                                            <p:cond delay="0"/>
+                                          </p:stCondLst>
+                                        </p:cTn>
+                                        <p:tgtEl>
+                                          <p:spTgt spid="3">
+                                            <p:txEl>
+                                              <p:pRg st="2" end="2"/>
+                                            </p:txEl>
+                                          </p:spTgt>
+                                        </p:tgtEl>
+                                        <p:attrNameLst>
+                                          <p:attrName>style.visibility</p:attrName>
+                                        </p:attrNameLst>
+                                      </p:cBhvr>
+                                      <p:to>
+                                        <p:strVal val="visible"/>
+                                      </p:to>
+                                    </p:set>
+                                  </p:childTnLst>
+                                </p:cTn>
+                              </p:par>
+                            </p:childTnLst>
+                          </p:cTn>
+                        </p:par>
+                      </p:childTnLst>
+                    </p:cTn>
+                  </p:par>
+                  <p:par>
+                    <p:cTn id="15" fill="hold">
+                      <p:stCondLst>
+                        <p:cond delay="indefinite"/>
+                      </p:stCondLst>
+                      <p:childTnLst>
+                        <p:par>
+                          <p:cTn id="16" fill="hold">
+                            <p:stCondLst>
+                              <p:cond delay="0"/>
+                            </p:stCondLst>
+                            <p:childTnLst>
+                              <p:par>
+                                <p:cTn id="17" presetID="1" presetClass="entr" presetSubtype="0" fill="hold" grpId="0" nodeType="clickEffect">
+                                  <p:stCondLst>
+                                    <p:cond delay="0"/>
+                                  </p:stCondLst>
+                                  <p:childTnLst>
+                                    <p:set>
+                                      <p:cBhvr>
+                                        <p:cTn id="18" dur="1" fill="hold">
+                                          <p:stCondLst>
+                                            <p:cond delay="0"/>
+                                          </p:stCondLst>
+                                        </p:cTn>
+                                        <p:tgtEl>
+                                          <p:spTgt spid="3">
+                                            <p:txEl>
+                                              <p:pRg st="3" end="3"/>
+                                            </p:txEl>
+                                          </p:spTgt>
+                                        </p:tgtEl>
+                                        <p:attrNameLst>
+                                          <p:attrName>style.visibility</p:attrName>
+                                        </p:attrNameLst>
+                                      </p:cBhvr>
+                                      <p:to>
+                                        <p:strVal val="visible"/>
+                                      </p:to>
+                                    </p:set>
+                                  </p:childTnLst>
+                                </p:cTn>
+                              </p:par>
+                            </p:childTnLst>
+                          </p:cTn>
+                        </p:par>
+                      </p:childTnLst>
+                    </p:cTn>
+                  </p:par>
+                  <p:par>
+                    <p:cTn id="19" fill="hold">
+                      <p:stCondLst>
+                        <p:cond delay="indefinite"/>
+                      </p:stCondLst>
+                      <p:childTnLst>
+                        <p:par>
+                          <p:cTn id="20" fill="hold">
+                            <p:stCondLst>
+                              <p:cond delay="0"/>
+                            </p:stCondLst>
+                            <p:childTnLst>
+                              <p:par>
+                                <p:cTn id="21" presetID="1" presetClass="entr" presetSubtype="0" fill="hold" grpId="0" nodeType="clickEffect">
+                                  <p:stCondLst>
+                                    <p:cond delay="0"/>
+                                  </p:stCondLst>
+                                  <p:childTnLst>
+                                    <p:set>
+                                      <p:cBhvr>
+                                        <p:cTn id="22" dur="1" fill="hold">
+                                          <p:stCondLst>
+                                            <p:cond delay="0"/>
+                                          </p:stCondLst>
+                                        </p:cTn>
+                                        <p:tgtEl>
+                                          <p:spTgt spid="3">
+                                            <p:txEl>
+                                              <p:pRg st="4" end="4"/>
+                                            </p:txEl>
+                                          </p:spTgt>
+                                        </p:tgtEl>
+                                        <p:attrNameLst>
+                                          <p:attrName>style.visibility</p:attrName>
+                                        </p:attrNameLst>
+                                      </p:cBhvr>
+                                      <p:to>
+                                        <p:strVal val="visible"/>
+                                      </p:to>
+                                    </p:set>
+                                  </p:childTnLst>
+                                </p:cTn>
+                              </p:par>
+                            </p:childTnLst>
+                          </p:cTn>
+                        </p:par>
+                      </p:childTnLst>
+                    </p:cTn>
+                  </p:par>
+                  <p:par>
+                    <p:cTn id="23" fill="hold">
+                      <p:stCondLst>
+                        <p:cond delay="indefinite"/>
+                      </p:stCondLst>
+                      <p:childTnLst>
+                        <p:par>
+                          <p:cTn id="24" fill="hold">
+                            <p:stCondLst>
+                              <p:cond delay="0"/>
+                            </p:stCondLst>
+                            <p:childTnLst>
+                              <p:par>
+                                <p:cTn id="25" presetID="1" presetClass="entr" presetSubtype="0" fill="hold" grpId="0" nodeType="clickEffect">
+                                  <p:stCondLst>
+                                    <p:cond delay="0"/>
+                                  </p:stCondLst>
+                                  <p:childTnLst>
+                                    <p:set>
+                                      <p:cBhvr>
+                                        <p:cTn id="26" dur="1" fill="hold">
+                                          <p:stCondLst>
+                                            <p:cond delay="0"/>
+                                          </p:stCondLst>
+                                        </p:cTn>
+                                        <p:tgtEl>
+                                          <p:spTgt spid="3">
+                                            <p:txEl>
+                                              <p:pRg st="5" end="5"/>
+                                            </p:txEl>
+                                          </p:spTgt>
+                                        </p:tgtEl>
+                                        <p:attrNameLst>
+                                          <p:attrName>style.visibility</p:attrName>
+                                        </p:attrNameLst>
+                                      </p:cBhvr>
+                                      <p:to>
+                                        <p:strVal val="visible"/>
+                                      </p:to>
+                                    </p:set>
+                                  </p:childTnLst>
+                                </p:cTn>
+                              </p:par>
+                            </p:childTnLst>
+                          </p:cTn>
+                        </p:par>
+                      </p:childTnLst>
+                    </p:cTn>
+                  </p:par>
+                  <p:par>
+                    <p:cTn id="27" fill="hold">
+                      <p:stCondLst>
+                        <p:cond delay="indefinite"/>
+                      </p:stCondLst>
+                      <p:childTnLst>
+                        <p:par>
+                          <p:cTn id="28" fill="hold">
+                            <p:stCondLst>
+                              <p:cond delay="0"/>
+                            </p:stCondLst>
+                            <p:childTnLst>
+                              <p:par>
+                                <p:cTn id="29" presetID="1" presetClass="entr" presetSubtype="0" fill="hold" grpId="0" nodeType="clickEffect">
+                                  <p:stCondLst>
+                                    <p:cond delay="0"/>
+                                  </p:stCondLst>
+                                  <p:childTnLst>
+                                    <p:set>
+                                      <p:cBhvr>
+                                        <p:cTn id="30" dur="1" fill="hold">
+                                          <p:stCondLst>
+                                            <p:cond delay="0"/>
+                                          </p:stCondLst>
+                                        </p:cTn>
+                                        <p:tgtEl>
+                                          <p:spTgt spid="3">
+                                            <p:txEl>
+                                              <p:pRg st="6" end="6"/>
+                                            </p:txEl>
+                                          </p:spTgt>
+                                        </p:tgtEl>
+                                        <p:attrNameLst>
+                                          <p:attrName>style.visibility</p:attrName>
+                                        </p:attrNameLst>
+                                      </p:cBhvr>
+                                      <p:to>
+                                        <p:strVal val="visible"/>
+                                      </p:to>
+                                    </p:set>
+                                  </p:childTnLst>
+                                </p:cTn>
+                              </p:par>
+                            </p:childTnLst>
+                          </p:cTn>
+                        </p:par>
+                      </p:childTnLst>
+                    </p:cTn>
+                  </p:par>
+                  <p:par>
+                    <p:cTn id="31" fill="hold">
+                      <p:stCondLst>
+                        <p:cond delay="indefinite"/>
+                      </p:stCondLst>
+                      <p:childTnLst>
+                        <p:par>
+                          <p:cTn id="32" fill="hold">
+                            <p:stCondLst>
+                              <p:cond delay="0"/>
+                            </p:stCondLst>
+                            <p:childTnLst>
+                              <p:par>
+                                <p:cTn id="33" presetID="1" presetClass="entr" presetSubtype="0" fill="hold" grpId="0" nodeType="clickEffect">
+                                  <p:stCondLst>
+                                    <p:cond delay="0"/>
+                                  </p:stCondLst>
+                                  <p:childTnLst>
+                                    <p:set>
+                                      <p:cBhvr>
+                                        <p:cTn id="34" dur="1" fill="hold">
+                                          <p:stCondLst>
+                                            <p:cond delay="0"/>
+                                          </p:stCondLst>
+                                        </p:cTn>
+                                        <p:tgtEl>
+                                          <p:spTgt spid="3">
+                                            <p:txEl>
+                                              <p:pRg st="7" end="7"/>
+                                            </p:txEl>
+                                          </p:spTgt>
+                                        </p:tgtEl>
+                                        <p:attrNameLst>
+                                          <p:attrName>style.visibility</p:attrName>
+                                        </p:attrNameLst>
+                                      </p:cBhvr>
+                                      <p:to>
+                                        <p:strVal val="visible"/>
+                                      </p:to>
+                                    </p:set>
+                                  </p:childTnLst>
+                                </p:cTn>
+                              </p:par>
+                            </p:childTnLst>
+                          </p:cTn>
+                        </p:par>
+                      </p:childTnLst>
+                    </p:cTn>
+                  </p:par>
+                  <p:par>
+                    <p:cTn id="35" fill="hold">
+                      <p:stCondLst>
+                        <p:cond delay="indefinite"/>
+                      </p:stCondLst>
+                      <p:childTnLst>
+                        <p:par>
+                          <p:cTn id="36" fill="hold">
+                            <p:stCondLst>
+                              <p:cond delay="0"/>
+                            </p:stCondLst>
+                            <p:childTnLst>
+                              <p:par>
+                                <p:cTn id="37" presetID="1" presetClass="entr" presetSubtype="0" fill="hold" grpId="0" nodeType="clickEffect">
+                                  <p:stCondLst>
+                                    <p:cond delay="0"/>
+                                  </p:stCondLst>
+                                  <p:childTnLst>
+                                    <p:set>
+                                      <p:cBhvr>
+                                        <p:cTn id="38" dur="1" fill="hold">
+                                          <p:stCondLst>
+                                            <p:cond delay="0"/>
+                                          </p:stCondLst>
+                                        </p:cTn>
+                                        <p:tgtEl>
+                                          <p:spTgt spid="3">
+                                            <p:txEl>
+                                              <p:pRg st="8" end="8"/>
+                                            </p:txEl>
+                                          </p:spTgt>
+                                        </p:tgtEl>
+                                        <p:attrNameLst>
+                                          <p:attrName>style.visibility</p:attrName>
+                                        </p:attrNameLst>
+                                      </p:cBhvr>
+                                      <p:to>
+                                        <p:strVal val="visible"/>
+                                      </p:to>
+                                    </p:set>
+                                  </p:childTnLst>
+                                </p:cTn>
+                              </p:par>
+                            </p:childTnLst>
+                          </p:cTn>
+                        </p:par>
+                      </p:childTnLst>
+                    </p:cTn>
+                  </p:par>
+                  <p:par>
+                    <p:cTn id="39" fill="hold">
+                      <p:stCondLst>
+                        <p:cond delay="indefinite"/>
+                      </p:stCondLst>
+                      <p:childTnLst>
+                        <p:par>
+                          <p:cTn id="40" fill="hold">
+                            <p:stCondLst>
+                              <p:cond delay="0"/>
+                            </p:stCondLst>
+                            <p:childTnLst>
+                              <p:par>
+                                <p:cTn id="41" presetID="1" presetClass="entr" presetSubtype="0" fill="hold" grpId="0" nodeType="clickEffect">
+                                  <p:stCondLst>
+                                    <p:cond delay="0"/>
+                                  </p:stCondLst>
+                                  <p:childTnLst>
+                                    <p:set>
+                                      <p:cBhvr>
+                                        <p:cTn id="42" dur="1" fill="hold">
+                                          <p:stCondLst>
+                                            <p:cond delay="0"/>
+                                          </p:stCondLst>
+                                        </p:cTn>
+                                        <p:tgtEl>
+                                          <p:spTgt spid="4">
+                                            <p:txEl>
+                                              <p:pRg st="0" end="0"/>
+                                            </p:txEl>
+                                          </p:spTgt>
+                                        </p:tgtEl>
+                                        <p:attrNameLst>
+                                          <p:attrName>style.visibility</p:attrName>
+                                        </p:attrNameLst>
+                                      </p:cBhvr>
+                                      <p:to>
+                                        <p:strVal val="visible"/>
+                                      </p:to>
+                                    </p:set>
+                                  </p:childTnLst>
+                                </p:cTn>
+                              </p:par>
+                            </p:childTnLst>
+                          </p:cTn>
+                        </p:par>
+                      </p:childTnLst>
+                    </p:cTn>
+                  </p:par>
+                  <p:par>
+                    <p:cTn id="43" fill="hold">
+                      <p:stCondLst>
+                        <p:cond delay="indefinite"/>
+                      </p:stCondLst>
+                      <p:childTnLst>
+                        <p:par>
+                          <p:cTn id="44" fill="hold">
+                            <p:stCondLst>
+                              <p:cond delay="0"/>
+                            </p:stCondLst>
+                            <p:childTnLst>
+                              <p:par>
+                                <p:cTn id="45" presetID="1" presetClass="entr" presetSubtype="0" fill="hold" grpId="0" nodeType="clickEffect">
+                                  <p:stCondLst>
+                                    <p:cond delay="0"/>
+                                  </p:stCondLst>
+                                  <p:childTnLst>
+                                    <p:set>
+                                      <p:cBhvr>
+                                        <p:cTn id="46" dur="1" fill="hold">
+                                          <p:stCondLst>
+                                            <p:cond delay="0"/>
+                                          </p:stCondLst>
+                                        </p:cTn>
+                                        <p:tgtEl>
+                                          <p:spTgt spid="4">
+                                            <p:txEl>
+                                              <p:pRg st="1" end="1"/>
+                                            </p:txEl>
+                                          </p:spTgt>
+                                        </p:tgtEl>
+                                        <p:attrNameLst>
+                                          <p:attrName>style.visibility</p:attrName>
+                                        </p:attrNameLst>
+                                      </p:cBhvr>
+                                      <p:to>
+                                        <p:strVal val="visible"/>
+                                      </p:to>
+                                    </p:set>
+                                  </p:childTnLst>
+                                </p:cTn>
+                              </p:par>
+                            </p:childTnLst>
+                          </p:cTn>
+                        </p:par>
+                      </p:childTnLst>
+                    </p:cTn>
+                  </p:par>
+                  <p:par>
+                    <p:cTn id="47" fill="hold">
+                      <p:stCondLst>
+                        <p:cond delay="indefinite"/>
+                      </p:stCondLst>
+                      <p:childTnLst>
+                        <p:par>
+                          <p:cTn id="48" fill="hold">
+                            <p:stCondLst>
+                              <p:cond delay="0"/>
+                            </p:stCondLst>
+                            <p:childTnLst>
+                              <p:par>
+                                <p:cTn id="49" presetID="1" presetClass="entr" presetSubtype="0" fill="hold" grpId="0" nodeType="clickEffect">
+                                  <p:stCondLst>
+                                    <p:cond delay="0"/>
+                                  </p:stCondLst>
+                                  <p:childTnLst>
+                                    <p:set>
+                                      <p:cBhvr>
+                                        <p:cTn id="50" dur="1" fill="hold">
+                                          <p:stCondLst>
+                                            <p:cond delay="0"/>
+                                          </p:stCondLst>
+                                        </p:cTn>
+                                        <p:tgtEl>
+                                          <p:spTgt spid="4">
+                                            <p:txEl>
+                                              <p:pRg st="2" end="2"/>
+                                            </p:txEl>
+                                          </p:spTgt>
+                                        </p:tgtEl>
+                                        <p:attrNameLst>
+                                          <p:attrName>style.visibility</p:attrName>
+                                        </p:attrNameLst>
+                                      </p:cBhvr>
+                                      <p:to>
+                                        <p:strVal val="visible"/>
+                                      </p:to>
+                                    </p:set>
+                                  </p:childTnLst>
+                                </p:cTn>
+                              </p:par>
+                            </p:childTnLst>
+                          </p:cTn>
+                        </p:par>
+                      </p:childTnLst>
+                    </p:cTn>
+                  </p:par>
+                  <p:par>
+                    <p:cTn id="51" fill="hold">
+                      <p:stCondLst>
+                        <p:cond delay="indefinite"/>
+                      </p:stCondLst>
+                      <p:childTnLst>
+                        <p:par>
+                          <p:cTn id="52" fill="hold">
+                            <p:stCondLst>
+                              <p:cond delay="0"/>
+                            </p:stCondLst>
+                            <p:childTnLst>
+                              <p:par>
+                                <p:cTn id="53" presetID="1" presetClass="entr" presetSubtype="0" fill="hold" grpId="0" nodeType="clickEffect">
+                                  <p:stCondLst>
+                                    <p:cond delay="0"/>
+                                  </p:stCondLst>
+                                  <p:childTnLst>
+                                    <p:set>
+                                      <p:cBhvr>
+                                        <p:cTn id="54" dur="1" fill="hold">
+                                          <p:stCondLst>
+                                            <p:cond delay="0"/>
+                                          </p:stCondLst>
+                                        </p:cTn>
+                                        <p:tgtEl>
+                                          <p:spTgt spid="4">
+                                            <p:txEl>
+                                              <p:pRg st="3" end="3"/>
+                                            </p:txEl>
+                                          </p:spTgt>
+                                        </p:tgtEl>
+                                        <p:attrNameLst>
+                                          <p:attrName>style.visibility</p:attrName>
+                                        </p:attrNameLst>
+                                      </p:cBhvr>
+                                      <p:to>
+                                        <p:strVal val="visible"/>
+                                      </p:to>
+                                    </p:set>
+                                  </p:childTnLst>
+                                </p:cTn>
+                              </p:par>
+                            </p:childTnLst>
+                          </p:cTn>
+                        </p:par>
+                      </p:childTnLst>
+                    </p:cTn>
+                  </p:par>
+                  <p:par>
+                    <p:cTn id="55" fill="hold">
+                      <p:stCondLst>
+                        <p:cond delay="indefinite"/>
+                      </p:stCondLst>
+                      <p:childTnLst>
+                        <p:par>
+                          <p:cTn id="56" fill="hold">
+                            <p:stCondLst>
+                              <p:cond delay="0"/>
+                            </p:stCondLst>
+                            <p:childTnLst>
+                              <p:par>
+                                <p:cTn id="57" presetID="1" presetClass="entr" presetSubtype="0" fill="hold" grpId="0" nodeType="clickEffect">
+                                  <p:stCondLst>
+                                    <p:cond delay="0"/>
+                                  </p:stCondLst>
+                                  <p:childTnLst>
+                                    <p:set>
+                                      <p:cBhvr>
+                                        <p:cTn id="58" dur="1" fill="hold">
+                                          <p:stCondLst>
+                                            <p:cond delay="0"/>
+                                          </p:stCondLst>
+                                        </p:cTn>
+                                        <p:tgtEl>
+                                          <p:spTgt spid="4">
+                                            <p:txEl>
+                                              <p:pRg st="4" end="4"/>
+                                            </p:txEl>
+                                          </p:spTgt>
+                                        </p:tgtEl>
+                                        <p:attrNameLst>
+                                          <p:attrName>style.visibility</p:attrName>
+                                        </p:attrNameLst>
+                                      </p:cBhvr>
+                                      <p:to>
+                                        <p:strVal val="visible"/>
+                                      </p:to>
+                                    </p:set>
+                                  </p:childTnLst>
+                                </p:cTn>
+                              </p:par>
+                            </p:childTnLst>
+                          </p:cTn>
+                        </p:par>
+                      </p:childTnLst>
+                    </p:cTn>
+                  </p:par>
+                  <p:par>
+                    <p:cTn id="59" fill="hold">
+                      <p:stCondLst>
+                        <p:cond delay="indefinite"/>
+                      </p:stCondLst>
+                      <p:childTnLst>
+                        <p:par>
+                          <p:cTn id="60" fill="hold">
+                            <p:stCondLst>
+                              <p:cond delay="0"/>
+                            </p:stCondLst>
+                            <p:childTnLst>
+                              <p:par>
+                                <p:cTn id="61" presetID="1" presetClass="entr" presetSubtype="0" fill="hold" grpId="0" nodeType="clickEffect">
+                                  <p:stCondLst>
+                                    <p:cond delay="0"/>
+                                  </p:stCondLst>
+                                  <p:childTnLst>
+                                    <p:set>
+                                      <p:cBhvr>
+                                        <p:cTn id="62" dur="1" fill="hold">
+                                          <p:stCondLst>
+                                            <p:cond delay="0"/>
+                                          </p:stCondLst>
+                                        </p:cTn>
+                                        <p:tgtEl>
+                                          <p:spTgt spid="4">
+                                            <p:txEl>
+                                              <p:pRg st="5" end="5"/>
+                                            </p:txEl>
+                                          </p:spTgt>
+                                        </p:tgtEl>
+                                        <p:attrNameLst>
+                                          <p:attrName>style.visibility</p:attrName>
+                                        </p:attrNameLst>
+                                      </p:cBhvr>
+                                      <p:to>
+                                        <p:strVal val="visible"/>
+                                      </p:to>
+                                    </p:set>
+                                  </p:childTnLst>
+                                </p:cTn>
+                              </p:par>
+                            </p:childTnLst>
+                          </p:cTn>
+                        </p:par>
+                      </p:childTnLst>
+                    </p:cTn>
+                  </p:par>
+                  <p:par>
+                    <p:cTn id="63" fill="hold">
+                      <p:stCondLst>
+                        <p:cond delay="indefinite"/>
+                      </p:stCondLst>
+                      <p:childTnLst>
+                        <p:par>
+                          <p:cTn id="64" fill="hold">
+                            <p:stCondLst>
+                              <p:cond delay="0"/>
+                            </p:stCondLst>
+                            <p:childTnLst>
+                              <p:par>
+                                <p:cTn id="65" presetID="1" presetClass="entr" presetSubtype="0" fill="hold" grpId="0" nodeType="clickEffect">
+                                  <p:stCondLst>
+                                    <p:cond delay="0"/>
+                                  </p:stCondLst>
+                                  <p:childTnLst>
+                                    <p:set>
+                                      <p:cBhvr>
+                                        <p:cTn id="66" dur="1" fill="hold">
+                                          <p:stCondLst>
+                                            <p:cond delay="0"/>
+                                          </p:stCondLst>
+                                        </p:cTn>
+                                        <p:tgtEl>
+                                          <p:spTgt spid="4">
+                                            <p:txEl>
+                                              <p:pRg st="6" end="6"/>
+                                            </p:txEl>
+                                          </p:spTgt>
+                                        </p:tgtEl>
+                                        <p:attrNameLst>
+                                          <p:attrName>style.visibility</p:attrName>
+                                        </p:attrNameLst>
+                                      </p:cBhvr>
+                                      <p:to>
+                                        <p:strVal val="visible"/>
+                                      </p:to>
+                                    </p:set>
+                                  </p:childTnLst>
+                                </p:cTn>
+                              </p:par>
+                            </p:childTnLst>
+                          </p:cTn>
+                        </p:par>
+                      </p:childTnLst>
+                    </p:cTn>
+                  </p:par>
+                  <p:par>
+                    <p:cTn id="67" fill="hold">
+                      <p:stCondLst>
+                        <p:cond delay="indefinite"/>
+                      </p:stCondLst>
+                      <p:childTnLst>
+                        <p:par>
+                          <p:cTn id="68" fill="hold">
+                            <p:stCondLst>
+                              <p:cond delay="0"/>
+                            </p:stCondLst>
+                            <p:childTnLst>
+                              <p:par>
+                                <p:cTn id="69" presetID="1" presetClass="entr" presetSubtype="0" fill="hold" grpId="0" nodeType="clickEffect">
+                                  <p:stCondLst>
+                                    <p:cond delay="0"/>
+                                  </p:stCondLst>
+                                  <p:childTnLst>
+                                    <p:set>
+                                      <p:cBhvr>
+                                        <p:cTn id="70" dur="1" fill="hold">
+                                          <p:stCondLst>
+                                            <p:cond delay="0"/>
+                                          </p:stCondLst>
+                                        </p:cTn>
+                                        <p:tgtEl>
+                                          <p:spTgt spid="4">
+                                            <p:txEl>
+                                              <p:pRg st="7" end="7"/>
+                                            </p:txEl>
+                                          </p:spTgt>
+                                        </p:tgtEl>
+                                        <p:attrNameLst>
+                                          <p:attrName>style.visibility</p:attrName>
+                                        </p:attrNameLst>
+                                      </p:cBhvr>
+                                      <p:to>
+                                        <p:strVal val="visible"/>
+                                      </p:to>
+                                    </p:set>
+                                  </p:childTnLst>
+                                </p:cTn>
+                              </p:par>
+                            </p:childTnLst>
+                          </p:cTn>
+                        </p:par>
+                      </p:childTnLst>
+                    </p:cTn>
+                  </p:par>
+                  <p:par>
+                    <p:cTn id="71" fill="hold">
+                      <p:stCondLst>
+                        <p:cond delay="indefinite"/>
+                      </p:stCondLst>
+                      <p:childTnLst>
+                        <p:par>
+                          <p:cTn id="72" fill="hold">
+                            <p:stCondLst>
+                              <p:cond delay="0"/>
+                            </p:stCondLst>
+                            <p:childTnLst>
+                              <p:par>
+                                <p:cTn id="73" presetID="1" presetClass="entr" presetSubtype="0" fill="hold" grpId="0" nodeType="clickEffect">
+                                  <p:stCondLst>
+                                    <p:cond delay="0"/>
+                                  </p:stCondLst>
+                                  <p:childTnLst>
+                                    <p:set>
+                                      <p:cBhvr>
+                                        <p:cTn id="74" dur="1" fill="hold">
+                                          <p:stCondLst>
+                                            <p:cond delay="0"/>
+                                          </p:stCondLst>
+                                        </p:cTn>
+                                        <p:tgtEl>
+                                          <p:spTgt spid="4">
+                                            <p:txEl>
+                                              <p:pRg st="8" end="8"/>
+                                            </p:txEl>
+                                          </p:spTgt>
+                                        </p:tgtEl>
+                                        <p:attrNameLst>
+                                          <p:attrName>style.visibility</p:attrName>
+                                        </p:attrNameLst>
+                                      </p:cBhvr>
+                                      <p:to>
+                                        <p:strVal val="visible"/>
+                                      </p:to>
+                                    </p:set>
+                                  </p:childTnLst>
+                                </p:cTn>
+                              </p:par>
+                            </p:childTnLst>
+                          </p:cTn>
+                        </p:par>
+                      </p:childTnLst>
+                    </p:cTn>
+                  </p:par>
+                  <p:par>
+                    <p:cTn id="75" fill="hold">
+                      <p:stCondLst>
+                        <p:cond delay="indefinite"/>
+                      </p:stCondLst>
+                      <p:childTnLst>
+                        <p:par>
+                          <p:cTn id="76" fill="hold">
+                            <p:stCondLst>
+                              <p:cond delay="0"/>
+                            </p:stCondLst>
+                            <p:childTnLst>
+                              <p:par>
+                                <p:cTn id="77" presetID="1" presetClass="entr" presetSubtype="0" fill="hold" grpId="0" nodeType="clickEffect">
+                                  <p:stCondLst>
+                                    <p:cond delay="0"/>
+                                  </p:stCondLst>
+                                  <p:childTnLst>
+                                    <p:set>
+                                      <p:cBhvr>
+                                        <p:cTn id="78" dur="1" fill="hold">
+                                          <p:stCondLst>
+                                            <p:cond delay="0"/>
+                                          </p:stCondLst>
+                                        </p:cTn>
+                                        <p:tgtEl>
+                                          <p:spTgt spid="4">
+                                            <p:txEl>
+                                              <p:pRg st="9" end="9"/>
+                                            </p:txEl>
+                                          </p:spTgt>
+                                        </p:tgtEl>
+                                        <p:attrNameLst>
+                                          <p:attrName>style.visibility</p:attrName>
+                                        </p:attrNameLst>
+                                      </p:cBhvr>
+                                      <p:to>
+                                        <p:strVal val="visible"/>
+                                      </p:to>
+                                    </p:set>
+                                  </p:childTnLst>
+                                </p:cTn>
+                              </p:par>
+                            </p:childTnLst>
+                          </p:cTn>
+                        </p:par>
+                      </p:childTnLst>
+                    </p:cTn>
+                  </p:par>
+                  <p:par>
+                    <p:cTn id="79" fill="hold">
+                      <p:stCondLst>
+                        <p:cond delay="indefinite"/>
+                      </p:stCondLst>
+                      <p:childTnLst>
+                        <p:par>
+                          <p:cTn id="80" fill="hold">
+                            <p:stCondLst>
+                              <p:cond delay="0"/>
+                            </p:stCondLst>
+                            <p:childTnLst>
+                              <p:par>
+                                <p:cTn id="81" presetID="1" presetClass="entr" presetSubtype="0" fill="hold" grpId="0" nodeType="clickEffect">
+                                  <p:stCondLst>
+                                    <p:cond delay="0"/>
+                                  </p:stCondLst>
+                                  <p:childTnLst>
+                                    <p:set>
+                                      <p:cBhvr>
+                                        <p:cTn id="82" dur="1" fill="hold">
+                                          <p:stCondLst>
+                                            <p:cond delay="0"/>
+                                          </p:stCondLst>
+                                        </p:cTn>
+                                        <p:tgtEl>
+                                          <p:spTgt spid="4">
+                                            <p:txEl>
+                                              <p:pRg st="10" end="10"/>
+                                            </p:txEl>
+                                          </p:spTgt>
+                                        </p:tgtEl>
+                                        <p:attrNameLst>
+                                          <p:attrName>style.visibility</p:attrName>
+                                        </p:attrNameLst>
+                                      </p:cBhvr>
+                                      <p:to>
+                                        <p:strVal val="visible"/>
+                                      </p:to>
+                                    </p:set>
+                                  </p:childTnLst>
+                                </p:cTn>
+                              </p:par>
+                            </p:childTnLst>
+                          </p:cTn>
+                        </p:par>
+                      </p:childTnLst>
+                    </p:cTn>
+                  </p:par>
+                </p:childTnLst>
+              </p:cTn>
+              <p:prevCondLst>
+                <p:cond evt="onPrev" delay="0">
+                  <p:tgtEl>
+                    <p:sldTgt/>
+                  </p:tgtEl>
+                </p:cond>
+              </p:prevCondLst>
+              <p:nextCondLst>
+                <p:cond evt="onNext" delay="0">
+                  <p:tgtEl>
+                    <p:sldTgt/>
+                  </p:tgtEl>
+                </p:cond>
+              </p:nextCondLst>
+            </p:seq>
+          </p:childTnLst>
+        </p:cTn>
+      </p:par>
+    </p:tnLst>
+    <p:bldLst>
+      <p:bldP spid="3" grpId="0" uiExpand="1" build="p"/>
+      <p:bldP spid="4" grpId="0" uiExpand="1" build="p"/>
+    </p:bldLst>
+  </p:timing>
 </p:sld>
 </file>
 
